--- a/docs/StockSense_AI_Presentation_Review.pptx
+++ b/docs/StockSense_AI_Presentation_Review.pptx
@@ -2,26 +2,26 @@
 <file path=ppt/presentation.xml><?xml version="1.0" encoding="utf-8"?>
 <p:presentation xmlns:p="http://schemas.openxmlformats.org/presentationml/2006/main">
   <p:sldMasterIdLst>
-    <p:sldMasterId xmlns:r="http://schemas.openxmlformats.org/officeDocument/2006/relationships" id="2147483648" r:id="Rbff4521ad74b4e76"/>
+    <p:sldMasterId xmlns:r="http://schemas.openxmlformats.org/officeDocument/2006/relationships" id="2147483648" r:id="R101154f5b5d84181"/>
   </p:sldMasterIdLst>
   <p:notesMasterIdLst>
-    <p:notesMasterId xmlns:r="http://schemas.openxmlformats.org/officeDocument/2006/relationships" r:id="Rbc4674ad0ec44263"/>
+    <p:notesMasterId xmlns:r="http://schemas.openxmlformats.org/officeDocument/2006/relationships" r:id="R4ba4671598e8442e"/>
   </p:notesMasterIdLst>
   <p:sldIdLst>
-    <p:sldId xmlns:r="http://schemas.openxmlformats.org/officeDocument/2006/relationships" id="256" r:id="R73bee633f5374637"/>
-    <p:sldId xmlns:r="http://schemas.openxmlformats.org/officeDocument/2006/relationships" id="257" r:id="Rd4f69c5ff76a4822"/>
-    <p:sldId xmlns:r="http://schemas.openxmlformats.org/officeDocument/2006/relationships" id="258" r:id="R93aac0da15604bad"/>
-    <p:sldId xmlns:r="http://schemas.openxmlformats.org/officeDocument/2006/relationships" id="259" r:id="R38e23c67b2404791"/>
-    <p:sldId xmlns:r="http://schemas.openxmlformats.org/officeDocument/2006/relationships" id="260" r:id="R646a3cb2474d4f59"/>
-    <p:sldId xmlns:r="http://schemas.openxmlformats.org/officeDocument/2006/relationships" id="261" r:id="R4f59363352404e07"/>
-    <p:sldId xmlns:r="http://schemas.openxmlformats.org/officeDocument/2006/relationships" id="262" r:id="R1fd11efb58fe4a84"/>
-    <p:sldId xmlns:r="http://schemas.openxmlformats.org/officeDocument/2006/relationships" id="263" r:id="Re5af03559c224cbb"/>
-    <p:sldId xmlns:r="http://schemas.openxmlformats.org/officeDocument/2006/relationships" id="264" r:id="Red8f162aa95b4856"/>
-    <p:sldId xmlns:r="http://schemas.openxmlformats.org/officeDocument/2006/relationships" id="265" r:id="R02d473acacd74467"/>
-    <p:sldId xmlns:r="http://schemas.openxmlformats.org/officeDocument/2006/relationships" id="266" r:id="R9bd4a56724ac42ba"/>
-    <p:sldId xmlns:r="http://schemas.openxmlformats.org/officeDocument/2006/relationships" id="267" r:id="Rff63db1c92d24bf2"/>
-    <p:sldId xmlns:r="http://schemas.openxmlformats.org/officeDocument/2006/relationships" id="268" r:id="Ref7335a3d21c4f7d"/>
-    <p:sldId xmlns:r="http://schemas.openxmlformats.org/officeDocument/2006/relationships" id="269" r:id="R9d77614df797419d"/>
+    <p:sldId xmlns:r="http://schemas.openxmlformats.org/officeDocument/2006/relationships" id="256" r:id="Re9f81e83f0e344ac"/>
+    <p:sldId xmlns:r="http://schemas.openxmlformats.org/officeDocument/2006/relationships" id="257" r:id="Rc5383c1bdf574d61"/>
+    <p:sldId xmlns:r="http://schemas.openxmlformats.org/officeDocument/2006/relationships" id="258" r:id="R44549dfb05de4edc"/>
+    <p:sldId xmlns:r="http://schemas.openxmlformats.org/officeDocument/2006/relationships" id="259" r:id="R8e6a36b35f194d65"/>
+    <p:sldId xmlns:r="http://schemas.openxmlformats.org/officeDocument/2006/relationships" id="260" r:id="Rb5da6b72550b4c8a"/>
+    <p:sldId xmlns:r="http://schemas.openxmlformats.org/officeDocument/2006/relationships" id="261" r:id="R731d4df3c1274c61"/>
+    <p:sldId xmlns:r="http://schemas.openxmlformats.org/officeDocument/2006/relationships" id="262" r:id="R8433b1283d924878"/>
+    <p:sldId xmlns:r="http://schemas.openxmlformats.org/officeDocument/2006/relationships" id="263" r:id="R8ca97a6a19db4c5c"/>
+    <p:sldId xmlns:r="http://schemas.openxmlformats.org/officeDocument/2006/relationships" id="264" r:id="R7422c9040c6b4067"/>
+    <p:sldId xmlns:r="http://schemas.openxmlformats.org/officeDocument/2006/relationships" id="265" r:id="R7510e3cb8dc64086"/>
+    <p:sldId xmlns:r="http://schemas.openxmlformats.org/officeDocument/2006/relationships" id="266" r:id="R9411cef8bb7d4600"/>
+    <p:sldId xmlns:r="http://schemas.openxmlformats.org/officeDocument/2006/relationships" id="267" r:id="Rb087fc7485b74afa"/>
+    <p:sldId xmlns:r="http://schemas.openxmlformats.org/officeDocument/2006/relationships" id="268" r:id="R9936eed42c534650"/>
+    <p:sldId xmlns:r="http://schemas.openxmlformats.org/officeDocument/2006/relationships" id="269" r:id="Ree4bf01160624d4f"/>
   </p:sldIdLst>
   <p:sldSz cx="12192000" cy="6858000"/>
   <p:notesSz cx="6858000" cy="9144000"/>
@@ -525,7 +525,7 @@
           <a:lstStyle xmlns:a="http://schemas.openxmlformats.org/drawingml/2006/main"/>
           <a:p xmlns:a="http://schemas.openxmlformats.org/drawingml/2006/main">
             <a:r>
-              <a:t>Proposed speaker: Morris. About 90 seconds. Demonstration input for Product 1: 50 available, 0 outstanding, two-day lead, three-day review, 10 buffer. Forecast for first five days 77.52. Target 87.52. Order ceiling(87.52-50)=38. Stock data is entered manually.</a:t>
+              <a:t>Proposed speaker: Morris. About 90 seconds. Demonstration input for Product 1: 50 available, 0 outstanding, two-day lead, three-day review, 10 buffer. First-five-day forecast 77.52. Target 87.52. Order ceiling(87.52 minus 50)=38. Stock data is entered manually.</a:t>
             </a:r>
           </a:p>
         </p:txBody>
@@ -595,7 +595,7 @@
           <a:lstStyle xmlns:a="http://schemas.openxmlformats.org/drawingml/2006/main"/>
           <a:p xmlns:a="http://schemas.openxmlformats.org/drawingml/2006/main">
             <a:r>
-              <a:t>Proposed speaker: Sibongiseni. About 90 seconds. The assistant classifies five intents using TF-IDF and logistic regression. It retrieves saved forecast or stock objects. A request for another item uses that item’s forecast, while its stock answer requires new inputs. It is not a general conversational assistant.</a:t>
+              <a:t>Proposed speaker: Sibongiseni. About 90 seconds. TF-IDF and logistic regression classify five intents. Answers retrieve saved forecast or stock objects. Another item uses its own forecast; stock answer needs fresh inputs.</a:t>
             </a:r>
           </a:p>
         </p:txBody>
@@ -665,7 +665,7 @@
           <a:lstStyle xmlns:a="http://schemas.openxmlformats.org/drawingml/2006/main"/>
           <a:p xmlns:a="http://schemas.openxmlformats.org/drawingml/2006/main">
             <a:r>
-              <a:t>Proposed speakers: Buhle and Wandile. About 90 seconds. The office copy passed 52 tests on 12 October 2026. The earlier personal-PC rehearsal passed 45 tests on 10 October. Assistant fresh check recognised 24/25 supported requests and rejected 8/8 unrelated requests. Human usability review is pending.</a:t>
+              <a:t>Proposed speakers: Buhle and Wandile. About 90 seconds. Office copy passed 52 tests on 12 October 2026. Earlier personal-PC rehearsal passed 45 tests. Assistant fresh check: 24/25 supported, 8/8 unrelated rejected. Human usability review is pending.</a:t>
             </a:r>
           </a:p>
         </p:txBody>
@@ -735,7 +735,7 @@
           <a:lstStyle xmlns:a="http://schemas.openxmlformats.org/drawingml/2006/main"/>
           <a:p xmlns:a="http://schemas.openxmlformats.org/drawingml/2006/main">
             <a:r>
-              <a:t>Proposed speakers: Sibongiseni and Morris. About three minutes. Open the saved local app. Select a product, calculate the 38-unit Product 1 example, ask a forecast question, show the 2016 and 2017 comparisons. If live app fails, use the screenshot and backup recording.</a:t>
+              <a:t>Proposed speakers: Sibongiseni and Morris. About three minutes. Select Product 1, show seven dated forecasts, calculate the 38-unit example, ask about another product, show comparisons. If live app fails use screenshot and backup recording.</a:t>
             </a:r>
           </a:p>
         </p:txBody>
@@ -805,7 +805,7 @@
           <a:lstStyle xmlns:a="http://schemas.openxmlformats.org/drawingml/2006/main"/>
           <a:p xmlns:a="http://schemas.openxmlformats.org/drawingml/2006/main">
             <a:r>
-              <a:t>Proposed speaker: Senamile. About 60 seconds, then five minutes of questions. Random forest had the lowest daily test error. LSTM had the lowest overall weekly-total error. The app has no measured savings, because no real inventory or cost data were supplied.</a:t>
+              <a:t>Proposed speaker: Senamile. About 60 seconds, then five minutes of questions. Random forest had the lowest daily test error. LSTM had the lowest weekly-total error. No real savings or January 2018 accuracy have been measured.</a:t>
             </a:r>
           </a:p>
         </p:txBody>
@@ -1155,7 +1155,7 @@
           <a:lstStyle xmlns:a="http://schemas.openxmlformats.org/drawingml/2006/main"/>
           <a:p xmlns:a="http://schemas.openxmlformats.org/drawingml/2006/main">
             <a:r>
-              <a:t>Proposed speaker: Neo. About 90 seconds. Source: frozen local model comparison and the group report. Each method is scored on the same 52 weeks per item. We selected using 2016, then froze the choice before 2017.</a:t>
+              <a:t>Proposed speaker: Neo. About 90 seconds. Each method is scored on the same 52 weeks per item. We selected using 2016, then froze the choice before 2017.</a:t>
             </a:r>
           </a:p>
         </p:txBody>
@@ -1225,7 +1225,7 @@
           <a:lstStyle xmlns:a="http://schemas.openxmlformats.org/drawingml/2006/main"/>
           <a:p xmlns:a="http://schemas.openxmlformats.org/drawingml/2006/main">
             <a:r>
-              <a:t>Proposed speaker: Ungakimi. About 60 seconds. Values are daily MAE in units: benchmark 6.320, random forest 4.911, LSTM 5.439. Lower is better. Source: frozen local comparison.</a:t>
+              <a:t>Proposed speaker: Ungakimi. About 60 seconds. Daily MAE: benchmark 6.320, LSTM 5.439, random forest 4.911. Lower is better. Source: frozen local comparison.</a:t>
             </a:r>
           </a:p>
         </p:txBody>
@@ -1295,7 +1295,7 @@
           <a:lstStyle xmlns:a="http://schemas.openxmlformats.org/drawingml/2006/main"/>
           <a:p xmlns:a="http://schemas.openxmlformats.org/drawingml/2006/main">
             <a:r>
-              <a:t>Proposed speaker: Ungakimi. About 90 seconds. Values are from the frozen final test. Daily MAE: benchmark 6.273, random forest 4.812, LSTM 5.411. Weekly-total MAE: benchmark 18.427, random forest 17.973, LSTM 17.343. The 23.3% means relative daily MAE reduction, not accuracy.</a:t>
+              <a:t>Proposed speaker: Ungakimi. About 90 seconds. Daily MAE: benchmark 6.273, LSTM 5.411, random forest 4.812. Weekly-total MAE: benchmark 18.427, random forest 17.973, LSTM 17.343. The 23.3% is a relative daily MAE reduction, not accuracy.</a:t>
             </a:r>
           </a:p>
         </p:txBody>
@@ -1365,7 +1365,7 @@
           <a:lstStyle xmlns:a="http://schemas.openxmlformats.org/drawingml/2006/main"/>
           <a:p xmlns:a="http://schemas.openxmlformats.org/drawingml/2006/main">
             <a:r>
-              <a:t>Proposed speaker: Neo. About 90 seconds. The model has 28 sales inputs, one 16-unit LSTM layer and seven outputs. It was compared to the benchmark and random forest on the same evaluation dates. It did not win the selected daily error measure.</a:t>
+              <a:t>Proposed speaker: Neo. About 90 seconds. The model has 28 sales inputs, one 16-unit LSTM layer and seven outputs. It did not win the selected daily error measure.</a:t>
             </a:r>
           </a:p>
         </p:txBody>
@@ -1412,7 +1412,7 @@
           <p:cNvPr id="3" name="Title">
             <a:extLst xmlns:a="http://schemas.openxmlformats.org/drawingml/2006/main">
               <a:ext uri="{FF2B5EF4-FFF2-40B4-BE49-F238E27FC236}">
-                <a16:creationId xmlns:a16="http://schemas.microsoft.com/office/drawing/2014/main" id="{70F762E7-452E-4196-BA7D-A79A3A527995}"/>
+                <a16:creationId xmlns:a16="http://schemas.microsoft.com/office/drawing/2014/main" id="{2E76197B-CA47-44AC-82B4-48CBE227779C}"/>
               </a:ext>
             </a:extLst>
           </p:cNvPr>
@@ -1569,7 +1569,7 @@
           <p:cNvPr id="2" name="Subtitle">
             <a:extLst xmlns:a="http://schemas.openxmlformats.org/drawingml/2006/main">
               <a:ext uri="{FF2B5EF4-FFF2-40B4-BE49-F238E27FC236}">
-                <a16:creationId xmlns:a16="http://schemas.microsoft.com/office/drawing/2014/main" id="{B1A1263F-6640-4486-B265-841DE76ABB54}"/>
+                <a16:creationId xmlns:a16="http://schemas.microsoft.com/office/drawing/2014/main" id="{BD3958C4-6C80-4EA8-9D18-879B95830298}"/>
               </a:ext>
             </a:extLst>
           </p:cNvPr>
@@ -1743,7 +1743,7 @@
           <p:cNvPr id="2" name="Section title">
             <a:extLst xmlns:a="http://schemas.openxmlformats.org/drawingml/2006/main">
               <a:ext uri="{FF2B5EF4-FFF2-40B4-BE49-F238E27FC236}">
-                <a16:creationId xmlns:a16="http://schemas.microsoft.com/office/drawing/2014/main" id="{C91C718C-57B9-46EF-B72D-6CC082BC5B62}"/>
+                <a16:creationId xmlns:a16="http://schemas.microsoft.com/office/drawing/2014/main" id="{3E70EC83-DBDF-460B-9797-5984F577C7B4}"/>
               </a:ext>
             </a:extLst>
           </p:cNvPr>
@@ -1917,7 +1917,7 @@
           <p:cNvPr id="3" name="Title">
             <a:extLst xmlns:a="http://schemas.openxmlformats.org/drawingml/2006/main">
               <a:ext uri="{FF2B5EF4-FFF2-40B4-BE49-F238E27FC236}">
-                <a16:creationId xmlns:a16="http://schemas.microsoft.com/office/drawing/2014/main" id="{9B6F5F30-2944-4484-A407-D696ED02F670}"/>
+                <a16:creationId xmlns:a16="http://schemas.microsoft.com/office/drawing/2014/main" id="{2C1E4AF9-DDC7-4FEF-B15B-2A40C9CD580F}"/>
               </a:ext>
             </a:extLst>
           </p:cNvPr>
@@ -2074,7 +2074,7 @@
           <p:cNvPr id="2" name="Body">
             <a:extLst xmlns:a="http://schemas.openxmlformats.org/drawingml/2006/main">
               <a:ext uri="{FF2B5EF4-FFF2-40B4-BE49-F238E27FC236}">
-                <a16:creationId xmlns:a16="http://schemas.microsoft.com/office/drawing/2014/main" id="{F17C463D-4ABA-4CAF-BEE1-7236E2F61E91}"/>
+                <a16:creationId xmlns:a16="http://schemas.microsoft.com/office/drawing/2014/main" id="{2A16ED3F-0B32-4389-99C2-FC55406E7AF3}"/>
               </a:ext>
             </a:extLst>
           </p:cNvPr>
@@ -2248,7 +2248,7 @@
           <p:cNvPr id="4" name="Title">
             <a:extLst xmlns:a="http://schemas.openxmlformats.org/drawingml/2006/main">
               <a:ext uri="{FF2B5EF4-FFF2-40B4-BE49-F238E27FC236}">
-                <a16:creationId xmlns:a16="http://schemas.microsoft.com/office/drawing/2014/main" id="{158BC5A2-F8D3-46EB-8FFF-B13C96330F27}"/>
+                <a16:creationId xmlns:a16="http://schemas.microsoft.com/office/drawing/2014/main" id="{D9C1FB9F-DEA2-4983-AAAD-43770A5A32B6}"/>
               </a:ext>
             </a:extLst>
           </p:cNvPr>
@@ -2405,7 +2405,7 @@
           <p:cNvPr id="2" name="Left column">
             <a:extLst xmlns:a="http://schemas.openxmlformats.org/drawingml/2006/main">
               <a:ext uri="{FF2B5EF4-FFF2-40B4-BE49-F238E27FC236}">
-                <a16:creationId xmlns:a16="http://schemas.microsoft.com/office/drawing/2014/main" id="{B695A615-CE11-4719-86A0-B9506BB5D387}"/>
+                <a16:creationId xmlns:a16="http://schemas.microsoft.com/office/drawing/2014/main" id="{95D83889-080F-4009-A71C-A7B6C9701322}"/>
               </a:ext>
             </a:extLst>
           </p:cNvPr>
@@ -2562,7 +2562,7 @@
           <p:cNvPr id="3" name="Right column">
             <a:extLst xmlns:a="http://schemas.openxmlformats.org/drawingml/2006/main">
               <a:ext uri="{FF2B5EF4-FFF2-40B4-BE49-F238E27FC236}">
-                <a16:creationId xmlns:a16="http://schemas.microsoft.com/office/drawing/2014/main" id="{AE2D2434-1578-46CE-A103-72BD889DADA1}"/>
+                <a16:creationId xmlns:a16="http://schemas.microsoft.com/office/drawing/2014/main" id="{01A6555E-55C2-4DCC-ABC9-34F91F90033B}"/>
               </a:ext>
             </a:extLst>
           </p:cNvPr>
@@ -2736,7 +2736,7 @@
           <p:cNvPr id="3" name="Title">
             <a:extLst xmlns:a="http://schemas.openxmlformats.org/drawingml/2006/main">
               <a:ext uri="{FF2B5EF4-FFF2-40B4-BE49-F238E27FC236}">
-                <a16:creationId xmlns:a16="http://schemas.microsoft.com/office/drawing/2014/main" id="{A80021E5-4529-4F0A-B3A4-DD5FBE178218}"/>
+                <a16:creationId xmlns:a16="http://schemas.microsoft.com/office/drawing/2014/main" id="{DAC424F3-0825-4CFA-B3D9-6AEE490FC542}"/>
               </a:ext>
             </a:extLst>
           </p:cNvPr>
@@ -2893,7 +2893,7 @@
           <p:cNvPr id="2" name="Left column">
             <a:extLst xmlns:a="http://schemas.openxmlformats.org/drawingml/2006/main">
               <a:ext uri="{FF2B5EF4-FFF2-40B4-BE49-F238E27FC236}">
-                <a16:creationId xmlns:a16="http://schemas.microsoft.com/office/drawing/2014/main" id="{3C843ED6-7631-4D1A-BC4B-56A5355C886F}"/>
+                <a16:creationId xmlns:a16="http://schemas.microsoft.com/office/drawing/2014/main" id="{B1DAC8C7-3DEE-4910-83F3-46656C1A759D}"/>
               </a:ext>
             </a:extLst>
           </p:cNvPr>
@@ -3088,12 +3088,12 @@
   </p:cSld>
   <p:clrMap bg1="lt1" tx1="dk1" bg2="lt2" tx2="dk2" accent1="accent1" accent2="accent2" accent3="accent3" accent4="accent4" accent5="accent5" accent6="accent6" hlink="hlink" folHlink="folHlink"/>
   <p:sldLayoutIdLst>
-    <p:sldLayoutId xmlns:r="http://schemas.openxmlformats.org/officeDocument/2006/relationships" id="2147483649" r:id="R43199274faa14b0c"/>
-    <p:sldLayoutId xmlns:r="http://schemas.openxmlformats.org/officeDocument/2006/relationships" id="2147483650" r:id="R89023a7d53a04436"/>
-    <p:sldLayoutId xmlns:r="http://schemas.openxmlformats.org/officeDocument/2006/relationships" id="2147483651" r:id="Rad861094a238491a"/>
-    <p:sldLayoutId xmlns:r="http://schemas.openxmlformats.org/officeDocument/2006/relationships" id="2147483652" r:id="Rc885c72e5ec0428b"/>
-    <p:sldLayoutId xmlns:r="http://schemas.openxmlformats.org/officeDocument/2006/relationships" id="2147483653" r:id="Rfa2261d96eba468d"/>
-    <p:sldLayoutId xmlns:r="http://schemas.openxmlformats.org/officeDocument/2006/relationships" id="2147483654" r:id="R0f68981dfd834e70"/>
+    <p:sldLayoutId xmlns:r="http://schemas.openxmlformats.org/officeDocument/2006/relationships" id="2147483649" r:id="Rf386b9e1a2a54981"/>
+    <p:sldLayoutId xmlns:r="http://schemas.openxmlformats.org/officeDocument/2006/relationships" id="2147483650" r:id="Rb0a7a8d1569848f1"/>
+    <p:sldLayoutId xmlns:r="http://schemas.openxmlformats.org/officeDocument/2006/relationships" id="2147483651" r:id="R6a30389fb1574322"/>
+    <p:sldLayoutId xmlns:r="http://schemas.openxmlformats.org/officeDocument/2006/relationships" id="2147483652" r:id="R3f3bbfe34204413d"/>
+    <p:sldLayoutId xmlns:r="http://schemas.openxmlformats.org/officeDocument/2006/relationships" id="2147483653" r:id="Re35c447399a34a7c"/>
+    <p:sldLayoutId xmlns:r="http://schemas.openxmlformats.org/officeDocument/2006/relationships" id="2147483654" r:id="R1f435da037664d79"/>
   </p:sldLayoutIdLst>
   <p:txStyles>
     <p:titleStyle>
@@ -3636,7 +3636,7 @@
           </c:tx>
           <c:spPr>
             <a:solidFill xmlns:a="http://schemas.openxmlformats.org/drawingml/2006/main">
-              <a:srgbClr val="0F766E"/>
+              <a:srgbClr val="087E79"/>
             </a:solidFill>
           </c:spPr>
           <c:cat>
@@ -3748,7 +3748,7 @@
           <c:spPr>
             <a:ln xmlns:a="http://schemas.openxmlformats.org/drawingml/2006/main" w="9525">
               <a:solidFill>
-                <a:srgbClr val="DCE3ED"/>
+                <a:srgbClr val="DCE5E2"/>
               </a:solidFill>
               <a:prstDash val="solid"/>
             </a:ln>
@@ -3809,7 +3809,7 @@
           </c:tx>
           <c:spPr>
             <a:solidFill xmlns:a="http://schemas.openxmlformats.org/drawingml/2006/main">
-              <a:srgbClr val="0F766E"/>
+              <a:srgbClr val="087E79"/>
             </a:solidFill>
           </c:spPr>
           <c:cat>
@@ -3921,7 +3921,7 @@
           <c:spPr>
             <a:ln xmlns:a="http://schemas.openxmlformats.org/drawingml/2006/main" w="9525">
               <a:solidFill>
-                <a:srgbClr val="DCE3ED"/>
+                <a:srgbClr val="DCE5E2"/>
               </a:solidFill>
               <a:prstDash val="solid"/>
             </a:ln>
@@ -3972,7 +3972,7 @@
     <p:bg>
       <p:bgPr>
         <a:solidFill xmlns:a="http://schemas.openxmlformats.org/drawingml/2006/main">
-          <a:srgbClr val="FFFFFF"/>
+          <a:srgbClr val="11263E"/>
         </a:solidFill>
       </p:bgPr>
     </p:bg>
@@ -3987,10 +3987,10 @@
       </p:grpSpPr>
       <p:sp>
         <p:nvSpPr>
-          <p:cNvPr id="6" name="">
-            <a:extLst xmlns:a="http://schemas.openxmlformats.org/drawingml/2006/main">
-              <a:ext uri="{FF2B5EF4-FFF2-40B4-BE49-F238E27FC236}">
-                <a16:creationId xmlns:a16="http://schemas.microsoft.com/office/drawing/2014/main" id="{52EA28D2-2FA3-4DE0-8DD8-D55FE670B4D3}"/>
+          <p:cNvPr id="7" name="">
+            <a:extLst xmlns:a="http://schemas.openxmlformats.org/drawingml/2006/main">
+              <a:ext uri="{FF2B5EF4-FFF2-40B4-BE49-F238E27FC236}">
+                <a16:creationId xmlns:a16="http://schemas.microsoft.com/office/drawing/2014/main" id="{2AAB8E37-E6C3-425D-A0BE-BA6F9229318D}"/>
               </a:ext>
             </a:extLst>
           </p:cNvPr>
@@ -4001,8 +4001,8 @@
         </p:nvSpPr>
         <p:spPr>
           <a:xfrm xmlns:a="http://schemas.openxmlformats.org/drawingml/2006/main">
-            <a:off x="685800" y="6315075"/>
-            <a:ext cx="6096000" cy="266700"/>
+            <a:off x="609600" y="6315075"/>
+            <a:ext cx="4000500" cy="209550"/>
           </a:xfrm>
           <a:prstGeom xmlns:a="http://schemas.openxmlformats.org/drawingml/2006/main" prst="rect">
             <a:avLst/>
@@ -4017,9 +4017,9 @@
           <a:bodyPr xmlns:a="http://schemas.openxmlformats.org/drawingml/2006/main"/>
           <a:lstStyle xmlns:a="http://schemas.openxmlformats.org/drawingml/2006/main">
             <a:defPPr>
-              <a:defRPr sz="1050" b="0">
-                <a:solidFill>
-                  <a:srgbClr val="526174"/>
+              <a:defRPr sz="975" b="1">
+                <a:solidFill>
+                  <a:srgbClr val="A9E7D7"/>
                 </a:solidFill>
                 <a:latin typeface="Arial"/>
                 <a:ea typeface="Arial"/>
@@ -4029,9 +4029,9 @@
           </a:lstStyle>
           <a:p xmlns:a="http://schemas.openxmlformats.org/drawingml/2006/main">
             <a:pPr>
-              <a:defRPr sz="1050" b="0">
-                <a:solidFill>
-                  <a:srgbClr val="526174"/>
+              <a:defRPr sz="975" b="1">
+                <a:solidFill>
+                  <a:srgbClr val="A9E7D7"/>
                 </a:solidFill>
                 <a:latin typeface="Arial"/>
                 <a:ea typeface="Arial"/>
@@ -4039,15 +4039,15 @@
               </a:defRPr>
             </a:pPr>
             <a:r>
-              <a:rPr sz="1050" b="0">
-                <a:solidFill>
-                  <a:srgbClr val="526174"/>
+              <a:rPr sz="975" b="1">
+                <a:solidFill>
+                  <a:srgbClr val="A9E7D7"/>
                 </a:solidFill>
                 <a:latin typeface="Arial"/>
                 <a:ea typeface="Arial"/>
                 <a:cs typeface="Arial"/>
               </a:rPr>
-              <a:t>VUT AI SOLUTIONS  /  AIBUY3A</a:t>
+              <a:t>STOCKSENSE AI</a:t>
             </a:r>
           </a:p>
         </p:txBody>
@@ -4057,7 +4057,7 @@
           <p:cNvPr id="2" name="">
             <a:extLst xmlns:a="http://schemas.openxmlformats.org/drawingml/2006/main">
               <a:ext uri="{FF2B5EF4-FFF2-40B4-BE49-F238E27FC236}">
-                <a16:creationId xmlns:a16="http://schemas.microsoft.com/office/drawing/2014/main" id="{F317F3A5-0205-4550-AD1E-895CECEDFE6E}"/>
+                <a16:creationId xmlns:a16="http://schemas.microsoft.com/office/drawing/2014/main" id="{5072FDF2-07EE-4A94-BF69-08D65C13482E}"/>
               </a:ext>
             </a:extLst>
           </p:cNvPr>
@@ -4068,8 +4068,8 @@
         </p:nvSpPr>
         <p:spPr>
           <a:xfrm xmlns:a="http://schemas.openxmlformats.org/drawingml/2006/main">
-            <a:off x="11001375" y="6315075"/>
-            <a:ext cx="523875" cy="266700"/>
+            <a:off x="11049000" y="6315075"/>
+            <a:ext cx="666750" cy="209550"/>
           </a:xfrm>
           <a:prstGeom xmlns:a="http://schemas.openxmlformats.org/drawingml/2006/main" prst="rect">
             <a:avLst/>
@@ -4084,9 +4084,9 @@
           <a:bodyPr xmlns:a="http://schemas.openxmlformats.org/drawingml/2006/main"/>
           <a:lstStyle xmlns:a="http://schemas.openxmlformats.org/drawingml/2006/main">
             <a:defPPr>
-              <a:defRPr sz="1050" b="0">
-                <a:solidFill>
-                  <a:srgbClr val="526174"/>
+              <a:defRPr sz="975" b="0">
+                <a:solidFill>
+                  <a:srgbClr val="A9E7D7"/>
                 </a:solidFill>
                 <a:latin typeface="Arial"/>
                 <a:ea typeface="Arial"/>
@@ -4096,9 +4096,9 @@
           </a:lstStyle>
           <a:p xmlns:a="http://schemas.openxmlformats.org/drawingml/2006/main">
             <a:pPr>
-              <a:defRPr sz="1050" b="0">
-                <a:solidFill>
-                  <a:srgbClr val="526174"/>
+              <a:defRPr sz="975" b="0">
+                <a:solidFill>
+                  <a:srgbClr val="A9E7D7"/>
                 </a:solidFill>
                 <a:latin typeface="Arial"/>
                 <a:ea typeface="Arial"/>
@@ -4106,9 +4106,9 @@
               </a:defRPr>
             </a:pPr>
             <a:r>
-              <a:rPr sz="1050" b="0">
-                <a:solidFill>
-                  <a:srgbClr val="526174"/>
+              <a:rPr sz="975" b="0">
+                <a:solidFill>
+                  <a:srgbClr val="A9E7D7"/>
                 </a:solidFill>
                 <a:latin typeface="Arial"/>
                 <a:ea typeface="Arial"/>
@@ -4124,7 +4124,7 @@
           <p:cNvPr id="3" name="">
             <a:extLst xmlns:a="http://schemas.openxmlformats.org/drawingml/2006/main">
               <a:ext uri="{FF2B5EF4-FFF2-40B4-BE49-F238E27FC236}">
-                <a16:creationId xmlns:a16="http://schemas.microsoft.com/office/drawing/2014/main" id="{1A90B238-1B8A-4C96-9007-44D8886BE2EB}"/>
+                <a16:creationId xmlns:a16="http://schemas.microsoft.com/office/drawing/2014/main" id="{5BDC8085-27E7-4606-910C-1A801BD2A4D7}"/>
               </a:ext>
             </a:extLst>
           </p:cNvPr>
@@ -4135,8 +4135,8 @@
         </p:nvSpPr>
         <p:spPr>
           <a:xfrm xmlns:a="http://schemas.openxmlformats.org/drawingml/2006/main">
-            <a:off x="685800" y="1666875"/>
-            <a:ext cx="10477500" cy="1000125"/>
+            <a:off x="609600" y="1476375"/>
+            <a:ext cx="10477500" cy="952500"/>
           </a:xfrm>
           <a:prstGeom xmlns:a="http://schemas.openxmlformats.org/drawingml/2006/main" prst="rect">
             <a:avLst/>
@@ -4151,9 +4151,9 @@
           <a:bodyPr xmlns:a="http://schemas.openxmlformats.org/drawingml/2006/main"/>
           <a:lstStyle xmlns:a="http://schemas.openxmlformats.org/drawingml/2006/main">
             <a:defPPr>
-              <a:defRPr sz="4800" b="1">
-                <a:solidFill>
-                  <a:srgbClr val="172B4D"/>
+              <a:defRPr sz="6150" b="1">
+                <a:solidFill>
+                  <a:srgbClr val="FFFFFF"/>
                 </a:solidFill>
                 <a:latin typeface="Arial"/>
                 <a:ea typeface="Arial"/>
@@ -4163,9 +4163,9 @@
           </a:lstStyle>
           <a:p xmlns:a="http://schemas.openxmlformats.org/drawingml/2006/main">
             <a:pPr>
-              <a:defRPr sz="4800" b="1">
-                <a:solidFill>
-                  <a:srgbClr val="172B4D"/>
+              <a:defRPr sz="6150" b="1">
+                <a:solidFill>
+                  <a:srgbClr val="FFFFFF"/>
                 </a:solidFill>
                 <a:latin typeface="Arial"/>
                 <a:ea typeface="Arial"/>
@@ -4173,15 +4173,15 @@
               </a:defRPr>
             </a:pPr>
             <a:r>
-              <a:rPr sz="4800" b="1">
-                <a:solidFill>
-                  <a:srgbClr val="172B4D"/>
+              <a:rPr sz="6150" b="1">
+                <a:solidFill>
+                  <a:srgbClr val="FFFFFF"/>
                 </a:solidFill>
                 <a:latin typeface="Arial"/>
                 <a:ea typeface="Arial"/>
                 <a:cs typeface="Arial"/>
               </a:rPr>
-              <a:t>StockSense AI</a:t>
+              <a:t>StockSense</a:t>
             </a:r>
           </a:p>
         </p:txBody>
@@ -4191,7 +4191,7 @@
           <p:cNvPr id="4" name="">
             <a:extLst xmlns:a="http://schemas.openxmlformats.org/drawingml/2006/main">
               <a:ext uri="{FF2B5EF4-FFF2-40B4-BE49-F238E27FC236}">
-                <a16:creationId xmlns:a16="http://schemas.microsoft.com/office/drawing/2014/main" id="{C09EC25F-724C-47B7-B7CB-1A363B7A02A7}"/>
+                <a16:creationId xmlns:a16="http://schemas.microsoft.com/office/drawing/2014/main" id="{301C7989-FF4B-430F-964A-5BC4098E3DC1}"/>
               </a:ext>
             </a:extLst>
           </p:cNvPr>
@@ -4202,8 +4202,75 @@
         </p:nvSpPr>
         <p:spPr>
           <a:xfrm xmlns:a="http://schemas.openxmlformats.org/drawingml/2006/main">
-            <a:off x="714375" y="2924175"/>
-            <a:ext cx="10096500" cy="590550"/>
+            <a:off x="609600" y="2362200"/>
+            <a:ext cx="4762500" cy="1047750"/>
+          </a:xfrm>
+          <a:prstGeom xmlns:a="http://schemas.openxmlformats.org/drawingml/2006/main" prst="rect">
+            <a:avLst/>
+          </a:prstGeom>
+          <a:noFill xmlns:a="http://schemas.openxmlformats.org/drawingml/2006/main"/>
+          <a:ln xmlns:a="http://schemas.openxmlformats.org/drawingml/2006/main" w="0">
+            <a:noFill/>
+            <a:prstDash val="solid"/>
+          </a:ln>
+        </p:spPr>
+        <p:txBody>
+          <a:bodyPr xmlns:a="http://schemas.openxmlformats.org/drawingml/2006/main"/>
+          <a:lstStyle xmlns:a="http://schemas.openxmlformats.org/drawingml/2006/main">
+            <a:defPPr>
+              <a:defRPr sz="6900" b="1">
+                <a:solidFill>
+                  <a:srgbClr val="A9E7D7"/>
+                </a:solidFill>
+                <a:latin typeface="Arial"/>
+                <a:ea typeface="Arial"/>
+                <a:cs typeface="Arial"/>
+              </a:defRPr>
+            </a:defPPr>
+          </a:lstStyle>
+          <a:p xmlns:a="http://schemas.openxmlformats.org/drawingml/2006/main">
+            <a:pPr>
+              <a:defRPr sz="6900" b="1">
+                <a:solidFill>
+                  <a:srgbClr val="A9E7D7"/>
+                </a:solidFill>
+                <a:latin typeface="Arial"/>
+                <a:ea typeface="Arial"/>
+                <a:cs typeface="Arial"/>
+              </a:defRPr>
+            </a:pPr>
+            <a:r>
+              <a:rPr sz="6900" b="1">
+                <a:solidFill>
+                  <a:srgbClr val="A9E7D7"/>
+                </a:solidFill>
+                <a:latin typeface="Arial"/>
+                <a:ea typeface="Arial"/>
+                <a:cs typeface="Arial"/>
+              </a:rPr>
+              <a:t>AI</a:t>
+            </a:r>
+          </a:p>
+        </p:txBody>
+      </p:sp>
+      <p:sp>
+        <p:nvSpPr>
+          <p:cNvPr id="5" name="">
+            <a:extLst xmlns:a="http://schemas.openxmlformats.org/drawingml/2006/main">
+              <a:ext uri="{FF2B5EF4-FFF2-40B4-BE49-F238E27FC236}">
+                <a16:creationId xmlns:a16="http://schemas.microsoft.com/office/drawing/2014/main" id="{C90C6994-74A4-4575-B313-45258DED45D0}"/>
+              </a:ext>
+            </a:extLst>
+          </p:cNvPr>
+          <p:cNvSpPr>
+            <a:spLocks xmlns:a="http://schemas.openxmlformats.org/drawingml/2006/main" noGrp="1"/>
+          </p:cNvSpPr>
+          <p:nvPr/>
+        </p:nvSpPr>
+        <p:spPr>
+          <a:xfrm xmlns:a="http://schemas.openxmlformats.org/drawingml/2006/main">
+            <a:off x="657225" y="3943350"/>
+            <a:ext cx="10096500" cy="1047750"/>
           </a:xfrm>
           <a:prstGeom xmlns:a="http://schemas.openxmlformats.org/drawingml/2006/main" prst="rect">
             <a:avLst/>
@@ -4220,7 +4287,7 @@
             <a:defPPr>
               <a:defRPr sz="2550" b="0">
                 <a:solidFill>
-                  <a:srgbClr val="0F766E"/>
+                  <a:srgbClr val="FFFFFF"/>
                 </a:solidFill>
                 <a:latin typeface="Arial"/>
                 <a:ea typeface="Arial"/>
@@ -4232,7 +4299,7 @@
             <a:pPr>
               <a:defRPr sz="2550" b="0">
                 <a:solidFill>
-                  <a:srgbClr val="0F766E"/>
+                  <a:srgbClr val="FFFFFF"/>
                 </a:solidFill>
                 <a:latin typeface="Arial"/>
                 <a:ea typeface="Arial"/>
@@ -4242,23 +4309,23 @@
             <a:r>
               <a:rPr sz="2550" b="0">
                 <a:solidFill>
-                  <a:srgbClr val="0F766E"/>
+                  <a:srgbClr val="FFFFFF"/>
                 </a:solidFill>
                 <a:latin typeface="Arial"/>
                 <a:ea typeface="Arial"/>
                 <a:cs typeface="Arial"/>
               </a:rPr>
-              <a:t>Sales forecasting and stock planning</a:t>
-            </a:r>
-          </a:p>
-        </p:txBody>
-      </p:sp>
-      <p:sp>
-        <p:nvSpPr>
-          <p:cNvPr id="5" name="">
-            <a:extLst xmlns:a="http://schemas.openxmlformats.org/drawingml/2006/main">
-              <a:ext uri="{FF2B5EF4-FFF2-40B4-BE49-F238E27FC236}">
-                <a16:creationId xmlns:a16="http://schemas.microsoft.com/office/drawing/2014/main" id="{2C3E3180-B4D4-4367-92EF-03BC75B6CA5E}"/>
+              <a:t>Sales forecasts and stock suggestions for a fictional mini market</a:t>
+            </a:r>
+          </a:p>
+        </p:txBody>
+      </p:sp>
+      <p:sp>
+        <p:nvSpPr>
+          <p:cNvPr id="6" name="">
+            <a:extLst xmlns:a="http://schemas.openxmlformats.org/drawingml/2006/main">
+              <a:ext uri="{FF2B5EF4-FFF2-40B4-BE49-F238E27FC236}">
+                <a16:creationId xmlns:a16="http://schemas.microsoft.com/office/drawing/2014/main" id="{654CC4FF-8806-4A61-B7A4-C4691A90DDB8}"/>
               </a:ext>
             </a:extLst>
           </p:cNvPr>
@@ -4269,8 +4336,8 @@
         </p:nvSpPr>
         <p:spPr>
           <a:xfrm xmlns:a="http://schemas.openxmlformats.org/drawingml/2006/main">
-            <a:off x="714375" y="3886200"/>
-            <a:ext cx="10096500" cy="400050"/>
+            <a:off x="657225" y="5372100"/>
+            <a:ext cx="10287000" cy="495300"/>
           </a:xfrm>
           <a:prstGeom xmlns:a="http://schemas.openxmlformats.org/drawingml/2006/main" prst="rect">
             <a:avLst/>
@@ -4285,9 +4352,9 @@
           <a:bodyPr xmlns:a="http://schemas.openxmlformats.org/drawingml/2006/main"/>
           <a:lstStyle xmlns:a="http://schemas.openxmlformats.org/drawingml/2006/main">
             <a:defPPr>
-              <a:defRPr sz="1875" b="0">
-                <a:solidFill>
-                  <a:srgbClr val="526174"/>
+              <a:defRPr sz="1725" b="0">
+                <a:solidFill>
+                  <a:srgbClr val="A9E7D7"/>
                 </a:solidFill>
                 <a:latin typeface="Arial"/>
                 <a:ea typeface="Arial"/>
@@ -4297,9 +4364,9 @@
           </a:lstStyle>
           <a:p xmlns:a="http://schemas.openxmlformats.org/drawingml/2006/main">
             <a:pPr>
-              <a:defRPr sz="1875" b="0">
-                <a:solidFill>
-                  <a:srgbClr val="526174"/>
+              <a:defRPr sz="1725" b="0">
+                <a:solidFill>
+                  <a:srgbClr val="A9E7D7"/>
                 </a:solidFill>
                 <a:latin typeface="Arial"/>
                 <a:ea typeface="Arial"/>
@@ -4307,15 +4374,15 @@
               </a:defRPr>
             </a:pPr>
             <a:r>
-              <a:rPr sz="1875" b="0">
-                <a:solidFill>
-                  <a:srgbClr val="526174"/>
+              <a:rPr sz="1725" b="0">
+                <a:solidFill>
+                  <a:srgbClr val="A9E7D7"/>
                 </a:solidFill>
                 <a:latin typeface="Arial"/>
                 <a:ea typeface="Arial"/>
                 <a:cs typeface="Arial"/>
               </a:rPr>
-              <a:t>Sunrise Mini Market is a fictional retail case</a:t>
+              <a:t>Store 1     5 products     7-day forecast</a:t>
             </a:r>
           </a:p>
         </p:txBody>
@@ -4323,7 +4390,7 @@
     </p:spTree>
     <p:extLst>
       <p:ext uri="{BB962C8B-B14F-4D97-AF65-F5344CB8AC3E}">
-        <p14:creationId xmlns:p14="http://schemas.microsoft.com/office/powerpoint/2010/main" val="190581542"/>
+        <p14:creationId xmlns:p14="http://schemas.microsoft.com/office/powerpoint/2010/main" val="1475198136"/>
       </p:ext>
     </p:extLst>
   </p:cSld>
@@ -4336,7 +4403,7 @@
     <p:bg>
       <p:bgPr>
         <a:solidFill xmlns:a="http://schemas.openxmlformats.org/drawingml/2006/main">
-          <a:srgbClr val="FFFFFF"/>
+          <a:srgbClr val="F7F5F0"/>
         </a:solidFill>
       </p:bgPr>
     </p:bg>
@@ -4351,10 +4418,10 @@
       </p:grpSpPr>
       <p:sp>
         <p:nvSpPr>
-          <p:cNvPr id="9" name="">
-            <a:extLst xmlns:a="http://schemas.openxmlformats.org/drawingml/2006/main">
-              <a:ext uri="{FF2B5EF4-FFF2-40B4-BE49-F238E27FC236}">
-                <a16:creationId xmlns:a16="http://schemas.microsoft.com/office/drawing/2014/main" id="{07E87790-7003-4BB4-A3E5-6376896C4CB9}"/>
+          <p:cNvPr id="10" name="">
+            <a:extLst xmlns:a="http://schemas.openxmlformats.org/drawingml/2006/main">
+              <a:ext uri="{FF2B5EF4-FFF2-40B4-BE49-F238E27FC236}">
+                <a16:creationId xmlns:a16="http://schemas.microsoft.com/office/drawing/2014/main" id="{3A43F67E-12E7-4ABF-A03A-8F1258454AC2}"/>
               </a:ext>
             </a:extLst>
           </p:cNvPr>
@@ -4365,8 +4432,8 @@
         </p:nvSpPr>
         <p:spPr>
           <a:xfrm xmlns:a="http://schemas.openxmlformats.org/drawingml/2006/main">
-            <a:off x="685800" y="476250"/>
-            <a:ext cx="10820400" cy="857250"/>
+            <a:off x="609600" y="400050"/>
+            <a:ext cx="5715000" cy="285750"/>
           </a:xfrm>
           <a:prstGeom xmlns:a="http://schemas.openxmlformats.org/drawingml/2006/main" prst="rect">
             <a:avLst/>
@@ -4381,9 +4448,9 @@
           <a:bodyPr xmlns:a="http://schemas.openxmlformats.org/drawingml/2006/main"/>
           <a:lstStyle xmlns:a="http://schemas.openxmlformats.org/drawingml/2006/main">
             <a:defPPr>
-              <a:defRPr sz="3150" b="1">
-                <a:solidFill>
-                  <a:srgbClr val="172B4D"/>
+              <a:defRPr sz="1200" b="1">
+                <a:solidFill>
+                  <a:srgbClr val="087E79"/>
                 </a:solidFill>
                 <a:latin typeface="Arial"/>
                 <a:ea typeface="Arial"/>
@@ -4393,9 +4460,9 @@
           </a:lstStyle>
           <a:p xmlns:a="http://schemas.openxmlformats.org/drawingml/2006/main">
             <a:pPr>
-              <a:defRPr sz="3150" b="1">
-                <a:solidFill>
-                  <a:srgbClr val="172B4D"/>
+              <a:defRPr sz="1200" b="1">
+                <a:solidFill>
+                  <a:srgbClr val="087E79"/>
                 </a:solidFill>
                 <a:latin typeface="Arial"/>
                 <a:ea typeface="Arial"/>
@@ -4403,15 +4470,15 @@
               </a:defRPr>
             </a:pPr>
             <a:r>
-              <a:rPr sz="3150" b="1">
-                <a:solidFill>
-                  <a:srgbClr val="172B4D"/>
+              <a:rPr sz="1200" b="1">
+                <a:solidFill>
+                  <a:srgbClr val="087E79"/>
                 </a:solidFill>
                 <a:latin typeface="Arial"/>
                 <a:ea typeface="Arial"/>
                 <a:cs typeface="Arial"/>
               </a:rPr>
-              <a:t>Stock suggestion</a:t>
+              <a:t>STOCK PLANNING</a:t>
             </a:r>
           </a:p>
         </p:txBody>
@@ -4421,7 +4488,7 @@
           <p:cNvPr id="2" name="">
             <a:extLst xmlns:a="http://schemas.openxmlformats.org/drawingml/2006/main">
               <a:ext uri="{FF2B5EF4-FFF2-40B4-BE49-F238E27FC236}">
-                <a16:creationId xmlns:a16="http://schemas.microsoft.com/office/drawing/2014/main" id="{E511BDF3-3D36-40FD-AC8C-8AF361E32B80}"/>
+                <a16:creationId xmlns:a16="http://schemas.microsoft.com/office/drawing/2014/main" id="{1F12C4A8-E1FA-42C4-8D73-726E4DF5CB9A}"/>
               </a:ext>
             </a:extLst>
           </p:cNvPr>
@@ -4432,8 +4499,8 @@
         </p:nvSpPr>
         <p:spPr>
           <a:xfrm xmlns:a="http://schemas.openxmlformats.org/drawingml/2006/main">
-            <a:off x="685800" y="6315075"/>
-            <a:ext cx="6096000" cy="266700"/>
+            <a:off x="609600" y="876300"/>
+            <a:ext cx="10934700" cy="914400"/>
           </a:xfrm>
           <a:prstGeom xmlns:a="http://schemas.openxmlformats.org/drawingml/2006/main" prst="rect">
             <a:avLst/>
@@ -4448,9 +4515,9 @@
           <a:bodyPr xmlns:a="http://schemas.openxmlformats.org/drawingml/2006/main"/>
           <a:lstStyle xmlns:a="http://schemas.openxmlformats.org/drawingml/2006/main">
             <a:defPPr>
-              <a:defRPr sz="1050" b="0">
-                <a:solidFill>
-                  <a:srgbClr val="526174"/>
+              <a:defRPr sz="3300" b="1">
+                <a:solidFill>
+                  <a:srgbClr val="18324A"/>
                 </a:solidFill>
                 <a:latin typeface="Arial"/>
                 <a:ea typeface="Arial"/>
@@ -4460,9 +4527,9 @@
           </a:lstStyle>
           <a:p xmlns:a="http://schemas.openxmlformats.org/drawingml/2006/main">
             <a:pPr>
-              <a:defRPr sz="1050" b="0">
-                <a:solidFill>
-                  <a:srgbClr val="526174"/>
+              <a:defRPr sz="3300" b="1">
+                <a:solidFill>
+                  <a:srgbClr val="18324A"/>
                 </a:solidFill>
                 <a:latin typeface="Arial"/>
                 <a:ea typeface="Arial"/>
@@ -4470,15 +4537,15 @@
               </a:defRPr>
             </a:pPr>
             <a:r>
-              <a:rPr sz="1050" b="0">
-                <a:solidFill>
-                  <a:srgbClr val="526174"/>
+              <a:rPr sz="3300" b="1">
+                <a:solidFill>
+                  <a:srgbClr val="18324A"/>
                 </a:solidFill>
                 <a:latin typeface="Arial"/>
                 <a:ea typeface="Arial"/>
                 <a:cs typeface="Arial"/>
               </a:rPr>
-              <a:t>VUT AI SOLUTIONS  /  AIBUY3A</a:t>
+              <a:t>How the order number is calculated</a:t>
             </a:r>
           </a:p>
         </p:txBody>
@@ -4488,7 +4555,7 @@
           <p:cNvPr id="3" name="">
             <a:extLst xmlns:a="http://schemas.openxmlformats.org/drawingml/2006/main">
               <a:ext uri="{FF2B5EF4-FFF2-40B4-BE49-F238E27FC236}">
-                <a16:creationId xmlns:a16="http://schemas.microsoft.com/office/drawing/2014/main" id="{C468DCBF-F46F-43A9-B87E-44E52DC3DD67}"/>
+                <a16:creationId xmlns:a16="http://schemas.microsoft.com/office/drawing/2014/main" id="{AF55DEF5-5A49-4B78-90AF-D2936C977884}"/>
               </a:ext>
             </a:extLst>
           </p:cNvPr>
@@ -4499,8 +4566,8 @@
         </p:nvSpPr>
         <p:spPr>
           <a:xfrm xmlns:a="http://schemas.openxmlformats.org/drawingml/2006/main">
-            <a:off x="11001375" y="6315075"/>
-            <a:ext cx="523875" cy="266700"/>
+            <a:off x="609600" y="6315075"/>
+            <a:ext cx="4000500" cy="209550"/>
           </a:xfrm>
           <a:prstGeom xmlns:a="http://schemas.openxmlformats.org/drawingml/2006/main" prst="rect">
             <a:avLst/>
@@ -4515,9 +4582,9 @@
           <a:bodyPr xmlns:a="http://schemas.openxmlformats.org/drawingml/2006/main"/>
           <a:lstStyle xmlns:a="http://schemas.openxmlformats.org/drawingml/2006/main">
             <a:defPPr>
-              <a:defRPr sz="1050" b="0">
-                <a:solidFill>
-                  <a:srgbClr val="526174"/>
+              <a:defRPr sz="975" b="1">
+                <a:solidFill>
+                  <a:srgbClr val="536A78"/>
                 </a:solidFill>
                 <a:latin typeface="Arial"/>
                 <a:ea typeface="Arial"/>
@@ -4527,9 +4594,9 @@
           </a:lstStyle>
           <a:p xmlns:a="http://schemas.openxmlformats.org/drawingml/2006/main">
             <a:pPr>
-              <a:defRPr sz="1050" b="0">
-                <a:solidFill>
-                  <a:srgbClr val="526174"/>
+              <a:defRPr sz="975" b="1">
+                <a:solidFill>
+                  <a:srgbClr val="536A78"/>
                 </a:solidFill>
                 <a:latin typeface="Arial"/>
                 <a:ea typeface="Arial"/>
@@ -4537,9 +4604,76 @@
               </a:defRPr>
             </a:pPr>
             <a:r>
-              <a:rPr sz="1050" b="0">
-                <a:solidFill>
-                  <a:srgbClr val="526174"/>
+              <a:rPr sz="975" b="1">
+                <a:solidFill>
+                  <a:srgbClr val="536A78"/>
+                </a:solidFill>
+                <a:latin typeface="Arial"/>
+                <a:ea typeface="Arial"/>
+                <a:cs typeface="Arial"/>
+              </a:rPr>
+              <a:t>STOCKSENSE AI</a:t>
+            </a:r>
+          </a:p>
+        </p:txBody>
+      </p:sp>
+      <p:sp>
+        <p:nvSpPr>
+          <p:cNvPr id="4" name="">
+            <a:extLst xmlns:a="http://schemas.openxmlformats.org/drawingml/2006/main">
+              <a:ext uri="{FF2B5EF4-FFF2-40B4-BE49-F238E27FC236}">
+                <a16:creationId xmlns:a16="http://schemas.microsoft.com/office/drawing/2014/main" id="{D4CE188B-DC76-4CCF-AEA1-D316286A8593}"/>
+              </a:ext>
+            </a:extLst>
+          </p:cNvPr>
+          <p:cNvSpPr>
+            <a:spLocks xmlns:a="http://schemas.openxmlformats.org/drawingml/2006/main" noGrp="1"/>
+          </p:cNvSpPr>
+          <p:nvPr/>
+        </p:nvSpPr>
+        <p:spPr>
+          <a:xfrm xmlns:a="http://schemas.openxmlformats.org/drawingml/2006/main">
+            <a:off x="11049000" y="6315075"/>
+            <a:ext cx="666750" cy="209550"/>
+          </a:xfrm>
+          <a:prstGeom xmlns:a="http://schemas.openxmlformats.org/drawingml/2006/main" prst="rect">
+            <a:avLst/>
+          </a:prstGeom>
+          <a:noFill xmlns:a="http://schemas.openxmlformats.org/drawingml/2006/main"/>
+          <a:ln xmlns:a="http://schemas.openxmlformats.org/drawingml/2006/main" w="0">
+            <a:noFill/>
+            <a:prstDash val="solid"/>
+          </a:ln>
+        </p:spPr>
+        <p:txBody>
+          <a:bodyPr xmlns:a="http://schemas.openxmlformats.org/drawingml/2006/main"/>
+          <a:lstStyle xmlns:a="http://schemas.openxmlformats.org/drawingml/2006/main">
+            <a:defPPr>
+              <a:defRPr sz="975" b="0">
+                <a:solidFill>
+                  <a:srgbClr val="536A78"/>
+                </a:solidFill>
+                <a:latin typeface="Arial"/>
+                <a:ea typeface="Arial"/>
+                <a:cs typeface="Arial"/>
+              </a:defRPr>
+            </a:defPPr>
+          </a:lstStyle>
+          <a:p xmlns:a="http://schemas.openxmlformats.org/drawingml/2006/main">
+            <a:pPr>
+              <a:defRPr sz="975" b="0">
+                <a:solidFill>
+                  <a:srgbClr val="536A78"/>
+                </a:solidFill>
+                <a:latin typeface="Arial"/>
+                <a:ea typeface="Arial"/>
+                <a:cs typeface="Arial"/>
+              </a:defRPr>
+            </a:pPr>
+            <a:r>
+              <a:rPr sz="975" b="0">
+                <a:solidFill>
+                  <a:srgbClr val="536A78"/>
                 </a:solidFill>
                 <a:latin typeface="Arial"/>
                 <a:ea typeface="Arial"/>
@@ -4552,10 +4686,10 @@
       </p:sp>
       <p:sp>
         <p:nvSpPr>
-          <p:cNvPr id="4" name="">
-            <a:extLst xmlns:a="http://schemas.openxmlformats.org/drawingml/2006/main">
-              <a:ext uri="{FF2B5EF4-FFF2-40B4-BE49-F238E27FC236}">
-                <a16:creationId xmlns:a16="http://schemas.microsoft.com/office/drawing/2014/main" id="{F848F79A-7F39-4C7F-BD36-C489F47FF521}"/>
+          <p:cNvPr id="5" name="">
+            <a:extLst xmlns:a="http://schemas.openxmlformats.org/drawingml/2006/main">
+              <a:ext uri="{FF2B5EF4-FFF2-40B4-BE49-F238E27FC236}">
+                <a16:creationId xmlns:a16="http://schemas.microsoft.com/office/drawing/2014/main" id="{6CB958C5-6154-4AFF-9CA8-D5708285ED8D}"/>
               </a:ext>
             </a:extLst>
           </p:cNvPr>
@@ -4566,8 +4700,8 @@
         </p:nvSpPr>
         <p:spPr>
           <a:xfrm xmlns:a="http://schemas.openxmlformats.org/drawingml/2006/main">
-            <a:off x="723900" y="1524000"/>
-            <a:ext cx="10477500" cy="666750"/>
+            <a:off x="638175" y="2152650"/>
+            <a:ext cx="3333750" cy="1009650"/>
           </a:xfrm>
           <a:prstGeom xmlns:a="http://schemas.openxmlformats.org/drawingml/2006/main" prst="rect">
             <a:avLst/>
@@ -4582,9 +4716,9 @@
           <a:bodyPr xmlns:a="http://schemas.openxmlformats.org/drawingml/2006/main"/>
           <a:lstStyle xmlns:a="http://schemas.openxmlformats.org/drawingml/2006/main">
             <a:defPPr>
-              <a:defRPr sz="2250" b="1">
-                <a:solidFill>
-                  <a:srgbClr val="172B4D"/>
+              <a:defRPr sz="5550" b="1">
+                <a:solidFill>
+                  <a:srgbClr val="087E79"/>
                 </a:solidFill>
                 <a:latin typeface="Arial"/>
                 <a:ea typeface="Arial"/>
@@ -4594,9 +4728,9 @@
           </a:lstStyle>
           <a:p xmlns:a="http://schemas.openxmlformats.org/drawingml/2006/main">
             <a:pPr>
-              <a:defRPr sz="2250" b="1">
-                <a:solidFill>
-                  <a:srgbClr val="172B4D"/>
+              <a:defRPr sz="5550" b="1">
+                <a:solidFill>
+                  <a:srgbClr val="087E79"/>
                 </a:solidFill>
                 <a:latin typeface="Arial"/>
                 <a:ea typeface="Arial"/>
@@ -4604,25 +4738,25 @@
               </a:defRPr>
             </a:pPr>
             <a:r>
-              <a:rPr sz="2250" b="1">
-                <a:solidFill>
-                  <a:srgbClr val="172B4D"/>
+              <a:rPr sz="5550" b="1">
+                <a:solidFill>
+                  <a:srgbClr val="087E79"/>
                 </a:solidFill>
                 <a:latin typeface="Arial"/>
                 <a:ea typeface="Arial"/>
                 <a:cs typeface="Arial"/>
               </a:rPr>
-              <a:t>Target stock = forecast during coverage + buffer</a:t>
-            </a:r>
-          </a:p>
-        </p:txBody>
-      </p:sp>
-      <p:sp>
-        <p:nvSpPr>
-          <p:cNvPr id="5" name="">
-            <a:extLst xmlns:a="http://schemas.openxmlformats.org/drawingml/2006/main">
-              <a:ext uri="{FF2B5EF4-FFF2-40B4-BE49-F238E27FC236}">
-                <a16:creationId xmlns:a16="http://schemas.microsoft.com/office/drawing/2014/main" id="{1045576D-0F64-4B35-BF5A-5FECBB89E25C}"/>
+              <a:t>77.52</a:t>
+            </a:r>
+          </a:p>
+        </p:txBody>
+      </p:sp>
+      <p:sp>
+        <p:nvSpPr>
+          <p:cNvPr id="6" name="">
+            <a:extLst xmlns:a="http://schemas.openxmlformats.org/drawingml/2006/main">
+              <a:ext uri="{FF2B5EF4-FFF2-40B4-BE49-F238E27FC236}">
+                <a16:creationId xmlns:a16="http://schemas.microsoft.com/office/drawing/2014/main" id="{DA8CE579-BECB-4922-80AB-98B9CABC7CB4}"/>
               </a:ext>
             </a:extLst>
           </p:cNvPr>
@@ -4633,8 +4767,8 @@
         </p:nvSpPr>
         <p:spPr>
           <a:xfrm xmlns:a="http://schemas.openxmlformats.org/drawingml/2006/main">
-            <a:off x="723900" y="2428875"/>
-            <a:ext cx="10477500" cy="762000"/>
+            <a:off x="657225" y="3200400"/>
+            <a:ext cx="4572000" cy="685800"/>
           </a:xfrm>
           <a:prstGeom xmlns:a="http://schemas.openxmlformats.org/drawingml/2006/main" prst="rect">
             <a:avLst/>
@@ -4649,9 +4783,9 @@
           <a:bodyPr xmlns:a="http://schemas.openxmlformats.org/drawingml/2006/main"/>
           <a:lstStyle xmlns:a="http://schemas.openxmlformats.org/drawingml/2006/main">
             <a:defPPr>
-              <a:defRPr sz="2025" b="0">
-                <a:solidFill>
-                  <a:srgbClr val="0F766E"/>
+              <a:defRPr sz="1875" b="0">
+                <a:solidFill>
+                  <a:srgbClr val="18324A"/>
                 </a:solidFill>
                 <a:latin typeface="Arial"/>
                 <a:ea typeface="Arial"/>
@@ -4661,9 +4795,9 @@
           </a:lstStyle>
           <a:p xmlns:a="http://schemas.openxmlformats.org/drawingml/2006/main">
             <a:pPr>
-              <a:defRPr sz="2025" b="0">
-                <a:solidFill>
-                  <a:srgbClr val="0F766E"/>
+              <a:defRPr sz="1875" b="0">
+                <a:solidFill>
+                  <a:srgbClr val="18324A"/>
                 </a:solidFill>
                 <a:latin typeface="Arial"/>
                 <a:ea typeface="Arial"/>
@@ -4671,25 +4805,25 @@
               </a:defRPr>
             </a:pPr>
             <a:r>
-              <a:rPr sz="2025" b="0">
-                <a:solidFill>
-                  <a:srgbClr val="0F766E"/>
+              <a:rPr sz="1875" b="0">
+                <a:solidFill>
+                  <a:srgbClr val="18324A"/>
                 </a:solidFill>
                 <a:latin typeface="Arial"/>
                 <a:ea typeface="Arial"/>
                 <a:cs typeface="Arial"/>
               </a:rPr>
-              <a:t>Suggested order = round up max(0, target − available − outstanding)</a:t>
-            </a:r>
-          </a:p>
-        </p:txBody>
-      </p:sp>
-      <p:sp>
-        <p:nvSpPr>
-          <p:cNvPr id="6" name="">
-            <a:extLst xmlns:a="http://schemas.openxmlformats.org/drawingml/2006/main">
-              <a:ext uri="{FF2B5EF4-FFF2-40B4-BE49-F238E27FC236}">
-                <a16:creationId xmlns:a16="http://schemas.microsoft.com/office/drawing/2014/main" id="{E695AB42-236B-435A-9611-4E579EA828EC}"/>
+              <a:t>forecast units during coverage</a:t>
+            </a:r>
+          </a:p>
+        </p:txBody>
+      </p:sp>
+      <p:sp>
+        <p:nvSpPr>
+          <p:cNvPr id="7" name="">
+            <a:extLst xmlns:a="http://schemas.openxmlformats.org/drawingml/2006/main">
+              <a:ext uri="{FF2B5EF4-FFF2-40B4-BE49-F238E27FC236}">
+                <a16:creationId xmlns:a16="http://schemas.microsoft.com/office/drawing/2014/main" id="{88DC9E01-3F30-4482-A59C-1A43E0DFA948}"/>
               </a:ext>
             </a:extLst>
           </p:cNvPr>
@@ -4700,8 +4834,8 @@
         </p:nvSpPr>
         <p:spPr>
           <a:xfrm xmlns:a="http://schemas.openxmlformats.org/drawingml/2006/main">
-            <a:off x="723900" y="3762375"/>
-            <a:ext cx="10477500" cy="514350"/>
+            <a:off x="638175" y="4143375"/>
+            <a:ext cx="10287000" cy="638175"/>
           </a:xfrm>
           <a:prstGeom xmlns:a="http://schemas.openxmlformats.org/drawingml/2006/main" prst="rect">
             <a:avLst/>
@@ -4716,9 +4850,9 @@
           <a:bodyPr xmlns:a="http://schemas.openxmlformats.org/drawingml/2006/main"/>
           <a:lstStyle xmlns:a="http://schemas.openxmlformats.org/drawingml/2006/main">
             <a:defPPr>
-              <a:defRPr sz="2025" b="0">
-                <a:solidFill>
-                  <a:srgbClr val="172B4D"/>
+              <a:defRPr sz="2775" b="1">
+                <a:solidFill>
+                  <a:srgbClr val="18324A"/>
                 </a:solidFill>
                 <a:latin typeface="Arial"/>
                 <a:ea typeface="Arial"/>
@@ -4728,9 +4862,9 @@
           </a:lstStyle>
           <a:p xmlns:a="http://schemas.openxmlformats.org/drawingml/2006/main">
             <a:pPr>
-              <a:defRPr sz="2025" b="0">
-                <a:solidFill>
-                  <a:srgbClr val="172B4D"/>
+              <a:defRPr sz="2775" b="1">
+                <a:solidFill>
+                  <a:srgbClr val="18324A"/>
                 </a:solidFill>
                 <a:latin typeface="Arial"/>
                 <a:ea typeface="Arial"/>
@@ -4738,25 +4872,25 @@
               </a:defRPr>
             </a:pPr>
             <a:r>
-              <a:rPr sz="2025" b="0">
-                <a:solidFill>
-                  <a:srgbClr val="172B4D"/>
+              <a:rPr sz="2775" b="1">
+                <a:solidFill>
+                  <a:srgbClr val="18324A"/>
                 </a:solidFill>
                 <a:latin typeface="Arial"/>
                 <a:ea typeface="Arial"/>
                 <a:cs typeface="Arial"/>
               </a:rPr>
-              <a:t>Example: 77.52 + 10 = 87.52 target units</a:t>
-            </a:r>
-          </a:p>
-        </p:txBody>
-      </p:sp>
-      <p:sp>
-        <p:nvSpPr>
-          <p:cNvPr id="7" name="">
-            <a:extLst xmlns:a="http://schemas.openxmlformats.org/drawingml/2006/main">
-              <a:ext uri="{FF2B5EF4-FFF2-40B4-BE49-F238E27FC236}">
-                <a16:creationId xmlns:a16="http://schemas.microsoft.com/office/drawing/2014/main" id="{A158EA4E-179D-466F-A4B6-1F576212F0DC}"/>
+              <a:t>+ 10 buffer = 87.52 target</a:t>
+            </a:r>
+          </a:p>
+        </p:txBody>
+      </p:sp>
+      <p:sp>
+        <p:nvSpPr>
+          <p:cNvPr id="8" name="">
+            <a:extLst xmlns:a="http://schemas.openxmlformats.org/drawingml/2006/main">
+              <a:ext uri="{FF2B5EF4-FFF2-40B4-BE49-F238E27FC236}">
+                <a16:creationId xmlns:a16="http://schemas.microsoft.com/office/drawing/2014/main" id="{785ED2C8-DCEE-412A-BEF7-DE5220791B2E}"/>
               </a:ext>
             </a:extLst>
           </p:cNvPr>
@@ -4767,8 +4901,8 @@
         </p:nvSpPr>
         <p:spPr>
           <a:xfrm xmlns:a="http://schemas.openxmlformats.org/drawingml/2006/main">
-            <a:off x="723900" y="4457700"/>
-            <a:ext cx="10477500" cy="666750"/>
+            <a:off x="638175" y="4924425"/>
+            <a:ext cx="8382000" cy="457200"/>
           </a:xfrm>
           <a:prstGeom xmlns:a="http://schemas.openxmlformats.org/drawingml/2006/main" prst="rect">
             <a:avLst/>
@@ -4783,9 +4917,9 @@
           <a:bodyPr xmlns:a="http://schemas.openxmlformats.org/drawingml/2006/main"/>
           <a:lstStyle xmlns:a="http://schemas.openxmlformats.org/drawingml/2006/main">
             <a:defPPr>
-              <a:defRPr sz="2025" b="1">
-                <a:solidFill>
-                  <a:srgbClr val="172B4D"/>
+              <a:defRPr sz="1950" b="0">
+                <a:solidFill>
+                  <a:srgbClr val="536A78"/>
                 </a:solidFill>
                 <a:latin typeface="Arial"/>
                 <a:ea typeface="Arial"/>
@@ -4795,9 +4929,9 @@
           </a:lstStyle>
           <a:p xmlns:a="http://schemas.openxmlformats.org/drawingml/2006/main">
             <a:pPr>
-              <a:defRPr sz="2025" b="1">
-                <a:solidFill>
-                  <a:srgbClr val="172B4D"/>
+              <a:defRPr sz="1950" b="0">
+                <a:solidFill>
+                  <a:srgbClr val="536A78"/>
                 </a:solidFill>
                 <a:latin typeface="Arial"/>
                 <a:ea typeface="Arial"/>
@@ -4805,25 +4939,25 @@
               </a:defRPr>
             </a:pPr>
             <a:r>
-              <a:rPr sz="2025" b="1">
-                <a:solidFill>
-                  <a:srgbClr val="172B4D"/>
+              <a:rPr sz="1950" b="0">
+                <a:solidFill>
+                  <a:srgbClr val="536A78"/>
                 </a:solidFill>
                 <a:latin typeface="Arial"/>
                 <a:ea typeface="Arial"/>
                 <a:cs typeface="Arial"/>
               </a:rPr>
-              <a:t>With 50 available and 0 outstanding, suggest 38 units.</a:t>
-            </a:r>
-          </a:p>
-        </p:txBody>
-      </p:sp>
-      <p:sp>
-        <p:nvSpPr>
-          <p:cNvPr id="8" name="">
-            <a:extLst xmlns:a="http://schemas.openxmlformats.org/drawingml/2006/main">
-              <a:ext uri="{FF2B5EF4-FFF2-40B4-BE49-F238E27FC236}">
-                <a16:creationId xmlns:a16="http://schemas.microsoft.com/office/drawing/2014/main" id="{8009AE04-8FBF-49B3-9A6B-272425C62BE6}"/>
+              <a:t>50 available, 0 outstanding</a:t>
+            </a:r>
+          </a:p>
+        </p:txBody>
+      </p:sp>
+      <p:sp>
+        <p:nvSpPr>
+          <p:cNvPr id="9" name="">
+            <a:extLst xmlns:a="http://schemas.openxmlformats.org/drawingml/2006/main">
+              <a:ext uri="{FF2B5EF4-FFF2-40B4-BE49-F238E27FC236}">
+                <a16:creationId xmlns:a16="http://schemas.microsoft.com/office/drawing/2014/main" id="{1BD2D218-A798-4BA5-8225-4929C9DCD6CF}"/>
               </a:ext>
             </a:extLst>
           </p:cNvPr>
@@ -4834,8 +4968,8 @@
         </p:nvSpPr>
         <p:spPr>
           <a:xfrm xmlns:a="http://schemas.openxmlformats.org/drawingml/2006/main">
-            <a:off x="723900" y="5467350"/>
-            <a:ext cx="10477500" cy="400050"/>
+            <a:off x="638175" y="5467350"/>
+            <a:ext cx="10572750" cy="581025"/>
           </a:xfrm>
           <a:prstGeom xmlns:a="http://schemas.openxmlformats.org/drawingml/2006/main" prst="rect">
             <a:avLst/>
@@ -4850,9 +4984,9 @@
           <a:bodyPr xmlns:a="http://schemas.openxmlformats.org/drawingml/2006/main"/>
           <a:lstStyle xmlns:a="http://schemas.openxmlformats.org/drawingml/2006/main">
             <a:defPPr>
-              <a:defRPr sz="1650" b="0">
-                <a:solidFill>
-                  <a:srgbClr val="526174"/>
+              <a:defRPr sz="2550" b="1">
+                <a:solidFill>
+                  <a:srgbClr val="087E79"/>
                 </a:solidFill>
                 <a:latin typeface="Arial"/>
                 <a:ea typeface="Arial"/>
@@ -4862,9 +4996,9 @@
           </a:lstStyle>
           <a:p xmlns:a="http://schemas.openxmlformats.org/drawingml/2006/main">
             <a:pPr>
-              <a:defRPr sz="1650" b="0">
-                <a:solidFill>
-                  <a:srgbClr val="526174"/>
+              <a:defRPr sz="2550" b="1">
+                <a:solidFill>
+                  <a:srgbClr val="087E79"/>
                 </a:solidFill>
                 <a:latin typeface="Arial"/>
                 <a:ea typeface="Arial"/>
@@ -4872,15 +5006,15 @@
               </a:defRPr>
             </a:pPr>
             <a:r>
-              <a:rPr sz="1650" b="0">
-                <a:solidFill>
-                  <a:srgbClr val="526174"/>
+              <a:rPr sz="2550" b="1">
+                <a:solidFill>
+                  <a:srgbClr val="087E79"/>
                 </a:solidFill>
                 <a:latin typeface="Arial"/>
                 <a:ea typeface="Arial"/>
                 <a:cs typeface="Arial"/>
               </a:rPr>
-              <a:t>An early shortage warning is shown separately.</a:t>
+              <a:t>Suggest ordering 38 units</a:t>
             </a:r>
           </a:p>
         </p:txBody>
@@ -4888,7 +5022,7 @@
     </p:spTree>
     <p:extLst>
       <p:ext uri="{BB962C8B-B14F-4D97-AF65-F5344CB8AC3E}">
-        <p14:creationId xmlns:p14="http://schemas.microsoft.com/office/powerpoint/2010/main" val="1951494969"/>
+        <p14:creationId xmlns:p14="http://schemas.microsoft.com/office/powerpoint/2010/main" val="1148015930"/>
       </p:ext>
     </p:extLst>
   </p:cSld>
@@ -4901,7 +5035,7 @@
     <p:bg>
       <p:bgPr>
         <a:solidFill xmlns:a="http://schemas.openxmlformats.org/drawingml/2006/main">
-          <a:srgbClr val="FFFFFF"/>
+          <a:srgbClr val="F7F5F0"/>
         </a:solidFill>
       </p:bgPr>
     </p:bg>
@@ -4916,10 +5050,10 @@
       </p:grpSpPr>
       <p:sp>
         <p:nvSpPr>
-          <p:cNvPr id="8" name="">
-            <a:extLst xmlns:a="http://schemas.openxmlformats.org/drawingml/2006/main">
-              <a:ext uri="{FF2B5EF4-FFF2-40B4-BE49-F238E27FC236}">
-                <a16:creationId xmlns:a16="http://schemas.microsoft.com/office/drawing/2014/main" id="{3BB60EBB-EEDC-4C67-AD4F-EEAA4122BBB6}"/>
+          <p:cNvPr id="9" name="">
+            <a:extLst xmlns:a="http://schemas.openxmlformats.org/drawingml/2006/main">
+              <a:ext uri="{FF2B5EF4-FFF2-40B4-BE49-F238E27FC236}">
+                <a16:creationId xmlns:a16="http://schemas.microsoft.com/office/drawing/2014/main" id="{B2D29293-13EB-4EC5-A917-17F6926182F8}"/>
               </a:ext>
             </a:extLst>
           </p:cNvPr>
@@ -4930,8 +5064,8 @@
         </p:nvSpPr>
         <p:spPr>
           <a:xfrm xmlns:a="http://schemas.openxmlformats.org/drawingml/2006/main">
-            <a:off x="685800" y="476250"/>
-            <a:ext cx="10820400" cy="857250"/>
+            <a:off x="609600" y="400050"/>
+            <a:ext cx="5715000" cy="285750"/>
           </a:xfrm>
           <a:prstGeom xmlns:a="http://schemas.openxmlformats.org/drawingml/2006/main" prst="rect">
             <a:avLst/>
@@ -4946,9 +5080,9 @@
           <a:bodyPr xmlns:a="http://schemas.openxmlformats.org/drawingml/2006/main"/>
           <a:lstStyle xmlns:a="http://schemas.openxmlformats.org/drawingml/2006/main">
             <a:defPPr>
-              <a:defRPr sz="3150" b="1">
-                <a:solidFill>
-                  <a:srgbClr val="172B4D"/>
+              <a:defRPr sz="1200" b="1">
+                <a:solidFill>
+                  <a:srgbClr val="087E79"/>
                 </a:solidFill>
                 <a:latin typeface="Arial"/>
                 <a:ea typeface="Arial"/>
@@ -4958,9 +5092,9 @@
           </a:lstStyle>
           <a:p xmlns:a="http://schemas.openxmlformats.org/drawingml/2006/main">
             <a:pPr>
-              <a:defRPr sz="3150" b="1">
-                <a:solidFill>
-                  <a:srgbClr val="172B4D"/>
+              <a:defRPr sz="1200" b="1">
+                <a:solidFill>
+                  <a:srgbClr val="087E79"/>
                 </a:solidFill>
                 <a:latin typeface="Arial"/>
                 <a:ea typeface="Arial"/>
@@ -4968,9 +5102,76 @@
               </a:defRPr>
             </a:pPr>
             <a:r>
-              <a:rPr sz="3150" b="1">
-                <a:solidFill>
-                  <a:srgbClr val="172B4D"/>
+              <a:rPr sz="1200" b="1">
+                <a:solidFill>
+                  <a:srgbClr val="087E79"/>
+                </a:solidFill>
+                <a:latin typeface="Arial"/>
+                <a:ea typeface="Arial"/>
+                <a:cs typeface="Arial"/>
+              </a:rPr>
+              <a:t>TEXT ASSISTANT</a:t>
+            </a:r>
+          </a:p>
+        </p:txBody>
+      </p:sp>
+      <p:sp>
+        <p:nvSpPr>
+          <p:cNvPr id="2" name="">
+            <a:extLst xmlns:a="http://schemas.openxmlformats.org/drawingml/2006/main">
+              <a:ext uri="{FF2B5EF4-FFF2-40B4-BE49-F238E27FC236}">
+                <a16:creationId xmlns:a16="http://schemas.microsoft.com/office/drawing/2014/main" id="{71C0AFF1-D55A-4A67-84A8-F0FA58DC8CE8}"/>
+              </a:ext>
+            </a:extLst>
+          </p:cNvPr>
+          <p:cNvSpPr>
+            <a:spLocks xmlns:a="http://schemas.openxmlformats.org/drawingml/2006/main" noGrp="1"/>
+          </p:cNvSpPr>
+          <p:nvPr/>
+        </p:nvSpPr>
+        <p:spPr>
+          <a:xfrm xmlns:a="http://schemas.openxmlformats.org/drawingml/2006/main">
+            <a:off x="609600" y="876300"/>
+            <a:ext cx="10934700" cy="914400"/>
+          </a:xfrm>
+          <a:prstGeom xmlns:a="http://schemas.openxmlformats.org/drawingml/2006/main" prst="rect">
+            <a:avLst/>
+          </a:prstGeom>
+          <a:noFill xmlns:a="http://schemas.openxmlformats.org/drawingml/2006/main"/>
+          <a:ln xmlns:a="http://schemas.openxmlformats.org/drawingml/2006/main" w="0">
+            <a:noFill/>
+            <a:prstDash val="solid"/>
+          </a:ln>
+        </p:spPr>
+        <p:txBody>
+          <a:bodyPr xmlns:a="http://schemas.openxmlformats.org/drawingml/2006/main"/>
+          <a:lstStyle xmlns:a="http://schemas.openxmlformats.org/drawingml/2006/main">
+            <a:defPPr>
+              <a:defRPr sz="3300" b="1">
+                <a:solidFill>
+                  <a:srgbClr val="18324A"/>
+                </a:solidFill>
+                <a:latin typeface="Arial"/>
+                <a:ea typeface="Arial"/>
+                <a:cs typeface="Arial"/>
+              </a:defRPr>
+            </a:defPPr>
+          </a:lstStyle>
+          <a:p xmlns:a="http://schemas.openxmlformats.org/drawingml/2006/main">
+            <a:pPr>
+              <a:defRPr sz="3300" b="1">
+                <a:solidFill>
+                  <a:srgbClr val="18324A"/>
+                </a:solidFill>
+                <a:latin typeface="Arial"/>
+                <a:ea typeface="Arial"/>
+                <a:cs typeface="Arial"/>
+              </a:defRPr>
+            </a:pPr>
+            <a:r>
+              <a:rPr sz="3300" b="1">
+                <a:solidFill>
+                  <a:srgbClr val="18324A"/>
                 </a:solidFill>
                 <a:latin typeface="Arial"/>
                 <a:ea typeface="Arial"/>
@@ -4983,10 +5184,10 @@
       </p:sp>
       <p:sp>
         <p:nvSpPr>
-          <p:cNvPr id="2" name="">
-            <a:extLst xmlns:a="http://schemas.openxmlformats.org/drawingml/2006/main">
-              <a:ext uri="{FF2B5EF4-FFF2-40B4-BE49-F238E27FC236}">
-                <a16:creationId xmlns:a16="http://schemas.microsoft.com/office/drawing/2014/main" id="{1A0A6BE6-DEDE-4C4C-B58E-7358D8D0E9D1}"/>
+          <p:cNvPr id="3" name="">
+            <a:extLst xmlns:a="http://schemas.openxmlformats.org/drawingml/2006/main">
+              <a:ext uri="{FF2B5EF4-FFF2-40B4-BE49-F238E27FC236}">
+                <a16:creationId xmlns:a16="http://schemas.microsoft.com/office/drawing/2014/main" id="{145DC5E3-5FE8-423B-9A1A-495913728EF8}"/>
               </a:ext>
             </a:extLst>
           </p:cNvPr>
@@ -4997,8 +5198,8 @@
         </p:nvSpPr>
         <p:spPr>
           <a:xfrm xmlns:a="http://schemas.openxmlformats.org/drawingml/2006/main">
-            <a:off x="685800" y="6315075"/>
-            <a:ext cx="6096000" cy="266700"/>
+            <a:off x="609600" y="6315075"/>
+            <a:ext cx="4000500" cy="209550"/>
           </a:xfrm>
           <a:prstGeom xmlns:a="http://schemas.openxmlformats.org/drawingml/2006/main" prst="rect">
             <a:avLst/>
@@ -5013,9 +5214,9 @@
           <a:bodyPr xmlns:a="http://schemas.openxmlformats.org/drawingml/2006/main"/>
           <a:lstStyle xmlns:a="http://schemas.openxmlformats.org/drawingml/2006/main">
             <a:defPPr>
-              <a:defRPr sz="1050" b="0">
-                <a:solidFill>
-                  <a:srgbClr val="526174"/>
+              <a:defRPr sz="975" b="1">
+                <a:solidFill>
+                  <a:srgbClr val="536A78"/>
                 </a:solidFill>
                 <a:latin typeface="Arial"/>
                 <a:ea typeface="Arial"/>
@@ -5025,9 +5226,9 @@
           </a:lstStyle>
           <a:p xmlns:a="http://schemas.openxmlformats.org/drawingml/2006/main">
             <a:pPr>
-              <a:defRPr sz="1050" b="0">
-                <a:solidFill>
-                  <a:srgbClr val="526174"/>
+              <a:defRPr sz="975" b="1">
+                <a:solidFill>
+                  <a:srgbClr val="536A78"/>
                 </a:solidFill>
                 <a:latin typeface="Arial"/>
                 <a:ea typeface="Arial"/>
@@ -5035,25 +5236,25 @@
               </a:defRPr>
             </a:pPr>
             <a:r>
-              <a:rPr sz="1050" b="0">
-                <a:solidFill>
-                  <a:srgbClr val="526174"/>
+              <a:rPr sz="975" b="1">
+                <a:solidFill>
+                  <a:srgbClr val="536A78"/>
                 </a:solidFill>
                 <a:latin typeface="Arial"/>
                 <a:ea typeface="Arial"/>
                 <a:cs typeface="Arial"/>
               </a:rPr>
-              <a:t>VUT AI SOLUTIONS  /  AIBUY3A</a:t>
-            </a:r>
-          </a:p>
-        </p:txBody>
-      </p:sp>
-      <p:sp>
-        <p:nvSpPr>
-          <p:cNvPr id="3" name="">
-            <a:extLst xmlns:a="http://schemas.openxmlformats.org/drawingml/2006/main">
-              <a:ext uri="{FF2B5EF4-FFF2-40B4-BE49-F238E27FC236}">
-                <a16:creationId xmlns:a16="http://schemas.microsoft.com/office/drawing/2014/main" id="{E5C60A33-5FE8-4343-8EFE-01D5DE1DDF76}"/>
+              <a:t>STOCKSENSE AI</a:t>
+            </a:r>
+          </a:p>
+        </p:txBody>
+      </p:sp>
+      <p:sp>
+        <p:nvSpPr>
+          <p:cNvPr id="4" name="">
+            <a:extLst xmlns:a="http://schemas.openxmlformats.org/drawingml/2006/main">
+              <a:ext uri="{FF2B5EF4-FFF2-40B4-BE49-F238E27FC236}">
+                <a16:creationId xmlns:a16="http://schemas.microsoft.com/office/drawing/2014/main" id="{000C8F3F-9634-40DF-9EAD-06A4FF87F383}"/>
               </a:ext>
             </a:extLst>
           </p:cNvPr>
@@ -5064,8 +5265,8 @@
         </p:nvSpPr>
         <p:spPr>
           <a:xfrm xmlns:a="http://schemas.openxmlformats.org/drawingml/2006/main">
-            <a:off x="11001375" y="6315075"/>
-            <a:ext cx="523875" cy="266700"/>
+            <a:off x="11049000" y="6315075"/>
+            <a:ext cx="666750" cy="209550"/>
           </a:xfrm>
           <a:prstGeom xmlns:a="http://schemas.openxmlformats.org/drawingml/2006/main" prst="rect">
             <a:avLst/>
@@ -5080,9 +5281,9 @@
           <a:bodyPr xmlns:a="http://schemas.openxmlformats.org/drawingml/2006/main"/>
           <a:lstStyle xmlns:a="http://schemas.openxmlformats.org/drawingml/2006/main">
             <a:defPPr>
-              <a:defRPr sz="1050" b="0">
-                <a:solidFill>
-                  <a:srgbClr val="526174"/>
+              <a:defRPr sz="975" b="0">
+                <a:solidFill>
+                  <a:srgbClr val="536A78"/>
                 </a:solidFill>
                 <a:latin typeface="Arial"/>
                 <a:ea typeface="Arial"/>
@@ -5092,9 +5293,9 @@
           </a:lstStyle>
           <a:p xmlns:a="http://schemas.openxmlformats.org/drawingml/2006/main">
             <a:pPr>
-              <a:defRPr sz="1050" b="0">
-                <a:solidFill>
-                  <a:srgbClr val="526174"/>
+              <a:defRPr sz="975" b="0">
+                <a:solidFill>
+                  <a:srgbClr val="536A78"/>
                 </a:solidFill>
                 <a:latin typeface="Arial"/>
                 <a:ea typeface="Arial"/>
@@ -5102,9 +5303,9 @@
               </a:defRPr>
             </a:pPr>
             <a:r>
-              <a:rPr sz="1050" b="0">
-                <a:solidFill>
-                  <a:srgbClr val="526174"/>
+              <a:rPr sz="975" b="0">
+                <a:solidFill>
+                  <a:srgbClr val="536A78"/>
                 </a:solidFill>
                 <a:latin typeface="Arial"/>
                 <a:ea typeface="Arial"/>
@@ -5117,10 +5318,10 @@
       </p:sp>
       <p:sp>
         <p:nvSpPr>
-          <p:cNvPr id="4" name="">
-            <a:extLst xmlns:a="http://schemas.openxmlformats.org/drawingml/2006/main">
-              <a:ext uri="{FF2B5EF4-FFF2-40B4-BE49-F238E27FC236}">
-                <a16:creationId xmlns:a16="http://schemas.microsoft.com/office/drawing/2014/main" id="{BD9A7A74-84E4-4FA5-AC76-8090ED5C8631}"/>
+          <p:cNvPr id="5" name="">
+            <a:extLst xmlns:a="http://schemas.openxmlformats.org/drawingml/2006/main">
+              <a:ext uri="{FF2B5EF4-FFF2-40B4-BE49-F238E27FC236}">
+                <a16:creationId xmlns:a16="http://schemas.microsoft.com/office/drawing/2014/main" id="{045C2248-20BF-4CCB-A3F4-F46161C762A8}"/>
               </a:ext>
             </a:extLst>
           </p:cNvPr>
@@ -5131,8 +5332,8 @@
         </p:nvSpPr>
         <p:spPr>
           <a:xfrm xmlns:a="http://schemas.openxmlformats.org/drawingml/2006/main">
-            <a:off x="723900" y="1666875"/>
-            <a:ext cx="10477500" cy="552450"/>
+            <a:off x="638175" y="2124075"/>
+            <a:ext cx="10477500" cy="781050"/>
           </a:xfrm>
           <a:prstGeom xmlns:a="http://schemas.openxmlformats.org/drawingml/2006/main" prst="rect">
             <a:avLst/>
@@ -5147,9 +5348,9 @@
           <a:bodyPr xmlns:a="http://schemas.openxmlformats.org/drawingml/2006/main"/>
           <a:lstStyle xmlns:a="http://schemas.openxmlformats.org/drawingml/2006/main">
             <a:defPPr>
-              <a:defRPr sz="2625" b="1">
-                <a:solidFill>
-                  <a:srgbClr val="0F766E"/>
+              <a:defRPr sz="2700" b="1">
+                <a:solidFill>
+                  <a:srgbClr val="18324A"/>
                 </a:solidFill>
                 <a:latin typeface="Arial"/>
                 <a:ea typeface="Arial"/>
@@ -5159,9 +5360,9 @@
           </a:lstStyle>
           <a:p xmlns:a="http://schemas.openxmlformats.org/drawingml/2006/main">
             <a:pPr>
-              <a:defRPr sz="2625" b="1">
-                <a:solidFill>
-                  <a:srgbClr val="0F766E"/>
+              <a:defRPr sz="2700" b="1">
+                <a:solidFill>
+                  <a:srgbClr val="18324A"/>
                 </a:solidFill>
                 <a:latin typeface="Arial"/>
                 <a:ea typeface="Arial"/>
@@ -5169,25 +5370,25 @@
               </a:defRPr>
             </a:pPr>
             <a:r>
-              <a:rPr sz="2625" b="1">
-                <a:solidFill>
-                  <a:srgbClr val="0F766E"/>
+              <a:rPr sz="2700" b="1">
+                <a:solidFill>
+                  <a:srgbClr val="18324A"/>
                 </a:solidFill>
                 <a:latin typeface="Arial"/>
                 <a:ea typeface="Arial"/>
                 <a:cs typeface="Arial"/>
               </a:rPr>
-              <a:t>Five request types</a:t>
-            </a:r>
-          </a:p>
-        </p:txBody>
-      </p:sp>
-      <p:sp>
-        <p:nvSpPr>
-          <p:cNvPr id="5" name="">
-            <a:extLst xmlns:a="http://schemas.openxmlformats.org/drawingml/2006/main">
-              <a:ext uri="{FF2B5EF4-FFF2-40B4-BE49-F238E27FC236}">
-                <a16:creationId xmlns:a16="http://schemas.microsoft.com/office/drawing/2014/main" id="{B6BE37AB-1EDB-4CE4-A00F-2AD0ABCB3ABA}"/>
+              <a:t>“What will Product 1 sell next week?”</a:t>
+            </a:r>
+          </a:p>
+        </p:txBody>
+      </p:sp>
+      <p:sp>
+        <p:nvSpPr>
+          <p:cNvPr id="6" name="">
+            <a:extLst xmlns:a="http://schemas.openxmlformats.org/drawingml/2006/main">
+              <a:ext uri="{FF2B5EF4-FFF2-40B4-BE49-F238E27FC236}">
+                <a16:creationId xmlns:a16="http://schemas.microsoft.com/office/drawing/2014/main" id="{19DCB64C-D20D-40E8-97B2-0CED1A189684}"/>
               </a:ext>
             </a:extLst>
           </p:cNvPr>
@@ -5198,8 +5399,8 @@
         </p:nvSpPr>
         <p:spPr>
           <a:xfrm xmlns:a="http://schemas.openxmlformats.org/drawingml/2006/main">
-            <a:off x="723900" y="2571750"/>
-            <a:ext cx="10477500" cy="742950"/>
+            <a:off x="657225" y="3133725"/>
+            <a:ext cx="10382250" cy="1047750"/>
           </a:xfrm>
           <a:prstGeom xmlns:a="http://schemas.openxmlformats.org/drawingml/2006/main" prst="rect">
             <a:avLst/>
@@ -5214,9 +5415,9 @@
           <a:bodyPr xmlns:a="http://schemas.openxmlformats.org/drawingml/2006/main"/>
           <a:lstStyle xmlns:a="http://schemas.openxmlformats.org/drawingml/2006/main">
             <a:defPPr>
-              <a:defRPr sz="2025" b="0">
-                <a:solidFill>
-                  <a:srgbClr val="172B4D"/>
+              <a:defRPr sz="2175" b="0">
+                <a:solidFill>
+                  <a:srgbClr val="18324A"/>
                 </a:solidFill>
                 <a:latin typeface="Arial"/>
                 <a:ea typeface="Arial"/>
@@ -5226,9 +5427,9 @@
           </a:lstStyle>
           <a:p xmlns:a="http://schemas.openxmlformats.org/drawingml/2006/main">
             <a:pPr>
-              <a:defRPr sz="2025" b="0">
-                <a:solidFill>
-                  <a:srgbClr val="172B4D"/>
+              <a:defRPr sz="2175" b="0">
+                <a:solidFill>
+                  <a:srgbClr val="18324A"/>
                 </a:solidFill>
                 <a:latin typeface="Arial"/>
                 <a:ea typeface="Arial"/>
@@ -5236,25 +5437,25 @@
               </a:defRPr>
             </a:pPr>
             <a:r>
-              <a:rPr sz="2025" b="0">
-                <a:solidFill>
-                  <a:srgbClr val="172B4D"/>
+              <a:rPr sz="2175" b="0">
+                <a:solidFill>
+                  <a:srgbClr val="18324A"/>
                 </a:solidFill>
                 <a:latin typeface="Arial"/>
                 <a:ea typeface="Arial"/>
                 <a:cs typeface="Arial"/>
               </a:rPr>
-              <a:t>Forecast, stock order, recent sales, model results and help</a:t>
-            </a:r>
-          </a:p>
-        </p:txBody>
-      </p:sp>
-      <p:sp>
-        <p:nvSpPr>
-          <p:cNvPr id="6" name="">
-            <a:extLst xmlns:a="http://schemas.openxmlformats.org/drawingml/2006/main">
-              <a:ext uri="{FF2B5EF4-FFF2-40B4-BE49-F238E27FC236}">
-                <a16:creationId xmlns:a16="http://schemas.microsoft.com/office/drawing/2014/main" id="{55DCC17E-510E-480F-BF06-894DBBF03CA4}"/>
+              <a:t>The assistant identifies the request type, then reads the saved forecast.</a:t>
+            </a:r>
+          </a:p>
+        </p:txBody>
+      </p:sp>
+      <p:sp>
+        <p:nvSpPr>
+          <p:cNvPr id="7" name="">
+            <a:extLst xmlns:a="http://schemas.openxmlformats.org/drawingml/2006/main">
+              <a:ext uri="{FF2B5EF4-FFF2-40B4-BE49-F238E27FC236}">
+                <a16:creationId xmlns:a16="http://schemas.microsoft.com/office/drawing/2014/main" id="{9ABD4239-9282-4DD2-BFC1-9AAA47580661}"/>
               </a:ext>
             </a:extLst>
           </p:cNvPr>
@@ -5265,8 +5466,8 @@
         </p:nvSpPr>
         <p:spPr>
           <a:xfrm xmlns:a="http://schemas.openxmlformats.org/drawingml/2006/main">
-            <a:off x="723900" y="3390900"/>
-            <a:ext cx="10477500" cy="742950"/>
+            <a:off x="638175" y="4619625"/>
+            <a:ext cx="10477500" cy="523875"/>
           </a:xfrm>
           <a:prstGeom xmlns:a="http://schemas.openxmlformats.org/drawingml/2006/main" prst="rect">
             <a:avLst/>
@@ -5281,9 +5482,9 @@
           <a:bodyPr xmlns:a="http://schemas.openxmlformats.org/drawingml/2006/main"/>
           <a:lstStyle xmlns:a="http://schemas.openxmlformats.org/drawingml/2006/main">
             <a:defPPr>
-              <a:defRPr sz="2025" b="0">
-                <a:solidFill>
-                  <a:srgbClr val="172B4D"/>
+              <a:defRPr sz="2325" b="1">
+                <a:solidFill>
+                  <a:srgbClr val="087E79"/>
                 </a:solidFill>
                 <a:latin typeface="Arial"/>
                 <a:ea typeface="Arial"/>
@@ -5293,9 +5494,9 @@
           </a:lstStyle>
           <a:p xmlns:a="http://schemas.openxmlformats.org/drawingml/2006/main">
             <a:pPr>
-              <a:defRPr sz="2025" b="0">
-                <a:solidFill>
-                  <a:srgbClr val="172B4D"/>
+              <a:defRPr sz="2325" b="1">
+                <a:solidFill>
+                  <a:srgbClr val="087E79"/>
                 </a:solidFill>
                 <a:latin typeface="Arial"/>
                 <a:ea typeface="Arial"/>
@@ -5303,25 +5504,25 @@
               </a:defRPr>
             </a:pPr>
             <a:r>
-              <a:rPr sz="2025" b="0">
-                <a:solidFill>
-                  <a:srgbClr val="172B4D"/>
+              <a:rPr sz="2325" b="1">
+                <a:solidFill>
+                  <a:srgbClr val="087E79"/>
                 </a:solidFill>
                 <a:latin typeface="Arial"/>
                 <a:ea typeface="Arial"/>
                 <a:cs typeface="Arial"/>
               </a:rPr>
-              <a:t>Text classification selects a request type</a:t>
-            </a:r>
-          </a:p>
-        </p:txBody>
-      </p:sp>
-      <p:sp>
-        <p:nvSpPr>
-          <p:cNvPr id="7" name="">
-            <a:extLst xmlns:a="http://schemas.openxmlformats.org/drawingml/2006/main">
-              <a:ext uri="{FF2B5EF4-FFF2-40B4-BE49-F238E27FC236}">
-                <a16:creationId xmlns:a16="http://schemas.microsoft.com/office/drawing/2014/main" id="{4BEBA27F-0A04-483F-900B-ED1521CCCB29}"/>
+              <a:t>5 supported request types</a:t>
+            </a:r>
+          </a:p>
+        </p:txBody>
+      </p:sp>
+      <p:sp>
+        <p:nvSpPr>
+          <p:cNvPr id="8" name="">
+            <a:extLst xmlns:a="http://schemas.openxmlformats.org/drawingml/2006/main">
+              <a:ext uri="{FF2B5EF4-FFF2-40B4-BE49-F238E27FC236}">
+                <a16:creationId xmlns:a16="http://schemas.microsoft.com/office/drawing/2014/main" id="{02546D33-F3B4-4A73-8759-272D7F7C58A9}"/>
               </a:ext>
             </a:extLst>
           </p:cNvPr>
@@ -5332,8 +5533,8 @@
         </p:nvSpPr>
         <p:spPr>
           <a:xfrm xmlns:a="http://schemas.openxmlformats.org/drawingml/2006/main">
-            <a:off x="723900" y="4210050"/>
-            <a:ext cx="10477500" cy="742950"/>
+            <a:off x="647700" y="5219700"/>
+            <a:ext cx="10477500" cy="590550"/>
           </a:xfrm>
           <a:prstGeom xmlns:a="http://schemas.openxmlformats.org/drawingml/2006/main" prst="rect">
             <a:avLst/>
@@ -5348,9 +5549,9 @@
           <a:bodyPr xmlns:a="http://schemas.openxmlformats.org/drawingml/2006/main"/>
           <a:lstStyle xmlns:a="http://schemas.openxmlformats.org/drawingml/2006/main">
             <a:defPPr>
-              <a:defRPr sz="2025" b="0">
-                <a:solidFill>
-                  <a:srgbClr val="172B4D"/>
+              <a:defRPr sz="1950" b="0">
+                <a:solidFill>
+                  <a:srgbClr val="536A78"/>
                 </a:solidFill>
                 <a:latin typeface="Arial"/>
                 <a:ea typeface="Arial"/>
@@ -5360,9 +5561,9 @@
           </a:lstStyle>
           <a:p xmlns:a="http://schemas.openxmlformats.org/drawingml/2006/main">
             <a:pPr>
-              <a:defRPr sz="2025" b="0">
-                <a:solidFill>
-                  <a:srgbClr val="172B4D"/>
+              <a:defRPr sz="1950" b="0">
+                <a:solidFill>
+                  <a:srgbClr val="536A78"/>
                 </a:solidFill>
                 <a:latin typeface="Arial"/>
                 <a:ea typeface="Arial"/>
@@ -5370,15 +5571,15 @@
               </a:defRPr>
             </a:pPr>
             <a:r>
-              <a:rPr sz="2025" b="0">
-                <a:solidFill>
-                  <a:srgbClr val="172B4D"/>
+              <a:rPr sz="1950" b="0">
+                <a:solidFill>
+                  <a:srgbClr val="536A78"/>
                 </a:solidFill>
                 <a:latin typeface="Arial"/>
                 <a:ea typeface="Arial"/>
                 <a:cs typeface="Arial"/>
               </a:rPr>
-              <a:t>Answers use the same calculated values as the dashboard</a:t>
+              <a:t>Forecast, order, recent sales, model results and help</a:t>
             </a:r>
           </a:p>
         </p:txBody>
@@ -5386,7 +5587,7 @@
     </p:spTree>
     <p:extLst>
       <p:ext uri="{BB962C8B-B14F-4D97-AF65-F5344CB8AC3E}">
-        <p14:creationId xmlns:p14="http://schemas.microsoft.com/office/powerpoint/2010/main" val="174203643"/>
+        <p14:creationId xmlns:p14="http://schemas.microsoft.com/office/powerpoint/2010/main" val="1920829630"/>
       </p:ext>
     </p:extLst>
   </p:cSld>
@@ -5399,7 +5600,7 @@
     <p:bg>
       <p:bgPr>
         <a:solidFill xmlns:a="http://schemas.openxmlformats.org/drawingml/2006/main">
-          <a:srgbClr val="FFFFFF"/>
+          <a:srgbClr val="11263E"/>
         </a:solidFill>
       </p:bgPr>
     </p:bg>
@@ -5414,10 +5615,10 @@
       </p:grpSpPr>
       <p:sp>
         <p:nvSpPr>
-          <p:cNvPr id="8" name="">
-            <a:extLst xmlns:a="http://schemas.openxmlformats.org/drawingml/2006/main">
-              <a:ext uri="{FF2B5EF4-FFF2-40B4-BE49-F238E27FC236}">
-                <a16:creationId xmlns:a16="http://schemas.microsoft.com/office/drawing/2014/main" id="{19BB6AB7-6E44-4F68-B64C-EDB984622033}"/>
+          <p:cNvPr id="11" name="">
+            <a:extLst xmlns:a="http://schemas.openxmlformats.org/drawingml/2006/main">
+              <a:ext uri="{FF2B5EF4-FFF2-40B4-BE49-F238E27FC236}">
+                <a16:creationId xmlns:a16="http://schemas.microsoft.com/office/drawing/2014/main" id="{79FC376C-F93B-4951-85E2-FDC93C98FF6E}"/>
               </a:ext>
             </a:extLst>
           </p:cNvPr>
@@ -5428,8 +5629,8 @@
         </p:nvSpPr>
         <p:spPr>
           <a:xfrm xmlns:a="http://schemas.openxmlformats.org/drawingml/2006/main">
-            <a:off x="685800" y="476250"/>
-            <a:ext cx="10820400" cy="857250"/>
+            <a:off x="609600" y="400050"/>
+            <a:ext cx="5715000" cy="285750"/>
           </a:xfrm>
           <a:prstGeom xmlns:a="http://schemas.openxmlformats.org/drawingml/2006/main" prst="rect">
             <a:avLst/>
@@ -5444,9 +5645,9 @@
           <a:bodyPr xmlns:a="http://schemas.openxmlformats.org/drawingml/2006/main"/>
           <a:lstStyle xmlns:a="http://schemas.openxmlformats.org/drawingml/2006/main">
             <a:defPPr>
-              <a:defRPr sz="3150" b="1">
-                <a:solidFill>
-                  <a:srgbClr val="172B4D"/>
+              <a:defRPr sz="1200" b="1">
+                <a:solidFill>
+                  <a:srgbClr val="A9E7D7"/>
                 </a:solidFill>
                 <a:latin typeface="Arial"/>
                 <a:ea typeface="Arial"/>
@@ -5456,9 +5657,9 @@
           </a:lstStyle>
           <a:p xmlns:a="http://schemas.openxmlformats.org/drawingml/2006/main">
             <a:pPr>
-              <a:defRPr sz="3150" b="1">
-                <a:solidFill>
-                  <a:srgbClr val="172B4D"/>
+              <a:defRPr sz="1200" b="1">
+                <a:solidFill>
+                  <a:srgbClr val="A9E7D7"/>
                 </a:solidFill>
                 <a:latin typeface="Arial"/>
                 <a:ea typeface="Arial"/>
@@ -5466,15 +5667,15 @@
               </a:defRPr>
             </a:pPr>
             <a:r>
-              <a:rPr sz="3150" b="1">
-                <a:solidFill>
-                  <a:srgbClr val="172B4D"/>
+              <a:rPr sz="1200" b="1">
+                <a:solidFill>
+                  <a:srgbClr val="A9E7D7"/>
                 </a:solidFill>
                 <a:latin typeface="Arial"/>
                 <a:ea typeface="Arial"/>
                 <a:cs typeface="Arial"/>
               </a:rPr>
-              <a:t>Checks completed</a:t>
+              <a:t>EVIDENCE</a:t>
             </a:r>
           </a:p>
         </p:txBody>
@@ -5484,7 +5685,7 @@
           <p:cNvPr id="2" name="">
             <a:extLst xmlns:a="http://schemas.openxmlformats.org/drawingml/2006/main">
               <a:ext uri="{FF2B5EF4-FFF2-40B4-BE49-F238E27FC236}">
-                <a16:creationId xmlns:a16="http://schemas.microsoft.com/office/drawing/2014/main" id="{298A682C-C3A4-41B4-84EA-E3A929A6E3CB}"/>
+                <a16:creationId xmlns:a16="http://schemas.microsoft.com/office/drawing/2014/main" id="{D28AC5D1-8F64-4BAF-B6B2-A5325E129F84}"/>
               </a:ext>
             </a:extLst>
           </p:cNvPr>
@@ -5495,8 +5696,8 @@
         </p:nvSpPr>
         <p:spPr>
           <a:xfrm xmlns:a="http://schemas.openxmlformats.org/drawingml/2006/main">
-            <a:off x="685800" y="6315075"/>
-            <a:ext cx="6096000" cy="266700"/>
+            <a:off x="609600" y="876300"/>
+            <a:ext cx="10934700" cy="914400"/>
           </a:xfrm>
           <a:prstGeom xmlns:a="http://schemas.openxmlformats.org/drawingml/2006/main" prst="rect">
             <a:avLst/>
@@ -5511,9 +5712,9 @@
           <a:bodyPr xmlns:a="http://schemas.openxmlformats.org/drawingml/2006/main"/>
           <a:lstStyle xmlns:a="http://schemas.openxmlformats.org/drawingml/2006/main">
             <a:defPPr>
-              <a:defRPr sz="1050" b="0">
-                <a:solidFill>
-                  <a:srgbClr val="526174"/>
+              <a:defRPr sz="3300" b="1">
+                <a:solidFill>
+                  <a:srgbClr val="FFFFFF"/>
                 </a:solidFill>
                 <a:latin typeface="Arial"/>
                 <a:ea typeface="Arial"/>
@@ -5523,9 +5724,9 @@
           </a:lstStyle>
           <a:p xmlns:a="http://schemas.openxmlformats.org/drawingml/2006/main">
             <a:pPr>
-              <a:defRPr sz="1050" b="0">
-                <a:solidFill>
-                  <a:srgbClr val="526174"/>
+              <a:defRPr sz="3300" b="1">
+                <a:solidFill>
+                  <a:srgbClr val="FFFFFF"/>
                 </a:solidFill>
                 <a:latin typeface="Arial"/>
                 <a:ea typeface="Arial"/>
@@ -5533,15 +5734,15 @@
               </a:defRPr>
             </a:pPr>
             <a:r>
-              <a:rPr sz="1050" b="0">
-                <a:solidFill>
-                  <a:srgbClr val="526174"/>
+              <a:rPr sz="3300" b="1">
+                <a:solidFill>
+                  <a:srgbClr val="FFFFFF"/>
                 </a:solidFill>
                 <a:latin typeface="Arial"/>
                 <a:ea typeface="Arial"/>
                 <a:cs typeface="Arial"/>
               </a:rPr>
-              <a:t>VUT AI SOLUTIONS  /  AIBUY3A</a:t>
+              <a:t>Prototype checks</a:t>
             </a:r>
           </a:p>
         </p:txBody>
@@ -5551,7 +5752,7 @@
           <p:cNvPr id="3" name="">
             <a:extLst xmlns:a="http://schemas.openxmlformats.org/drawingml/2006/main">
               <a:ext uri="{FF2B5EF4-FFF2-40B4-BE49-F238E27FC236}">
-                <a16:creationId xmlns:a16="http://schemas.microsoft.com/office/drawing/2014/main" id="{4B8D3BDA-C120-48F8-ACD6-9F88374492B0}"/>
+                <a16:creationId xmlns:a16="http://schemas.microsoft.com/office/drawing/2014/main" id="{74E65A36-4DF2-4B76-9D03-AFED7CCBFC4D}"/>
               </a:ext>
             </a:extLst>
           </p:cNvPr>
@@ -5562,8 +5763,8 @@
         </p:nvSpPr>
         <p:spPr>
           <a:xfrm xmlns:a="http://schemas.openxmlformats.org/drawingml/2006/main">
-            <a:off x="11001375" y="6315075"/>
-            <a:ext cx="523875" cy="266700"/>
+            <a:off x="609600" y="6315075"/>
+            <a:ext cx="4000500" cy="209550"/>
           </a:xfrm>
           <a:prstGeom xmlns:a="http://schemas.openxmlformats.org/drawingml/2006/main" prst="rect">
             <a:avLst/>
@@ -5578,9 +5779,9 @@
           <a:bodyPr xmlns:a="http://schemas.openxmlformats.org/drawingml/2006/main"/>
           <a:lstStyle xmlns:a="http://schemas.openxmlformats.org/drawingml/2006/main">
             <a:defPPr>
-              <a:defRPr sz="1050" b="0">
-                <a:solidFill>
-                  <a:srgbClr val="526174"/>
+              <a:defRPr sz="975" b="1">
+                <a:solidFill>
+                  <a:srgbClr val="A9E7D7"/>
                 </a:solidFill>
                 <a:latin typeface="Arial"/>
                 <a:ea typeface="Arial"/>
@@ -5590,9 +5791,9 @@
           </a:lstStyle>
           <a:p xmlns:a="http://schemas.openxmlformats.org/drawingml/2006/main">
             <a:pPr>
-              <a:defRPr sz="1050" b="0">
-                <a:solidFill>
-                  <a:srgbClr val="526174"/>
+              <a:defRPr sz="975" b="1">
+                <a:solidFill>
+                  <a:srgbClr val="A9E7D7"/>
                 </a:solidFill>
                 <a:latin typeface="Arial"/>
                 <a:ea typeface="Arial"/>
@@ -5600,9 +5801,76 @@
               </a:defRPr>
             </a:pPr>
             <a:r>
-              <a:rPr sz="1050" b="0">
-                <a:solidFill>
-                  <a:srgbClr val="526174"/>
+              <a:rPr sz="975" b="1">
+                <a:solidFill>
+                  <a:srgbClr val="A9E7D7"/>
+                </a:solidFill>
+                <a:latin typeface="Arial"/>
+                <a:ea typeface="Arial"/>
+                <a:cs typeface="Arial"/>
+              </a:rPr>
+              <a:t>STOCKSENSE AI</a:t>
+            </a:r>
+          </a:p>
+        </p:txBody>
+      </p:sp>
+      <p:sp>
+        <p:nvSpPr>
+          <p:cNvPr id="4" name="">
+            <a:extLst xmlns:a="http://schemas.openxmlformats.org/drawingml/2006/main">
+              <a:ext uri="{FF2B5EF4-FFF2-40B4-BE49-F238E27FC236}">
+                <a16:creationId xmlns:a16="http://schemas.microsoft.com/office/drawing/2014/main" id="{27B6C3C6-7767-4AAF-A7AC-A2775E9ACAE5}"/>
+              </a:ext>
+            </a:extLst>
+          </p:cNvPr>
+          <p:cNvSpPr>
+            <a:spLocks xmlns:a="http://schemas.openxmlformats.org/drawingml/2006/main" noGrp="1"/>
+          </p:cNvSpPr>
+          <p:nvPr/>
+        </p:nvSpPr>
+        <p:spPr>
+          <a:xfrm xmlns:a="http://schemas.openxmlformats.org/drawingml/2006/main">
+            <a:off x="11049000" y="6315075"/>
+            <a:ext cx="666750" cy="209550"/>
+          </a:xfrm>
+          <a:prstGeom xmlns:a="http://schemas.openxmlformats.org/drawingml/2006/main" prst="rect">
+            <a:avLst/>
+          </a:prstGeom>
+          <a:noFill xmlns:a="http://schemas.openxmlformats.org/drawingml/2006/main"/>
+          <a:ln xmlns:a="http://schemas.openxmlformats.org/drawingml/2006/main" w="0">
+            <a:noFill/>
+            <a:prstDash val="solid"/>
+          </a:ln>
+        </p:spPr>
+        <p:txBody>
+          <a:bodyPr xmlns:a="http://schemas.openxmlformats.org/drawingml/2006/main"/>
+          <a:lstStyle xmlns:a="http://schemas.openxmlformats.org/drawingml/2006/main">
+            <a:defPPr>
+              <a:defRPr sz="975" b="0">
+                <a:solidFill>
+                  <a:srgbClr val="A9E7D7"/>
+                </a:solidFill>
+                <a:latin typeface="Arial"/>
+                <a:ea typeface="Arial"/>
+                <a:cs typeface="Arial"/>
+              </a:defRPr>
+            </a:defPPr>
+          </a:lstStyle>
+          <a:p xmlns:a="http://schemas.openxmlformats.org/drawingml/2006/main">
+            <a:pPr>
+              <a:defRPr sz="975" b="0">
+                <a:solidFill>
+                  <a:srgbClr val="A9E7D7"/>
+                </a:solidFill>
+                <a:latin typeface="Arial"/>
+                <a:ea typeface="Arial"/>
+                <a:cs typeface="Arial"/>
+              </a:defRPr>
+            </a:pPr>
+            <a:r>
+              <a:rPr sz="975" b="0">
+                <a:solidFill>
+                  <a:srgbClr val="A9E7D7"/>
                 </a:solidFill>
                 <a:latin typeface="Arial"/>
                 <a:ea typeface="Arial"/>
@@ -5615,10 +5883,10 @@
       </p:sp>
       <p:sp>
         <p:nvSpPr>
-          <p:cNvPr id="4" name="">
-            <a:extLst xmlns:a="http://schemas.openxmlformats.org/drawingml/2006/main">
-              <a:ext uri="{FF2B5EF4-FFF2-40B4-BE49-F238E27FC236}">
-                <a16:creationId xmlns:a16="http://schemas.microsoft.com/office/drawing/2014/main" id="{EA9DB874-760D-4C00-AE13-064C93529A97}"/>
+          <p:cNvPr id="5" name="">
+            <a:extLst xmlns:a="http://schemas.openxmlformats.org/drawingml/2006/main">
+              <a:ext uri="{FF2B5EF4-FFF2-40B4-BE49-F238E27FC236}">
+                <a16:creationId xmlns:a16="http://schemas.microsoft.com/office/drawing/2014/main" id="{49021D98-4074-4666-BE6E-6969B78F23F3}"/>
               </a:ext>
             </a:extLst>
           </p:cNvPr>
@@ -5629,8 +5897,8 @@
         </p:nvSpPr>
         <p:spPr>
           <a:xfrm xmlns:a="http://schemas.openxmlformats.org/drawingml/2006/main">
-            <a:off x="723900" y="1638300"/>
-            <a:ext cx="10477500" cy="714375"/>
+            <a:off x="638175" y="1990725"/>
+            <a:ext cx="4953000" cy="1457325"/>
           </a:xfrm>
           <a:prstGeom xmlns:a="http://schemas.openxmlformats.org/drawingml/2006/main" prst="rect">
             <a:avLst/>
@@ -5645,9 +5913,9 @@
           <a:bodyPr xmlns:a="http://schemas.openxmlformats.org/drawingml/2006/main"/>
           <a:lstStyle xmlns:a="http://schemas.openxmlformats.org/drawingml/2006/main">
             <a:defPPr>
-              <a:defRPr sz="2625" b="1">
-                <a:solidFill>
-                  <a:srgbClr val="0F766E"/>
+              <a:defRPr sz="8400" b="1">
+                <a:solidFill>
+                  <a:srgbClr val="A9E7D7"/>
                 </a:solidFill>
                 <a:latin typeface="Arial"/>
                 <a:ea typeface="Arial"/>
@@ -5657,9 +5925,9 @@
           </a:lstStyle>
           <a:p xmlns:a="http://schemas.openxmlformats.org/drawingml/2006/main">
             <a:pPr>
-              <a:defRPr sz="2625" b="1">
-                <a:solidFill>
-                  <a:srgbClr val="0F766E"/>
+              <a:defRPr sz="8400" b="1">
+                <a:solidFill>
+                  <a:srgbClr val="A9E7D7"/>
                 </a:solidFill>
                 <a:latin typeface="Arial"/>
                 <a:ea typeface="Arial"/>
@@ -5667,25 +5935,25 @@
               </a:defRPr>
             </a:pPr>
             <a:r>
-              <a:rPr sz="2625" b="1">
-                <a:solidFill>
-                  <a:srgbClr val="0F766E"/>
+              <a:rPr sz="8400" b="1">
+                <a:solidFill>
+                  <a:srgbClr val="A9E7D7"/>
                 </a:solidFill>
                 <a:latin typeface="Arial"/>
                 <a:ea typeface="Arial"/>
                 <a:cs typeface="Arial"/>
               </a:rPr>
-              <a:t>52 tests passed on the office PC</a:t>
-            </a:r>
-          </a:p>
-        </p:txBody>
-      </p:sp>
-      <p:sp>
-        <p:nvSpPr>
-          <p:cNvPr id="5" name="">
-            <a:extLst xmlns:a="http://schemas.openxmlformats.org/drawingml/2006/main">
-              <a:ext uri="{FF2B5EF4-FFF2-40B4-BE49-F238E27FC236}">
-                <a16:creationId xmlns:a16="http://schemas.microsoft.com/office/drawing/2014/main" id="{F5076E84-E70D-42C0-BBD6-8FAD5A4858A0}"/>
+              <a:t>52</a:t>
+            </a:r>
+          </a:p>
+        </p:txBody>
+      </p:sp>
+      <p:sp>
+        <p:nvSpPr>
+          <p:cNvPr id="6" name="">
+            <a:extLst xmlns:a="http://schemas.openxmlformats.org/drawingml/2006/main">
+              <a:ext uri="{FF2B5EF4-FFF2-40B4-BE49-F238E27FC236}">
+                <a16:creationId xmlns:a16="http://schemas.microsoft.com/office/drawing/2014/main" id="{2E146629-ADFF-41D1-9BDB-81AC1DEA5A9A}"/>
               </a:ext>
             </a:extLst>
           </p:cNvPr>
@@ -5696,8 +5964,8 @@
         </p:nvSpPr>
         <p:spPr>
           <a:xfrm xmlns:a="http://schemas.openxmlformats.org/drawingml/2006/main">
-            <a:off x="723900" y="2781300"/>
-            <a:ext cx="10477500" cy="666750"/>
+            <a:off x="676275" y="3543300"/>
+            <a:ext cx="6667500" cy="552450"/>
           </a:xfrm>
           <a:prstGeom xmlns:a="http://schemas.openxmlformats.org/drawingml/2006/main" prst="rect">
             <a:avLst/>
@@ -5712,9 +5980,9 @@
           <a:bodyPr xmlns:a="http://schemas.openxmlformats.org/drawingml/2006/main"/>
           <a:lstStyle xmlns:a="http://schemas.openxmlformats.org/drawingml/2006/main">
             <a:defPPr>
-              <a:defRPr sz="2100" b="0">
-                <a:solidFill>
-                  <a:srgbClr val="172B4D"/>
+              <a:defRPr sz="2325" b="0">
+                <a:solidFill>
+                  <a:srgbClr val="FFFFFF"/>
                 </a:solidFill>
                 <a:latin typeface="Arial"/>
                 <a:ea typeface="Arial"/>
@@ -5724,9 +5992,9 @@
           </a:lstStyle>
           <a:p xmlns:a="http://schemas.openxmlformats.org/drawingml/2006/main">
             <a:pPr>
-              <a:defRPr sz="2100" b="0">
-                <a:solidFill>
-                  <a:srgbClr val="172B4D"/>
+              <a:defRPr sz="2325" b="0">
+                <a:solidFill>
+                  <a:srgbClr val="FFFFFF"/>
                 </a:solidFill>
                 <a:latin typeface="Arial"/>
                 <a:ea typeface="Arial"/>
@@ -5734,25 +6002,25 @@
               </a:defRPr>
             </a:pPr>
             <a:r>
-              <a:rPr sz="2100" b="0">
-                <a:solidFill>
-                  <a:srgbClr val="172B4D"/>
+              <a:rPr sz="2325" b="0">
+                <a:solidFill>
+                  <a:srgbClr val="FFFFFF"/>
                 </a:solidFill>
                 <a:latin typeface="Arial"/>
                 <a:ea typeface="Arial"/>
                 <a:cs typeface="Arial"/>
               </a:rPr>
-              <a:t>An earlier setup worked on a second PC.</a:t>
-            </a:r>
-          </a:p>
-        </p:txBody>
-      </p:sp>
-      <p:sp>
-        <p:nvSpPr>
-          <p:cNvPr id="6" name="">
-            <a:extLst xmlns:a="http://schemas.openxmlformats.org/drawingml/2006/main">
-              <a:ext uri="{FF2B5EF4-FFF2-40B4-BE49-F238E27FC236}">
-                <a16:creationId xmlns:a16="http://schemas.microsoft.com/office/drawing/2014/main" id="{9313DE29-CC52-404C-A348-7A635A199C69}"/>
+              <a:t>automated tests passed</a:t>
+            </a:r>
+          </a:p>
+        </p:txBody>
+      </p:sp>
+      <p:sp>
+        <p:nvSpPr>
+          <p:cNvPr id="7" name="">
+            <a:extLst xmlns:a="http://schemas.openxmlformats.org/drawingml/2006/main">
+              <a:ext uri="{FF2B5EF4-FFF2-40B4-BE49-F238E27FC236}">
+                <a16:creationId xmlns:a16="http://schemas.microsoft.com/office/drawing/2014/main" id="{A22D9B58-3FB6-4FD1-BDC2-59DD016EEE33}"/>
               </a:ext>
             </a:extLst>
           </p:cNvPr>
@@ -5763,8 +6031,8 @@
         </p:nvSpPr>
         <p:spPr>
           <a:xfrm xmlns:a="http://schemas.openxmlformats.org/drawingml/2006/main">
-            <a:off x="723900" y="3667125"/>
-            <a:ext cx="10477500" cy="819150"/>
+            <a:off x="657225" y="4714875"/>
+            <a:ext cx="4095750" cy="723900"/>
           </a:xfrm>
           <a:prstGeom xmlns:a="http://schemas.openxmlformats.org/drawingml/2006/main" prst="rect">
             <a:avLst/>
@@ -5779,9 +6047,9 @@
           <a:bodyPr xmlns:a="http://schemas.openxmlformats.org/drawingml/2006/main"/>
           <a:lstStyle xmlns:a="http://schemas.openxmlformats.org/drawingml/2006/main">
             <a:defPPr>
-              <a:defRPr sz="2100" b="0">
-                <a:solidFill>
-                  <a:srgbClr val="172B4D"/>
+              <a:defRPr sz="3675" b="1">
+                <a:solidFill>
+                  <a:srgbClr val="A9E7D7"/>
                 </a:solidFill>
                 <a:latin typeface="Arial"/>
                 <a:ea typeface="Arial"/>
@@ -5791,9 +6059,9 @@
           </a:lstStyle>
           <a:p xmlns:a="http://schemas.openxmlformats.org/drawingml/2006/main">
             <a:pPr>
-              <a:defRPr sz="2100" b="0">
-                <a:solidFill>
-                  <a:srgbClr val="172B4D"/>
+              <a:defRPr sz="3675" b="1">
+                <a:solidFill>
+                  <a:srgbClr val="A9E7D7"/>
                 </a:solidFill>
                 <a:latin typeface="Arial"/>
                 <a:ea typeface="Arial"/>
@@ -5801,25 +6069,25 @@
               </a:defRPr>
             </a:pPr>
             <a:r>
-              <a:rPr sz="2100" b="0">
-                <a:solidFill>
-                  <a:srgbClr val="172B4D"/>
+              <a:rPr sz="3675" b="1">
+                <a:solidFill>
+                  <a:srgbClr val="A9E7D7"/>
                 </a:solidFill>
                 <a:latin typeface="Arial"/>
                 <a:ea typeface="Arial"/>
                 <a:cs typeface="Arial"/>
               </a:rPr>
-              <a:t>Assistant check: 24/25 supported requests; 8/8 unrelated requests rejected.</a:t>
-            </a:r>
-          </a:p>
-        </p:txBody>
-      </p:sp>
-      <p:sp>
-        <p:nvSpPr>
-          <p:cNvPr id="7" name="">
-            <a:extLst xmlns:a="http://schemas.openxmlformats.org/drawingml/2006/main">
-              <a:ext uri="{FF2B5EF4-FFF2-40B4-BE49-F238E27FC236}">
-                <a16:creationId xmlns:a16="http://schemas.microsoft.com/office/drawing/2014/main" id="{46C47B0D-101F-40AB-85B0-D0F099CA1F42}"/>
+              <a:t>24/25</a:t>
+            </a:r>
+          </a:p>
+        </p:txBody>
+      </p:sp>
+      <p:sp>
+        <p:nvSpPr>
+          <p:cNvPr id="8" name="">
+            <a:extLst xmlns:a="http://schemas.openxmlformats.org/drawingml/2006/main">
+              <a:ext uri="{FF2B5EF4-FFF2-40B4-BE49-F238E27FC236}">
+                <a16:creationId xmlns:a16="http://schemas.microsoft.com/office/drawing/2014/main" id="{D059DB48-9C77-459E-9D93-369EC5A4D2FC}"/>
               </a:ext>
             </a:extLst>
           </p:cNvPr>
@@ -5830,8 +6098,8 @@
         </p:nvSpPr>
         <p:spPr>
           <a:xfrm xmlns:a="http://schemas.openxmlformats.org/drawingml/2006/main">
-            <a:off x="723900" y="5048250"/>
-            <a:ext cx="10477500" cy="523875"/>
+            <a:off x="666750" y="5467350"/>
+            <a:ext cx="4762500" cy="476250"/>
           </a:xfrm>
           <a:prstGeom xmlns:a="http://schemas.openxmlformats.org/drawingml/2006/main" prst="rect">
             <a:avLst/>
@@ -5848,7 +6116,7 @@
             <a:defPPr>
               <a:defRPr sz="1800" b="0">
                 <a:solidFill>
-                  <a:srgbClr val="526174"/>
+                  <a:srgbClr val="FFFFFF"/>
                 </a:solidFill>
                 <a:latin typeface="Arial"/>
                 <a:ea typeface="Arial"/>
@@ -5860,7 +6128,7 @@
             <a:pPr>
               <a:defRPr sz="1800" b="0">
                 <a:solidFill>
-                  <a:srgbClr val="526174"/>
+                  <a:srgbClr val="FFFFFF"/>
                 </a:solidFill>
                 <a:latin typeface="Arial"/>
                 <a:ea typeface="Arial"/>
@@ -5870,13 +6138,147 @@
             <a:r>
               <a:rPr sz="1800" b="0">
                 <a:solidFill>
-                  <a:srgbClr val="526174"/>
+                  <a:srgbClr val="FFFFFF"/>
                 </a:solidFill>
                 <a:latin typeface="Arial"/>
                 <a:ea typeface="Arial"/>
                 <a:cs typeface="Arial"/>
               </a:rPr>
-              <a:t>Human usability results are still needed.</a:t>
+              <a:t>supported requests recognised</a:t>
+            </a:r>
+          </a:p>
+        </p:txBody>
+      </p:sp>
+      <p:sp>
+        <p:nvSpPr>
+          <p:cNvPr id="9" name="">
+            <a:extLst xmlns:a="http://schemas.openxmlformats.org/drawingml/2006/main">
+              <a:ext uri="{FF2B5EF4-FFF2-40B4-BE49-F238E27FC236}">
+                <a16:creationId xmlns:a16="http://schemas.microsoft.com/office/drawing/2014/main" id="{471B8564-07E4-4B09-BE6B-347CE8091483}"/>
+              </a:ext>
+            </a:extLst>
+          </p:cNvPr>
+          <p:cNvSpPr>
+            <a:spLocks xmlns:a="http://schemas.openxmlformats.org/drawingml/2006/main" noGrp="1"/>
+          </p:cNvSpPr>
+          <p:nvPr/>
+        </p:nvSpPr>
+        <p:spPr>
+          <a:xfrm xmlns:a="http://schemas.openxmlformats.org/drawingml/2006/main">
+            <a:off x="6696075" y="4714875"/>
+            <a:ext cx="2857500" cy="723900"/>
+          </a:xfrm>
+          <a:prstGeom xmlns:a="http://schemas.openxmlformats.org/drawingml/2006/main" prst="rect">
+            <a:avLst/>
+          </a:prstGeom>
+          <a:noFill xmlns:a="http://schemas.openxmlformats.org/drawingml/2006/main"/>
+          <a:ln xmlns:a="http://schemas.openxmlformats.org/drawingml/2006/main" w="0">
+            <a:noFill/>
+            <a:prstDash val="solid"/>
+          </a:ln>
+        </p:spPr>
+        <p:txBody>
+          <a:bodyPr xmlns:a="http://schemas.openxmlformats.org/drawingml/2006/main"/>
+          <a:lstStyle xmlns:a="http://schemas.openxmlformats.org/drawingml/2006/main">
+            <a:defPPr>
+              <a:defRPr sz="3675" b="1">
+                <a:solidFill>
+                  <a:srgbClr val="A9E7D7"/>
+                </a:solidFill>
+                <a:latin typeface="Arial"/>
+                <a:ea typeface="Arial"/>
+                <a:cs typeface="Arial"/>
+              </a:defRPr>
+            </a:defPPr>
+          </a:lstStyle>
+          <a:p xmlns:a="http://schemas.openxmlformats.org/drawingml/2006/main">
+            <a:pPr>
+              <a:defRPr sz="3675" b="1">
+                <a:solidFill>
+                  <a:srgbClr val="A9E7D7"/>
+                </a:solidFill>
+                <a:latin typeface="Arial"/>
+                <a:ea typeface="Arial"/>
+                <a:cs typeface="Arial"/>
+              </a:defRPr>
+            </a:pPr>
+            <a:r>
+              <a:rPr sz="3675" b="1">
+                <a:solidFill>
+                  <a:srgbClr val="A9E7D7"/>
+                </a:solidFill>
+                <a:latin typeface="Arial"/>
+                <a:ea typeface="Arial"/>
+                <a:cs typeface="Arial"/>
+              </a:rPr>
+              <a:t>8/8</a:t>
+            </a:r>
+          </a:p>
+        </p:txBody>
+      </p:sp>
+      <p:sp>
+        <p:nvSpPr>
+          <p:cNvPr id="10" name="">
+            <a:extLst xmlns:a="http://schemas.openxmlformats.org/drawingml/2006/main">
+              <a:ext uri="{FF2B5EF4-FFF2-40B4-BE49-F238E27FC236}">
+                <a16:creationId xmlns:a16="http://schemas.microsoft.com/office/drawing/2014/main" id="{8379262F-69E8-45AB-A89E-BBB27AD1CC95}"/>
+              </a:ext>
+            </a:extLst>
+          </p:cNvPr>
+          <p:cNvSpPr>
+            <a:spLocks xmlns:a="http://schemas.openxmlformats.org/drawingml/2006/main" noGrp="1"/>
+          </p:cNvSpPr>
+          <p:nvPr/>
+        </p:nvSpPr>
+        <p:spPr>
+          <a:xfrm xmlns:a="http://schemas.openxmlformats.org/drawingml/2006/main">
+            <a:off x="6715125" y="5467350"/>
+            <a:ext cx="4476750" cy="476250"/>
+          </a:xfrm>
+          <a:prstGeom xmlns:a="http://schemas.openxmlformats.org/drawingml/2006/main" prst="rect">
+            <a:avLst/>
+          </a:prstGeom>
+          <a:noFill xmlns:a="http://schemas.openxmlformats.org/drawingml/2006/main"/>
+          <a:ln xmlns:a="http://schemas.openxmlformats.org/drawingml/2006/main" w="0">
+            <a:noFill/>
+            <a:prstDash val="solid"/>
+          </a:ln>
+        </p:spPr>
+        <p:txBody>
+          <a:bodyPr xmlns:a="http://schemas.openxmlformats.org/drawingml/2006/main"/>
+          <a:lstStyle xmlns:a="http://schemas.openxmlformats.org/drawingml/2006/main">
+            <a:defPPr>
+              <a:defRPr sz="1800" b="0">
+                <a:solidFill>
+                  <a:srgbClr val="FFFFFF"/>
+                </a:solidFill>
+                <a:latin typeface="Arial"/>
+                <a:ea typeface="Arial"/>
+                <a:cs typeface="Arial"/>
+              </a:defRPr>
+            </a:defPPr>
+          </a:lstStyle>
+          <a:p xmlns:a="http://schemas.openxmlformats.org/drawingml/2006/main">
+            <a:pPr>
+              <a:defRPr sz="1800" b="0">
+                <a:solidFill>
+                  <a:srgbClr val="FFFFFF"/>
+                </a:solidFill>
+                <a:latin typeface="Arial"/>
+                <a:ea typeface="Arial"/>
+                <a:cs typeface="Arial"/>
+              </a:defRPr>
+            </a:pPr>
+            <a:r>
+              <a:rPr sz="1800" b="0">
+                <a:solidFill>
+                  <a:srgbClr val="FFFFFF"/>
+                </a:solidFill>
+                <a:latin typeface="Arial"/>
+                <a:ea typeface="Arial"/>
+                <a:cs typeface="Arial"/>
+              </a:rPr>
+              <a:t>unrelated requests rejected</a:t>
             </a:r>
           </a:p>
         </p:txBody>
@@ -5884,7 +6286,7 @@
     </p:spTree>
     <p:extLst>
       <p:ext uri="{BB962C8B-B14F-4D97-AF65-F5344CB8AC3E}">
-        <p14:creationId xmlns:p14="http://schemas.microsoft.com/office/powerpoint/2010/main" val="1237786223"/>
+        <p14:creationId xmlns:p14="http://schemas.microsoft.com/office/powerpoint/2010/main" val="71059300"/>
       </p:ext>
     </p:extLst>
   </p:cSld>
@@ -5897,7 +6299,7 @@
     <p:bg>
       <p:bgPr>
         <a:solidFill xmlns:a="http://schemas.openxmlformats.org/drawingml/2006/main">
-          <a:srgbClr val="FFFFFF"/>
+          <a:srgbClr val="F7F5F0"/>
         </a:solidFill>
       </p:bgPr>
     </p:bg>
@@ -5912,10 +6314,10 @@
       </p:grpSpPr>
       <p:sp>
         <p:nvSpPr>
-          <p:cNvPr id="9" name="">
-            <a:extLst xmlns:a="http://schemas.openxmlformats.org/drawingml/2006/main">
-              <a:ext uri="{FF2B5EF4-FFF2-40B4-BE49-F238E27FC236}">
-                <a16:creationId xmlns:a16="http://schemas.microsoft.com/office/drawing/2014/main" id="{4428ED21-D8DD-4B34-A9B6-13A674A69582}"/>
+          <p:cNvPr id="10" name="">
+            <a:extLst xmlns:a="http://schemas.openxmlformats.org/drawingml/2006/main">
+              <a:ext uri="{FF2B5EF4-FFF2-40B4-BE49-F238E27FC236}">
+                <a16:creationId xmlns:a16="http://schemas.microsoft.com/office/drawing/2014/main" id="{10A9D532-3B74-4773-8A40-4FD385D507E3}"/>
               </a:ext>
             </a:extLst>
           </p:cNvPr>
@@ -5926,8 +6328,8 @@
         </p:nvSpPr>
         <p:spPr>
           <a:xfrm xmlns:a="http://schemas.openxmlformats.org/drawingml/2006/main">
-            <a:off x="685800" y="476250"/>
-            <a:ext cx="10820400" cy="857250"/>
+            <a:off x="609600" y="400050"/>
+            <a:ext cx="5715000" cy="285750"/>
           </a:xfrm>
           <a:prstGeom xmlns:a="http://schemas.openxmlformats.org/drawingml/2006/main" prst="rect">
             <a:avLst/>
@@ -5942,9 +6344,9 @@
           <a:bodyPr xmlns:a="http://schemas.openxmlformats.org/drawingml/2006/main"/>
           <a:lstStyle xmlns:a="http://schemas.openxmlformats.org/drawingml/2006/main">
             <a:defPPr>
-              <a:defRPr sz="3150" b="1">
-                <a:solidFill>
-                  <a:srgbClr val="172B4D"/>
+              <a:defRPr sz="1200" b="1">
+                <a:solidFill>
+                  <a:srgbClr val="087E79"/>
                 </a:solidFill>
                 <a:latin typeface="Arial"/>
                 <a:ea typeface="Arial"/>
@@ -5954,9 +6356,9 @@
           </a:lstStyle>
           <a:p xmlns:a="http://schemas.openxmlformats.org/drawingml/2006/main">
             <a:pPr>
-              <a:defRPr sz="3150" b="1">
-                <a:solidFill>
-                  <a:srgbClr val="172B4D"/>
+              <a:defRPr sz="1200" b="1">
+                <a:solidFill>
+                  <a:srgbClr val="087E79"/>
                 </a:solidFill>
                 <a:latin typeface="Arial"/>
                 <a:ea typeface="Arial"/>
@@ -5964,15 +6366,15 @@
               </a:defRPr>
             </a:pPr>
             <a:r>
-              <a:rPr sz="3150" b="1">
-                <a:solidFill>
-                  <a:srgbClr val="172B4D"/>
+              <a:rPr sz="1200" b="1">
+                <a:solidFill>
+                  <a:srgbClr val="087E79"/>
                 </a:solidFill>
                 <a:latin typeface="Arial"/>
                 <a:ea typeface="Arial"/>
                 <a:cs typeface="Arial"/>
               </a:rPr>
-              <a:t>Live application demonstration</a:t>
+              <a:t>DEMONSTRATION</a:t>
             </a:r>
           </a:p>
         </p:txBody>
@@ -5982,7 +6384,7 @@
           <p:cNvPr id="2" name="">
             <a:extLst xmlns:a="http://schemas.openxmlformats.org/drawingml/2006/main">
               <a:ext uri="{FF2B5EF4-FFF2-40B4-BE49-F238E27FC236}">
-                <a16:creationId xmlns:a16="http://schemas.microsoft.com/office/drawing/2014/main" id="{72304217-2C8F-44B6-BCB8-14F42BE5A258}"/>
+                <a16:creationId xmlns:a16="http://schemas.microsoft.com/office/drawing/2014/main" id="{F79DCDA6-8640-43DB-AD5E-A1661E35EB50}"/>
               </a:ext>
             </a:extLst>
           </p:cNvPr>
@@ -5993,8 +6395,8 @@
         </p:nvSpPr>
         <p:spPr>
           <a:xfrm xmlns:a="http://schemas.openxmlformats.org/drawingml/2006/main">
-            <a:off x="685800" y="6315075"/>
-            <a:ext cx="6096000" cy="266700"/>
+            <a:off x="609600" y="876300"/>
+            <a:ext cx="10934700" cy="914400"/>
           </a:xfrm>
           <a:prstGeom xmlns:a="http://schemas.openxmlformats.org/drawingml/2006/main" prst="rect">
             <a:avLst/>
@@ -6009,9 +6411,9 @@
           <a:bodyPr xmlns:a="http://schemas.openxmlformats.org/drawingml/2006/main"/>
           <a:lstStyle xmlns:a="http://schemas.openxmlformats.org/drawingml/2006/main">
             <a:defPPr>
-              <a:defRPr sz="1050" b="0">
-                <a:solidFill>
-                  <a:srgbClr val="526174"/>
+              <a:defRPr sz="3300" b="1">
+                <a:solidFill>
+                  <a:srgbClr val="18324A"/>
                 </a:solidFill>
                 <a:latin typeface="Arial"/>
                 <a:ea typeface="Arial"/>
@@ -6021,9 +6423,9 @@
           </a:lstStyle>
           <a:p xmlns:a="http://schemas.openxmlformats.org/drawingml/2006/main">
             <a:pPr>
-              <a:defRPr sz="1050" b="0">
-                <a:solidFill>
-                  <a:srgbClr val="526174"/>
+              <a:defRPr sz="3300" b="1">
+                <a:solidFill>
+                  <a:srgbClr val="18324A"/>
                 </a:solidFill>
                 <a:latin typeface="Arial"/>
                 <a:ea typeface="Arial"/>
@@ -6031,15 +6433,15 @@
               </a:defRPr>
             </a:pPr>
             <a:r>
-              <a:rPr sz="1050" b="0">
-                <a:solidFill>
-                  <a:srgbClr val="526174"/>
+              <a:rPr sz="3300" b="1">
+                <a:solidFill>
+                  <a:srgbClr val="18324A"/>
                 </a:solidFill>
                 <a:latin typeface="Arial"/>
                 <a:ea typeface="Arial"/>
                 <a:cs typeface="Arial"/>
               </a:rPr>
-              <a:t>VUT AI SOLUTIONS  /  AIBUY3A</a:t>
+              <a:t>Live prototype walkthrough</a:t>
             </a:r>
           </a:p>
         </p:txBody>
@@ -6049,7 +6451,7 @@
           <p:cNvPr id="3" name="">
             <a:extLst xmlns:a="http://schemas.openxmlformats.org/drawingml/2006/main">
               <a:ext uri="{FF2B5EF4-FFF2-40B4-BE49-F238E27FC236}">
-                <a16:creationId xmlns:a16="http://schemas.microsoft.com/office/drawing/2014/main" id="{39B8153E-4760-496E-8073-9D23BFFDD17F}"/>
+                <a16:creationId xmlns:a16="http://schemas.microsoft.com/office/drawing/2014/main" id="{2CF9BBD0-DEE6-40A7-83FA-00CFA6F06B94}"/>
               </a:ext>
             </a:extLst>
           </p:cNvPr>
@@ -6060,8 +6462,8 @@
         </p:nvSpPr>
         <p:spPr>
           <a:xfrm xmlns:a="http://schemas.openxmlformats.org/drawingml/2006/main">
-            <a:off x="11001375" y="6315075"/>
-            <a:ext cx="523875" cy="266700"/>
+            <a:off x="609600" y="6315075"/>
+            <a:ext cx="4000500" cy="209550"/>
           </a:xfrm>
           <a:prstGeom xmlns:a="http://schemas.openxmlformats.org/drawingml/2006/main" prst="rect">
             <a:avLst/>
@@ -6076,9 +6478,9 @@
           <a:bodyPr xmlns:a="http://schemas.openxmlformats.org/drawingml/2006/main"/>
           <a:lstStyle xmlns:a="http://schemas.openxmlformats.org/drawingml/2006/main">
             <a:defPPr>
-              <a:defRPr sz="1050" b="0">
-                <a:solidFill>
-                  <a:srgbClr val="526174"/>
+              <a:defRPr sz="975" b="1">
+                <a:solidFill>
+                  <a:srgbClr val="536A78"/>
                 </a:solidFill>
                 <a:latin typeface="Arial"/>
                 <a:ea typeface="Arial"/>
@@ -6088,9 +6490,9 @@
           </a:lstStyle>
           <a:p xmlns:a="http://schemas.openxmlformats.org/drawingml/2006/main">
             <a:pPr>
-              <a:defRPr sz="1050" b="0">
-                <a:solidFill>
-                  <a:srgbClr val="526174"/>
+              <a:defRPr sz="975" b="1">
+                <a:solidFill>
+                  <a:srgbClr val="536A78"/>
                 </a:solidFill>
                 <a:latin typeface="Arial"/>
                 <a:ea typeface="Arial"/>
@@ -6098,9 +6500,76 @@
               </a:defRPr>
             </a:pPr>
             <a:r>
-              <a:rPr sz="1050" b="0">
-                <a:solidFill>
-                  <a:srgbClr val="526174"/>
+              <a:rPr sz="975" b="1">
+                <a:solidFill>
+                  <a:srgbClr val="536A78"/>
+                </a:solidFill>
+                <a:latin typeface="Arial"/>
+                <a:ea typeface="Arial"/>
+                <a:cs typeface="Arial"/>
+              </a:rPr>
+              <a:t>STOCKSENSE AI</a:t>
+            </a:r>
+          </a:p>
+        </p:txBody>
+      </p:sp>
+      <p:sp>
+        <p:nvSpPr>
+          <p:cNvPr id="4" name="">
+            <a:extLst xmlns:a="http://schemas.openxmlformats.org/drawingml/2006/main">
+              <a:ext uri="{FF2B5EF4-FFF2-40B4-BE49-F238E27FC236}">
+                <a16:creationId xmlns:a16="http://schemas.microsoft.com/office/drawing/2014/main" id="{A4601726-F3C7-4ED8-87E1-7F9EFA7CF745}"/>
+              </a:ext>
+            </a:extLst>
+          </p:cNvPr>
+          <p:cNvSpPr>
+            <a:spLocks xmlns:a="http://schemas.openxmlformats.org/drawingml/2006/main" noGrp="1"/>
+          </p:cNvSpPr>
+          <p:nvPr/>
+        </p:nvSpPr>
+        <p:spPr>
+          <a:xfrm xmlns:a="http://schemas.openxmlformats.org/drawingml/2006/main">
+            <a:off x="11049000" y="6315075"/>
+            <a:ext cx="666750" cy="209550"/>
+          </a:xfrm>
+          <a:prstGeom xmlns:a="http://schemas.openxmlformats.org/drawingml/2006/main" prst="rect">
+            <a:avLst/>
+          </a:prstGeom>
+          <a:noFill xmlns:a="http://schemas.openxmlformats.org/drawingml/2006/main"/>
+          <a:ln xmlns:a="http://schemas.openxmlformats.org/drawingml/2006/main" w="0">
+            <a:noFill/>
+            <a:prstDash val="solid"/>
+          </a:ln>
+        </p:spPr>
+        <p:txBody>
+          <a:bodyPr xmlns:a="http://schemas.openxmlformats.org/drawingml/2006/main"/>
+          <a:lstStyle xmlns:a="http://schemas.openxmlformats.org/drawingml/2006/main">
+            <a:defPPr>
+              <a:defRPr sz="975" b="0">
+                <a:solidFill>
+                  <a:srgbClr val="536A78"/>
+                </a:solidFill>
+                <a:latin typeface="Arial"/>
+                <a:ea typeface="Arial"/>
+                <a:cs typeface="Arial"/>
+              </a:defRPr>
+            </a:defPPr>
+          </a:lstStyle>
+          <a:p xmlns:a="http://schemas.openxmlformats.org/drawingml/2006/main">
+            <a:pPr>
+              <a:defRPr sz="975" b="0">
+                <a:solidFill>
+                  <a:srgbClr val="536A78"/>
+                </a:solidFill>
+                <a:latin typeface="Arial"/>
+                <a:ea typeface="Arial"/>
+                <a:cs typeface="Arial"/>
+              </a:defRPr>
+            </a:pPr>
+            <a:r>
+              <a:rPr sz="975" b="0">
+                <a:solidFill>
+                  <a:srgbClr val="536A78"/>
                 </a:solidFill>
                 <a:latin typeface="Arial"/>
                 <a:ea typeface="Arial"/>
@@ -6113,10 +6582,10 @@
       </p:sp>
       <p:pic>
         <p:nvPicPr>
-          <p:cNvPr id="4" name="">
-            <a:extLst xmlns:a="http://schemas.openxmlformats.org/drawingml/2006/main">
-              <a:ext uri="{FF2B5EF4-FFF2-40B4-BE49-F238E27FC236}">
-                <a16:creationId xmlns:a16="http://schemas.microsoft.com/office/drawing/2014/main" id="{4D3BC49E-4598-466D-A890-1229B0FC7D3F}"/>
+          <p:cNvPr id="5" name="">
+            <a:extLst xmlns:a="http://schemas.openxmlformats.org/drawingml/2006/main">
+              <a:ext uri="{FF2B5EF4-FFF2-40B4-BE49-F238E27FC236}">
+                <a16:creationId xmlns:a16="http://schemas.microsoft.com/office/drawing/2014/main" id="{0BFF1DD5-E81A-4A16-AC50-BD254967427E}"/>
               </a:ext>
             </a:extLst>
           </p:cNvPr>
@@ -6126,13 +6595,13 @@
           <p:nvPr/>
         </p:nvPicPr>
         <p:blipFill>
-          <a:blip xmlns:r="http://schemas.openxmlformats.org/officeDocument/2006/relationships" xmlns:a="http://schemas.openxmlformats.org/drawingml/2006/main" r:embed="R4570671089f14424"/>
+          <a:blip xmlns:r="http://schemas.openxmlformats.org/officeDocument/2006/relationships" xmlns:a="http://schemas.openxmlformats.org/drawingml/2006/main" r:embed="Rbdcbea0ea4134a94"/>
           <a:stretch xmlns:a="http://schemas.openxmlformats.org/drawingml/2006/main"/>
         </p:blipFill>
         <p:spPr>
           <a:xfrm xmlns:a="http://schemas.openxmlformats.org/drawingml/2006/main">
-            <a:off x="1199717" y="1476375"/>
-            <a:ext cx="5611091" cy="4286250"/>
+            <a:off x="1911927" y="1800225"/>
+            <a:ext cx="5548745" cy="4238625"/>
           </a:xfrm>
           <a:prstGeom xmlns:a="http://schemas.openxmlformats.org/drawingml/2006/main" prst="rect">
             <a:avLst/>
@@ -6141,10 +6610,10 @@
       </p:pic>
       <p:sp>
         <p:nvSpPr>
-          <p:cNvPr id="5" name="">
-            <a:extLst xmlns:a="http://schemas.openxmlformats.org/drawingml/2006/main">
-              <a:ext uri="{FF2B5EF4-FFF2-40B4-BE49-F238E27FC236}">
-                <a16:creationId xmlns:a16="http://schemas.microsoft.com/office/drawing/2014/main" id="{2BD5A1D6-401B-4287-882B-157937B43083}"/>
+          <p:cNvPr id="6" name="">
+            <a:extLst xmlns:a="http://schemas.openxmlformats.org/drawingml/2006/main">
+              <a:ext uri="{FF2B5EF4-FFF2-40B4-BE49-F238E27FC236}">
+                <a16:creationId xmlns:a16="http://schemas.microsoft.com/office/drawing/2014/main" id="{CD4CA056-6ED1-4A29-A158-A68CA959633E}"/>
               </a:ext>
             </a:extLst>
           </p:cNvPr>
@@ -6155,8 +6624,8 @@
         </p:nvSpPr>
         <p:spPr>
           <a:xfrm xmlns:a="http://schemas.openxmlformats.org/drawingml/2006/main">
-            <a:off x="7591425" y="1762125"/>
-            <a:ext cx="3810000" cy="762000"/>
+            <a:off x="8982075" y="2200275"/>
+            <a:ext cx="2695575" cy="542925"/>
           </a:xfrm>
           <a:prstGeom xmlns:a="http://schemas.openxmlformats.org/drawingml/2006/main" prst="rect">
             <a:avLst/>
@@ -6171,9 +6640,9 @@
           <a:bodyPr xmlns:a="http://schemas.openxmlformats.org/drawingml/2006/main"/>
           <a:lstStyle xmlns:a="http://schemas.openxmlformats.org/drawingml/2006/main">
             <a:defPPr>
-              <a:defRPr sz="1875" b="0">
-                <a:solidFill>
-                  <a:srgbClr val="172B4D"/>
+              <a:defRPr sz="1800" b="1">
+                <a:solidFill>
+                  <a:srgbClr val="18324A"/>
                 </a:solidFill>
                 <a:latin typeface="Arial"/>
                 <a:ea typeface="Arial"/>
@@ -6183,9 +6652,9 @@
           </a:lstStyle>
           <a:p xmlns:a="http://schemas.openxmlformats.org/drawingml/2006/main">
             <a:pPr>
-              <a:defRPr sz="1875" b="0">
-                <a:solidFill>
-                  <a:srgbClr val="172B4D"/>
+              <a:defRPr sz="1800" b="1">
+                <a:solidFill>
+                  <a:srgbClr val="18324A"/>
                 </a:solidFill>
                 <a:latin typeface="Arial"/>
                 <a:ea typeface="Arial"/>
@@ -6193,25 +6662,25 @@
               </a:defRPr>
             </a:pPr>
             <a:r>
-              <a:rPr sz="1875" b="0">
-                <a:solidFill>
-                  <a:srgbClr val="172B4D"/>
+              <a:rPr sz="1800" b="1">
+                <a:solidFill>
+                  <a:srgbClr val="18324A"/>
                 </a:solidFill>
                 <a:latin typeface="Arial"/>
                 <a:ea typeface="Arial"/>
                 <a:cs typeface="Arial"/>
               </a:rPr>
-              <a:t>Select Product 1</a:t>
-            </a:r>
-          </a:p>
-        </p:txBody>
-      </p:sp>
-      <p:sp>
-        <p:nvSpPr>
-          <p:cNvPr id="6" name="">
-            <a:extLst xmlns:a="http://schemas.openxmlformats.org/drawingml/2006/main">
-              <a:ext uri="{FF2B5EF4-FFF2-40B4-BE49-F238E27FC236}">
-                <a16:creationId xmlns:a16="http://schemas.microsoft.com/office/drawing/2014/main" id="{A8165A8E-055E-47AC-832E-772E4C882DDD}"/>
+              <a:t>01  Select a product</a:t>
+            </a:r>
+          </a:p>
+        </p:txBody>
+      </p:sp>
+      <p:sp>
+        <p:nvSpPr>
+          <p:cNvPr id="7" name="">
+            <a:extLst xmlns:a="http://schemas.openxmlformats.org/drawingml/2006/main">
+              <a:ext uri="{FF2B5EF4-FFF2-40B4-BE49-F238E27FC236}">
+                <a16:creationId xmlns:a16="http://schemas.microsoft.com/office/drawing/2014/main" id="{A22FB8EA-F208-4395-A371-76D92905557E}"/>
               </a:ext>
             </a:extLst>
           </p:cNvPr>
@@ -6222,8 +6691,8 @@
         </p:nvSpPr>
         <p:spPr>
           <a:xfrm xmlns:a="http://schemas.openxmlformats.org/drawingml/2006/main">
-            <a:off x="7591425" y="2600325"/>
-            <a:ext cx="3810000" cy="762000"/>
+            <a:off x="8982075" y="3048000"/>
+            <a:ext cx="2695575" cy="542925"/>
           </a:xfrm>
           <a:prstGeom xmlns:a="http://schemas.openxmlformats.org/drawingml/2006/main" prst="rect">
             <a:avLst/>
@@ -6238,9 +6707,9 @@
           <a:bodyPr xmlns:a="http://schemas.openxmlformats.org/drawingml/2006/main"/>
           <a:lstStyle xmlns:a="http://schemas.openxmlformats.org/drawingml/2006/main">
             <a:defPPr>
-              <a:defRPr sz="1875" b="0">
-                <a:solidFill>
-                  <a:srgbClr val="172B4D"/>
+              <a:defRPr sz="1800" b="1">
+                <a:solidFill>
+                  <a:srgbClr val="18324A"/>
                 </a:solidFill>
                 <a:latin typeface="Arial"/>
                 <a:ea typeface="Arial"/>
@@ -6250,9 +6719,9 @@
           </a:lstStyle>
           <a:p xmlns:a="http://schemas.openxmlformats.org/drawingml/2006/main">
             <a:pPr>
-              <a:defRPr sz="1875" b="0">
-                <a:solidFill>
-                  <a:srgbClr val="172B4D"/>
+              <a:defRPr sz="1800" b="1">
+                <a:solidFill>
+                  <a:srgbClr val="18324A"/>
                 </a:solidFill>
                 <a:latin typeface="Arial"/>
                 <a:ea typeface="Arial"/>
@@ -6260,25 +6729,25 @@
               </a:defRPr>
             </a:pPr>
             <a:r>
-              <a:rPr sz="1875" b="0">
-                <a:solidFill>
-                  <a:srgbClr val="172B4D"/>
+              <a:rPr sz="1800" b="1">
+                <a:solidFill>
+                  <a:srgbClr val="18324A"/>
                 </a:solidFill>
                 <a:latin typeface="Arial"/>
                 <a:ea typeface="Arial"/>
                 <a:cs typeface="Arial"/>
               </a:rPr>
-              <a:t>Show seven dated estimates</a:t>
-            </a:r>
-          </a:p>
-        </p:txBody>
-      </p:sp>
-      <p:sp>
-        <p:nvSpPr>
-          <p:cNvPr id="7" name="">
-            <a:extLst xmlns:a="http://schemas.openxmlformats.org/drawingml/2006/main">
-              <a:ext uri="{FF2B5EF4-FFF2-40B4-BE49-F238E27FC236}">
-                <a16:creationId xmlns:a16="http://schemas.microsoft.com/office/drawing/2014/main" id="{8C5F3D27-CC1A-4AFF-BA2D-076BF62F29AE}"/>
+              <a:t>02  View seven days</a:t>
+            </a:r>
+          </a:p>
+        </p:txBody>
+      </p:sp>
+      <p:sp>
+        <p:nvSpPr>
+          <p:cNvPr id="8" name="">
+            <a:extLst xmlns:a="http://schemas.openxmlformats.org/drawingml/2006/main">
+              <a:ext uri="{FF2B5EF4-FFF2-40B4-BE49-F238E27FC236}">
+                <a16:creationId xmlns:a16="http://schemas.microsoft.com/office/drawing/2014/main" id="{AACF5239-FD7F-480E-B858-66D51A2B0245}"/>
               </a:ext>
             </a:extLst>
           </p:cNvPr>
@@ -6289,8 +6758,8 @@
         </p:nvSpPr>
         <p:spPr>
           <a:xfrm xmlns:a="http://schemas.openxmlformats.org/drawingml/2006/main">
-            <a:off x="7591425" y="3438525"/>
-            <a:ext cx="3810000" cy="762000"/>
+            <a:off x="8982075" y="3895725"/>
+            <a:ext cx="2695575" cy="542925"/>
           </a:xfrm>
           <a:prstGeom xmlns:a="http://schemas.openxmlformats.org/drawingml/2006/main" prst="rect">
             <a:avLst/>
@@ -6305,9 +6774,9 @@
           <a:bodyPr xmlns:a="http://schemas.openxmlformats.org/drawingml/2006/main"/>
           <a:lstStyle xmlns:a="http://schemas.openxmlformats.org/drawingml/2006/main">
             <a:defPPr>
-              <a:defRPr sz="1875" b="0">
-                <a:solidFill>
-                  <a:srgbClr val="172B4D"/>
+              <a:defRPr sz="1800" b="1">
+                <a:solidFill>
+                  <a:srgbClr val="18324A"/>
                 </a:solidFill>
                 <a:latin typeface="Arial"/>
                 <a:ea typeface="Arial"/>
@@ -6317,9 +6786,9 @@
           </a:lstStyle>
           <a:p xmlns:a="http://schemas.openxmlformats.org/drawingml/2006/main">
             <a:pPr>
-              <a:defRPr sz="1875" b="0">
-                <a:solidFill>
-                  <a:srgbClr val="172B4D"/>
+              <a:defRPr sz="1800" b="1">
+                <a:solidFill>
+                  <a:srgbClr val="18324A"/>
                 </a:solidFill>
                 <a:latin typeface="Arial"/>
                 <a:ea typeface="Arial"/>
@@ -6327,25 +6796,25 @@
               </a:defRPr>
             </a:pPr>
             <a:r>
-              <a:rPr sz="1875" b="0">
-                <a:solidFill>
-                  <a:srgbClr val="172B4D"/>
+              <a:rPr sz="1800" b="1">
+                <a:solidFill>
+                  <a:srgbClr val="18324A"/>
                 </a:solidFill>
                 <a:latin typeface="Arial"/>
                 <a:ea typeface="Arial"/>
                 <a:cs typeface="Arial"/>
               </a:rPr>
-              <a:t>Calculate the 38-unit example</a:t>
-            </a:r>
-          </a:p>
-        </p:txBody>
-      </p:sp>
-      <p:sp>
-        <p:nvSpPr>
-          <p:cNvPr id="8" name="">
-            <a:extLst xmlns:a="http://schemas.openxmlformats.org/drawingml/2006/main">
-              <a:ext uri="{FF2B5EF4-FFF2-40B4-BE49-F238E27FC236}">
-                <a16:creationId xmlns:a16="http://schemas.microsoft.com/office/drawing/2014/main" id="{BAE000A1-0FB5-4072-AE09-69B75E18E8F2}"/>
+              <a:t>03  Enter stock</a:t>
+            </a:r>
+          </a:p>
+        </p:txBody>
+      </p:sp>
+      <p:sp>
+        <p:nvSpPr>
+          <p:cNvPr id="9" name="">
+            <a:extLst xmlns:a="http://schemas.openxmlformats.org/drawingml/2006/main">
+              <a:ext uri="{FF2B5EF4-FFF2-40B4-BE49-F238E27FC236}">
+                <a16:creationId xmlns:a16="http://schemas.microsoft.com/office/drawing/2014/main" id="{FA7EED4A-96CA-481A-9DE9-CC5A6C1CEE3C}"/>
               </a:ext>
             </a:extLst>
           </p:cNvPr>
@@ -6356,8 +6825,8 @@
         </p:nvSpPr>
         <p:spPr>
           <a:xfrm xmlns:a="http://schemas.openxmlformats.org/drawingml/2006/main">
-            <a:off x="7591425" y="4276725"/>
-            <a:ext cx="3810000" cy="762000"/>
+            <a:off x="8982075" y="4743450"/>
+            <a:ext cx="2695575" cy="542925"/>
           </a:xfrm>
           <a:prstGeom xmlns:a="http://schemas.openxmlformats.org/drawingml/2006/main" prst="rect">
             <a:avLst/>
@@ -6372,9 +6841,9 @@
           <a:bodyPr xmlns:a="http://schemas.openxmlformats.org/drawingml/2006/main"/>
           <a:lstStyle xmlns:a="http://schemas.openxmlformats.org/drawingml/2006/main">
             <a:defPPr>
-              <a:defRPr sz="1875" b="0">
-                <a:solidFill>
-                  <a:srgbClr val="172B4D"/>
+              <a:defRPr sz="1800" b="1">
+                <a:solidFill>
+                  <a:srgbClr val="18324A"/>
                 </a:solidFill>
                 <a:latin typeface="Arial"/>
                 <a:ea typeface="Arial"/>
@@ -6384,9 +6853,9 @@
           </a:lstStyle>
           <a:p xmlns:a="http://schemas.openxmlformats.org/drawingml/2006/main">
             <a:pPr>
-              <a:defRPr sz="1875" b="0">
-                <a:solidFill>
-                  <a:srgbClr val="172B4D"/>
+              <a:defRPr sz="1800" b="1">
+                <a:solidFill>
+                  <a:srgbClr val="18324A"/>
                 </a:solidFill>
                 <a:latin typeface="Arial"/>
                 <a:ea typeface="Arial"/>
@@ -6394,15 +6863,15 @@
               </a:defRPr>
             </a:pPr>
             <a:r>
-              <a:rPr sz="1875" b="0">
-                <a:solidFill>
-                  <a:srgbClr val="172B4D"/>
+              <a:rPr sz="1800" b="1">
+                <a:solidFill>
+                  <a:srgbClr val="18324A"/>
                 </a:solidFill>
                 <a:latin typeface="Arial"/>
                 <a:ea typeface="Arial"/>
                 <a:cs typeface="Arial"/>
               </a:rPr>
-              <a:t>Ask about another product</a:t>
+              <a:t>04  Ask a question</a:t>
             </a:r>
           </a:p>
         </p:txBody>
@@ -6410,7 +6879,7 @@
     </p:spTree>
     <p:extLst>
       <p:ext uri="{BB962C8B-B14F-4D97-AF65-F5344CB8AC3E}">
-        <p14:creationId xmlns:p14="http://schemas.microsoft.com/office/powerpoint/2010/main" val="1460001832"/>
+        <p14:creationId xmlns:p14="http://schemas.microsoft.com/office/powerpoint/2010/main" val="1047439503"/>
       </p:ext>
     </p:extLst>
   </p:cSld>
@@ -6423,7 +6892,7 @@
     <p:bg>
       <p:bgPr>
         <a:solidFill xmlns:a="http://schemas.openxmlformats.org/drawingml/2006/main">
-          <a:srgbClr val="FFFFFF"/>
+          <a:srgbClr val="11263E"/>
         </a:solidFill>
       </p:bgPr>
     </p:bg>
@@ -6438,10 +6907,10 @@
       </p:grpSpPr>
       <p:sp>
         <p:nvSpPr>
-          <p:cNvPr id="8" name="">
-            <a:extLst xmlns:a="http://schemas.openxmlformats.org/drawingml/2006/main">
-              <a:ext uri="{FF2B5EF4-FFF2-40B4-BE49-F238E27FC236}">
-                <a16:creationId xmlns:a16="http://schemas.microsoft.com/office/drawing/2014/main" id="{33D4CF84-9126-4D7C-9B77-0B34CE87B184}"/>
+          <p:cNvPr id="9" name="">
+            <a:extLst xmlns:a="http://schemas.openxmlformats.org/drawingml/2006/main">
+              <a:ext uri="{FF2B5EF4-FFF2-40B4-BE49-F238E27FC236}">
+                <a16:creationId xmlns:a16="http://schemas.microsoft.com/office/drawing/2014/main" id="{8B86CDFA-CCAA-4E6B-BE19-FCA21408ECE6}"/>
               </a:ext>
             </a:extLst>
           </p:cNvPr>
@@ -6452,8 +6921,8 @@
         </p:nvSpPr>
         <p:spPr>
           <a:xfrm xmlns:a="http://schemas.openxmlformats.org/drawingml/2006/main">
-            <a:off x="685800" y="476250"/>
-            <a:ext cx="10820400" cy="857250"/>
+            <a:off x="609600" y="400050"/>
+            <a:ext cx="5715000" cy="285750"/>
           </a:xfrm>
           <a:prstGeom xmlns:a="http://schemas.openxmlformats.org/drawingml/2006/main" prst="rect">
             <a:avLst/>
@@ -6468,9 +6937,9 @@
           <a:bodyPr xmlns:a="http://schemas.openxmlformats.org/drawingml/2006/main"/>
           <a:lstStyle xmlns:a="http://schemas.openxmlformats.org/drawingml/2006/main">
             <a:defPPr>
-              <a:defRPr sz="3150" b="1">
-                <a:solidFill>
-                  <a:srgbClr val="172B4D"/>
+              <a:defRPr sz="1200" b="1">
+                <a:solidFill>
+                  <a:srgbClr val="A9E7D7"/>
                 </a:solidFill>
                 <a:latin typeface="Arial"/>
                 <a:ea typeface="Arial"/>
@@ -6480,9 +6949,9 @@
           </a:lstStyle>
           <a:p xmlns:a="http://schemas.openxmlformats.org/drawingml/2006/main">
             <a:pPr>
-              <a:defRPr sz="3150" b="1">
-                <a:solidFill>
-                  <a:srgbClr val="172B4D"/>
+              <a:defRPr sz="1200" b="1">
+                <a:solidFill>
+                  <a:srgbClr val="A9E7D7"/>
                 </a:solidFill>
                 <a:latin typeface="Arial"/>
                 <a:ea typeface="Arial"/>
@@ -6490,15 +6959,15 @@
               </a:defRPr>
             </a:pPr>
             <a:r>
-              <a:rPr sz="3150" b="1">
-                <a:solidFill>
-                  <a:srgbClr val="172B4D"/>
+              <a:rPr sz="1200" b="1">
+                <a:solidFill>
+                  <a:srgbClr val="A9E7D7"/>
                 </a:solidFill>
                 <a:latin typeface="Arial"/>
                 <a:ea typeface="Arial"/>
                 <a:cs typeface="Arial"/>
               </a:rPr>
-              <a:t>Findings and limits</a:t>
+              <a:t>CONCLUSION</a:t>
             </a:r>
           </a:p>
         </p:txBody>
@@ -6508,7 +6977,7 @@
           <p:cNvPr id="2" name="">
             <a:extLst xmlns:a="http://schemas.openxmlformats.org/drawingml/2006/main">
               <a:ext uri="{FF2B5EF4-FFF2-40B4-BE49-F238E27FC236}">
-                <a16:creationId xmlns:a16="http://schemas.microsoft.com/office/drawing/2014/main" id="{C11C99F4-A294-493A-B3D5-5146062D07D9}"/>
+                <a16:creationId xmlns:a16="http://schemas.microsoft.com/office/drawing/2014/main" id="{CBE3A980-09FE-4A1A-9FFA-A0CB97D2C46C}"/>
               </a:ext>
             </a:extLst>
           </p:cNvPr>
@@ -6519,8 +6988,8 @@
         </p:nvSpPr>
         <p:spPr>
           <a:xfrm xmlns:a="http://schemas.openxmlformats.org/drawingml/2006/main">
-            <a:off x="685800" y="6315075"/>
-            <a:ext cx="6096000" cy="266700"/>
+            <a:off x="609600" y="876300"/>
+            <a:ext cx="10934700" cy="914400"/>
           </a:xfrm>
           <a:prstGeom xmlns:a="http://schemas.openxmlformats.org/drawingml/2006/main" prst="rect">
             <a:avLst/>
@@ -6535,9 +7004,9 @@
           <a:bodyPr xmlns:a="http://schemas.openxmlformats.org/drawingml/2006/main"/>
           <a:lstStyle xmlns:a="http://schemas.openxmlformats.org/drawingml/2006/main">
             <a:defPPr>
-              <a:defRPr sz="1050" b="0">
-                <a:solidFill>
-                  <a:srgbClr val="526174"/>
+              <a:defRPr sz="3300" b="1">
+                <a:solidFill>
+                  <a:srgbClr val="FFFFFF"/>
                 </a:solidFill>
                 <a:latin typeface="Arial"/>
                 <a:ea typeface="Arial"/>
@@ -6547,9 +7016,9 @@
           </a:lstStyle>
           <a:p xmlns:a="http://schemas.openxmlformats.org/drawingml/2006/main">
             <a:pPr>
-              <a:defRPr sz="1050" b="0">
-                <a:solidFill>
-                  <a:srgbClr val="526174"/>
+              <a:defRPr sz="3300" b="1">
+                <a:solidFill>
+                  <a:srgbClr val="FFFFFF"/>
                 </a:solidFill>
                 <a:latin typeface="Arial"/>
                 <a:ea typeface="Arial"/>
@@ -6557,15 +7026,15 @@
               </a:defRPr>
             </a:pPr>
             <a:r>
-              <a:rPr sz="1050" b="0">
-                <a:solidFill>
-                  <a:srgbClr val="526174"/>
+              <a:rPr sz="3300" b="1">
+                <a:solidFill>
+                  <a:srgbClr val="FFFFFF"/>
                 </a:solidFill>
                 <a:latin typeface="Arial"/>
                 <a:ea typeface="Arial"/>
                 <a:cs typeface="Arial"/>
               </a:rPr>
-              <a:t>VUT AI SOLUTIONS  /  AIBUY3A</a:t>
+              <a:t>What we can conclude</a:t>
             </a:r>
           </a:p>
         </p:txBody>
@@ -6575,7 +7044,7 @@
           <p:cNvPr id="3" name="">
             <a:extLst xmlns:a="http://schemas.openxmlformats.org/drawingml/2006/main">
               <a:ext uri="{FF2B5EF4-FFF2-40B4-BE49-F238E27FC236}">
-                <a16:creationId xmlns:a16="http://schemas.microsoft.com/office/drawing/2014/main" id="{0DD2BF11-ABFA-4ABA-98C0-BE3EC1F28B1E}"/>
+                <a16:creationId xmlns:a16="http://schemas.microsoft.com/office/drawing/2014/main" id="{158600B0-0012-4E00-B7BE-08F2B0ECA52F}"/>
               </a:ext>
             </a:extLst>
           </p:cNvPr>
@@ -6586,8 +7055,8 @@
         </p:nvSpPr>
         <p:spPr>
           <a:xfrm xmlns:a="http://schemas.openxmlformats.org/drawingml/2006/main">
-            <a:off x="11001375" y="6315075"/>
-            <a:ext cx="523875" cy="266700"/>
+            <a:off x="609600" y="6315075"/>
+            <a:ext cx="4000500" cy="209550"/>
           </a:xfrm>
           <a:prstGeom xmlns:a="http://schemas.openxmlformats.org/drawingml/2006/main" prst="rect">
             <a:avLst/>
@@ -6602,9 +7071,9 @@
           <a:bodyPr xmlns:a="http://schemas.openxmlformats.org/drawingml/2006/main"/>
           <a:lstStyle xmlns:a="http://schemas.openxmlformats.org/drawingml/2006/main">
             <a:defPPr>
-              <a:defRPr sz="1050" b="0">
-                <a:solidFill>
-                  <a:srgbClr val="526174"/>
+              <a:defRPr sz="975" b="1">
+                <a:solidFill>
+                  <a:srgbClr val="A9E7D7"/>
                 </a:solidFill>
                 <a:latin typeface="Arial"/>
                 <a:ea typeface="Arial"/>
@@ -6614,9 +7083,9 @@
           </a:lstStyle>
           <a:p xmlns:a="http://schemas.openxmlformats.org/drawingml/2006/main">
             <a:pPr>
-              <a:defRPr sz="1050" b="0">
-                <a:solidFill>
-                  <a:srgbClr val="526174"/>
+              <a:defRPr sz="975" b="1">
+                <a:solidFill>
+                  <a:srgbClr val="A9E7D7"/>
                 </a:solidFill>
                 <a:latin typeface="Arial"/>
                 <a:ea typeface="Arial"/>
@@ -6624,9 +7093,76 @@
               </a:defRPr>
             </a:pPr>
             <a:r>
-              <a:rPr sz="1050" b="0">
-                <a:solidFill>
-                  <a:srgbClr val="526174"/>
+              <a:rPr sz="975" b="1">
+                <a:solidFill>
+                  <a:srgbClr val="A9E7D7"/>
+                </a:solidFill>
+                <a:latin typeface="Arial"/>
+                <a:ea typeface="Arial"/>
+                <a:cs typeface="Arial"/>
+              </a:rPr>
+              <a:t>STOCKSENSE AI</a:t>
+            </a:r>
+          </a:p>
+        </p:txBody>
+      </p:sp>
+      <p:sp>
+        <p:nvSpPr>
+          <p:cNvPr id="4" name="">
+            <a:extLst xmlns:a="http://schemas.openxmlformats.org/drawingml/2006/main">
+              <a:ext uri="{FF2B5EF4-FFF2-40B4-BE49-F238E27FC236}">
+                <a16:creationId xmlns:a16="http://schemas.microsoft.com/office/drawing/2014/main" id="{F5CBF45E-C492-40A6-81A7-E89BB17BF858}"/>
+              </a:ext>
+            </a:extLst>
+          </p:cNvPr>
+          <p:cNvSpPr>
+            <a:spLocks xmlns:a="http://schemas.openxmlformats.org/drawingml/2006/main" noGrp="1"/>
+          </p:cNvSpPr>
+          <p:nvPr/>
+        </p:nvSpPr>
+        <p:spPr>
+          <a:xfrm xmlns:a="http://schemas.openxmlformats.org/drawingml/2006/main">
+            <a:off x="11049000" y="6315075"/>
+            <a:ext cx="666750" cy="209550"/>
+          </a:xfrm>
+          <a:prstGeom xmlns:a="http://schemas.openxmlformats.org/drawingml/2006/main" prst="rect">
+            <a:avLst/>
+          </a:prstGeom>
+          <a:noFill xmlns:a="http://schemas.openxmlformats.org/drawingml/2006/main"/>
+          <a:ln xmlns:a="http://schemas.openxmlformats.org/drawingml/2006/main" w="0">
+            <a:noFill/>
+            <a:prstDash val="solid"/>
+          </a:ln>
+        </p:spPr>
+        <p:txBody>
+          <a:bodyPr xmlns:a="http://schemas.openxmlformats.org/drawingml/2006/main"/>
+          <a:lstStyle xmlns:a="http://schemas.openxmlformats.org/drawingml/2006/main">
+            <a:defPPr>
+              <a:defRPr sz="975" b="0">
+                <a:solidFill>
+                  <a:srgbClr val="A9E7D7"/>
+                </a:solidFill>
+                <a:latin typeface="Arial"/>
+                <a:ea typeface="Arial"/>
+                <a:cs typeface="Arial"/>
+              </a:defRPr>
+            </a:defPPr>
+          </a:lstStyle>
+          <a:p xmlns:a="http://schemas.openxmlformats.org/drawingml/2006/main">
+            <a:pPr>
+              <a:defRPr sz="975" b="0">
+                <a:solidFill>
+                  <a:srgbClr val="A9E7D7"/>
+                </a:solidFill>
+                <a:latin typeface="Arial"/>
+                <a:ea typeface="Arial"/>
+                <a:cs typeface="Arial"/>
+              </a:defRPr>
+            </a:pPr>
+            <a:r>
+              <a:rPr sz="975" b="0">
+                <a:solidFill>
+                  <a:srgbClr val="A9E7D7"/>
                 </a:solidFill>
                 <a:latin typeface="Arial"/>
                 <a:ea typeface="Arial"/>
@@ -6639,10 +7175,10 @@
       </p:sp>
       <p:sp>
         <p:nvSpPr>
-          <p:cNvPr id="4" name="">
-            <a:extLst xmlns:a="http://schemas.openxmlformats.org/drawingml/2006/main">
-              <a:ext uri="{FF2B5EF4-FFF2-40B4-BE49-F238E27FC236}">
-                <a16:creationId xmlns:a16="http://schemas.microsoft.com/office/drawing/2014/main" id="{DD3815E7-0E1C-457D-855D-8BB72C93CBF9}"/>
+          <p:cNvPr id="5" name="">
+            <a:extLst xmlns:a="http://schemas.openxmlformats.org/drawingml/2006/main">
+              <a:ext uri="{FF2B5EF4-FFF2-40B4-BE49-F238E27FC236}">
+                <a16:creationId xmlns:a16="http://schemas.microsoft.com/office/drawing/2014/main" id="{DCA7FC5B-2803-42D7-B9EE-613A0D645818}"/>
               </a:ext>
             </a:extLst>
           </p:cNvPr>
@@ -6653,8 +7189,8 @@
         </p:nvSpPr>
         <p:spPr>
           <a:xfrm xmlns:a="http://schemas.openxmlformats.org/drawingml/2006/main">
-            <a:off x="723900" y="1609725"/>
-            <a:ext cx="10477500" cy="857250"/>
+            <a:off x="657225" y="1962150"/>
+            <a:ext cx="10572750" cy="990600"/>
           </a:xfrm>
           <a:prstGeom xmlns:a="http://schemas.openxmlformats.org/drawingml/2006/main" prst="rect">
             <a:avLst/>
@@ -6669,9 +7205,9 @@
           <a:bodyPr xmlns:a="http://schemas.openxmlformats.org/drawingml/2006/main"/>
           <a:lstStyle xmlns:a="http://schemas.openxmlformats.org/drawingml/2006/main">
             <a:defPPr>
-              <a:defRPr sz="2550" b="1">
-                <a:solidFill>
-                  <a:srgbClr val="172B4D"/>
+              <a:defRPr sz="3300" b="1">
+                <a:solidFill>
+                  <a:srgbClr val="FFFFFF"/>
                 </a:solidFill>
                 <a:latin typeface="Arial"/>
                 <a:ea typeface="Arial"/>
@@ -6681,9 +7217,9 @@
           </a:lstStyle>
           <a:p xmlns:a="http://schemas.openxmlformats.org/drawingml/2006/main">
             <a:pPr>
-              <a:defRPr sz="2550" b="1">
-                <a:solidFill>
-                  <a:srgbClr val="172B4D"/>
+              <a:defRPr sz="3300" b="1">
+                <a:solidFill>
+                  <a:srgbClr val="FFFFFF"/>
                 </a:solidFill>
                 <a:latin typeface="Arial"/>
                 <a:ea typeface="Arial"/>
@@ -6691,25 +7227,25 @@
               </a:defRPr>
             </a:pPr>
             <a:r>
-              <a:rPr sz="2550" b="1">
-                <a:solidFill>
-                  <a:srgbClr val="172B4D"/>
+              <a:rPr sz="3300" b="1">
+                <a:solidFill>
+                  <a:srgbClr val="FFFFFF"/>
                 </a:solidFill>
                 <a:latin typeface="Arial"/>
                 <a:ea typeface="Arial"/>
                 <a:cs typeface="Arial"/>
               </a:rPr>
-              <a:t>The prototype gives a clear forecast and a transparent stock calculation.</a:t>
-            </a:r>
-          </a:p>
-        </p:txBody>
-      </p:sp>
-      <p:sp>
-        <p:nvSpPr>
-          <p:cNvPr id="5" name="">
-            <a:extLst xmlns:a="http://schemas.openxmlformats.org/drawingml/2006/main">
-              <a:ext uri="{FF2B5EF4-FFF2-40B4-BE49-F238E27FC236}">
-                <a16:creationId xmlns:a16="http://schemas.microsoft.com/office/drawing/2014/main" id="{A0A633A0-1417-403E-9300-40956F51ADE4}"/>
+              <a:t>Random forest had the lowest daily test error.</a:t>
+            </a:r>
+          </a:p>
+        </p:txBody>
+      </p:sp>
+      <p:sp>
+        <p:nvSpPr>
+          <p:cNvPr id="6" name="">
+            <a:extLst xmlns:a="http://schemas.openxmlformats.org/drawingml/2006/main">
+              <a:ext uri="{FF2B5EF4-FFF2-40B4-BE49-F238E27FC236}">
+                <a16:creationId xmlns:a16="http://schemas.microsoft.com/office/drawing/2014/main" id="{3C08BF2B-1F4B-4EBF-9BBF-4B5CB27D0B70}"/>
               </a:ext>
             </a:extLst>
           </p:cNvPr>
@@ -6720,8 +7256,8 @@
         </p:nvSpPr>
         <p:spPr>
           <a:xfrm xmlns:a="http://schemas.openxmlformats.org/drawingml/2006/main">
-            <a:off x="723900" y="2914650"/>
-            <a:ext cx="10477500" cy="666750"/>
+            <a:off x="657225" y="3333750"/>
+            <a:ext cx="10572750" cy="857250"/>
           </a:xfrm>
           <a:prstGeom xmlns:a="http://schemas.openxmlformats.org/drawingml/2006/main" prst="rect">
             <a:avLst/>
@@ -6736,9 +7272,9 @@
           <a:bodyPr xmlns:a="http://schemas.openxmlformats.org/drawingml/2006/main"/>
           <a:lstStyle xmlns:a="http://schemas.openxmlformats.org/drawingml/2006/main">
             <a:defPPr>
-              <a:defRPr sz="2100" b="0">
-                <a:solidFill>
-                  <a:srgbClr val="172B4D"/>
+              <a:defRPr sz="2325" b="0">
+                <a:solidFill>
+                  <a:srgbClr val="A9E7D7"/>
                 </a:solidFill>
                 <a:latin typeface="Arial"/>
                 <a:ea typeface="Arial"/>
@@ -6748,9 +7284,9 @@
           </a:lstStyle>
           <a:p xmlns:a="http://schemas.openxmlformats.org/drawingml/2006/main">
             <a:pPr>
-              <a:defRPr sz="2100" b="0">
-                <a:solidFill>
-                  <a:srgbClr val="172B4D"/>
+              <a:defRPr sz="2325" b="0">
+                <a:solidFill>
+                  <a:srgbClr val="A9E7D7"/>
                 </a:solidFill>
                 <a:latin typeface="Arial"/>
                 <a:ea typeface="Arial"/>
@@ -6758,25 +7294,25 @@
               </a:defRPr>
             </a:pPr>
             <a:r>
-              <a:rPr sz="2100" b="0">
-                <a:solidFill>
-                  <a:srgbClr val="172B4D"/>
+              <a:rPr sz="2325" b="0">
+                <a:solidFill>
+                  <a:srgbClr val="A9E7D7"/>
                 </a:solidFill>
                 <a:latin typeface="Arial"/>
                 <a:ea typeface="Arial"/>
                 <a:cs typeface="Arial"/>
               </a:rPr>
-              <a:t>Random forest performed best on daily error in this comparison.</a:t>
-            </a:r>
-          </a:p>
-        </p:txBody>
-      </p:sp>
-      <p:sp>
-        <p:nvSpPr>
-          <p:cNvPr id="6" name="">
-            <a:extLst xmlns:a="http://schemas.openxmlformats.org/drawingml/2006/main">
-              <a:ext uri="{FF2B5EF4-FFF2-40B4-BE49-F238E27FC236}">
-                <a16:creationId xmlns:a16="http://schemas.microsoft.com/office/drawing/2014/main" id="{F2A36E73-A2AE-4FBF-A966-FCA192B4A0D3}"/>
+              <a:t>The app turns forecasts into a clear order calculation.</a:t>
+            </a:r>
+          </a:p>
+        </p:txBody>
+      </p:sp>
+      <p:sp>
+        <p:nvSpPr>
+          <p:cNvPr id="7" name="">
+            <a:extLst xmlns:a="http://schemas.openxmlformats.org/drawingml/2006/main">
+              <a:ext uri="{FF2B5EF4-FFF2-40B4-BE49-F238E27FC236}">
+                <a16:creationId xmlns:a16="http://schemas.microsoft.com/office/drawing/2014/main" id="{8C24DF7C-EAB7-41AF-9709-CD73F18D57E4}"/>
               </a:ext>
             </a:extLst>
           </p:cNvPr>
@@ -6787,8 +7323,8 @@
         </p:nvSpPr>
         <p:spPr>
           <a:xfrm xmlns:a="http://schemas.openxmlformats.org/drawingml/2006/main">
-            <a:off x="723900" y="3810000"/>
-            <a:ext cx="10477500" cy="666750"/>
+            <a:off x="657225" y="4457700"/>
+            <a:ext cx="10572750" cy="857250"/>
           </a:xfrm>
           <a:prstGeom xmlns:a="http://schemas.openxmlformats.org/drawingml/2006/main" prst="rect">
             <a:avLst/>
@@ -6803,9 +7339,9 @@
           <a:bodyPr xmlns:a="http://schemas.openxmlformats.org/drawingml/2006/main"/>
           <a:lstStyle xmlns:a="http://schemas.openxmlformats.org/drawingml/2006/main">
             <a:defPPr>
-              <a:defRPr sz="2100" b="0">
-                <a:solidFill>
-                  <a:srgbClr val="526174"/>
+              <a:defRPr sz="2025" b="0">
+                <a:solidFill>
+                  <a:srgbClr val="FFFFFF"/>
                 </a:solidFill>
                 <a:latin typeface="Arial"/>
                 <a:ea typeface="Arial"/>
@@ -6815,9 +7351,9 @@
           </a:lstStyle>
           <a:p xmlns:a="http://schemas.openxmlformats.org/drawingml/2006/main">
             <a:pPr>
-              <a:defRPr sz="2100" b="0">
-                <a:solidFill>
-                  <a:srgbClr val="526174"/>
+              <a:defRPr sz="2025" b="0">
+                <a:solidFill>
+                  <a:srgbClr val="FFFFFF"/>
                 </a:solidFill>
                 <a:latin typeface="Arial"/>
                 <a:ea typeface="Arial"/>
@@ -6825,25 +7361,25 @@
               </a:defRPr>
             </a:pPr>
             <a:r>
-              <a:rPr sz="2100" b="0">
-                <a:solidFill>
-                  <a:srgbClr val="526174"/>
+              <a:rPr sz="2025" b="0">
+                <a:solidFill>
+                  <a:srgbClr val="FFFFFF"/>
                 </a:solidFill>
                 <a:latin typeface="Arial"/>
                 <a:ea typeface="Arial"/>
                 <a:cs typeface="Arial"/>
               </a:rPr>
-              <a:t>Real savings and January 2018 forecast accuracy remain unmeasured.</a:t>
-            </a:r>
-          </a:p>
-        </p:txBody>
-      </p:sp>
-      <p:sp>
-        <p:nvSpPr>
-          <p:cNvPr id="7" name="">
-            <a:extLst xmlns:a="http://schemas.openxmlformats.org/drawingml/2006/main">
-              <a:ext uri="{FF2B5EF4-FFF2-40B4-BE49-F238E27FC236}">
-                <a16:creationId xmlns:a16="http://schemas.microsoft.com/office/drawing/2014/main" id="{B45BEEA0-808E-46D4-8DBF-FA8D95B9E070}"/>
+              <a:t>Real savings and January 2018 accuracy remain unmeasured.</a:t>
+            </a:r>
+          </a:p>
+        </p:txBody>
+      </p:sp>
+      <p:sp>
+        <p:nvSpPr>
+          <p:cNvPr id="8" name="">
+            <a:extLst xmlns:a="http://schemas.openxmlformats.org/drawingml/2006/main">
+              <a:ext uri="{FF2B5EF4-FFF2-40B4-BE49-F238E27FC236}">
+                <a16:creationId xmlns:a16="http://schemas.microsoft.com/office/drawing/2014/main" id="{49EF753E-5279-4D94-BCB3-BF10F72A28E8}"/>
               </a:ext>
             </a:extLst>
           </p:cNvPr>
@@ -6854,8 +7390,8 @@
         </p:nvSpPr>
         <p:spPr>
           <a:xfrm xmlns:a="http://schemas.openxmlformats.org/drawingml/2006/main">
-            <a:off x="723900" y="5219700"/>
-            <a:ext cx="10477500" cy="666750"/>
+            <a:off x="657225" y="5543550"/>
+            <a:ext cx="10477500" cy="523875"/>
           </a:xfrm>
           <a:prstGeom xmlns:a="http://schemas.openxmlformats.org/drawingml/2006/main" prst="rect">
             <a:avLst/>
@@ -6870,9 +7406,9 @@
           <a:bodyPr xmlns:a="http://schemas.openxmlformats.org/drawingml/2006/main"/>
           <a:lstStyle xmlns:a="http://schemas.openxmlformats.org/drawingml/2006/main">
             <a:defPPr>
-              <a:defRPr sz="2775" b="1">
-                <a:solidFill>
-                  <a:srgbClr val="0F766E"/>
+              <a:defRPr sz="2475" b="1">
+                <a:solidFill>
+                  <a:srgbClr val="A9E7D7"/>
                 </a:solidFill>
                 <a:latin typeface="Arial"/>
                 <a:ea typeface="Arial"/>
@@ -6882,9 +7418,9 @@
           </a:lstStyle>
           <a:p xmlns:a="http://schemas.openxmlformats.org/drawingml/2006/main">
             <a:pPr>
-              <a:defRPr sz="2775" b="1">
-                <a:solidFill>
-                  <a:srgbClr val="0F766E"/>
+              <a:defRPr sz="2475" b="1">
+                <a:solidFill>
+                  <a:srgbClr val="A9E7D7"/>
                 </a:solidFill>
                 <a:latin typeface="Arial"/>
                 <a:ea typeface="Arial"/>
@@ -6892,9 +7428,9 @@
               </a:defRPr>
             </a:pPr>
             <a:r>
-              <a:rPr sz="2775" b="1">
-                <a:solidFill>
-                  <a:srgbClr val="0F766E"/>
+              <a:rPr sz="2475" b="1">
+                <a:solidFill>
+                  <a:srgbClr val="A9E7D7"/>
                 </a:solidFill>
                 <a:latin typeface="Arial"/>
                 <a:ea typeface="Arial"/>
@@ -6908,7 +7444,7 @@
     </p:spTree>
     <p:extLst>
       <p:ext uri="{BB962C8B-B14F-4D97-AF65-F5344CB8AC3E}">
-        <p14:creationId xmlns:p14="http://schemas.microsoft.com/office/powerpoint/2010/main" val="1625328635"/>
+        <p14:creationId xmlns:p14="http://schemas.microsoft.com/office/powerpoint/2010/main" val="1239748326"/>
       </p:ext>
     </p:extLst>
   </p:cSld>
@@ -6921,7 +7457,7 @@
     <p:bg>
       <p:bgPr>
         <a:solidFill xmlns:a="http://schemas.openxmlformats.org/drawingml/2006/main">
-          <a:srgbClr val="FFFFFF"/>
+          <a:srgbClr val="F7F5F0"/>
         </a:solidFill>
       </p:bgPr>
     </p:bg>
@@ -6936,10 +7472,10 @@
       </p:grpSpPr>
       <p:sp>
         <p:nvSpPr>
-          <p:cNvPr id="8" name="">
-            <a:extLst xmlns:a="http://schemas.openxmlformats.org/drawingml/2006/main">
-              <a:ext uri="{FF2B5EF4-FFF2-40B4-BE49-F238E27FC236}">
-                <a16:creationId xmlns:a16="http://schemas.microsoft.com/office/drawing/2014/main" id="{70494389-9710-4E34-A22A-52EF84D030A1}"/>
+          <p:cNvPr id="10" name="">
+            <a:extLst xmlns:a="http://schemas.openxmlformats.org/drawingml/2006/main">
+              <a:ext uri="{FF2B5EF4-FFF2-40B4-BE49-F238E27FC236}">
+                <a16:creationId xmlns:a16="http://schemas.microsoft.com/office/drawing/2014/main" id="{B5D7E0B7-7FB3-4C3B-98EA-AA640D42D837}"/>
               </a:ext>
             </a:extLst>
           </p:cNvPr>
@@ -6950,8 +7486,276 @@
         </p:nvSpPr>
         <p:spPr>
           <a:xfrm xmlns:a="http://schemas.openxmlformats.org/drawingml/2006/main">
-            <a:off x="685800" y="476250"/>
-            <a:ext cx="10820400" cy="857250"/>
+            <a:off x="609600" y="400050"/>
+            <a:ext cx="5715000" cy="285750"/>
+          </a:xfrm>
+          <a:prstGeom xmlns:a="http://schemas.openxmlformats.org/drawingml/2006/main" prst="rect">
+            <a:avLst/>
+          </a:prstGeom>
+          <a:noFill xmlns:a="http://schemas.openxmlformats.org/drawingml/2006/main"/>
+          <a:ln xmlns:a="http://schemas.openxmlformats.org/drawingml/2006/main" w="0">
+            <a:noFill/>
+            <a:prstDash val="solid"/>
+          </a:ln>
+        </p:spPr>
+        <p:txBody>
+          <a:bodyPr xmlns:a="http://schemas.openxmlformats.org/drawingml/2006/main"/>
+          <a:lstStyle xmlns:a="http://schemas.openxmlformats.org/drawingml/2006/main">
+            <a:defPPr>
+              <a:defRPr sz="1200" b="1">
+                <a:solidFill>
+                  <a:srgbClr val="087E79"/>
+                </a:solidFill>
+                <a:latin typeface="Arial"/>
+                <a:ea typeface="Arial"/>
+                <a:cs typeface="Arial"/>
+              </a:defRPr>
+            </a:defPPr>
+          </a:lstStyle>
+          <a:p xmlns:a="http://schemas.openxmlformats.org/drawingml/2006/main">
+            <a:pPr>
+              <a:defRPr sz="1200" b="1">
+                <a:solidFill>
+                  <a:srgbClr val="087E79"/>
+                </a:solidFill>
+                <a:latin typeface="Arial"/>
+                <a:ea typeface="Arial"/>
+                <a:cs typeface="Arial"/>
+              </a:defRPr>
+            </a:pPr>
+            <a:r>
+              <a:rPr sz="1200" b="1">
+                <a:solidFill>
+                  <a:srgbClr val="087E79"/>
+                </a:solidFill>
+                <a:latin typeface="Arial"/>
+                <a:ea typeface="Arial"/>
+                <a:cs typeface="Arial"/>
+              </a:rPr>
+              <a:t>PROBLEM</a:t>
+            </a:r>
+          </a:p>
+        </p:txBody>
+      </p:sp>
+      <p:sp>
+        <p:nvSpPr>
+          <p:cNvPr id="2" name="">
+            <a:extLst xmlns:a="http://schemas.openxmlformats.org/drawingml/2006/main">
+              <a:ext uri="{FF2B5EF4-FFF2-40B4-BE49-F238E27FC236}">
+                <a16:creationId xmlns:a16="http://schemas.microsoft.com/office/drawing/2014/main" id="{2DE599E1-A8A5-4375-AB5E-6E14B9714AD0}"/>
+              </a:ext>
+            </a:extLst>
+          </p:cNvPr>
+          <p:cNvSpPr>
+            <a:spLocks xmlns:a="http://schemas.openxmlformats.org/drawingml/2006/main" noGrp="1"/>
+          </p:cNvSpPr>
+          <p:nvPr/>
+        </p:nvSpPr>
+        <p:spPr>
+          <a:xfrm xmlns:a="http://schemas.openxmlformats.org/drawingml/2006/main">
+            <a:off x="609600" y="876300"/>
+            <a:ext cx="10934700" cy="914400"/>
+          </a:xfrm>
+          <a:prstGeom xmlns:a="http://schemas.openxmlformats.org/drawingml/2006/main" prst="rect">
+            <a:avLst/>
+          </a:prstGeom>
+          <a:noFill xmlns:a="http://schemas.openxmlformats.org/drawingml/2006/main"/>
+          <a:ln xmlns:a="http://schemas.openxmlformats.org/drawingml/2006/main" w="0">
+            <a:noFill/>
+            <a:prstDash val="solid"/>
+          </a:ln>
+        </p:spPr>
+        <p:txBody>
+          <a:bodyPr xmlns:a="http://schemas.openxmlformats.org/drawingml/2006/main"/>
+          <a:lstStyle xmlns:a="http://schemas.openxmlformats.org/drawingml/2006/main">
+            <a:defPPr>
+              <a:defRPr sz="3300" b="1">
+                <a:solidFill>
+                  <a:srgbClr val="18324A"/>
+                </a:solidFill>
+                <a:latin typeface="Arial"/>
+                <a:ea typeface="Arial"/>
+                <a:cs typeface="Arial"/>
+              </a:defRPr>
+            </a:defPPr>
+          </a:lstStyle>
+          <a:p xmlns:a="http://schemas.openxmlformats.org/drawingml/2006/main">
+            <a:pPr>
+              <a:defRPr sz="3300" b="1">
+                <a:solidFill>
+                  <a:srgbClr val="18324A"/>
+                </a:solidFill>
+                <a:latin typeface="Arial"/>
+                <a:ea typeface="Arial"/>
+                <a:cs typeface="Arial"/>
+              </a:defRPr>
+            </a:pPr>
+            <a:r>
+              <a:rPr sz="3300" b="1">
+                <a:solidFill>
+                  <a:srgbClr val="18324A"/>
+                </a:solidFill>
+                <a:latin typeface="Arial"/>
+                <a:ea typeface="Arial"/>
+                <a:cs typeface="Arial"/>
+              </a:rPr>
+              <a:t>The weekly stock decision</a:t>
+            </a:r>
+          </a:p>
+        </p:txBody>
+      </p:sp>
+      <p:sp>
+        <p:nvSpPr>
+          <p:cNvPr id="3" name="">
+            <a:extLst xmlns:a="http://schemas.openxmlformats.org/drawingml/2006/main">
+              <a:ext uri="{FF2B5EF4-FFF2-40B4-BE49-F238E27FC236}">
+                <a16:creationId xmlns:a16="http://schemas.microsoft.com/office/drawing/2014/main" id="{12CBE6B0-2962-4E19-8C79-058A43D3BF1C}"/>
+              </a:ext>
+            </a:extLst>
+          </p:cNvPr>
+          <p:cNvSpPr>
+            <a:spLocks xmlns:a="http://schemas.openxmlformats.org/drawingml/2006/main" noGrp="1"/>
+          </p:cNvSpPr>
+          <p:nvPr/>
+        </p:nvSpPr>
+        <p:spPr>
+          <a:xfrm xmlns:a="http://schemas.openxmlformats.org/drawingml/2006/main">
+            <a:off x="609600" y="6315075"/>
+            <a:ext cx="4000500" cy="209550"/>
+          </a:xfrm>
+          <a:prstGeom xmlns:a="http://schemas.openxmlformats.org/drawingml/2006/main" prst="rect">
+            <a:avLst/>
+          </a:prstGeom>
+          <a:noFill xmlns:a="http://schemas.openxmlformats.org/drawingml/2006/main"/>
+          <a:ln xmlns:a="http://schemas.openxmlformats.org/drawingml/2006/main" w="0">
+            <a:noFill/>
+            <a:prstDash val="solid"/>
+          </a:ln>
+        </p:spPr>
+        <p:txBody>
+          <a:bodyPr xmlns:a="http://schemas.openxmlformats.org/drawingml/2006/main"/>
+          <a:lstStyle xmlns:a="http://schemas.openxmlformats.org/drawingml/2006/main">
+            <a:defPPr>
+              <a:defRPr sz="975" b="1">
+                <a:solidFill>
+                  <a:srgbClr val="536A78"/>
+                </a:solidFill>
+                <a:latin typeface="Arial"/>
+                <a:ea typeface="Arial"/>
+                <a:cs typeface="Arial"/>
+              </a:defRPr>
+            </a:defPPr>
+          </a:lstStyle>
+          <a:p xmlns:a="http://schemas.openxmlformats.org/drawingml/2006/main">
+            <a:pPr>
+              <a:defRPr sz="975" b="1">
+                <a:solidFill>
+                  <a:srgbClr val="536A78"/>
+                </a:solidFill>
+                <a:latin typeface="Arial"/>
+                <a:ea typeface="Arial"/>
+                <a:cs typeface="Arial"/>
+              </a:defRPr>
+            </a:pPr>
+            <a:r>
+              <a:rPr sz="975" b="1">
+                <a:solidFill>
+                  <a:srgbClr val="536A78"/>
+                </a:solidFill>
+                <a:latin typeface="Arial"/>
+                <a:ea typeface="Arial"/>
+                <a:cs typeface="Arial"/>
+              </a:rPr>
+              <a:t>STOCKSENSE AI</a:t>
+            </a:r>
+          </a:p>
+        </p:txBody>
+      </p:sp>
+      <p:sp>
+        <p:nvSpPr>
+          <p:cNvPr id="4" name="">
+            <a:extLst xmlns:a="http://schemas.openxmlformats.org/drawingml/2006/main">
+              <a:ext uri="{FF2B5EF4-FFF2-40B4-BE49-F238E27FC236}">
+                <a16:creationId xmlns:a16="http://schemas.microsoft.com/office/drawing/2014/main" id="{EAB992E2-1E70-4CF4-BD2A-7BF3FAC0D460}"/>
+              </a:ext>
+            </a:extLst>
+          </p:cNvPr>
+          <p:cNvSpPr>
+            <a:spLocks xmlns:a="http://schemas.openxmlformats.org/drawingml/2006/main" noGrp="1"/>
+          </p:cNvSpPr>
+          <p:nvPr/>
+        </p:nvSpPr>
+        <p:spPr>
+          <a:xfrm xmlns:a="http://schemas.openxmlformats.org/drawingml/2006/main">
+            <a:off x="11049000" y="6315075"/>
+            <a:ext cx="666750" cy="209550"/>
+          </a:xfrm>
+          <a:prstGeom xmlns:a="http://schemas.openxmlformats.org/drawingml/2006/main" prst="rect">
+            <a:avLst/>
+          </a:prstGeom>
+          <a:noFill xmlns:a="http://schemas.openxmlformats.org/drawingml/2006/main"/>
+          <a:ln xmlns:a="http://schemas.openxmlformats.org/drawingml/2006/main" w="0">
+            <a:noFill/>
+            <a:prstDash val="solid"/>
+          </a:ln>
+        </p:spPr>
+        <p:txBody>
+          <a:bodyPr xmlns:a="http://schemas.openxmlformats.org/drawingml/2006/main"/>
+          <a:lstStyle xmlns:a="http://schemas.openxmlformats.org/drawingml/2006/main">
+            <a:defPPr>
+              <a:defRPr sz="975" b="0">
+                <a:solidFill>
+                  <a:srgbClr val="536A78"/>
+                </a:solidFill>
+                <a:latin typeface="Arial"/>
+                <a:ea typeface="Arial"/>
+                <a:cs typeface="Arial"/>
+              </a:defRPr>
+            </a:defPPr>
+          </a:lstStyle>
+          <a:p xmlns:a="http://schemas.openxmlformats.org/drawingml/2006/main">
+            <a:pPr>
+              <a:defRPr sz="975" b="0">
+                <a:solidFill>
+                  <a:srgbClr val="536A78"/>
+                </a:solidFill>
+                <a:latin typeface="Arial"/>
+                <a:ea typeface="Arial"/>
+                <a:cs typeface="Arial"/>
+              </a:defRPr>
+            </a:pPr>
+            <a:r>
+              <a:rPr sz="975" b="0">
+                <a:solidFill>
+                  <a:srgbClr val="536A78"/>
+                </a:solidFill>
+                <a:latin typeface="Arial"/>
+                <a:ea typeface="Arial"/>
+                <a:cs typeface="Arial"/>
+              </a:rPr>
+              <a:t>02</a:t>
+            </a:r>
+          </a:p>
+        </p:txBody>
+      </p:sp>
+      <p:sp>
+        <p:nvSpPr>
+          <p:cNvPr id="5" name="">
+            <a:extLst xmlns:a="http://schemas.openxmlformats.org/drawingml/2006/main">
+              <a:ext uri="{FF2B5EF4-FFF2-40B4-BE49-F238E27FC236}">
+                <a16:creationId xmlns:a16="http://schemas.microsoft.com/office/drawing/2014/main" id="{1428BFF3-9119-4514-9894-15AAF55E896F}"/>
+              </a:ext>
+            </a:extLst>
+          </p:cNvPr>
+          <p:cNvSpPr>
+            <a:spLocks xmlns:a="http://schemas.openxmlformats.org/drawingml/2006/main" noGrp="1"/>
+          </p:cNvSpPr>
+          <p:nvPr/>
+        </p:nvSpPr>
+        <p:spPr>
+          <a:xfrm xmlns:a="http://schemas.openxmlformats.org/drawingml/2006/main">
+            <a:off x="619125" y="2085975"/>
+            <a:ext cx="10572750" cy="1619250"/>
           </a:xfrm>
           <a:prstGeom xmlns:a="http://schemas.openxmlformats.org/drawingml/2006/main" prst="rect">
             <a:avLst/>
@@ -6968,7 +7772,7 @@
             <a:defPPr>
               <a:defRPr sz="3150" b="1">
                 <a:solidFill>
-                  <a:srgbClr val="172B4D"/>
+                  <a:srgbClr val="18324A"/>
                 </a:solidFill>
                 <a:latin typeface="Arial"/>
                 <a:ea typeface="Arial"/>
@@ -6980,7 +7784,7 @@
             <a:pPr>
               <a:defRPr sz="3150" b="1">
                 <a:solidFill>
-                  <a:srgbClr val="172B4D"/>
+                  <a:srgbClr val="18324A"/>
                 </a:solidFill>
                 <a:latin typeface="Arial"/>
                 <a:ea typeface="Arial"/>
@@ -6990,23 +7794,23 @@
             <a:r>
               <a:rPr sz="3150" b="1">
                 <a:solidFill>
-                  <a:srgbClr val="172B4D"/>
+                  <a:srgbClr val="18324A"/>
                 </a:solidFill>
                 <a:latin typeface="Arial"/>
                 <a:ea typeface="Arial"/>
                 <a:cs typeface="Arial"/>
               </a:rPr>
-              <a:t>The retail ordering problem</a:t>
-            </a:r>
-          </a:p>
-        </p:txBody>
-      </p:sp>
-      <p:sp>
-        <p:nvSpPr>
-          <p:cNvPr id="2" name="">
-            <a:extLst xmlns:a="http://schemas.openxmlformats.org/drawingml/2006/main">
-              <a:ext uri="{FF2B5EF4-FFF2-40B4-BE49-F238E27FC236}">
-                <a16:creationId xmlns:a16="http://schemas.microsoft.com/office/drawing/2014/main" id="{D7372A03-03FC-443F-AB72-0B3870116181}"/>
+              <a:t>How much should the manager order before next week’s sales are known?</a:t>
+            </a:r>
+          </a:p>
+        </p:txBody>
+      </p:sp>
+      <p:sp>
+        <p:nvSpPr>
+          <p:cNvPr id="6" name="">
+            <a:extLst xmlns:a="http://schemas.openxmlformats.org/drawingml/2006/main">
+              <a:ext uri="{FF2B5EF4-FFF2-40B4-BE49-F238E27FC236}">
+                <a16:creationId xmlns:a16="http://schemas.microsoft.com/office/drawing/2014/main" id="{9B89BC4F-6504-4BC4-98B2-1C20817112D1}"/>
               </a:ext>
             </a:extLst>
           </p:cNvPr>
@@ -7017,8 +7821,8 @@
         </p:nvSpPr>
         <p:spPr>
           <a:xfrm xmlns:a="http://schemas.openxmlformats.org/drawingml/2006/main">
-            <a:off x="685800" y="6315075"/>
-            <a:ext cx="6096000" cy="266700"/>
+            <a:off x="638175" y="4391025"/>
+            <a:ext cx="4857750" cy="590550"/>
           </a:xfrm>
           <a:prstGeom xmlns:a="http://schemas.openxmlformats.org/drawingml/2006/main" prst="rect">
             <a:avLst/>
@@ -7033,9 +7837,9 @@
           <a:bodyPr xmlns:a="http://schemas.openxmlformats.org/drawingml/2006/main"/>
           <a:lstStyle xmlns:a="http://schemas.openxmlformats.org/drawingml/2006/main">
             <a:defPPr>
-              <a:defRPr sz="1050" b="0">
-                <a:solidFill>
-                  <a:srgbClr val="526174"/>
+              <a:defRPr sz="2475" b="1">
+                <a:solidFill>
+                  <a:srgbClr val="087E79"/>
                 </a:solidFill>
                 <a:latin typeface="Arial"/>
                 <a:ea typeface="Arial"/>
@@ -7045,9 +7849,9 @@
           </a:lstStyle>
           <a:p xmlns:a="http://schemas.openxmlformats.org/drawingml/2006/main">
             <a:pPr>
-              <a:defRPr sz="1050" b="0">
-                <a:solidFill>
-                  <a:srgbClr val="526174"/>
+              <a:defRPr sz="2475" b="1">
+                <a:solidFill>
+                  <a:srgbClr val="087E79"/>
                 </a:solidFill>
                 <a:latin typeface="Arial"/>
                 <a:ea typeface="Arial"/>
@@ -7055,25 +7859,25 @@
               </a:defRPr>
             </a:pPr>
             <a:r>
-              <a:rPr sz="1050" b="0">
-                <a:solidFill>
-                  <a:srgbClr val="526174"/>
+              <a:rPr sz="2475" b="1">
+                <a:solidFill>
+                  <a:srgbClr val="087E79"/>
                 </a:solidFill>
                 <a:latin typeface="Arial"/>
                 <a:ea typeface="Arial"/>
                 <a:cs typeface="Arial"/>
               </a:rPr>
-              <a:t>VUT AI SOLUTIONS  /  AIBUY3A</a:t>
-            </a:r>
-          </a:p>
-        </p:txBody>
-      </p:sp>
-      <p:sp>
-        <p:nvSpPr>
-          <p:cNvPr id="3" name="">
-            <a:extLst xmlns:a="http://schemas.openxmlformats.org/drawingml/2006/main">
-              <a:ext uri="{FF2B5EF4-FFF2-40B4-BE49-F238E27FC236}">
-                <a16:creationId xmlns:a16="http://schemas.microsoft.com/office/drawing/2014/main" id="{ECCE737A-F283-466B-9F4D-2BA06321016E}"/>
+              <a:t>Too little stock</a:t>
+            </a:r>
+          </a:p>
+        </p:txBody>
+      </p:sp>
+      <p:sp>
+        <p:nvSpPr>
+          <p:cNvPr id="7" name="">
+            <a:extLst xmlns:a="http://schemas.openxmlformats.org/drawingml/2006/main">
+              <a:ext uri="{FF2B5EF4-FFF2-40B4-BE49-F238E27FC236}">
+                <a16:creationId xmlns:a16="http://schemas.microsoft.com/office/drawing/2014/main" id="{0E7014F3-37D2-40EB-ADBF-E13BD3C91E25}"/>
               </a:ext>
             </a:extLst>
           </p:cNvPr>
@@ -7084,8 +7888,8 @@
         </p:nvSpPr>
         <p:spPr>
           <a:xfrm xmlns:a="http://schemas.openxmlformats.org/drawingml/2006/main">
-            <a:off x="11001375" y="6315075"/>
-            <a:ext cx="523875" cy="266700"/>
+            <a:off x="638175" y="4991100"/>
+            <a:ext cx="4857750" cy="447675"/>
           </a:xfrm>
           <a:prstGeom xmlns:a="http://schemas.openxmlformats.org/drawingml/2006/main" prst="rect">
             <a:avLst/>
@@ -7100,9 +7904,9 @@
           <a:bodyPr xmlns:a="http://schemas.openxmlformats.org/drawingml/2006/main"/>
           <a:lstStyle xmlns:a="http://schemas.openxmlformats.org/drawingml/2006/main">
             <a:defPPr>
-              <a:defRPr sz="1050" b="0">
-                <a:solidFill>
-                  <a:srgbClr val="526174"/>
+              <a:defRPr sz="1875" b="0">
+                <a:solidFill>
+                  <a:srgbClr val="536A78"/>
                 </a:solidFill>
                 <a:latin typeface="Arial"/>
                 <a:ea typeface="Arial"/>
@@ -7112,9 +7916,9 @@
           </a:lstStyle>
           <a:p xmlns:a="http://schemas.openxmlformats.org/drawingml/2006/main">
             <a:pPr>
-              <a:defRPr sz="1050" b="0">
-                <a:solidFill>
-                  <a:srgbClr val="526174"/>
+              <a:defRPr sz="1875" b="0">
+                <a:solidFill>
+                  <a:srgbClr val="536A78"/>
                 </a:solidFill>
                 <a:latin typeface="Arial"/>
                 <a:ea typeface="Arial"/>
@@ -7122,25 +7926,25 @@
               </a:defRPr>
             </a:pPr>
             <a:r>
-              <a:rPr sz="1050" b="0">
-                <a:solidFill>
-                  <a:srgbClr val="526174"/>
+              <a:rPr sz="1875" b="0">
+                <a:solidFill>
+                  <a:srgbClr val="536A78"/>
                 </a:solidFill>
                 <a:latin typeface="Arial"/>
                 <a:ea typeface="Arial"/>
                 <a:cs typeface="Arial"/>
               </a:rPr>
-              <a:t>02</a:t>
-            </a:r>
-          </a:p>
-        </p:txBody>
-      </p:sp>
-      <p:sp>
-        <p:nvSpPr>
-          <p:cNvPr id="4" name="">
-            <a:extLst xmlns:a="http://schemas.openxmlformats.org/drawingml/2006/main">
-              <a:ext uri="{FF2B5EF4-FFF2-40B4-BE49-F238E27FC236}">
-                <a16:creationId xmlns:a16="http://schemas.microsoft.com/office/drawing/2014/main" id="{3AFC4142-566E-4741-ACBD-8C68A6E88522}"/>
+              <a:t>Missed sales</a:t>
+            </a:r>
+          </a:p>
+        </p:txBody>
+      </p:sp>
+      <p:sp>
+        <p:nvSpPr>
+          <p:cNvPr id="8" name="">
+            <a:extLst xmlns:a="http://schemas.openxmlformats.org/drawingml/2006/main">
+              <a:ext uri="{FF2B5EF4-FFF2-40B4-BE49-F238E27FC236}">
+                <a16:creationId xmlns:a16="http://schemas.microsoft.com/office/drawing/2014/main" id="{F2435BE4-23F5-4FEC-B414-7810A827DE08}"/>
               </a:ext>
             </a:extLst>
           </p:cNvPr>
@@ -7151,8 +7955,8 @@
         </p:nvSpPr>
         <p:spPr>
           <a:xfrm xmlns:a="http://schemas.openxmlformats.org/drawingml/2006/main">
-            <a:off x="723900" y="1590675"/>
-            <a:ext cx="10477500" cy="1333500"/>
+            <a:off x="6381750" y="4391025"/>
+            <a:ext cx="4953000" cy="590550"/>
           </a:xfrm>
           <a:prstGeom xmlns:a="http://schemas.openxmlformats.org/drawingml/2006/main" prst="rect">
             <a:avLst/>
@@ -7167,9 +7971,9 @@
           <a:bodyPr xmlns:a="http://schemas.openxmlformats.org/drawingml/2006/main"/>
           <a:lstStyle xmlns:a="http://schemas.openxmlformats.org/drawingml/2006/main">
             <a:defPPr>
-              <a:defRPr sz="2775" b="1">
-                <a:solidFill>
-                  <a:srgbClr val="172B4D"/>
+              <a:defRPr sz="2475" b="1">
+                <a:solidFill>
+                  <a:srgbClr val="087E79"/>
                 </a:solidFill>
                 <a:latin typeface="Arial"/>
                 <a:ea typeface="Arial"/>
@@ -7179,9 +7983,9 @@
           </a:lstStyle>
           <a:p xmlns:a="http://schemas.openxmlformats.org/drawingml/2006/main">
             <a:pPr>
-              <a:defRPr sz="2775" b="1">
-                <a:solidFill>
-                  <a:srgbClr val="172B4D"/>
+              <a:defRPr sz="2475" b="1">
+                <a:solidFill>
+                  <a:srgbClr val="087E79"/>
                 </a:solidFill>
                 <a:latin typeface="Arial"/>
                 <a:ea typeface="Arial"/>
@@ -7189,25 +7993,25 @@
               </a:defRPr>
             </a:pPr>
             <a:r>
-              <a:rPr sz="2775" b="1">
-                <a:solidFill>
-                  <a:srgbClr val="172B4D"/>
+              <a:rPr sz="2475" b="1">
+                <a:solidFill>
+                  <a:srgbClr val="087E79"/>
                 </a:solidFill>
                 <a:latin typeface="Arial"/>
                 <a:ea typeface="Arial"/>
                 <a:cs typeface="Arial"/>
               </a:rPr>
-              <a:t>A manager must decide how much to order before next week’s sales are known.</a:t>
-            </a:r>
-          </a:p>
-        </p:txBody>
-      </p:sp>
-      <p:sp>
-        <p:nvSpPr>
-          <p:cNvPr id="5" name="">
-            <a:extLst xmlns:a="http://schemas.openxmlformats.org/drawingml/2006/main">
-              <a:ext uri="{FF2B5EF4-FFF2-40B4-BE49-F238E27FC236}">
-                <a16:creationId xmlns:a16="http://schemas.microsoft.com/office/drawing/2014/main" id="{1FC882A6-3B73-4091-8616-42A883137AA4}"/>
+              <a:t>Too much stock</a:t>
+            </a:r>
+          </a:p>
+        </p:txBody>
+      </p:sp>
+      <p:sp>
+        <p:nvSpPr>
+          <p:cNvPr id="9" name="">
+            <a:extLst xmlns:a="http://schemas.openxmlformats.org/drawingml/2006/main">
+              <a:ext uri="{FF2B5EF4-FFF2-40B4-BE49-F238E27FC236}">
+                <a16:creationId xmlns:a16="http://schemas.microsoft.com/office/drawing/2014/main" id="{1DFA4FC6-0B60-4EE8-A63D-FEDA267340B5}"/>
               </a:ext>
             </a:extLst>
           </p:cNvPr>
@@ -7218,8 +8022,8 @@
         </p:nvSpPr>
         <p:spPr>
           <a:xfrm xmlns:a="http://schemas.openxmlformats.org/drawingml/2006/main">
-            <a:off x="723900" y="3619500"/>
-            <a:ext cx="4953000" cy="628650"/>
+            <a:off x="6381750" y="4991100"/>
+            <a:ext cx="4953000" cy="542925"/>
           </a:xfrm>
           <a:prstGeom xmlns:a="http://schemas.openxmlformats.org/drawingml/2006/main" prst="rect">
             <a:avLst/>
@@ -7234,9 +8038,9 @@
           <a:bodyPr xmlns:a="http://schemas.openxmlformats.org/drawingml/2006/main"/>
           <a:lstStyle xmlns:a="http://schemas.openxmlformats.org/drawingml/2006/main">
             <a:defPPr>
-              <a:defRPr sz="2025" b="0">
-                <a:solidFill>
-                  <a:srgbClr val="172B4D"/>
+              <a:defRPr sz="1875" b="0">
+                <a:solidFill>
+                  <a:srgbClr val="536A78"/>
                 </a:solidFill>
                 <a:latin typeface="Arial"/>
                 <a:ea typeface="Arial"/>
@@ -7246,9 +8050,9 @@
           </a:lstStyle>
           <a:p xmlns:a="http://schemas.openxmlformats.org/drawingml/2006/main">
             <a:pPr>
-              <a:defRPr sz="2025" b="0">
-                <a:solidFill>
-                  <a:srgbClr val="172B4D"/>
+              <a:defRPr sz="1875" b="0">
+                <a:solidFill>
+                  <a:srgbClr val="536A78"/>
                 </a:solidFill>
                 <a:latin typeface="Arial"/>
                 <a:ea typeface="Arial"/>
@@ -7256,149 +8060,15 @@
               </a:defRPr>
             </a:pPr>
             <a:r>
-              <a:rPr sz="2025" b="0">
-                <a:solidFill>
-                  <a:srgbClr val="172B4D"/>
+              <a:rPr sz="1875" b="0">
+                <a:solidFill>
+                  <a:srgbClr val="536A78"/>
                 </a:solidFill>
                 <a:latin typeface="Arial"/>
                 <a:ea typeface="Arial"/>
                 <a:cs typeface="Arial"/>
               </a:rPr>
-              <a:t>Too little stock can mean missed sales.</a:t>
-            </a:r>
-          </a:p>
-        </p:txBody>
-      </p:sp>
-      <p:sp>
-        <p:nvSpPr>
-          <p:cNvPr id="6" name="">
-            <a:extLst xmlns:a="http://schemas.openxmlformats.org/drawingml/2006/main">
-              <a:ext uri="{FF2B5EF4-FFF2-40B4-BE49-F238E27FC236}">
-                <a16:creationId xmlns:a16="http://schemas.microsoft.com/office/drawing/2014/main" id="{A704DAD6-305F-42EA-9859-D6346D85F05F}"/>
-              </a:ext>
-            </a:extLst>
-          </p:cNvPr>
-          <p:cNvSpPr>
-            <a:spLocks xmlns:a="http://schemas.openxmlformats.org/drawingml/2006/main" noGrp="1"/>
-          </p:cNvSpPr>
-          <p:nvPr/>
-        </p:nvSpPr>
-        <p:spPr>
-          <a:xfrm xmlns:a="http://schemas.openxmlformats.org/drawingml/2006/main">
-            <a:off x="6477000" y="3619500"/>
-            <a:ext cx="4762500" cy="628650"/>
-          </a:xfrm>
-          <a:prstGeom xmlns:a="http://schemas.openxmlformats.org/drawingml/2006/main" prst="rect">
-            <a:avLst/>
-          </a:prstGeom>
-          <a:noFill xmlns:a="http://schemas.openxmlformats.org/drawingml/2006/main"/>
-          <a:ln xmlns:a="http://schemas.openxmlformats.org/drawingml/2006/main" w="0">
-            <a:noFill/>
-            <a:prstDash val="solid"/>
-          </a:ln>
-        </p:spPr>
-        <p:txBody>
-          <a:bodyPr xmlns:a="http://schemas.openxmlformats.org/drawingml/2006/main"/>
-          <a:lstStyle xmlns:a="http://schemas.openxmlformats.org/drawingml/2006/main">
-            <a:defPPr>
-              <a:defRPr sz="2025" b="0">
-                <a:solidFill>
-                  <a:srgbClr val="172B4D"/>
-                </a:solidFill>
-                <a:latin typeface="Arial"/>
-                <a:ea typeface="Arial"/>
-                <a:cs typeface="Arial"/>
-              </a:defRPr>
-            </a:defPPr>
-          </a:lstStyle>
-          <a:p xmlns:a="http://schemas.openxmlformats.org/drawingml/2006/main">
-            <a:pPr>
-              <a:defRPr sz="2025" b="0">
-                <a:solidFill>
-                  <a:srgbClr val="172B4D"/>
-                </a:solidFill>
-                <a:latin typeface="Arial"/>
-                <a:ea typeface="Arial"/>
-                <a:cs typeface="Arial"/>
-              </a:defRPr>
-            </a:pPr>
-            <a:r>
-              <a:rPr sz="2025" b="0">
-                <a:solidFill>
-                  <a:srgbClr val="172B4D"/>
-                </a:solidFill>
-                <a:latin typeface="Arial"/>
-                <a:ea typeface="Arial"/>
-                <a:cs typeface="Arial"/>
-              </a:rPr>
-              <a:t>Too much stock ties up money.</a:t>
-            </a:r>
-          </a:p>
-        </p:txBody>
-      </p:sp>
-      <p:sp>
-        <p:nvSpPr>
-          <p:cNvPr id="7" name="">
-            <a:extLst xmlns:a="http://schemas.openxmlformats.org/drawingml/2006/main">
-              <a:ext uri="{FF2B5EF4-FFF2-40B4-BE49-F238E27FC236}">
-                <a16:creationId xmlns:a16="http://schemas.microsoft.com/office/drawing/2014/main" id="{3BC838C2-B2E3-4777-8A78-7C5D251FCF45}"/>
-              </a:ext>
-            </a:extLst>
-          </p:cNvPr>
-          <p:cNvSpPr>
-            <a:spLocks xmlns:a="http://schemas.openxmlformats.org/drawingml/2006/main" noGrp="1"/>
-          </p:cNvSpPr>
-          <p:nvPr/>
-        </p:nvSpPr>
-        <p:spPr>
-          <a:xfrm xmlns:a="http://schemas.openxmlformats.org/drawingml/2006/main">
-            <a:off x="723900" y="5029200"/>
-            <a:ext cx="10477500" cy="714375"/>
-          </a:xfrm>
-          <a:prstGeom xmlns:a="http://schemas.openxmlformats.org/drawingml/2006/main" prst="rect">
-            <a:avLst/>
-          </a:prstGeom>
-          <a:noFill xmlns:a="http://schemas.openxmlformats.org/drawingml/2006/main"/>
-          <a:ln xmlns:a="http://schemas.openxmlformats.org/drawingml/2006/main" w="0">
-            <a:noFill/>
-            <a:prstDash val="solid"/>
-          </a:ln>
-        </p:spPr>
-        <p:txBody>
-          <a:bodyPr xmlns:a="http://schemas.openxmlformats.org/drawingml/2006/main"/>
-          <a:lstStyle xmlns:a="http://schemas.openxmlformats.org/drawingml/2006/main">
-            <a:defPPr>
-              <a:defRPr sz="2100" b="0">
-                <a:solidFill>
-                  <a:srgbClr val="0F766E"/>
-                </a:solidFill>
-                <a:latin typeface="Arial"/>
-                <a:ea typeface="Arial"/>
-                <a:cs typeface="Arial"/>
-              </a:defRPr>
-            </a:defPPr>
-          </a:lstStyle>
-          <a:p xmlns:a="http://schemas.openxmlformats.org/drawingml/2006/main">
-            <a:pPr>
-              <a:defRPr sz="2100" b="0">
-                <a:solidFill>
-                  <a:srgbClr val="0F766E"/>
-                </a:solidFill>
-                <a:latin typeface="Arial"/>
-                <a:ea typeface="Arial"/>
-                <a:cs typeface="Arial"/>
-              </a:defRPr>
-            </a:pPr>
-            <a:r>
-              <a:rPr sz="2100" b="0">
-                <a:solidFill>
-                  <a:srgbClr val="0F766E"/>
-                </a:solidFill>
-                <a:latin typeface="Arial"/>
-                <a:ea typeface="Arial"/>
-                <a:cs typeface="Arial"/>
-              </a:rPr>
-              <a:t>The app gives the manager a consistent estimate to check before ordering.</a:t>
+              <a:t>Money tied up in inventory</a:t>
             </a:r>
           </a:p>
         </p:txBody>
@@ -7406,7 +8076,7 @@
     </p:spTree>
     <p:extLst>
       <p:ext uri="{BB962C8B-B14F-4D97-AF65-F5344CB8AC3E}">
-        <p14:creationId xmlns:p14="http://schemas.microsoft.com/office/powerpoint/2010/main" val="663993441"/>
+        <p14:creationId xmlns:p14="http://schemas.microsoft.com/office/powerpoint/2010/main" val="1036595488"/>
       </p:ext>
     </p:extLst>
   </p:cSld>
@@ -7419,7 +8089,7 @@
     <p:bg>
       <p:bgPr>
         <a:solidFill xmlns:a="http://schemas.openxmlformats.org/drawingml/2006/main">
-          <a:srgbClr val="FFFFFF"/>
+          <a:srgbClr val="11263E"/>
         </a:solidFill>
       </p:bgPr>
     </p:bg>
@@ -7434,10 +8104,10 @@
       </p:grpSpPr>
       <p:sp>
         <p:nvSpPr>
-          <p:cNvPr id="8" name="">
-            <a:extLst xmlns:a="http://schemas.openxmlformats.org/drawingml/2006/main">
-              <a:ext uri="{FF2B5EF4-FFF2-40B4-BE49-F238E27FC236}">
-                <a16:creationId xmlns:a16="http://schemas.microsoft.com/office/drawing/2014/main" id="{1C65E7C2-7133-4BBB-9EC3-9095845A9AAE}"/>
+          <p:cNvPr id="12" name="">
+            <a:extLst xmlns:a="http://schemas.openxmlformats.org/drawingml/2006/main">
+              <a:ext uri="{FF2B5EF4-FFF2-40B4-BE49-F238E27FC236}">
+                <a16:creationId xmlns:a16="http://schemas.microsoft.com/office/drawing/2014/main" id="{55D94B22-8495-41CF-9AED-6F49DB43B31F}"/>
               </a:ext>
             </a:extLst>
           </p:cNvPr>
@@ -7448,8 +8118,8 @@
         </p:nvSpPr>
         <p:spPr>
           <a:xfrm xmlns:a="http://schemas.openxmlformats.org/drawingml/2006/main">
-            <a:off x="685800" y="476250"/>
-            <a:ext cx="10820400" cy="857250"/>
+            <a:off x="609600" y="400050"/>
+            <a:ext cx="5715000" cy="285750"/>
           </a:xfrm>
           <a:prstGeom xmlns:a="http://schemas.openxmlformats.org/drawingml/2006/main" prst="rect">
             <a:avLst/>
@@ -7464,9 +8134,9 @@
           <a:bodyPr xmlns:a="http://schemas.openxmlformats.org/drawingml/2006/main"/>
           <a:lstStyle xmlns:a="http://schemas.openxmlformats.org/drawingml/2006/main">
             <a:defPPr>
-              <a:defRPr sz="3150" b="1">
-                <a:solidFill>
-                  <a:srgbClr val="172B4D"/>
+              <a:defRPr sz="1200" b="1">
+                <a:solidFill>
+                  <a:srgbClr val="A9E7D7"/>
                 </a:solidFill>
                 <a:latin typeface="Arial"/>
                 <a:ea typeface="Arial"/>
@@ -7476,9 +8146,9 @@
           </a:lstStyle>
           <a:p xmlns:a="http://schemas.openxmlformats.org/drawingml/2006/main">
             <a:pPr>
-              <a:defRPr sz="3150" b="1">
-                <a:solidFill>
-                  <a:srgbClr val="172B4D"/>
+              <a:defRPr sz="1200" b="1">
+                <a:solidFill>
+                  <a:srgbClr val="A9E7D7"/>
                 </a:solidFill>
                 <a:latin typeface="Arial"/>
                 <a:ea typeface="Arial"/>
@@ -7486,15 +8156,15 @@
               </a:defRPr>
             </a:pPr>
             <a:r>
-              <a:rPr sz="3150" b="1">
-                <a:solidFill>
-                  <a:srgbClr val="172B4D"/>
+              <a:rPr sz="1200" b="1">
+                <a:solidFill>
+                  <a:srgbClr val="A9E7D7"/>
                 </a:solidFill>
                 <a:latin typeface="Arial"/>
                 <a:ea typeface="Arial"/>
                 <a:cs typeface="Arial"/>
               </a:rPr>
-              <a:t>Objective and scope</a:t>
+              <a:t>SCOPE</a:t>
             </a:r>
           </a:p>
         </p:txBody>
@@ -7504,7 +8174,7 @@
           <p:cNvPr id="2" name="">
             <a:extLst xmlns:a="http://schemas.openxmlformats.org/drawingml/2006/main">
               <a:ext uri="{FF2B5EF4-FFF2-40B4-BE49-F238E27FC236}">
-                <a16:creationId xmlns:a16="http://schemas.microsoft.com/office/drawing/2014/main" id="{3B496CA9-8019-4EF7-8749-E9D79ECB86FB}"/>
+                <a16:creationId xmlns:a16="http://schemas.microsoft.com/office/drawing/2014/main" id="{EC4024C2-6D4F-4E9E-8E47-B98E8BC0A625}"/>
               </a:ext>
             </a:extLst>
           </p:cNvPr>
@@ -7515,8 +8185,8 @@
         </p:nvSpPr>
         <p:spPr>
           <a:xfrm xmlns:a="http://schemas.openxmlformats.org/drawingml/2006/main">
-            <a:off x="685800" y="6315075"/>
-            <a:ext cx="6096000" cy="266700"/>
+            <a:off x="609600" y="876300"/>
+            <a:ext cx="10934700" cy="914400"/>
           </a:xfrm>
           <a:prstGeom xmlns:a="http://schemas.openxmlformats.org/drawingml/2006/main" prst="rect">
             <a:avLst/>
@@ -7531,9 +8201,9 @@
           <a:bodyPr xmlns:a="http://schemas.openxmlformats.org/drawingml/2006/main"/>
           <a:lstStyle xmlns:a="http://schemas.openxmlformats.org/drawingml/2006/main">
             <a:defPPr>
-              <a:defRPr sz="1050" b="0">
-                <a:solidFill>
-                  <a:srgbClr val="526174"/>
+              <a:defRPr sz="3300" b="1">
+                <a:solidFill>
+                  <a:srgbClr val="FFFFFF"/>
                 </a:solidFill>
                 <a:latin typeface="Arial"/>
                 <a:ea typeface="Arial"/>
@@ -7543,9 +8213,9 @@
           </a:lstStyle>
           <a:p xmlns:a="http://schemas.openxmlformats.org/drawingml/2006/main">
             <a:pPr>
-              <a:defRPr sz="1050" b="0">
-                <a:solidFill>
-                  <a:srgbClr val="526174"/>
+              <a:defRPr sz="3300" b="1">
+                <a:solidFill>
+                  <a:srgbClr val="FFFFFF"/>
                 </a:solidFill>
                 <a:latin typeface="Arial"/>
                 <a:ea typeface="Arial"/>
@@ -7553,15 +8223,15 @@
               </a:defRPr>
             </a:pPr>
             <a:r>
-              <a:rPr sz="1050" b="0">
-                <a:solidFill>
-                  <a:srgbClr val="526174"/>
+              <a:rPr sz="3300" b="1">
+                <a:solidFill>
+                  <a:srgbClr val="FFFFFF"/>
                 </a:solidFill>
                 <a:latin typeface="Arial"/>
                 <a:ea typeface="Arial"/>
                 <a:cs typeface="Arial"/>
               </a:rPr>
-              <a:t>VUT AI SOLUTIONS  /  AIBUY3A</a:t>
+              <a:t>A small, clear prototype</a:t>
             </a:r>
           </a:p>
         </p:txBody>
@@ -7571,7 +8241,7 @@
           <p:cNvPr id="3" name="">
             <a:extLst xmlns:a="http://schemas.openxmlformats.org/drawingml/2006/main">
               <a:ext uri="{FF2B5EF4-FFF2-40B4-BE49-F238E27FC236}">
-                <a16:creationId xmlns:a16="http://schemas.microsoft.com/office/drawing/2014/main" id="{5AFD832B-9776-4DEA-8ADE-FB48FA5D60FF}"/>
+                <a16:creationId xmlns:a16="http://schemas.microsoft.com/office/drawing/2014/main" id="{278E1886-8005-468E-9BF5-659B905A7178}"/>
               </a:ext>
             </a:extLst>
           </p:cNvPr>
@@ -7582,8 +8252,8 @@
         </p:nvSpPr>
         <p:spPr>
           <a:xfrm xmlns:a="http://schemas.openxmlformats.org/drawingml/2006/main">
-            <a:off x="11001375" y="6315075"/>
-            <a:ext cx="523875" cy="266700"/>
+            <a:off x="609600" y="6315075"/>
+            <a:ext cx="4000500" cy="209550"/>
           </a:xfrm>
           <a:prstGeom xmlns:a="http://schemas.openxmlformats.org/drawingml/2006/main" prst="rect">
             <a:avLst/>
@@ -7598,9 +8268,9 @@
           <a:bodyPr xmlns:a="http://schemas.openxmlformats.org/drawingml/2006/main"/>
           <a:lstStyle xmlns:a="http://schemas.openxmlformats.org/drawingml/2006/main">
             <a:defPPr>
-              <a:defRPr sz="1050" b="0">
-                <a:solidFill>
-                  <a:srgbClr val="526174"/>
+              <a:defRPr sz="975" b="1">
+                <a:solidFill>
+                  <a:srgbClr val="A9E7D7"/>
                 </a:solidFill>
                 <a:latin typeface="Arial"/>
                 <a:ea typeface="Arial"/>
@@ -7610,9 +8280,9 @@
           </a:lstStyle>
           <a:p xmlns:a="http://schemas.openxmlformats.org/drawingml/2006/main">
             <a:pPr>
-              <a:defRPr sz="1050" b="0">
-                <a:solidFill>
-                  <a:srgbClr val="526174"/>
+              <a:defRPr sz="975" b="1">
+                <a:solidFill>
+                  <a:srgbClr val="A9E7D7"/>
                 </a:solidFill>
                 <a:latin typeface="Arial"/>
                 <a:ea typeface="Arial"/>
@@ -7620,9 +8290,76 @@
               </a:defRPr>
             </a:pPr>
             <a:r>
-              <a:rPr sz="1050" b="0">
-                <a:solidFill>
-                  <a:srgbClr val="526174"/>
+              <a:rPr sz="975" b="1">
+                <a:solidFill>
+                  <a:srgbClr val="A9E7D7"/>
+                </a:solidFill>
+                <a:latin typeface="Arial"/>
+                <a:ea typeface="Arial"/>
+                <a:cs typeface="Arial"/>
+              </a:rPr>
+              <a:t>STOCKSENSE AI</a:t>
+            </a:r>
+          </a:p>
+        </p:txBody>
+      </p:sp>
+      <p:sp>
+        <p:nvSpPr>
+          <p:cNvPr id="4" name="">
+            <a:extLst xmlns:a="http://schemas.openxmlformats.org/drawingml/2006/main">
+              <a:ext uri="{FF2B5EF4-FFF2-40B4-BE49-F238E27FC236}">
+                <a16:creationId xmlns:a16="http://schemas.microsoft.com/office/drawing/2014/main" id="{7FC2AD71-985E-42CA-A1D4-7C1605510161}"/>
+              </a:ext>
+            </a:extLst>
+          </p:cNvPr>
+          <p:cNvSpPr>
+            <a:spLocks xmlns:a="http://schemas.openxmlformats.org/drawingml/2006/main" noGrp="1"/>
+          </p:cNvSpPr>
+          <p:nvPr/>
+        </p:nvSpPr>
+        <p:spPr>
+          <a:xfrm xmlns:a="http://schemas.openxmlformats.org/drawingml/2006/main">
+            <a:off x="11049000" y="6315075"/>
+            <a:ext cx="666750" cy="209550"/>
+          </a:xfrm>
+          <a:prstGeom xmlns:a="http://schemas.openxmlformats.org/drawingml/2006/main" prst="rect">
+            <a:avLst/>
+          </a:prstGeom>
+          <a:noFill xmlns:a="http://schemas.openxmlformats.org/drawingml/2006/main"/>
+          <a:ln xmlns:a="http://schemas.openxmlformats.org/drawingml/2006/main" w="0">
+            <a:noFill/>
+            <a:prstDash val="solid"/>
+          </a:ln>
+        </p:spPr>
+        <p:txBody>
+          <a:bodyPr xmlns:a="http://schemas.openxmlformats.org/drawingml/2006/main"/>
+          <a:lstStyle xmlns:a="http://schemas.openxmlformats.org/drawingml/2006/main">
+            <a:defPPr>
+              <a:defRPr sz="975" b="0">
+                <a:solidFill>
+                  <a:srgbClr val="A9E7D7"/>
+                </a:solidFill>
+                <a:latin typeface="Arial"/>
+                <a:ea typeface="Arial"/>
+                <a:cs typeface="Arial"/>
+              </a:defRPr>
+            </a:defPPr>
+          </a:lstStyle>
+          <a:p xmlns:a="http://schemas.openxmlformats.org/drawingml/2006/main">
+            <a:pPr>
+              <a:defRPr sz="975" b="0">
+                <a:solidFill>
+                  <a:srgbClr val="A9E7D7"/>
+                </a:solidFill>
+                <a:latin typeface="Arial"/>
+                <a:ea typeface="Arial"/>
+                <a:cs typeface="Arial"/>
+              </a:defRPr>
+            </a:pPr>
+            <a:r>
+              <a:rPr sz="975" b="0">
+                <a:solidFill>
+                  <a:srgbClr val="A9E7D7"/>
                 </a:solidFill>
                 <a:latin typeface="Arial"/>
                 <a:ea typeface="Arial"/>
@@ -7635,10 +8372,10 @@
       </p:sp>
       <p:sp>
         <p:nvSpPr>
-          <p:cNvPr id="4" name="">
-            <a:extLst xmlns:a="http://schemas.openxmlformats.org/drawingml/2006/main">
-              <a:ext uri="{FF2B5EF4-FFF2-40B4-BE49-F238E27FC236}">
-                <a16:creationId xmlns:a16="http://schemas.microsoft.com/office/drawing/2014/main" id="{B9AA5857-ABD2-4597-A745-DF925F740D39}"/>
+          <p:cNvPr id="5" name="">
+            <a:extLst xmlns:a="http://schemas.openxmlformats.org/drawingml/2006/main">
+              <a:ext uri="{FF2B5EF4-FFF2-40B4-BE49-F238E27FC236}">
+                <a16:creationId xmlns:a16="http://schemas.microsoft.com/office/drawing/2014/main" id="{CEC55CCA-8FA2-4061-90DE-520884088807}"/>
               </a:ext>
             </a:extLst>
           </p:cNvPr>
@@ -7649,8 +8386,8 @@
         </p:nvSpPr>
         <p:spPr>
           <a:xfrm xmlns:a="http://schemas.openxmlformats.org/drawingml/2006/main">
-            <a:off x="723900" y="1638300"/>
-            <a:ext cx="10477500" cy="1285875"/>
+            <a:off x="647700" y="2095500"/>
+            <a:ext cx="2857500" cy="1238250"/>
           </a:xfrm>
           <a:prstGeom xmlns:a="http://schemas.openxmlformats.org/drawingml/2006/main" prst="rect">
             <a:avLst/>
@@ -7665,9 +8402,9 @@
           <a:bodyPr xmlns:a="http://schemas.openxmlformats.org/drawingml/2006/main"/>
           <a:lstStyle xmlns:a="http://schemas.openxmlformats.org/drawingml/2006/main">
             <a:defPPr>
-              <a:defRPr sz="2550" b="1">
-                <a:solidFill>
-                  <a:srgbClr val="172B4D"/>
+              <a:defRPr sz="7800" b="1">
+                <a:solidFill>
+                  <a:srgbClr val="A9E7D7"/>
                 </a:solidFill>
                 <a:latin typeface="Arial"/>
                 <a:ea typeface="Arial"/>
@@ -7677,9 +8414,9 @@
           </a:lstStyle>
           <a:p xmlns:a="http://schemas.openxmlformats.org/drawingml/2006/main">
             <a:pPr>
-              <a:defRPr sz="2550" b="1">
-                <a:solidFill>
-                  <a:srgbClr val="172B4D"/>
+              <a:defRPr sz="7800" b="1">
+                <a:solidFill>
+                  <a:srgbClr val="A9E7D7"/>
                 </a:solidFill>
                 <a:latin typeface="Arial"/>
                 <a:ea typeface="Arial"/>
@@ -7687,25 +8424,25 @@
               </a:defRPr>
             </a:pPr>
             <a:r>
-              <a:rPr sz="2550" b="1">
-                <a:solidFill>
-                  <a:srgbClr val="172B4D"/>
+              <a:rPr sz="7800" b="1">
+                <a:solidFill>
+                  <a:srgbClr val="A9E7D7"/>
                 </a:solidFill>
                 <a:latin typeface="Arial"/>
                 <a:ea typeface="Arial"/>
                 <a:cs typeface="Arial"/>
               </a:rPr>
-              <a:t>Forecast seven days of sales for five products, then show a transparent order suggestion.</a:t>
-            </a:r>
-          </a:p>
-        </p:txBody>
-      </p:sp>
-      <p:sp>
-        <p:nvSpPr>
-          <p:cNvPr id="5" name="">
-            <a:extLst xmlns:a="http://schemas.openxmlformats.org/drawingml/2006/main">
-              <a:ext uri="{FF2B5EF4-FFF2-40B4-BE49-F238E27FC236}">
-                <a16:creationId xmlns:a16="http://schemas.microsoft.com/office/drawing/2014/main" id="{8B281BDE-BB53-4583-AD8D-69BA6E5DD320}"/>
+              <a:t>1</a:t>
+            </a:r>
+          </a:p>
+        </p:txBody>
+      </p:sp>
+      <p:sp>
+        <p:nvSpPr>
+          <p:cNvPr id="6" name="">
+            <a:extLst xmlns:a="http://schemas.openxmlformats.org/drawingml/2006/main">
+              <a:ext uri="{FF2B5EF4-FFF2-40B4-BE49-F238E27FC236}">
+                <a16:creationId xmlns:a16="http://schemas.microsoft.com/office/drawing/2014/main" id="{21991933-A0AF-4672-B17D-8475A52BBEF4}"/>
               </a:ext>
             </a:extLst>
           </p:cNvPr>
@@ -7716,8 +8453,8 @@
         </p:nvSpPr>
         <p:spPr>
           <a:xfrm xmlns:a="http://schemas.openxmlformats.org/drawingml/2006/main">
-            <a:off x="723900" y="3429000"/>
-            <a:ext cx="10477500" cy="581025"/>
+            <a:off x="666750" y="3362325"/>
+            <a:ext cx="3333750" cy="495300"/>
           </a:xfrm>
           <a:prstGeom xmlns:a="http://schemas.openxmlformats.org/drawingml/2006/main" prst="rect">
             <a:avLst/>
@@ -7732,9 +8469,9 @@
           <a:bodyPr xmlns:a="http://schemas.openxmlformats.org/drawingml/2006/main"/>
           <a:lstStyle xmlns:a="http://schemas.openxmlformats.org/drawingml/2006/main">
             <a:defPPr>
-              <a:defRPr sz="1875" b="0">
-                <a:solidFill>
-                  <a:srgbClr val="172B4D"/>
+              <a:defRPr sz="2250" b="0">
+                <a:solidFill>
+                  <a:srgbClr val="FFFFFF"/>
                 </a:solidFill>
                 <a:latin typeface="Arial"/>
                 <a:ea typeface="Arial"/>
@@ -7744,9 +8481,9 @@
           </a:lstStyle>
           <a:p xmlns:a="http://schemas.openxmlformats.org/drawingml/2006/main">
             <a:pPr>
-              <a:defRPr sz="1875" b="0">
-                <a:solidFill>
-                  <a:srgbClr val="172B4D"/>
+              <a:defRPr sz="2250" b="0">
+                <a:solidFill>
+                  <a:srgbClr val="FFFFFF"/>
                 </a:solidFill>
                 <a:latin typeface="Arial"/>
                 <a:ea typeface="Arial"/>
@@ -7754,25 +8491,25 @@
               </a:defRPr>
             </a:pPr>
             <a:r>
-              <a:rPr sz="1875" b="0">
-                <a:solidFill>
-                  <a:srgbClr val="172B4D"/>
+              <a:rPr sz="2250" b="0">
+                <a:solidFill>
+                  <a:srgbClr val="FFFFFF"/>
                 </a:solidFill>
                 <a:latin typeface="Arial"/>
                 <a:ea typeface="Arial"/>
                 <a:cs typeface="Arial"/>
               </a:rPr>
-              <a:t>One fictional retailer mapped to dataset Store 1</a:t>
-            </a:r>
-          </a:p>
-        </p:txBody>
-      </p:sp>
-      <p:sp>
-        <p:nvSpPr>
-          <p:cNvPr id="6" name="">
-            <a:extLst xmlns:a="http://schemas.openxmlformats.org/drawingml/2006/main">
-              <a:ext uri="{FF2B5EF4-FFF2-40B4-BE49-F238E27FC236}">
-                <a16:creationId xmlns:a16="http://schemas.microsoft.com/office/drawing/2014/main" id="{5FBF4AE8-53B6-4F90-B9A1-9501C777DAAC}"/>
+              <a:t>fictional store</a:t>
+            </a:r>
+          </a:p>
+        </p:txBody>
+      </p:sp>
+      <p:sp>
+        <p:nvSpPr>
+          <p:cNvPr id="7" name="">
+            <a:extLst xmlns:a="http://schemas.openxmlformats.org/drawingml/2006/main">
+              <a:ext uri="{FF2B5EF4-FFF2-40B4-BE49-F238E27FC236}">
+                <a16:creationId xmlns:a16="http://schemas.microsoft.com/office/drawing/2014/main" id="{DAA55E08-0CFF-41B3-A451-5505B8C65027}"/>
               </a:ext>
             </a:extLst>
           </p:cNvPr>
@@ -7783,8 +8520,8 @@
         </p:nvSpPr>
         <p:spPr>
           <a:xfrm xmlns:a="http://schemas.openxmlformats.org/drawingml/2006/main">
-            <a:off x="723900" y="4086225"/>
-            <a:ext cx="10477500" cy="581025"/>
+            <a:off x="4667250" y="2095500"/>
+            <a:ext cx="2381250" cy="1238250"/>
           </a:xfrm>
           <a:prstGeom xmlns:a="http://schemas.openxmlformats.org/drawingml/2006/main" prst="rect">
             <a:avLst/>
@@ -7799,9 +8536,9 @@
           <a:bodyPr xmlns:a="http://schemas.openxmlformats.org/drawingml/2006/main"/>
           <a:lstStyle xmlns:a="http://schemas.openxmlformats.org/drawingml/2006/main">
             <a:defPPr>
-              <a:defRPr sz="1875" b="0">
-                <a:solidFill>
-                  <a:srgbClr val="172B4D"/>
+              <a:defRPr sz="7800" b="1">
+                <a:solidFill>
+                  <a:srgbClr val="A9E7D7"/>
                 </a:solidFill>
                 <a:latin typeface="Arial"/>
                 <a:ea typeface="Arial"/>
@@ -7811,9 +8548,9 @@
           </a:lstStyle>
           <a:p xmlns:a="http://schemas.openxmlformats.org/drawingml/2006/main">
             <a:pPr>
-              <a:defRPr sz="1875" b="0">
-                <a:solidFill>
-                  <a:srgbClr val="172B4D"/>
+              <a:defRPr sz="7800" b="1">
+                <a:solidFill>
+                  <a:srgbClr val="A9E7D7"/>
                 </a:solidFill>
                 <a:latin typeface="Arial"/>
                 <a:ea typeface="Arial"/>
@@ -7821,25 +8558,25 @@
               </a:defRPr>
             </a:pPr>
             <a:r>
-              <a:rPr sz="1875" b="0">
-                <a:solidFill>
-                  <a:srgbClr val="172B4D"/>
+              <a:rPr sz="7800" b="1">
+                <a:solidFill>
+                  <a:srgbClr val="A9E7D7"/>
                 </a:solidFill>
                 <a:latin typeface="Arial"/>
                 <a:ea typeface="Arial"/>
                 <a:cs typeface="Arial"/>
               </a:rPr>
-              <a:t>Product 1–5 map to anonymous dataset Item 1–5</a:t>
-            </a:r>
-          </a:p>
-        </p:txBody>
-      </p:sp>
-      <p:sp>
-        <p:nvSpPr>
-          <p:cNvPr id="7" name="">
-            <a:extLst xmlns:a="http://schemas.openxmlformats.org/drawingml/2006/main">
-              <a:ext uri="{FF2B5EF4-FFF2-40B4-BE49-F238E27FC236}">
-                <a16:creationId xmlns:a16="http://schemas.microsoft.com/office/drawing/2014/main" id="{37B466AC-7598-4491-9AAD-31061F875885}"/>
+              <a:t>5</a:t>
+            </a:r>
+          </a:p>
+        </p:txBody>
+      </p:sp>
+      <p:sp>
+        <p:nvSpPr>
+          <p:cNvPr id="8" name="">
+            <a:extLst xmlns:a="http://schemas.openxmlformats.org/drawingml/2006/main">
+              <a:ext uri="{FF2B5EF4-FFF2-40B4-BE49-F238E27FC236}">
+                <a16:creationId xmlns:a16="http://schemas.microsoft.com/office/drawing/2014/main" id="{763EEA8B-6885-4369-A84D-8E5DC40C0E26}"/>
               </a:ext>
             </a:extLst>
           </p:cNvPr>
@@ -7850,8 +8587,8 @@
         </p:nvSpPr>
         <p:spPr>
           <a:xfrm xmlns:a="http://schemas.openxmlformats.org/drawingml/2006/main">
-            <a:off x="723900" y="4743450"/>
-            <a:ext cx="10477500" cy="581025"/>
+            <a:off x="4686300" y="3362325"/>
+            <a:ext cx="3524250" cy="495300"/>
           </a:xfrm>
           <a:prstGeom xmlns:a="http://schemas.openxmlformats.org/drawingml/2006/main" prst="rect">
             <a:avLst/>
@@ -7866,9 +8603,9 @@
           <a:bodyPr xmlns:a="http://schemas.openxmlformats.org/drawingml/2006/main"/>
           <a:lstStyle xmlns:a="http://schemas.openxmlformats.org/drawingml/2006/main">
             <a:defPPr>
-              <a:defRPr sz="1875" b="0">
-                <a:solidFill>
-                  <a:srgbClr val="172B4D"/>
+              <a:defRPr sz="2250" b="0">
+                <a:solidFill>
+                  <a:srgbClr val="FFFFFF"/>
                 </a:solidFill>
                 <a:latin typeface="Arial"/>
                 <a:ea typeface="Arial"/>
@@ -7878,9 +8615,9 @@
           </a:lstStyle>
           <a:p xmlns:a="http://schemas.openxmlformats.org/drawingml/2006/main">
             <a:pPr>
-              <a:defRPr sz="1875" b="0">
-                <a:solidFill>
-                  <a:srgbClr val="172B4D"/>
+              <a:defRPr sz="2250" b="0">
+                <a:solidFill>
+                  <a:srgbClr val="FFFFFF"/>
                 </a:solidFill>
                 <a:latin typeface="Arial"/>
                 <a:ea typeface="Arial"/>
@@ -7888,15 +8625,216 @@
               </a:defRPr>
             </a:pPr>
             <a:r>
-              <a:rPr sz="1875" b="0">
-                <a:solidFill>
-                  <a:srgbClr val="172B4D"/>
+              <a:rPr sz="2250" b="0">
+                <a:solidFill>
+                  <a:srgbClr val="FFFFFF"/>
                 </a:solidFill>
                 <a:latin typeface="Arial"/>
                 <a:ea typeface="Arial"/>
                 <a:cs typeface="Arial"/>
               </a:rPr>
-              <a:t>Stock and supplier values are entered for the demonstration</a:t>
+              <a:t>anonymous products</a:t>
+            </a:r>
+          </a:p>
+        </p:txBody>
+      </p:sp>
+      <p:sp>
+        <p:nvSpPr>
+          <p:cNvPr id="9" name="">
+            <a:extLst xmlns:a="http://schemas.openxmlformats.org/drawingml/2006/main">
+              <a:ext uri="{FF2B5EF4-FFF2-40B4-BE49-F238E27FC236}">
+                <a16:creationId xmlns:a16="http://schemas.microsoft.com/office/drawing/2014/main" id="{81214FCE-EB3D-4E00-9171-DDF418F07EEB}"/>
+              </a:ext>
+            </a:extLst>
+          </p:cNvPr>
+          <p:cNvSpPr>
+            <a:spLocks xmlns:a="http://schemas.openxmlformats.org/drawingml/2006/main" noGrp="1"/>
+          </p:cNvSpPr>
+          <p:nvPr/>
+        </p:nvSpPr>
+        <p:spPr>
+          <a:xfrm xmlns:a="http://schemas.openxmlformats.org/drawingml/2006/main">
+            <a:off x="8963025" y="2095500"/>
+            <a:ext cx="2286000" cy="1238250"/>
+          </a:xfrm>
+          <a:prstGeom xmlns:a="http://schemas.openxmlformats.org/drawingml/2006/main" prst="rect">
+            <a:avLst/>
+          </a:prstGeom>
+          <a:noFill xmlns:a="http://schemas.openxmlformats.org/drawingml/2006/main"/>
+          <a:ln xmlns:a="http://schemas.openxmlformats.org/drawingml/2006/main" w="0">
+            <a:noFill/>
+            <a:prstDash val="solid"/>
+          </a:ln>
+        </p:spPr>
+        <p:txBody>
+          <a:bodyPr xmlns:a="http://schemas.openxmlformats.org/drawingml/2006/main"/>
+          <a:lstStyle xmlns:a="http://schemas.openxmlformats.org/drawingml/2006/main">
+            <a:defPPr>
+              <a:defRPr sz="7800" b="1">
+                <a:solidFill>
+                  <a:srgbClr val="A9E7D7"/>
+                </a:solidFill>
+                <a:latin typeface="Arial"/>
+                <a:ea typeface="Arial"/>
+                <a:cs typeface="Arial"/>
+              </a:defRPr>
+            </a:defPPr>
+          </a:lstStyle>
+          <a:p xmlns:a="http://schemas.openxmlformats.org/drawingml/2006/main">
+            <a:pPr>
+              <a:defRPr sz="7800" b="1">
+                <a:solidFill>
+                  <a:srgbClr val="A9E7D7"/>
+                </a:solidFill>
+                <a:latin typeface="Arial"/>
+                <a:ea typeface="Arial"/>
+                <a:cs typeface="Arial"/>
+              </a:defRPr>
+            </a:pPr>
+            <a:r>
+              <a:rPr sz="7800" b="1">
+                <a:solidFill>
+                  <a:srgbClr val="A9E7D7"/>
+                </a:solidFill>
+                <a:latin typeface="Arial"/>
+                <a:ea typeface="Arial"/>
+                <a:cs typeface="Arial"/>
+              </a:rPr>
+              <a:t>7</a:t>
+            </a:r>
+          </a:p>
+        </p:txBody>
+      </p:sp>
+      <p:sp>
+        <p:nvSpPr>
+          <p:cNvPr id="10" name="">
+            <a:extLst xmlns:a="http://schemas.openxmlformats.org/drawingml/2006/main">
+              <a:ext uri="{FF2B5EF4-FFF2-40B4-BE49-F238E27FC236}">
+                <a16:creationId xmlns:a16="http://schemas.microsoft.com/office/drawing/2014/main" id="{3AB96A34-19AF-4A7A-BCA7-71E2B71D5477}"/>
+              </a:ext>
+            </a:extLst>
+          </p:cNvPr>
+          <p:cNvSpPr>
+            <a:spLocks xmlns:a="http://schemas.openxmlformats.org/drawingml/2006/main" noGrp="1"/>
+          </p:cNvSpPr>
+          <p:nvPr/>
+        </p:nvSpPr>
+        <p:spPr>
+          <a:xfrm xmlns:a="http://schemas.openxmlformats.org/drawingml/2006/main">
+            <a:off x="8953500" y="3362325"/>
+            <a:ext cx="2667000" cy="495300"/>
+          </a:xfrm>
+          <a:prstGeom xmlns:a="http://schemas.openxmlformats.org/drawingml/2006/main" prst="rect">
+            <a:avLst/>
+          </a:prstGeom>
+          <a:noFill xmlns:a="http://schemas.openxmlformats.org/drawingml/2006/main"/>
+          <a:ln xmlns:a="http://schemas.openxmlformats.org/drawingml/2006/main" w="0">
+            <a:noFill/>
+            <a:prstDash val="solid"/>
+          </a:ln>
+        </p:spPr>
+        <p:txBody>
+          <a:bodyPr xmlns:a="http://schemas.openxmlformats.org/drawingml/2006/main"/>
+          <a:lstStyle xmlns:a="http://schemas.openxmlformats.org/drawingml/2006/main">
+            <a:defPPr>
+              <a:defRPr sz="2250" b="0">
+                <a:solidFill>
+                  <a:srgbClr val="FFFFFF"/>
+                </a:solidFill>
+                <a:latin typeface="Arial"/>
+                <a:ea typeface="Arial"/>
+                <a:cs typeface="Arial"/>
+              </a:defRPr>
+            </a:defPPr>
+          </a:lstStyle>
+          <a:p xmlns:a="http://schemas.openxmlformats.org/drawingml/2006/main">
+            <a:pPr>
+              <a:defRPr sz="2250" b="0">
+                <a:solidFill>
+                  <a:srgbClr val="FFFFFF"/>
+                </a:solidFill>
+                <a:latin typeface="Arial"/>
+                <a:ea typeface="Arial"/>
+                <a:cs typeface="Arial"/>
+              </a:defRPr>
+            </a:pPr>
+            <a:r>
+              <a:rPr sz="2250" b="0">
+                <a:solidFill>
+                  <a:srgbClr val="FFFFFF"/>
+                </a:solidFill>
+                <a:latin typeface="Arial"/>
+                <a:ea typeface="Arial"/>
+                <a:cs typeface="Arial"/>
+              </a:rPr>
+              <a:t>forecast days</a:t>
+            </a:r>
+          </a:p>
+        </p:txBody>
+      </p:sp>
+      <p:sp>
+        <p:nvSpPr>
+          <p:cNvPr id="11" name="">
+            <a:extLst xmlns:a="http://schemas.openxmlformats.org/drawingml/2006/main">
+              <a:ext uri="{FF2B5EF4-FFF2-40B4-BE49-F238E27FC236}">
+                <a16:creationId xmlns:a16="http://schemas.microsoft.com/office/drawing/2014/main" id="{4CB7E545-59A0-4E13-B3B0-C15AC1896B51}"/>
+              </a:ext>
+            </a:extLst>
+          </p:cNvPr>
+          <p:cNvSpPr>
+            <a:spLocks xmlns:a="http://schemas.openxmlformats.org/drawingml/2006/main" noGrp="1"/>
+          </p:cNvSpPr>
+          <p:nvPr/>
+        </p:nvSpPr>
+        <p:spPr>
+          <a:xfrm xmlns:a="http://schemas.openxmlformats.org/drawingml/2006/main">
+            <a:off x="666750" y="4905375"/>
+            <a:ext cx="10572750" cy="952500"/>
+          </a:xfrm>
+          <a:prstGeom xmlns:a="http://schemas.openxmlformats.org/drawingml/2006/main" prst="rect">
+            <a:avLst/>
+          </a:prstGeom>
+          <a:noFill xmlns:a="http://schemas.openxmlformats.org/drawingml/2006/main"/>
+          <a:ln xmlns:a="http://schemas.openxmlformats.org/drawingml/2006/main" w="0">
+            <a:noFill/>
+            <a:prstDash val="solid"/>
+          </a:ln>
+        </p:spPr>
+        <p:txBody>
+          <a:bodyPr xmlns:a="http://schemas.openxmlformats.org/drawingml/2006/main"/>
+          <a:lstStyle xmlns:a="http://schemas.openxmlformats.org/drawingml/2006/main">
+            <a:defPPr>
+              <a:defRPr sz="2175" b="0">
+                <a:solidFill>
+                  <a:srgbClr val="FFFFFF"/>
+                </a:solidFill>
+                <a:latin typeface="Arial"/>
+                <a:ea typeface="Arial"/>
+                <a:cs typeface="Arial"/>
+              </a:defRPr>
+            </a:defPPr>
+          </a:lstStyle>
+          <a:p xmlns:a="http://schemas.openxmlformats.org/drawingml/2006/main">
+            <a:pPr>
+              <a:defRPr sz="2175" b="0">
+                <a:solidFill>
+                  <a:srgbClr val="FFFFFF"/>
+                </a:solidFill>
+                <a:latin typeface="Arial"/>
+                <a:ea typeface="Arial"/>
+                <a:cs typeface="Arial"/>
+              </a:defRPr>
+            </a:pPr>
+            <a:r>
+              <a:rPr sz="2175" b="0">
+                <a:solidFill>
+                  <a:srgbClr val="FFFFFF"/>
+                </a:solidFill>
+                <a:latin typeface="Arial"/>
+                <a:ea typeface="Arial"/>
+                <a:cs typeface="Arial"/>
+              </a:rPr>
+              <a:t>The app turns these forecasts and entered stock values into an order suggestion.</a:t>
             </a:r>
           </a:p>
         </p:txBody>
@@ -7904,7 +8842,7 @@
     </p:spTree>
     <p:extLst>
       <p:ext uri="{BB962C8B-B14F-4D97-AF65-F5344CB8AC3E}">
-        <p14:creationId xmlns:p14="http://schemas.microsoft.com/office/powerpoint/2010/main" val="1353972984"/>
+        <p14:creationId xmlns:p14="http://schemas.microsoft.com/office/powerpoint/2010/main" val="1285690700"/>
       </p:ext>
     </p:extLst>
   </p:cSld>
@@ -7917,7 +8855,7 @@
     <p:bg>
       <p:bgPr>
         <a:solidFill xmlns:a="http://schemas.openxmlformats.org/drawingml/2006/main">
-          <a:srgbClr val="FFFFFF"/>
+          <a:srgbClr val="F7F5F0"/>
         </a:solidFill>
       </p:bgPr>
     </p:bg>
@@ -7932,10 +8870,10 @@
       </p:grpSpPr>
       <p:sp>
         <p:nvSpPr>
-          <p:cNvPr id="10" name="">
-            <a:extLst xmlns:a="http://schemas.openxmlformats.org/drawingml/2006/main">
-              <a:ext uri="{FF2B5EF4-FFF2-40B4-BE49-F238E27FC236}">
-                <a16:creationId xmlns:a16="http://schemas.microsoft.com/office/drawing/2014/main" id="{3B15AD3D-9475-431F-A085-C26BF26C6B8A}"/>
+          <p:cNvPr id="11" name="">
+            <a:extLst xmlns:a="http://schemas.openxmlformats.org/drawingml/2006/main">
+              <a:ext uri="{FF2B5EF4-FFF2-40B4-BE49-F238E27FC236}">
+                <a16:creationId xmlns:a16="http://schemas.microsoft.com/office/drawing/2014/main" id="{C9B27962-68D9-4C1A-97A4-D9026906AB27}"/>
               </a:ext>
             </a:extLst>
           </p:cNvPr>
@@ -7946,8 +8884,8 @@
         </p:nvSpPr>
         <p:spPr>
           <a:xfrm xmlns:a="http://schemas.openxmlformats.org/drawingml/2006/main">
-            <a:off x="685800" y="476250"/>
-            <a:ext cx="10820400" cy="857250"/>
+            <a:off x="609600" y="400050"/>
+            <a:ext cx="5715000" cy="285750"/>
           </a:xfrm>
           <a:prstGeom xmlns:a="http://schemas.openxmlformats.org/drawingml/2006/main" prst="rect">
             <a:avLst/>
@@ -7962,9 +8900,9 @@
           <a:bodyPr xmlns:a="http://schemas.openxmlformats.org/drawingml/2006/main"/>
           <a:lstStyle xmlns:a="http://schemas.openxmlformats.org/drawingml/2006/main">
             <a:defPPr>
-              <a:defRPr sz="3150" b="1">
-                <a:solidFill>
-                  <a:srgbClr val="172B4D"/>
+              <a:defRPr sz="1200" b="1">
+                <a:solidFill>
+                  <a:srgbClr val="087E79"/>
                 </a:solidFill>
                 <a:latin typeface="Arial"/>
                 <a:ea typeface="Arial"/>
@@ -7974,9 +8912,9 @@
           </a:lstStyle>
           <a:p xmlns:a="http://schemas.openxmlformats.org/drawingml/2006/main">
             <a:pPr>
-              <a:defRPr sz="3150" b="1">
-                <a:solidFill>
-                  <a:srgbClr val="172B4D"/>
+              <a:defRPr sz="1200" b="1">
+                <a:solidFill>
+                  <a:srgbClr val="087E79"/>
                 </a:solidFill>
                 <a:latin typeface="Arial"/>
                 <a:ea typeface="Arial"/>
@@ -7984,15 +8922,15 @@
               </a:defRPr>
             </a:pPr>
             <a:r>
-              <a:rPr sz="3150" b="1">
-                <a:solidFill>
-                  <a:srgbClr val="172B4D"/>
+              <a:rPr sz="1200" b="1">
+                <a:solidFill>
+                  <a:srgbClr val="087E79"/>
                 </a:solidFill>
                 <a:latin typeface="Arial"/>
                 <a:ea typeface="Arial"/>
                 <a:cs typeface="Arial"/>
               </a:rPr>
-              <a:t>Sales dataset</a:t>
+              <a:t>DATASET</a:t>
             </a:r>
           </a:p>
         </p:txBody>
@@ -8002,7 +8940,7 @@
           <p:cNvPr id="2" name="">
             <a:extLst xmlns:a="http://schemas.openxmlformats.org/drawingml/2006/main">
               <a:ext uri="{FF2B5EF4-FFF2-40B4-BE49-F238E27FC236}">
-                <a16:creationId xmlns:a16="http://schemas.microsoft.com/office/drawing/2014/main" id="{714F6217-1C93-4744-AD96-8A9963857CA6}"/>
+                <a16:creationId xmlns:a16="http://schemas.microsoft.com/office/drawing/2014/main" id="{CD0A37D2-7972-4708-BD1C-2979E41EBBD3}"/>
               </a:ext>
             </a:extLst>
           </p:cNvPr>
@@ -8013,8 +8951,8 @@
         </p:nvSpPr>
         <p:spPr>
           <a:xfrm xmlns:a="http://schemas.openxmlformats.org/drawingml/2006/main">
-            <a:off x="685800" y="6315075"/>
-            <a:ext cx="6096000" cy="266700"/>
+            <a:off x="609600" y="876300"/>
+            <a:ext cx="10934700" cy="914400"/>
           </a:xfrm>
           <a:prstGeom xmlns:a="http://schemas.openxmlformats.org/drawingml/2006/main" prst="rect">
             <a:avLst/>
@@ -8029,9 +8967,9 @@
           <a:bodyPr xmlns:a="http://schemas.openxmlformats.org/drawingml/2006/main"/>
           <a:lstStyle xmlns:a="http://schemas.openxmlformats.org/drawingml/2006/main">
             <a:defPPr>
-              <a:defRPr sz="1050" b="0">
-                <a:solidFill>
-                  <a:srgbClr val="526174"/>
+              <a:defRPr sz="3300" b="1">
+                <a:solidFill>
+                  <a:srgbClr val="18324A"/>
                 </a:solidFill>
                 <a:latin typeface="Arial"/>
                 <a:ea typeface="Arial"/>
@@ -8041,9 +8979,9 @@
           </a:lstStyle>
           <a:p xmlns:a="http://schemas.openxmlformats.org/drawingml/2006/main">
             <a:pPr>
-              <a:defRPr sz="1050" b="0">
-                <a:solidFill>
-                  <a:srgbClr val="526174"/>
+              <a:defRPr sz="3300" b="1">
+                <a:solidFill>
+                  <a:srgbClr val="18324A"/>
                 </a:solidFill>
                 <a:latin typeface="Arial"/>
                 <a:ea typeface="Arial"/>
@@ -8051,15 +8989,15 @@
               </a:defRPr>
             </a:pPr>
             <a:r>
-              <a:rPr sz="1050" b="0">
-                <a:solidFill>
-                  <a:srgbClr val="526174"/>
+              <a:rPr sz="3300" b="1">
+                <a:solidFill>
+                  <a:srgbClr val="18324A"/>
                 </a:solidFill>
                 <a:latin typeface="Arial"/>
                 <a:ea typeface="Arial"/>
                 <a:cs typeface="Arial"/>
               </a:rPr>
-              <a:t>VUT AI SOLUTIONS  /  AIBUY3A</a:t>
+              <a:t>The sales data</a:t>
             </a:r>
           </a:p>
         </p:txBody>
@@ -8069,7 +9007,7 @@
           <p:cNvPr id="3" name="">
             <a:extLst xmlns:a="http://schemas.openxmlformats.org/drawingml/2006/main">
               <a:ext uri="{FF2B5EF4-FFF2-40B4-BE49-F238E27FC236}">
-                <a16:creationId xmlns:a16="http://schemas.microsoft.com/office/drawing/2014/main" id="{46EF2C24-5492-4523-8E25-E23621A8B439}"/>
+                <a16:creationId xmlns:a16="http://schemas.microsoft.com/office/drawing/2014/main" id="{A58CECB5-C875-47D5-A8E7-CA1B80FB79F2}"/>
               </a:ext>
             </a:extLst>
           </p:cNvPr>
@@ -8080,8 +9018,8 @@
         </p:nvSpPr>
         <p:spPr>
           <a:xfrm xmlns:a="http://schemas.openxmlformats.org/drawingml/2006/main">
-            <a:off x="11001375" y="6315075"/>
-            <a:ext cx="523875" cy="266700"/>
+            <a:off x="609600" y="6315075"/>
+            <a:ext cx="4000500" cy="209550"/>
           </a:xfrm>
           <a:prstGeom xmlns:a="http://schemas.openxmlformats.org/drawingml/2006/main" prst="rect">
             <a:avLst/>
@@ -8096,9 +9034,9 @@
           <a:bodyPr xmlns:a="http://schemas.openxmlformats.org/drawingml/2006/main"/>
           <a:lstStyle xmlns:a="http://schemas.openxmlformats.org/drawingml/2006/main">
             <a:defPPr>
-              <a:defRPr sz="1050" b="0">
-                <a:solidFill>
-                  <a:srgbClr val="526174"/>
+              <a:defRPr sz="975" b="1">
+                <a:solidFill>
+                  <a:srgbClr val="536A78"/>
                 </a:solidFill>
                 <a:latin typeface="Arial"/>
                 <a:ea typeface="Arial"/>
@@ -8108,9 +9046,9 @@
           </a:lstStyle>
           <a:p xmlns:a="http://schemas.openxmlformats.org/drawingml/2006/main">
             <a:pPr>
-              <a:defRPr sz="1050" b="0">
-                <a:solidFill>
-                  <a:srgbClr val="526174"/>
+              <a:defRPr sz="975" b="1">
+                <a:solidFill>
+                  <a:srgbClr val="536A78"/>
                 </a:solidFill>
                 <a:latin typeface="Arial"/>
                 <a:ea typeface="Arial"/>
@@ -8118,9 +9056,76 @@
               </a:defRPr>
             </a:pPr>
             <a:r>
-              <a:rPr sz="1050" b="0">
-                <a:solidFill>
-                  <a:srgbClr val="526174"/>
+              <a:rPr sz="975" b="1">
+                <a:solidFill>
+                  <a:srgbClr val="536A78"/>
+                </a:solidFill>
+                <a:latin typeface="Arial"/>
+                <a:ea typeface="Arial"/>
+                <a:cs typeface="Arial"/>
+              </a:rPr>
+              <a:t>STOCKSENSE AI</a:t>
+            </a:r>
+          </a:p>
+        </p:txBody>
+      </p:sp>
+      <p:sp>
+        <p:nvSpPr>
+          <p:cNvPr id="4" name="">
+            <a:extLst xmlns:a="http://schemas.openxmlformats.org/drawingml/2006/main">
+              <a:ext uri="{FF2B5EF4-FFF2-40B4-BE49-F238E27FC236}">
+                <a16:creationId xmlns:a16="http://schemas.microsoft.com/office/drawing/2014/main" id="{845C082C-6B4B-4677-80A3-EFDFD27FE05C}"/>
+              </a:ext>
+            </a:extLst>
+          </p:cNvPr>
+          <p:cNvSpPr>
+            <a:spLocks xmlns:a="http://schemas.openxmlformats.org/drawingml/2006/main" noGrp="1"/>
+          </p:cNvSpPr>
+          <p:nvPr/>
+        </p:nvSpPr>
+        <p:spPr>
+          <a:xfrm xmlns:a="http://schemas.openxmlformats.org/drawingml/2006/main">
+            <a:off x="11049000" y="6315075"/>
+            <a:ext cx="666750" cy="209550"/>
+          </a:xfrm>
+          <a:prstGeom xmlns:a="http://schemas.openxmlformats.org/drawingml/2006/main" prst="rect">
+            <a:avLst/>
+          </a:prstGeom>
+          <a:noFill xmlns:a="http://schemas.openxmlformats.org/drawingml/2006/main"/>
+          <a:ln xmlns:a="http://schemas.openxmlformats.org/drawingml/2006/main" w="0">
+            <a:noFill/>
+            <a:prstDash val="solid"/>
+          </a:ln>
+        </p:spPr>
+        <p:txBody>
+          <a:bodyPr xmlns:a="http://schemas.openxmlformats.org/drawingml/2006/main"/>
+          <a:lstStyle xmlns:a="http://schemas.openxmlformats.org/drawingml/2006/main">
+            <a:defPPr>
+              <a:defRPr sz="975" b="0">
+                <a:solidFill>
+                  <a:srgbClr val="536A78"/>
+                </a:solidFill>
+                <a:latin typeface="Arial"/>
+                <a:ea typeface="Arial"/>
+                <a:cs typeface="Arial"/>
+              </a:defRPr>
+            </a:defPPr>
+          </a:lstStyle>
+          <a:p xmlns:a="http://schemas.openxmlformats.org/drawingml/2006/main">
+            <a:pPr>
+              <a:defRPr sz="975" b="0">
+                <a:solidFill>
+                  <a:srgbClr val="536A78"/>
+                </a:solidFill>
+                <a:latin typeface="Arial"/>
+                <a:ea typeface="Arial"/>
+                <a:cs typeface="Arial"/>
+              </a:defRPr>
+            </a:pPr>
+            <a:r>
+              <a:rPr sz="975" b="0">
+                <a:solidFill>
+                  <a:srgbClr val="536A78"/>
                 </a:solidFill>
                 <a:latin typeface="Arial"/>
                 <a:ea typeface="Arial"/>
@@ -8133,10 +9138,10 @@
       </p:sp>
       <p:sp>
         <p:nvSpPr>
-          <p:cNvPr id="4" name="">
-            <a:extLst xmlns:a="http://schemas.openxmlformats.org/drawingml/2006/main">
-              <a:ext uri="{FF2B5EF4-FFF2-40B4-BE49-F238E27FC236}">
-                <a16:creationId xmlns:a16="http://schemas.microsoft.com/office/drawing/2014/main" id="{A04EEDA4-9C46-4FF1-A3CC-C8387FA14A86}"/>
+          <p:cNvPr id="5" name="">
+            <a:extLst xmlns:a="http://schemas.openxmlformats.org/drawingml/2006/main">
+              <a:ext uri="{FF2B5EF4-FFF2-40B4-BE49-F238E27FC236}">
+                <a16:creationId xmlns:a16="http://schemas.microsoft.com/office/drawing/2014/main" id="{4B4F3AD5-8A61-4388-842E-66F2CC165072}"/>
               </a:ext>
             </a:extLst>
           </p:cNvPr>
@@ -8147,8 +9152,8 @@
         </p:nvSpPr>
         <p:spPr>
           <a:xfrm xmlns:a="http://schemas.openxmlformats.org/drawingml/2006/main">
-            <a:off x="714375" y="1704975"/>
-            <a:ext cx="4762500" cy="857250"/>
+            <a:off x="619125" y="2095500"/>
+            <a:ext cx="5048250" cy="1047750"/>
           </a:xfrm>
           <a:prstGeom xmlns:a="http://schemas.openxmlformats.org/drawingml/2006/main" prst="rect">
             <a:avLst/>
@@ -8163,9 +9168,9 @@
           <a:bodyPr xmlns:a="http://schemas.openxmlformats.org/drawingml/2006/main"/>
           <a:lstStyle xmlns:a="http://schemas.openxmlformats.org/drawingml/2006/main">
             <a:defPPr>
-              <a:defRPr sz="4575" b="1">
-                <a:solidFill>
-                  <a:srgbClr val="0F766E"/>
+              <a:defRPr sz="5625" b="1">
+                <a:solidFill>
+                  <a:srgbClr val="087E79"/>
                 </a:solidFill>
                 <a:latin typeface="Arial"/>
                 <a:ea typeface="Arial"/>
@@ -8175,9 +9180,9 @@
           </a:lstStyle>
           <a:p xmlns:a="http://schemas.openxmlformats.org/drawingml/2006/main">
             <a:pPr>
-              <a:defRPr sz="4575" b="1">
-                <a:solidFill>
-                  <a:srgbClr val="0F766E"/>
+              <a:defRPr sz="5625" b="1">
+                <a:solidFill>
+                  <a:srgbClr val="087E79"/>
                 </a:solidFill>
                 <a:latin typeface="Arial"/>
                 <a:ea typeface="Arial"/>
@@ -8185,9 +9190,9 @@
               </a:defRPr>
             </a:pPr>
             <a:r>
-              <a:rPr sz="4575" b="1">
-                <a:solidFill>
-                  <a:srgbClr val="0F766E"/>
+              <a:rPr sz="5625" b="1">
+                <a:solidFill>
+                  <a:srgbClr val="087E79"/>
                 </a:solidFill>
                 <a:latin typeface="Arial"/>
                 <a:ea typeface="Arial"/>
@@ -8200,10 +9205,10 @@
       </p:sp>
       <p:sp>
         <p:nvSpPr>
-          <p:cNvPr id="5" name="">
-            <a:extLst xmlns:a="http://schemas.openxmlformats.org/drawingml/2006/main">
-              <a:ext uri="{FF2B5EF4-FFF2-40B4-BE49-F238E27FC236}">
-                <a16:creationId xmlns:a16="http://schemas.microsoft.com/office/drawing/2014/main" id="{2910C1EE-359D-4858-BABF-340A2175354A}"/>
+          <p:cNvPr id="6" name="">
+            <a:extLst xmlns:a="http://schemas.openxmlformats.org/drawingml/2006/main">
+              <a:ext uri="{FF2B5EF4-FFF2-40B4-BE49-F238E27FC236}">
+                <a16:creationId xmlns:a16="http://schemas.microsoft.com/office/drawing/2014/main" id="{226C15EF-1E87-4D1B-B70A-D91B7F135014}"/>
               </a:ext>
             </a:extLst>
           </p:cNvPr>
@@ -8214,8 +9219,276 @@
         </p:nvSpPr>
         <p:spPr>
           <a:xfrm xmlns:a="http://schemas.openxmlformats.org/drawingml/2006/main">
-            <a:off x="742950" y="2667000"/>
-            <a:ext cx="4286250" cy="457200"/>
+            <a:off x="657225" y="3209925"/>
+            <a:ext cx="5238750" cy="466725"/>
+          </a:xfrm>
+          <a:prstGeom xmlns:a="http://schemas.openxmlformats.org/drawingml/2006/main" prst="rect">
+            <a:avLst/>
+          </a:prstGeom>
+          <a:noFill xmlns:a="http://schemas.openxmlformats.org/drawingml/2006/main"/>
+          <a:ln xmlns:a="http://schemas.openxmlformats.org/drawingml/2006/main" w="0">
+            <a:noFill/>
+            <a:prstDash val="solid"/>
+          </a:ln>
+        </p:spPr>
+        <p:txBody>
+          <a:bodyPr xmlns:a="http://schemas.openxmlformats.org/drawingml/2006/main"/>
+          <a:lstStyle xmlns:a="http://schemas.openxmlformats.org/drawingml/2006/main">
+            <a:defPPr>
+              <a:defRPr sz="1950" b="0">
+                <a:solidFill>
+                  <a:srgbClr val="18324A"/>
+                </a:solidFill>
+                <a:latin typeface="Arial"/>
+                <a:ea typeface="Arial"/>
+                <a:cs typeface="Arial"/>
+              </a:defRPr>
+            </a:defPPr>
+          </a:lstStyle>
+          <a:p xmlns:a="http://schemas.openxmlformats.org/drawingml/2006/main">
+            <a:pPr>
+              <a:defRPr sz="1950" b="0">
+                <a:solidFill>
+                  <a:srgbClr val="18324A"/>
+                </a:solidFill>
+                <a:latin typeface="Arial"/>
+                <a:ea typeface="Arial"/>
+                <a:cs typeface="Arial"/>
+              </a:defRPr>
+            </a:pPr>
+            <a:r>
+              <a:rPr sz="1950" b="0">
+                <a:solidFill>
+                  <a:srgbClr val="18324A"/>
+                </a:solidFill>
+                <a:latin typeface="Arial"/>
+                <a:ea typeface="Arial"/>
+                <a:cs typeface="Arial"/>
+              </a:rPr>
+              <a:t>rows in the source file</a:t>
+            </a:r>
+          </a:p>
+        </p:txBody>
+      </p:sp>
+      <p:sp>
+        <p:nvSpPr>
+          <p:cNvPr id="7" name="">
+            <a:extLst xmlns:a="http://schemas.openxmlformats.org/drawingml/2006/main">
+              <a:ext uri="{FF2B5EF4-FFF2-40B4-BE49-F238E27FC236}">
+                <a16:creationId xmlns:a16="http://schemas.microsoft.com/office/drawing/2014/main" id="{EAD2F1AE-A775-4AB3-B2DA-3C3446EA60C7}"/>
+              </a:ext>
+            </a:extLst>
+          </p:cNvPr>
+          <p:cNvSpPr>
+            <a:spLocks xmlns:a="http://schemas.openxmlformats.org/drawingml/2006/main" noGrp="1"/>
+          </p:cNvSpPr>
+          <p:nvPr/>
+        </p:nvSpPr>
+        <p:spPr>
+          <a:xfrm xmlns:a="http://schemas.openxmlformats.org/drawingml/2006/main">
+            <a:off x="6381750" y="2095500"/>
+            <a:ext cx="5048250" cy="1047750"/>
+          </a:xfrm>
+          <a:prstGeom xmlns:a="http://schemas.openxmlformats.org/drawingml/2006/main" prst="rect">
+            <a:avLst/>
+          </a:prstGeom>
+          <a:noFill xmlns:a="http://schemas.openxmlformats.org/drawingml/2006/main"/>
+          <a:ln xmlns:a="http://schemas.openxmlformats.org/drawingml/2006/main" w="0">
+            <a:noFill/>
+            <a:prstDash val="solid"/>
+          </a:ln>
+        </p:spPr>
+        <p:txBody>
+          <a:bodyPr xmlns:a="http://schemas.openxmlformats.org/drawingml/2006/main"/>
+          <a:lstStyle xmlns:a="http://schemas.openxmlformats.org/drawingml/2006/main">
+            <a:defPPr>
+              <a:defRPr sz="5625" b="1">
+                <a:solidFill>
+                  <a:srgbClr val="18324A"/>
+                </a:solidFill>
+                <a:latin typeface="Arial"/>
+                <a:ea typeface="Arial"/>
+                <a:cs typeface="Arial"/>
+              </a:defRPr>
+            </a:defPPr>
+          </a:lstStyle>
+          <a:p xmlns:a="http://schemas.openxmlformats.org/drawingml/2006/main">
+            <a:pPr>
+              <a:defRPr sz="5625" b="1">
+                <a:solidFill>
+                  <a:srgbClr val="18324A"/>
+                </a:solidFill>
+                <a:latin typeface="Arial"/>
+                <a:ea typeface="Arial"/>
+                <a:cs typeface="Arial"/>
+              </a:defRPr>
+            </a:pPr>
+            <a:r>
+              <a:rPr sz="5625" b="1">
+                <a:solidFill>
+                  <a:srgbClr val="18324A"/>
+                </a:solidFill>
+                <a:latin typeface="Arial"/>
+                <a:ea typeface="Arial"/>
+                <a:cs typeface="Arial"/>
+              </a:rPr>
+              <a:t>9,130</a:t>
+            </a:r>
+          </a:p>
+        </p:txBody>
+      </p:sp>
+      <p:sp>
+        <p:nvSpPr>
+          <p:cNvPr id="8" name="">
+            <a:extLst xmlns:a="http://schemas.openxmlformats.org/drawingml/2006/main">
+              <a:ext uri="{FF2B5EF4-FFF2-40B4-BE49-F238E27FC236}">
+                <a16:creationId xmlns:a16="http://schemas.microsoft.com/office/drawing/2014/main" id="{2693E08C-B2BD-4B03-988A-9557297119EE}"/>
+              </a:ext>
+            </a:extLst>
+          </p:cNvPr>
+          <p:cNvSpPr>
+            <a:spLocks xmlns:a="http://schemas.openxmlformats.org/drawingml/2006/main" noGrp="1"/>
+          </p:cNvSpPr>
+          <p:nvPr/>
+        </p:nvSpPr>
+        <p:spPr>
+          <a:xfrm xmlns:a="http://schemas.openxmlformats.org/drawingml/2006/main">
+            <a:off x="6410325" y="3209925"/>
+            <a:ext cx="5048250" cy="723900"/>
+          </a:xfrm>
+          <a:prstGeom xmlns:a="http://schemas.openxmlformats.org/drawingml/2006/main" prst="rect">
+            <a:avLst/>
+          </a:prstGeom>
+          <a:noFill xmlns:a="http://schemas.openxmlformats.org/drawingml/2006/main"/>
+          <a:ln xmlns:a="http://schemas.openxmlformats.org/drawingml/2006/main" w="0">
+            <a:noFill/>
+            <a:prstDash val="solid"/>
+          </a:ln>
+        </p:spPr>
+        <p:txBody>
+          <a:bodyPr xmlns:a="http://schemas.openxmlformats.org/drawingml/2006/main"/>
+          <a:lstStyle xmlns:a="http://schemas.openxmlformats.org/drawingml/2006/main">
+            <a:defPPr>
+              <a:defRPr sz="1950" b="0">
+                <a:solidFill>
+                  <a:srgbClr val="18324A"/>
+                </a:solidFill>
+                <a:latin typeface="Arial"/>
+                <a:ea typeface="Arial"/>
+                <a:cs typeface="Arial"/>
+              </a:defRPr>
+            </a:defPPr>
+          </a:lstStyle>
+          <a:p xmlns:a="http://schemas.openxmlformats.org/drawingml/2006/main">
+            <a:pPr>
+              <a:defRPr sz="1950" b="0">
+                <a:solidFill>
+                  <a:srgbClr val="18324A"/>
+                </a:solidFill>
+                <a:latin typeface="Arial"/>
+                <a:ea typeface="Arial"/>
+                <a:cs typeface="Arial"/>
+              </a:defRPr>
+            </a:pPr>
+            <a:r>
+              <a:rPr sz="1950" b="0">
+                <a:solidFill>
+                  <a:srgbClr val="18324A"/>
+                </a:solidFill>
+                <a:latin typeface="Arial"/>
+                <a:ea typeface="Arial"/>
+                <a:cs typeface="Arial"/>
+              </a:rPr>
+              <a:t>rows in our selected store and items</a:t>
+            </a:r>
+          </a:p>
+        </p:txBody>
+      </p:sp>
+      <p:sp>
+        <p:nvSpPr>
+          <p:cNvPr id="9" name="">
+            <a:extLst xmlns:a="http://schemas.openxmlformats.org/drawingml/2006/main">
+              <a:ext uri="{FF2B5EF4-FFF2-40B4-BE49-F238E27FC236}">
+                <a16:creationId xmlns:a16="http://schemas.microsoft.com/office/drawing/2014/main" id="{A52EBE38-0511-4C8E-AA4F-B7038C98184F}"/>
+              </a:ext>
+            </a:extLst>
+          </p:cNvPr>
+          <p:cNvSpPr>
+            <a:spLocks xmlns:a="http://schemas.openxmlformats.org/drawingml/2006/main" noGrp="1"/>
+          </p:cNvSpPr>
+          <p:nvPr/>
+        </p:nvSpPr>
+        <p:spPr>
+          <a:xfrm xmlns:a="http://schemas.openxmlformats.org/drawingml/2006/main">
+            <a:off x="628650" y="4619625"/>
+            <a:ext cx="10477500" cy="523875"/>
+          </a:xfrm>
+          <a:prstGeom xmlns:a="http://schemas.openxmlformats.org/drawingml/2006/main" prst="rect">
+            <a:avLst/>
+          </a:prstGeom>
+          <a:noFill xmlns:a="http://schemas.openxmlformats.org/drawingml/2006/main"/>
+          <a:ln xmlns:a="http://schemas.openxmlformats.org/drawingml/2006/main" w="0">
+            <a:noFill/>
+            <a:prstDash val="solid"/>
+          </a:ln>
+        </p:spPr>
+        <p:txBody>
+          <a:bodyPr xmlns:a="http://schemas.openxmlformats.org/drawingml/2006/main"/>
+          <a:lstStyle xmlns:a="http://schemas.openxmlformats.org/drawingml/2006/main">
+            <a:defPPr>
+              <a:defRPr sz="2250" b="1">
+                <a:solidFill>
+                  <a:srgbClr val="18324A"/>
+                </a:solidFill>
+                <a:latin typeface="Arial"/>
+                <a:ea typeface="Arial"/>
+                <a:cs typeface="Arial"/>
+              </a:defRPr>
+            </a:defPPr>
+          </a:lstStyle>
+          <a:p xmlns:a="http://schemas.openxmlformats.org/drawingml/2006/main">
+            <a:pPr>
+              <a:defRPr sz="2250" b="1">
+                <a:solidFill>
+                  <a:srgbClr val="18324A"/>
+                </a:solidFill>
+                <a:latin typeface="Arial"/>
+                <a:ea typeface="Arial"/>
+                <a:cs typeface="Arial"/>
+              </a:defRPr>
+            </a:pPr>
+            <a:r>
+              <a:rPr sz="2250" b="1">
+                <a:solidFill>
+                  <a:srgbClr val="18324A"/>
+                </a:solidFill>
+                <a:latin typeface="Arial"/>
+                <a:ea typeface="Arial"/>
+                <a:cs typeface="Arial"/>
+              </a:rPr>
+              <a:t>Daily sales from 2013 to 2017</a:t>
+            </a:r>
+          </a:p>
+        </p:txBody>
+      </p:sp>
+      <p:sp>
+        <p:nvSpPr>
+          <p:cNvPr id="10" name="">
+            <a:extLst xmlns:a="http://schemas.openxmlformats.org/drawingml/2006/main">
+              <a:ext uri="{FF2B5EF4-FFF2-40B4-BE49-F238E27FC236}">
+                <a16:creationId xmlns:a16="http://schemas.microsoft.com/office/drawing/2014/main" id="{EDD3EA0A-71AF-40AC-B597-D97922420E3C}"/>
+              </a:ext>
+            </a:extLst>
+          </p:cNvPr>
+          <p:cNvSpPr>
+            <a:spLocks xmlns:a="http://schemas.openxmlformats.org/drawingml/2006/main" noGrp="1"/>
+          </p:cNvSpPr>
+          <p:nvPr/>
+        </p:nvSpPr>
+        <p:spPr>
+          <a:xfrm xmlns:a="http://schemas.openxmlformats.org/drawingml/2006/main">
+            <a:off x="638175" y="5267325"/>
+            <a:ext cx="10477500" cy="638175"/>
           </a:xfrm>
           <a:prstGeom xmlns:a="http://schemas.openxmlformats.org/drawingml/2006/main" prst="rect">
             <a:avLst/>
@@ -8232,7 +9505,7 @@
             <a:defPPr>
               <a:defRPr sz="1875" b="0">
                 <a:solidFill>
-                  <a:srgbClr val="172B4D"/>
+                  <a:srgbClr val="536A78"/>
                 </a:solidFill>
                 <a:latin typeface="Arial"/>
                 <a:ea typeface="Arial"/>
@@ -8244,7 +9517,7 @@
             <a:pPr>
               <a:defRPr sz="1875" b="0">
                 <a:solidFill>
-                  <a:srgbClr val="172B4D"/>
+                  <a:srgbClr val="536A78"/>
                 </a:solidFill>
                 <a:latin typeface="Arial"/>
                 <a:ea typeface="Arial"/>
@@ -8254,281 +9527,13 @@
             <a:r>
               <a:rPr sz="1875" b="0">
                 <a:solidFill>
-                  <a:srgbClr val="172B4D"/>
+                  <a:srgbClr val="536A78"/>
                 </a:solidFill>
                 <a:latin typeface="Arial"/>
                 <a:ea typeface="Arial"/>
                 <a:cs typeface="Arial"/>
               </a:rPr>
-              <a:t>rows in the source CSV</a:t>
-            </a:r>
-          </a:p>
-        </p:txBody>
-      </p:sp>
-      <p:sp>
-        <p:nvSpPr>
-          <p:cNvPr id="6" name="">
-            <a:extLst xmlns:a="http://schemas.openxmlformats.org/drawingml/2006/main">
-              <a:ext uri="{FF2B5EF4-FFF2-40B4-BE49-F238E27FC236}">
-                <a16:creationId xmlns:a16="http://schemas.microsoft.com/office/drawing/2014/main" id="{AF20E47D-9FEF-480B-8D90-430A9EB1BC55}"/>
-              </a:ext>
-            </a:extLst>
-          </p:cNvPr>
-          <p:cNvSpPr>
-            <a:spLocks xmlns:a="http://schemas.openxmlformats.org/drawingml/2006/main" noGrp="1"/>
-          </p:cNvSpPr>
-          <p:nvPr/>
-        </p:nvSpPr>
-        <p:spPr>
-          <a:xfrm xmlns:a="http://schemas.openxmlformats.org/drawingml/2006/main">
-            <a:off x="6477000" y="1704975"/>
-            <a:ext cx="4762500" cy="857250"/>
-          </a:xfrm>
-          <a:prstGeom xmlns:a="http://schemas.openxmlformats.org/drawingml/2006/main" prst="rect">
-            <a:avLst/>
-          </a:prstGeom>
-          <a:noFill xmlns:a="http://schemas.openxmlformats.org/drawingml/2006/main"/>
-          <a:ln xmlns:a="http://schemas.openxmlformats.org/drawingml/2006/main" w="0">
-            <a:noFill/>
-            <a:prstDash val="solid"/>
-          </a:ln>
-        </p:spPr>
-        <p:txBody>
-          <a:bodyPr xmlns:a="http://schemas.openxmlformats.org/drawingml/2006/main"/>
-          <a:lstStyle xmlns:a="http://schemas.openxmlformats.org/drawingml/2006/main">
-            <a:defPPr>
-              <a:defRPr sz="4575" b="1">
-                <a:solidFill>
-                  <a:srgbClr val="0F766E"/>
-                </a:solidFill>
-                <a:latin typeface="Arial"/>
-                <a:ea typeface="Arial"/>
-                <a:cs typeface="Arial"/>
-              </a:defRPr>
-            </a:defPPr>
-          </a:lstStyle>
-          <a:p xmlns:a="http://schemas.openxmlformats.org/drawingml/2006/main">
-            <a:pPr>
-              <a:defRPr sz="4575" b="1">
-                <a:solidFill>
-                  <a:srgbClr val="0F766E"/>
-                </a:solidFill>
-                <a:latin typeface="Arial"/>
-                <a:ea typeface="Arial"/>
-                <a:cs typeface="Arial"/>
-              </a:defRPr>
-            </a:pPr>
-            <a:r>
-              <a:rPr sz="4575" b="1">
-                <a:solidFill>
-                  <a:srgbClr val="0F766E"/>
-                </a:solidFill>
-                <a:latin typeface="Arial"/>
-                <a:ea typeface="Arial"/>
-                <a:cs typeface="Arial"/>
-              </a:rPr>
-              <a:t>9,130</a:t>
-            </a:r>
-          </a:p>
-        </p:txBody>
-      </p:sp>
-      <p:sp>
-        <p:nvSpPr>
-          <p:cNvPr id="7" name="">
-            <a:extLst xmlns:a="http://schemas.openxmlformats.org/drawingml/2006/main">
-              <a:ext uri="{FF2B5EF4-FFF2-40B4-BE49-F238E27FC236}">
-                <a16:creationId xmlns:a16="http://schemas.microsoft.com/office/drawing/2014/main" id="{93EFFFC0-D6F4-4C2B-9432-A2F0084EEC65}"/>
-              </a:ext>
-            </a:extLst>
-          </p:cNvPr>
-          <p:cNvSpPr>
-            <a:spLocks xmlns:a="http://schemas.openxmlformats.org/drawingml/2006/main" noGrp="1"/>
-          </p:cNvSpPr>
-          <p:nvPr/>
-        </p:nvSpPr>
-        <p:spPr>
-          <a:xfrm xmlns:a="http://schemas.openxmlformats.org/drawingml/2006/main">
-            <a:off x="6505575" y="2667000"/>
-            <a:ext cx="4762500" cy="457200"/>
-          </a:xfrm>
-          <a:prstGeom xmlns:a="http://schemas.openxmlformats.org/drawingml/2006/main" prst="rect">
-            <a:avLst/>
-          </a:prstGeom>
-          <a:noFill xmlns:a="http://schemas.openxmlformats.org/drawingml/2006/main"/>
-          <a:ln xmlns:a="http://schemas.openxmlformats.org/drawingml/2006/main" w="0">
-            <a:noFill/>
-            <a:prstDash val="solid"/>
-          </a:ln>
-        </p:spPr>
-        <p:txBody>
-          <a:bodyPr xmlns:a="http://schemas.openxmlformats.org/drawingml/2006/main"/>
-          <a:lstStyle xmlns:a="http://schemas.openxmlformats.org/drawingml/2006/main">
-            <a:defPPr>
-              <a:defRPr sz="1875" b="0">
-                <a:solidFill>
-                  <a:srgbClr val="172B4D"/>
-                </a:solidFill>
-                <a:latin typeface="Arial"/>
-                <a:ea typeface="Arial"/>
-                <a:cs typeface="Arial"/>
-              </a:defRPr>
-            </a:defPPr>
-          </a:lstStyle>
-          <a:p xmlns:a="http://schemas.openxmlformats.org/drawingml/2006/main">
-            <a:pPr>
-              <a:defRPr sz="1875" b="0">
-                <a:solidFill>
-                  <a:srgbClr val="172B4D"/>
-                </a:solidFill>
-                <a:latin typeface="Arial"/>
-                <a:ea typeface="Arial"/>
-                <a:cs typeface="Arial"/>
-              </a:defRPr>
-            </a:pPr>
-            <a:r>
-              <a:rPr sz="1875" b="0">
-                <a:solidFill>
-                  <a:srgbClr val="172B4D"/>
-                </a:solidFill>
-                <a:latin typeface="Arial"/>
-                <a:ea typeface="Arial"/>
-                <a:cs typeface="Arial"/>
-              </a:rPr>
-              <a:t>rows in our selected scope</a:t>
-            </a:r>
-          </a:p>
-        </p:txBody>
-      </p:sp>
-      <p:sp>
-        <p:nvSpPr>
-          <p:cNvPr id="8" name="">
-            <a:extLst xmlns:a="http://schemas.openxmlformats.org/drawingml/2006/main">
-              <a:ext uri="{FF2B5EF4-FFF2-40B4-BE49-F238E27FC236}">
-                <a16:creationId xmlns:a16="http://schemas.microsoft.com/office/drawing/2014/main" id="{60E0395C-D1A9-4527-A8A3-FE0E99BDFB3C}"/>
-              </a:ext>
-            </a:extLst>
-          </p:cNvPr>
-          <p:cNvSpPr>
-            <a:spLocks xmlns:a="http://schemas.openxmlformats.org/drawingml/2006/main" noGrp="1"/>
-          </p:cNvSpPr>
-          <p:nvPr/>
-        </p:nvSpPr>
-        <p:spPr>
-          <a:xfrm xmlns:a="http://schemas.openxmlformats.org/drawingml/2006/main">
-            <a:off x="723900" y="4000500"/>
-            <a:ext cx="10477500" cy="857250"/>
-          </a:xfrm>
-          <a:prstGeom xmlns:a="http://schemas.openxmlformats.org/drawingml/2006/main" prst="rect">
-            <a:avLst/>
-          </a:prstGeom>
-          <a:noFill xmlns:a="http://schemas.openxmlformats.org/drawingml/2006/main"/>
-          <a:ln xmlns:a="http://schemas.openxmlformats.org/drawingml/2006/main" w="0">
-            <a:noFill/>
-            <a:prstDash val="solid"/>
-          </a:ln>
-        </p:spPr>
-        <p:txBody>
-          <a:bodyPr xmlns:a="http://schemas.openxmlformats.org/drawingml/2006/main"/>
-          <a:lstStyle xmlns:a="http://schemas.openxmlformats.org/drawingml/2006/main">
-            <a:defPPr>
-              <a:defRPr sz="2175" b="0">
-                <a:solidFill>
-                  <a:srgbClr val="172B4D"/>
-                </a:solidFill>
-                <a:latin typeface="Arial"/>
-                <a:ea typeface="Arial"/>
-                <a:cs typeface="Arial"/>
-              </a:defRPr>
-            </a:defPPr>
-          </a:lstStyle>
-          <a:p xmlns:a="http://schemas.openxmlformats.org/drawingml/2006/main">
-            <a:pPr>
-              <a:defRPr sz="2175" b="0">
-                <a:solidFill>
-                  <a:srgbClr val="172B4D"/>
-                </a:solidFill>
-                <a:latin typeface="Arial"/>
-                <a:ea typeface="Arial"/>
-                <a:cs typeface="Arial"/>
-              </a:defRPr>
-            </a:pPr>
-            <a:r>
-              <a:rPr sz="2175" b="0">
-                <a:solidFill>
-                  <a:srgbClr val="172B4D"/>
-                </a:solidFill>
-                <a:latin typeface="Arial"/>
-                <a:ea typeface="Arial"/>
-                <a:cs typeface="Arial"/>
-              </a:rPr>
-              <a:t>Daily sales, 2013–2017. The file has dates, store IDs, item IDs and units sold.</a:t>
-            </a:r>
-          </a:p>
-        </p:txBody>
-      </p:sp>
-      <p:sp>
-        <p:nvSpPr>
-          <p:cNvPr id="9" name="">
-            <a:extLst xmlns:a="http://schemas.openxmlformats.org/drawingml/2006/main">
-              <a:ext uri="{FF2B5EF4-FFF2-40B4-BE49-F238E27FC236}">
-                <a16:creationId xmlns:a16="http://schemas.microsoft.com/office/drawing/2014/main" id="{C0F16A5C-04E7-446F-847E-B0C96CECEB29}"/>
-              </a:ext>
-            </a:extLst>
-          </p:cNvPr>
-          <p:cNvSpPr>
-            <a:spLocks xmlns:a="http://schemas.openxmlformats.org/drawingml/2006/main" noGrp="1"/>
-          </p:cNvSpPr>
-          <p:nvPr/>
-        </p:nvSpPr>
-        <p:spPr>
-          <a:xfrm xmlns:a="http://schemas.openxmlformats.org/drawingml/2006/main">
-            <a:off x="723900" y="5219700"/>
-            <a:ext cx="10477500" cy="571500"/>
-          </a:xfrm>
-          <a:prstGeom xmlns:a="http://schemas.openxmlformats.org/drawingml/2006/main" prst="rect">
-            <a:avLst/>
-          </a:prstGeom>
-          <a:noFill xmlns:a="http://schemas.openxmlformats.org/drawingml/2006/main"/>
-          <a:ln xmlns:a="http://schemas.openxmlformats.org/drawingml/2006/main" w="0">
-            <a:noFill/>
-            <a:prstDash val="solid"/>
-          </a:ln>
-        </p:spPr>
-        <p:txBody>
-          <a:bodyPr xmlns:a="http://schemas.openxmlformats.org/drawingml/2006/main"/>
-          <a:lstStyle xmlns:a="http://schemas.openxmlformats.org/drawingml/2006/main">
-            <a:defPPr>
-              <a:defRPr sz="1875" b="0">
-                <a:solidFill>
-                  <a:srgbClr val="526174"/>
-                </a:solidFill>
-                <a:latin typeface="Arial"/>
-                <a:ea typeface="Arial"/>
-                <a:cs typeface="Arial"/>
-              </a:defRPr>
-            </a:defPPr>
-          </a:lstStyle>
-          <a:p xmlns:a="http://schemas.openxmlformats.org/drawingml/2006/main">
-            <a:pPr>
-              <a:defRPr sz="1875" b="0">
-                <a:solidFill>
-                  <a:srgbClr val="526174"/>
-                </a:solidFill>
-                <a:latin typeface="Arial"/>
-                <a:ea typeface="Arial"/>
-                <a:cs typeface="Arial"/>
-              </a:defRPr>
-            </a:pPr>
-            <a:r>
-              <a:rPr sz="1875" b="0">
-                <a:solidFill>
-                  <a:srgbClr val="526174"/>
-                </a:solidFill>
-                <a:latin typeface="Arial"/>
-                <a:ea typeface="Arial"/>
-                <a:cs typeface="Arial"/>
-              </a:rPr>
-              <a:t>The dataset has no product names, stock levels, prices or supplier records.</a:t>
+              <a:t>No product names, stock levels, prices or supplier records are supplied.</a:t>
             </a:r>
           </a:p>
         </p:txBody>
@@ -8536,7 +9541,7 @@
     </p:spTree>
     <p:extLst>
       <p:ext uri="{BB962C8B-B14F-4D97-AF65-F5344CB8AC3E}">
-        <p14:creationId xmlns:p14="http://schemas.microsoft.com/office/powerpoint/2010/main" val="4861934"/>
+        <p14:creationId xmlns:p14="http://schemas.microsoft.com/office/powerpoint/2010/main" val="1005363092"/>
       </p:ext>
     </p:extLst>
   </p:cSld>
@@ -8549,7 +9554,7 @@
     <p:bg>
       <p:bgPr>
         <a:solidFill xmlns:a="http://schemas.openxmlformats.org/drawingml/2006/main">
-          <a:srgbClr val="FFFFFF"/>
+          <a:srgbClr val="F7F5F0"/>
         </a:solidFill>
       </p:bgPr>
     </p:bg>
@@ -8564,10 +9569,10 @@
       </p:grpSpPr>
       <p:sp>
         <p:nvSpPr>
-          <p:cNvPr id="8" name="">
-            <a:extLst xmlns:a="http://schemas.openxmlformats.org/drawingml/2006/main">
-              <a:ext uri="{FF2B5EF4-FFF2-40B4-BE49-F238E27FC236}">
-                <a16:creationId xmlns:a16="http://schemas.microsoft.com/office/drawing/2014/main" id="{7EBA6650-FB82-4B70-8008-BB7AE2CBA670}"/>
+          <p:cNvPr id="9" name="">
+            <a:extLst xmlns:a="http://schemas.openxmlformats.org/drawingml/2006/main">
+              <a:ext uri="{FF2B5EF4-FFF2-40B4-BE49-F238E27FC236}">
+                <a16:creationId xmlns:a16="http://schemas.microsoft.com/office/drawing/2014/main" id="{83272FBA-5D96-451B-9631-8B85F683502E}"/>
               </a:ext>
             </a:extLst>
           </p:cNvPr>
@@ -8578,8 +9583,8 @@
         </p:nvSpPr>
         <p:spPr>
           <a:xfrm xmlns:a="http://schemas.openxmlformats.org/drawingml/2006/main">
-            <a:off x="685800" y="476250"/>
-            <a:ext cx="10820400" cy="857250"/>
+            <a:off x="609600" y="400050"/>
+            <a:ext cx="5715000" cy="285750"/>
           </a:xfrm>
           <a:prstGeom xmlns:a="http://schemas.openxmlformats.org/drawingml/2006/main" prst="rect">
             <a:avLst/>
@@ -8594,9 +9599,9 @@
           <a:bodyPr xmlns:a="http://schemas.openxmlformats.org/drawingml/2006/main"/>
           <a:lstStyle xmlns:a="http://schemas.openxmlformats.org/drawingml/2006/main">
             <a:defPPr>
-              <a:defRPr sz="3150" b="1">
-                <a:solidFill>
-                  <a:srgbClr val="172B4D"/>
+              <a:defRPr sz="1200" b="1">
+                <a:solidFill>
+                  <a:srgbClr val="087E79"/>
                 </a:solidFill>
                 <a:latin typeface="Arial"/>
                 <a:ea typeface="Arial"/>
@@ -8606,9 +9611,9 @@
           </a:lstStyle>
           <a:p xmlns:a="http://schemas.openxmlformats.org/drawingml/2006/main">
             <a:pPr>
-              <a:defRPr sz="3150" b="1">
-                <a:solidFill>
-                  <a:srgbClr val="172B4D"/>
+              <a:defRPr sz="1200" b="1">
+                <a:solidFill>
+                  <a:srgbClr val="087E79"/>
                 </a:solidFill>
                 <a:latin typeface="Arial"/>
                 <a:ea typeface="Arial"/>
@@ -8616,15 +9621,15 @@
               </a:defRPr>
             </a:pPr>
             <a:r>
-              <a:rPr sz="3150" b="1">
-                <a:solidFill>
-                  <a:srgbClr val="172B4D"/>
+              <a:rPr sz="1200" b="1">
+                <a:solidFill>
+                  <a:srgbClr val="087E79"/>
                 </a:solidFill>
                 <a:latin typeface="Arial"/>
                 <a:ea typeface="Arial"/>
                 <a:cs typeface="Arial"/>
               </a:rPr>
-              <a:t>Sales patterns in development data</a:t>
+              <a:t>EXPLORE</a:t>
             </a:r>
           </a:p>
         </p:txBody>
@@ -8634,7 +9639,7 @@
           <p:cNvPr id="2" name="">
             <a:extLst xmlns:a="http://schemas.openxmlformats.org/drawingml/2006/main">
               <a:ext uri="{FF2B5EF4-FFF2-40B4-BE49-F238E27FC236}">
-                <a16:creationId xmlns:a16="http://schemas.microsoft.com/office/drawing/2014/main" id="{1D41D111-D8E0-40E7-9731-31386701EFD2}"/>
+                <a16:creationId xmlns:a16="http://schemas.microsoft.com/office/drawing/2014/main" id="{1E6E7530-2C13-4C8B-925B-DED4CEEBC2F1}"/>
               </a:ext>
             </a:extLst>
           </p:cNvPr>
@@ -8645,8 +9650,8 @@
         </p:nvSpPr>
         <p:spPr>
           <a:xfrm xmlns:a="http://schemas.openxmlformats.org/drawingml/2006/main">
-            <a:off x="685800" y="6315075"/>
-            <a:ext cx="6096000" cy="266700"/>
+            <a:off x="609600" y="876300"/>
+            <a:ext cx="10934700" cy="914400"/>
           </a:xfrm>
           <a:prstGeom xmlns:a="http://schemas.openxmlformats.org/drawingml/2006/main" prst="rect">
             <a:avLst/>
@@ -8661,9 +9666,9 @@
           <a:bodyPr xmlns:a="http://schemas.openxmlformats.org/drawingml/2006/main"/>
           <a:lstStyle xmlns:a="http://schemas.openxmlformats.org/drawingml/2006/main">
             <a:defPPr>
-              <a:defRPr sz="1050" b="0">
-                <a:solidFill>
-                  <a:srgbClr val="526174"/>
+              <a:defRPr sz="3300" b="1">
+                <a:solidFill>
+                  <a:srgbClr val="18324A"/>
                 </a:solidFill>
                 <a:latin typeface="Arial"/>
                 <a:ea typeface="Arial"/>
@@ -8673,9 +9678,9 @@
           </a:lstStyle>
           <a:p xmlns:a="http://schemas.openxmlformats.org/drawingml/2006/main">
             <a:pPr>
-              <a:defRPr sz="1050" b="0">
-                <a:solidFill>
-                  <a:srgbClr val="526174"/>
+              <a:defRPr sz="3300" b="1">
+                <a:solidFill>
+                  <a:srgbClr val="18324A"/>
                 </a:solidFill>
                 <a:latin typeface="Arial"/>
                 <a:ea typeface="Arial"/>
@@ -8683,15 +9688,15 @@
               </a:defRPr>
             </a:pPr>
             <a:r>
-              <a:rPr sz="1050" b="0">
-                <a:solidFill>
-                  <a:srgbClr val="526174"/>
+              <a:rPr sz="3300" b="1">
+                <a:solidFill>
+                  <a:srgbClr val="18324A"/>
                 </a:solidFill>
                 <a:latin typeface="Arial"/>
                 <a:ea typeface="Arial"/>
                 <a:cs typeface="Arial"/>
               </a:rPr>
-              <a:t>VUT AI SOLUTIONS  /  AIBUY3A</a:t>
+              <a:t>Sales patterns before testing</a:t>
             </a:r>
           </a:p>
         </p:txBody>
@@ -8701,7 +9706,7 @@
           <p:cNvPr id="3" name="">
             <a:extLst xmlns:a="http://schemas.openxmlformats.org/drawingml/2006/main">
               <a:ext uri="{FF2B5EF4-FFF2-40B4-BE49-F238E27FC236}">
-                <a16:creationId xmlns:a16="http://schemas.microsoft.com/office/drawing/2014/main" id="{8387B343-CB93-4CA2-B254-D36359FCCB56}"/>
+                <a16:creationId xmlns:a16="http://schemas.microsoft.com/office/drawing/2014/main" id="{EFBA4308-2692-40DD-BB3E-8C98337F5A97}"/>
               </a:ext>
             </a:extLst>
           </p:cNvPr>
@@ -8712,8 +9717,8 @@
         </p:nvSpPr>
         <p:spPr>
           <a:xfrm xmlns:a="http://schemas.openxmlformats.org/drawingml/2006/main">
-            <a:off x="11001375" y="6315075"/>
-            <a:ext cx="523875" cy="266700"/>
+            <a:off x="609600" y="6315075"/>
+            <a:ext cx="4000500" cy="209550"/>
           </a:xfrm>
           <a:prstGeom xmlns:a="http://schemas.openxmlformats.org/drawingml/2006/main" prst="rect">
             <a:avLst/>
@@ -8728,9 +9733,9 @@
           <a:bodyPr xmlns:a="http://schemas.openxmlformats.org/drawingml/2006/main"/>
           <a:lstStyle xmlns:a="http://schemas.openxmlformats.org/drawingml/2006/main">
             <a:defPPr>
-              <a:defRPr sz="1050" b="0">
-                <a:solidFill>
-                  <a:srgbClr val="526174"/>
+              <a:defRPr sz="975" b="1">
+                <a:solidFill>
+                  <a:srgbClr val="536A78"/>
                 </a:solidFill>
                 <a:latin typeface="Arial"/>
                 <a:ea typeface="Arial"/>
@@ -8740,9 +9745,9 @@
           </a:lstStyle>
           <a:p xmlns:a="http://schemas.openxmlformats.org/drawingml/2006/main">
             <a:pPr>
-              <a:defRPr sz="1050" b="0">
-                <a:solidFill>
-                  <a:srgbClr val="526174"/>
+              <a:defRPr sz="975" b="1">
+                <a:solidFill>
+                  <a:srgbClr val="536A78"/>
                 </a:solidFill>
                 <a:latin typeface="Arial"/>
                 <a:ea typeface="Arial"/>
@@ -8750,9 +9755,76 @@
               </a:defRPr>
             </a:pPr>
             <a:r>
-              <a:rPr sz="1050" b="0">
-                <a:solidFill>
-                  <a:srgbClr val="526174"/>
+              <a:rPr sz="975" b="1">
+                <a:solidFill>
+                  <a:srgbClr val="536A78"/>
+                </a:solidFill>
+                <a:latin typeface="Arial"/>
+                <a:ea typeface="Arial"/>
+                <a:cs typeface="Arial"/>
+              </a:rPr>
+              <a:t>STOCKSENSE AI</a:t>
+            </a:r>
+          </a:p>
+        </p:txBody>
+      </p:sp>
+      <p:sp>
+        <p:nvSpPr>
+          <p:cNvPr id="4" name="">
+            <a:extLst xmlns:a="http://schemas.openxmlformats.org/drawingml/2006/main">
+              <a:ext uri="{FF2B5EF4-FFF2-40B4-BE49-F238E27FC236}">
+                <a16:creationId xmlns:a16="http://schemas.microsoft.com/office/drawing/2014/main" id="{AB3D67D5-E71D-4293-8636-AFC1E4B83CBF}"/>
+              </a:ext>
+            </a:extLst>
+          </p:cNvPr>
+          <p:cNvSpPr>
+            <a:spLocks xmlns:a="http://schemas.openxmlformats.org/drawingml/2006/main" noGrp="1"/>
+          </p:cNvSpPr>
+          <p:nvPr/>
+        </p:nvSpPr>
+        <p:spPr>
+          <a:xfrm xmlns:a="http://schemas.openxmlformats.org/drawingml/2006/main">
+            <a:off x="11049000" y="6315075"/>
+            <a:ext cx="666750" cy="209550"/>
+          </a:xfrm>
+          <a:prstGeom xmlns:a="http://schemas.openxmlformats.org/drawingml/2006/main" prst="rect">
+            <a:avLst/>
+          </a:prstGeom>
+          <a:noFill xmlns:a="http://schemas.openxmlformats.org/drawingml/2006/main"/>
+          <a:ln xmlns:a="http://schemas.openxmlformats.org/drawingml/2006/main" w="0">
+            <a:noFill/>
+            <a:prstDash val="solid"/>
+          </a:ln>
+        </p:spPr>
+        <p:txBody>
+          <a:bodyPr xmlns:a="http://schemas.openxmlformats.org/drawingml/2006/main"/>
+          <a:lstStyle xmlns:a="http://schemas.openxmlformats.org/drawingml/2006/main">
+            <a:defPPr>
+              <a:defRPr sz="975" b="0">
+                <a:solidFill>
+                  <a:srgbClr val="536A78"/>
+                </a:solidFill>
+                <a:latin typeface="Arial"/>
+                <a:ea typeface="Arial"/>
+                <a:cs typeface="Arial"/>
+              </a:defRPr>
+            </a:defPPr>
+          </a:lstStyle>
+          <a:p xmlns:a="http://schemas.openxmlformats.org/drawingml/2006/main">
+            <a:pPr>
+              <a:defRPr sz="975" b="0">
+                <a:solidFill>
+                  <a:srgbClr val="536A78"/>
+                </a:solidFill>
+                <a:latin typeface="Arial"/>
+                <a:ea typeface="Arial"/>
+                <a:cs typeface="Arial"/>
+              </a:defRPr>
+            </a:pPr>
+            <a:r>
+              <a:rPr sz="975" b="0">
+                <a:solidFill>
+                  <a:srgbClr val="536A78"/>
                 </a:solidFill>
                 <a:latin typeface="Arial"/>
                 <a:ea typeface="Arial"/>
@@ -8765,10 +9837,10 @@
       </p:sp>
       <p:pic>
         <p:nvPicPr>
-          <p:cNvPr id="4" name="">
-            <a:extLst xmlns:a="http://schemas.openxmlformats.org/drawingml/2006/main">
-              <a:ext uri="{FF2B5EF4-FFF2-40B4-BE49-F238E27FC236}">
-                <a16:creationId xmlns:a16="http://schemas.microsoft.com/office/drawing/2014/main" id="{2D39EECD-B1C5-4C60-B609-62B9A6F0AB3D}"/>
+          <p:cNvPr id="5" name="">
+            <a:extLst xmlns:a="http://schemas.openxmlformats.org/drawingml/2006/main">
+              <a:ext uri="{FF2B5EF4-FFF2-40B4-BE49-F238E27FC236}">
+                <a16:creationId xmlns:a16="http://schemas.microsoft.com/office/drawing/2014/main" id="{17A5246A-C432-48D7-886D-F1619ACDD7B8}"/>
               </a:ext>
             </a:extLst>
           </p:cNvPr>
@@ -8778,13 +9850,13 @@
           <p:nvPr/>
         </p:nvPicPr>
         <p:blipFill>
-          <a:blip xmlns:r="http://schemas.openxmlformats.org/officeDocument/2006/relationships" xmlns:a="http://schemas.openxmlformats.org/drawingml/2006/main" r:embed="R2484fe783dea4cec"/>
+          <a:blip xmlns:r="http://schemas.openxmlformats.org/officeDocument/2006/relationships" xmlns:a="http://schemas.openxmlformats.org/drawingml/2006/main" r:embed="R746e4114be4b4a58"/>
           <a:stretch xmlns:a="http://schemas.openxmlformats.org/drawingml/2006/main"/>
         </p:blipFill>
         <p:spPr>
           <a:xfrm xmlns:a="http://schemas.openxmlformats.org/drawingml/2006/main">
-            <a:off x="714375" y="1894582"/>
-            <a:ext cx="5238750" cy="2783086"/>
+            <a:off x="619125" y="2297906"/>
+            <a:ext cx="5334000" cy="2833688"/>
           </a:xfrm>
           <a:prstGeom xmlns:a="http://schemas.openxmlformats.org/drawingml/2006/main" prst="rect">
             <a:avLst/>
@@ -8793,10 +9865,10 @@
       </p:pic>
       <p:pic>
         <p:nvPicPr>
-          <p:cNvPr id="5" name="">
-            <a:extLst xmlns:a="http://schemas.openxmlformats.org/drawingml/2006/main">
-              <a:ext uri="{FF2B5EF4-FFF2-40B4-BE49-F238E27FC236}">
-                <a16:creationId xmlns:a16="http://schemas.microsoft.com/office/drawing/2014/main" id="{595A92A0-9E6B-47EC-B6BC-1A130D2F919A}"/>
+          <p:cNvPr id="6" name="">
+            <a:extLst xmlns:a="http://schemas.openxmlformats.org/drawingml/2006/main">
+              <a:ext uri="{FF2B5EF4-FFF2-40B4-BE49-F238E27FC236}">
+                <a16:creationId xmlns:a16="http://schemas.microsoft.com/office/drawing/2014/main" id="{730E552E-4A36-4E1B-A5B8-F1AF42C7D7F7}"/>
               </a:ext>
             </a:extLst>
           </p:cNvPr>
@@ -8806,13 +9878,13 @@
           <p:nvPr/>
         </p:nvPicPr>
         <p:blipFill>
-          <a:blip xmlns:r="http://schemas.openxmlformats.org/officeDocument/2006/relationships" xmlns:a="http://schemas.openxmlformats.org/drawingml/2006/main" r:embed="Re079630971314a14"/>
+          <a:blip xmlns:r="http://schemas.openxmlformats.org/officeDocument/2006/relationships" xmlns:a="http://schemas.openxmlformats.org/drawingml/2006/main" r:embed="R1855aa3057d2442f"/>
           <a:stretch xmlns:a="http://schemas.openxmlformats.org/drawingml/2006/main"/>
         </p:blipFill>
         <p:spPr>
           <a:xfrm xmlns:a="http://schemas.openxmlformats.org/drawingml/2006/main">
-            <a:off x="6210300" y="1894582"/>
-            <a:ext cx="5238750" cy="2783086"/>
+            <a:off x="6162675" y="2297906"/>
+            <a:ext cx="5334000" cy="2833688"/>
           </a:xfrm>
           <a:prstGeom xmlns:a="http://schemas.openxmlformats.org/drawingml/2006/main" prst="rect">
             <a:avLst/>
@@ -8821,10 +9893,10 @@
       </p:pic>
       <p:sp>
         <p:nvSpPr>
-          <p:cNvPr id="6" name="">
-            <a:extLst xmlns:a="http://schemas.openxmlformats.org/drawingml/2006/main">
-              <a:ext uri="{FF2B5EF4-FFF2-40B4-BE49-F238E27FC236}">
-                <a16:creationId xmlns:a16="http://schemas.microsoft.com/office/drawing/2014/main" id="{AF216A2C-75E2-47AD-BDC9-121588C71C02}"/>
+          <p:cNvPr id="7" name="">
+            <a:extLst xmlns:a="http://schemas.openxmlformats.org/drawingml/2006/main">
+              <a:ext uri="{FF2B5EF4-FFF2-40B4-BE49-F238E27FC236}">
+                <a16:creationId xmlns:a16="http://schemas.microsoft.com/office/drawing/2014/main" id="{20BCBB60-F8AC-4FA4-9899-C6A63DBDE2A7}"/>
               </a:ext>
             </a:extLst>
           </p:cNvPr>
@@ -8835,8 +9907,8 @@
         </p:nvSpPr>
         <p:spPr>
           <a:xfrm xmlns:a="http://schemas.openxmlformats.org/drawingml/2006/main">
-            <a:off x="752475" y="5219700"/>
-            <a:ext cx="4857750" cy="476250"/>
+            <a:off x="647700" y="5648325"/>
+            <a:ext cx="4857750" cy="381000"/>
           </a:xfrm>
           <a:prstGeom xmlns:a="http://schemas.openxmlformats.org/drawingml/2006/main" prst="rect">
             <a:avLst/>
@@ -8851,9 +9923,9 @@
           <a:bodyPr xmlns:a="http://schemas.openxmlformats.org/drawingml/2006/main"/>
           <a:lstStyle xmlns:a="http://schemas.openxmlformats.org/drawingml/2006/main">
             <a:defPPr>
-              <a:defRPr sz="1725" b="0">
-                <a:solidFill>
-                  <a:srgbClr val="172B4D"/>
+              <a:defRPr sz="1800" b="1">
+                <a:solidFill>
+                  <a:srgbClr val="18324A"/>
                 </a:solidFill>
                 <a:latin typeface="Arial"/>
                 <a:ea typeface="Arial"/>
@@ -8863,9 +9935,9 @@
           </a:lstStyle>
           <a:p xmlns:a="http://schemas.openxmlformats.org/drawingml/2006/main">
             <a:pPr>
-              <a:defRPr sz="1725" b="0">
-                <a:solidFill>
-                  <a:srgbClr val="172B4D"/>
+              <a:defRPr sz="1800" b="1">
+                <a:solidFill>
+                  <a:srgbClr val="18324A"/>
                 </a:solidFill>
                 <a:latin typeface="Arial"/>
                 <a:ea typeface="Arial"/>
@@ -8873,25 +9945,25 @@
               </a:defRPr>
             </a:pPr>
             <a:r>
-              <a:rPr sz="1725" b="0">
-                <a:solidFill>
-                  <a:srgbClr val="172B4D"/>
+              <a:rPr sz="1800" b="1">
+                <a:solidFill>
+                  <a:srgbClr val="18324A"/>
                 </a:solidFill>
                 <a:latin typeface="Arial"/>
                 <a:ea typeface="Arial"/>
                 <a:cs typeface="Arial"/>
               </a:rPr>
-              <a:t>Monthly totals change over time.</a:t>
-            </a:r>
-          </a:p>
-        </p:txBody>
-      </p:sp>
-      <p:sp>
-        <p:nvSpPr>
-          <p:cNvPr id="7" name="">
-            <a:extLst xmlns:a="http://schemas.openxmlformats.org/drawingml/2006/main">
-              <a:ext uri="{FF2B5EF4-FFF2-40B4-BE49-F238E27FC236}">
-                <a16:creationId xmlns:a16="http://schemas.microsoft.com/office/drawing/2014/main" id="{414B27DC-9872-47CA-A4CF-C5B6DF954973}"/>
+              <a:t>Monthly sales totals</a:t>
+            </a:r>
+          </a:p>
+        </p:txBody>
+      </p:sp>
+      <p:sp>
+        <p:nvSpPr>
+          <p:cNvPr id="8" name="">
+            <a:extLst xmlns:a="http://schemas.openxmlformats.org/drawingml/2006/main">
+              <a:ext uri="{FF2B5EF4-FFF2-40B4-BE49-F238E27FC236}">
+                <a16:creationId xmlns:a16="http://schemas.microsoft.com/office/drawing/2014/main" id="{58CC593A-AF4B-4F79-83F9-28F03205ECC8}"/>
               </a:ext>
             </a:extLst>
           </p:cNvPr>
@@ -8902,8 +9974,8 @@
         </p:nvSpPr>
         <p:spPr>
           <a:xfrm xmlns:a="http://schemas.openxmlformats.org/drawingml/2006/main">
-            <a:off x="6248400" y="5219700"/>
-            <a:ext cx="4857750" cy="476250"/>
+            <a:off x="6200775" y="5648325"/>
+            <a:ext cx="4857750" cy="381000"/>
           </a:xfrm>
           <a:prstGeom xmlns:a="http://schemas.openxmlformats.org/drawingml/2006/main" prst="rect">
             <a:avLst/>
@@ -8918,9 +9990,9 @@
           <a:bodyPr xmlns:a="http://schemas.openxmlformats.org/drawingml/2006/main"/>
           <a:lstStyle xmlns:a="http://schemas.openxmlformats.org/drawingml/2006/main">
             <a:defPPr>
-              <a:defRPr sz="1725" b="0">
-                <a:solidFill>
-                  <a:srgbClr val="172B4D"/>
+              <a:defRPr sz="1800" b="1">
+                <a:solidFill>
+                  <a:srgbClr val="18324A"/>
                 </a:solidFill>
                 <a:latin typeface="Arial"/>
                 <a:ea typeface="Arial"/>
@@ -8930,9 +10002,9 @@
           </a:lstStyle>
           <a:p xmlns:a="http://schemas.openxmlformats.org/drawingml/2006/main">
             <a:pPr>
-              <a:defRPr sz="1725" b="0">
-                <a:solidFill>
-                  <a:srgbClr val="172B4D"/>
+              <a:defRPr sz="1800" b="1">
+                <a:solidFill>
+                  <a:srgbClr val="18324A"/>
                 </a:solidFill>
                 <a:latin typeface="Arial"/>
                 <a:ea typeface="Arial"/>
@@ -8940,15 +10012,15 @@
               </a:defRPr>
             </a:pPr>
             <a:r>
-              <a:rPr sz="1725" b="0">
-                <a:solidFill>
-                  <a:srgbClr val="172B4D"/>
+              <a:rPr sz="1800" b="1">
+                <a:solidFill>
+                  <a:srgbClr val="18324A"/>
                 </a:solidFill>
                 <a:latin typeface="Arial"/>
                 <a:ea typeface="Arial"/>
                 <a:cs typeface="Arial"/>
               </a:rPr>
-              <a:t>The average differs by weekday.</a:t>
+              <a:t>Average by weekday</a:t>
             </a:r>
           </a:p>
         </p:txBody>
@@ -8956,7 +10028,7 @@
     </p:spTree>
     <p:extLst>
       <p:ext uri="{BB962C8B-B14F-4D97-AF65-F5344CB8AC3E}">
-        <p14:creationId xmlns:p14="http://schemas.microsoft.com/office/powerpoint/2010/main" val="1377889541"/>
+        <p14:creationId xmlns:p14="http://schemas.microsoft.com/office/powerpoint/2010/main" val="1240125564"/>
       </p:ext>
     </p:extLst>
   </p:cSld>
@@ -8969,7 +10041,7 @@
     <p:bg>
       <p:bgPr>
         <a:solidFill xmlns:a="http://schemas.openxmlformats.org/drawingml/2006/main">
-          <a:srgbClr val="FFFFFF"/>
+          <a:srgbClr val="11263E"/>
         </a:solidFill>
       </p:bgPr>
     </p:bg>
@@ -8984,10 +10056,10 @@
       </p:grpSpPr>
       <p:sp>
         <p:nvSpPr>
-          <p:cNvPr id="8" name="">
-            <a:extLst xmlns:a="http://schemas.openxmlformats.org/drawingml/2006/main">
-              <a:ext uri="{FF2B5EF4-FFF2-40B4-BE49-F238E27FC236}">
-                <a16:creationId xmlns:a16="http://schemas.microsoft.com/office/drawing/2014/main" id="{2EB9754A-3C01-4AB2-A580-315C6027DA3C}"/>
+          <p:cNvPr id="12" name="">
+            <a:extLst xmlns:a="http://schemas.openxmlformats.org/drawingml/2006/main">
+              <a:ext uri="{FF2B5EF4-FFF2-40B4-BE49-F238E27FC236}">
+                <a16:creationId xmlns:a16="http://schemas.microsoft.com/office/drawing/2014/main" id="{058F78DC-6C6E-4A9E-8B7E-E41D1439B500}"/>
               </a:ext>
             </a:extLst>
           </p:cNvPr>
@@ -8998,8 +10070,8 @@
         </p:nvSpPr>
         <p:spPr>
           <a:xfrm xmlns:a="http://schemas.openxmlformats.org/drawingml/2006/main">
-            <a:off x="685800" y="476250"/>
-            <a:ext cx="10820400" cy="857250"/>
+            <a:off x="609600" y="400050"/>
+            <a:ext cx="5715000" cy="285750"/>
           </a:xfrm>
           <a:prstGeom xmlns:a="http://schemas.openxmlformats.org/drawingml/2006/main" prst="rect">
             <a:avLst/>
@@ -9014,9 +10086,9 @@
           <a:bodyPr xmlns:a="http://schemas.openxmlformats.org/drawingml/2006/main"/>
           <a:lstStyle xmlns:a="http://schemas.openxmlformats.org/drawingml/2006/main">
             <a:defPPr>
-              <a:defRPr sz="3150" b="1">
-                <a:solidFill>
-                  <a:srgbClr val="172B4D"/>
+              <a:defRPr sz="1200" b="1">
+                <a:solidFill>
+                  <a:srgbClr val="A9E7D7"/>
                 </a:solidFill>
                 <a:latin typeface="Arial"/>
                 <a:ea typeface="Arial"/>
@@ -9026,9 +10098,9 @@
           </a:lstStyle>
           <a:p xmlns:a="http://schemas.openxmlformats.org/drawingml/2006/main">
             <a:pPr>
-              <a:defRPr sz="3150" b="1">
-                <a:solidFill>
-                  <a:srgbClr val="172B4D"/>
+              <a:defRPr sz="1200" b="1">
+                <a:solidFill>
+                  <a:srgbClr val="A9E7D7"/>
                 </a:solidFill>
                 <a:latin typeface="Arial"/>
                 <a:ea typeface="Arial"/>
@@ -9036,15 +10108,15 @@
               </a:defRPr>
             </a:pPr>
             <a:r>
-              <a:rPr sz="3150" b="1">
-                <a:solidFill>
-                  <a:srgbClr val="172B4D"/>
+              <a:rPr sz="1200" b="1">
+                <a:solidFill>
+                  <a:srgbClr val="A9E7D7"/>
                 </a:solidFill>
                 <a:latin typeface="Arial"/>
                 <a:ea typeface="Arial"/>
                 <a:cs typeface="Arial"/>
               </a:rPr>
-              <a:t>Forecast methods and time split</a:t>
+              <a:t>METHOD</a:t>
             </a:r>
           </a:p>
         </p:txBody>
@@ -9054,7 +10126,7 @@
           <p:cNvPr id="2" name="">
             <a:extLst xmlns:a="http://schemas.openxmlformats.org/drawingml/2006/main">
               <a:ext uri="{FF2B5EF4-FFF2-40B4-BE49-F238E27FC236}">
-                <a16:creationId xmlns:a16="http://schemas.microsoft.com/office/drawing/2014/main" id="{F34E29B0-B951-4E21-8660-08888EF0AC62}"/>
+                <a16:creationId xmlns:a16="http://schemas.microsoft.com/office/drawing/2014/main" id="{8D19B9CF-B4FF-4A03-B2CE-D9D1DB6EDE88}"/>
               </a:ext>
             </a:extLst>
           </p:cNvPr>
@@ -9065,8 +10137,8 @@
         </p:nvSpPr>
         <p:spPr>
           <a:xfrm xmlns:a="http://schemas.openxmlformats.org/drawingml/2006/main">
-            <a:off x="685800" y="6315075"/>
-            <a:ext cx="6096000" cy="266700"/>
+            <a:off x="609600" y="876300"/>
+            <a:ext cx="10934700" cy="914400"/>
           </a:xfrm>
           <a:prstGeom xmlns:a="http://schemas.openxmlformats.org/drawingml/2006/main" prst="rect">
             <a:avLst/>
@@ -9081,9 +10153,9 @@
           <a:bodyPr xmlns:a="http://schemas.openxmlformats.org/drawingml/2006/main"/>
           <a:lstStyle xmlns:a="http://schemas.openxmlformats.org/drawingml/2006/main">
             <a:defPPr>
-              <a:defRPr sz="1050" b="0">
-                <a:solidFill>
-                  <a:srgbClr val="526174"/>
+              <a:defRPr sz="3300" b="1">
+                <a:solidFill>
+                  <a:srgbClr val="FFFFFF"/>
                 </a:solidFill>
                 <a:latin typeface="Arial"/>
                 <a:ea typeface="Arial"/>
@@ -9093,9 +10165,9 @@
           </a:lstStyle>
           <a:p xmlns:a="http://schemas.openxmlformats.org/drawingml/2006/main">
             <a:pPr>
-              <a:defRPr sz="1050" b="0">
-                <a:solidFill>
-                  <a:srgbClr val="526174"/>
+              <a:defRPr sz="3300" b="1">
+                <a:solidFill>
+                  <a:srgbClr val="FFFFFF"/>
                 </a:solidFill>
                 <a:latin typeface="Arial"/>
                 <a:ea typeface="Arial"/>
@@ -9103,15 +10175,15 @@
               </a:defRPr>
             </a:pPr>
             <a:r>
-              <a:rPr sz="1050" b="0">
-                <a:solidFill>
-                  <a:srgbClr val="526174"/>
+              <a:rPr sz="3300" b="1">
+                <a:solidFill>
+                  <a:srgbClr val="FFFFFF"/>
                 </a:solidFill>
                 <a:latin typeface="Arial"/>
                 <a:ea typeface="Arial"/>
                 <a:cs typeface="Arial"/>
               </a:rPr>
-              <a:t>VUT AI SOLUTIONS  /  AIBUY3A</a:t>
+              <a:t>Time split and methods</a:t>
             </a:r>
           </a:p>
         </p:txBody>
@@ -9121,7 +10193,7 @@
           <p:cNvPr id="3" name="">
             <a:extLst xmlns:a="http://schemas.openxmlformats.org/drawingml/2006/main">
               <a:ext uri="{FF2B5EF4-FFF2-40B4-BE49-F238E27FC236}">
-                <a16:creationId xmlns:a16="http://schemas.microsoft.com/office/drawing/2014/main" id="{8EC5EC23-95DF-44F7-AB68-B4F52DB93003}"/>
+                <a16:creationId xmlns:a16="http://schemas.microsoft.com/office/drawing/2014/main" id="{B427927E-3B0C-491C-BEE6-BB8BA4900368}"/>
               </a:ext>
             </a:extLst>
           </p:cNvPr>
@@ -9132,8 +10204,8 @@
         </p:nvSpPr>
         <p:spPr>
           <a:xfrm xmlns:a="http://schemas.openxmlformats.org/drawingml/2006/main">
-            <a:off x="11001375" y="6315075"/>
-            <a:ext cx="523875" cy="266700"/>
+            <a:off x="609600" y="6315075"/>
+            <a:ext cx="4000500" cy="209550"/>
           </a:xfrm>
           <a:prstGeom xmlns:a="http://schemas.openxmlformats.org/drawingml/2006/main" prst="rect">
             <a:avLst/>
@@ -9148,9 +10220,9 @@
           <a:bodyPr xmlns:a="http://schemas.openxmlformats.org/drawingml/2006/main"/>
           <a:lstStyle xmlns:a="http://schemas.openxmlformats.org/drawingml/2006/main">
             <a:defPPr>
-              <a:defRPr sz="1050" b="0">
-                <a:solidFill>
-                  <a:srgbClr val="526174"/>
+              <a:defRPr sz="975" b="1">
+                <a:solidFill>
+                  <a:srgbClr val="A9E7D7"/>
                 </a:solidFill>
                 <a:latin typeface="Arial"/>
                 <a:ea typeface="Arial"/>
@@ -9160,9 +10232,9 @@
           </a:lstStyle>
           <a:p xmlns:a="http://schemas.openxmlformats.org/drawingml/2006/main">
             <a:pPr>
-              <a:defRPr sz="1050" b="0">
-                <a:solidFill>
-                  <a:srgbClr val="526174"/>
+              <a:defRPr sz="975" b="1">
+                <a:solidFill>
+                  <a:srgbClr val="A9E7D7"/>
                 </a:solidFill>
                 <a:latin typeface="Arial"/>
                 <a:ea typeface="Arial"/>
@@ -9170,9 +10242,76 @@
               </a:defRPr>
             </a:pPr>
             <a:r>
-              <a:rPr sz="1050" b="0">
-                <a:solidFill>
-                  <a:srgbClr val="526174"/>
+              <a:rPr sz="975" b="1">
+                <a:solidFill>
+                  <a:srgbClr val="A9E7D7"/>
+                </a:solidFill>
+                <a:latin typeface="Arial"/>
+                <a:ea typeface="Arial"/>
+                <a:cs typeface="Arial"/>
+              </a:rPr>
+              <a:t>STOCKSENSE AI</a:t>
+            </a:r>
+          </a:p>
+        </p:txBody>
+      </p:sp>
+      <p:sp>
+        <p:nvSpPr>
+          <p:cNvPr id="4" name="">
+            <a:extLst xmlns:a="http://schemas.openxmlformats.org/drawingml/2006/main">
+              <a:ext uri="{FF2B5EF4-FFF2-40B4-BE49-F238E27FC236}">
+                <a16:creationId xmlns:a16="http://schemas.microsoft.com/office/drawing/2014/main" id="{951B5E49-F384-41D0-BD4A-941234CE942A}"/>
+              </a:ext>
+            </a:extLst>
+          </p:cNvPr>
+          <p:cNvSpPr>
+            <a:spLocks xmlns:a="http://schemas.openxmlformats.org/drawingml/2006/main" noGrp="1"/>
+          </p:cNvSpPr>
+          <p:nvPr/>
+        </p:nvSpPr>
+        <p:spPr>
+          <a:xfrm xmlns:a="http://schemas.openxmlformats.org/drawingml/2006/main">
+            <a:off x="11049000" y="6315075"/>
+            <a:ext cx="666750" cy="209550"/>
+          </a:xfrm>
+          <a:prstGeom xmlns:a="http://schemas.openxmlformats.org/drawingml/2006/main" prst="rect">
+            <a:avLst/>
+          </a:prstGeom>
+          <a:noFill xmlns:a="http://schemas.openxmlformats.org/drawingml/2006/main"/>
+          <a:ln xmlns:a="http://schemas.openxmlformats.org/drawingml/2006/main" w="0">
+            <a:noFill/>
+            <a:prstDash val="solid"/>
+          </a:ln>
+        </p:spPr>
+        <p:txBody>
+          <a:bodyPr xmlns:a="http://schemas.openxmlformats.org/drawingml/2006/main"/>
+          <a:lstStyle xmlns:a="http://schemas.openxmlformats.org/drawingml/2006/main">
+            <a:defPPr>
+              <a:defRPr sz="975" b="0">
+                <a:solidFill>
+                  <a:srgbClr val="A9E7D7"/>
+                </a:solidFill>
+                <a:latin typeface="Arial"/>
+                <a:ea typeface="Arial"/>
+                <a:cs typeface="Arial"/>
+              </a:defRPr>
+            </a:defPPr>
+          </a:lstStyle>
+          <a:p xmlns:a="http://schemas.openxmlformats.org/drawingml/2006/main">
+            <a:pPr>
+              <a:defRPr sz="975" b="0">
+                <a:solidFill>
+                  <a:srgbClr val="A9E7D7"/>
+                </a:solidFill>
+                <a:latin typeface="Arial"/>
+                <a:ea typeface="Arial"/>
+                <a:cs typeface="Arial"/>
+              </a:defRPr>
+            </a:pPr>
+            <a:r>
+              <a:rPr sz="975" b="0">
+                <a:solidFill>
+                  <a:srgbClr val="A9E7D7"/>
                 </a:solidFill>
                 <a:latin typeface="Arial"/>
                 <a:ea typeface="Arial"/>
@@ -9185,10 +10324,10 @@
       </p:sp>
       <p:sp>
         <p:nvSpPr>
-          <p:cNvPr id="4" name="">
-            <a:extLst xmlns:a="http://schemas.openxmlformats.org/drawingml/2006/main">
-              <a:ext uri="{FF2B5EF4-FFF2-40B4-BE49-F238E27FC236}">
-                <a16:creationId xmlns:a16="http://schemas.microsoft.com/office/drawing/2014/main" id="{D301BE50-DBE7-4051-9B4A-7FF564D4661A}"/>
+          <p:cNvPr id="5" name="">
+            <a:extLst xmlns:a="http://schemas.openxmlformats.org/drawingml/2006/main">
+              <a:ext uri="{FF2B5EF4-FFF2-40B4-BE49-F238E27FC236}">
+                <a16:creationId xmlns:a16="http://schemas.microsoft.com/office/drawing/2014/main" id="{82B2FA39-CE48-486D-A90F-B47BE8D1F513}"/>
               </a:ext>
             </a:extLst>
           </p:cNvPr>
@@ -9199,8 +10338,8 @@
         </p:nvSpPr>
         <p:spPr>
           <a:xfrm xmlns:a="http://schemas.openxmlformats.org/drawingml/2006/main">
-            <a:off x="714375" y="1524000"/>
-            <a:ext cx="10477500" cy="781050"/>
+            <a:off x="657225" y="2143125"/>
+            <a:ext cx="3238500" cy="723900"/>
           </a:xfrm>
           <a:prstGeom xmlns:a="http://schemas.openxmlformats.org/drawingml/2006/main" prst="rect">
             <a:avLst/>
@@ -9215,9 +10354,9 @@
           <a:bodyPr xmlns:a="http://schemas.openxmlformats.org/drawingml/2006/main"/>
           <a:lstStyle xmlns:a="http://schemas.openxmlformats.org/drawingml/2006/main">
             <a:defPPr>
-              <a:defRPr sz="2175" b="0">
-                <a:solidFill>
-                  <a:srgbClr val="172B4D"/>
+              <a:defRPr sz="3825" b="1">
+                <a:solidFill>
+                  <a:srgbClr val="A9E7D7"/>
                 </a:solidFill>
                 <a:latin typeface="Arial"/>
                 <a:ea typeface="Arial"/>
@@ -9227,9 +10366,9 @@
           </a:lstStyle>
           <a:p xmlns:a="http://schemas.openxmlformats.org/drawingml/2006/main">
             <a:pPr>
-              <a:defRPr sz="2175" b="0">
-                <a:solidFill>
-                  <a:srgbClr val="172B4D"/>
+              <a:defRPr sz="3825" b="1">
+                <a:solidFill>
+                  <a:srgbClr val="A9E7D7"/>
                 </a:solidFill>
                 <a:latin typeface="Arial"/>
                 <a:ea typeface="Arial"/>
@@ -9237,25 +10376,25 @@
               </a:defRPr>
             </a:pPr>
             <a:r>
-              <a:rPr sz="2175" b="0">
-                <a:solidFill>
-                  <a:srgbClr val="172B4D"/>
+              <a:rPr sz="3825" b="1">
+                <a:solidFill>
+                  <a:srgbClr val="A9E7D7"/>
                 </a:solidFill>
                 <a:latin typeface="Arial"/>
                 <a:ea typeface="Arial"/>
                 <a:cs typeface="Arial"/>
               </a:rPr>
-              <a:t>2013–2015: fit the first models</a:t>
-            </a:r>
-          </a:p>
-        </p:txBody>
-      </p:sp>
-      <p:sp>
-        <p:nvSpPr>
-          <p:cNvPr id="5" name="">
-            <a:extLst xmlns:a="http://schemas.openxmlformats.org/drawingml/2006/main">
-              <a:ext uri="{FF2B5EF4-FFF2-40B4-BE49-F238E27FC236}">
-                <a16:creationId xmlns:a16="http://schemas.microsoft.com/office/drawing/2014/main" id="{47CD86BD-5838-4CF5-8DD1-C04D25689A4E}"/>
+              <a:t>2013–15</a:t>
+            </a:r>
+          </a:p>
+        </p:txBody>
+      </p:sp>
+      <p:sp>
+        <p:nvSpPr>
+          <p:cNvPr id="6" name="">
+            <a:extLst xmlns:a="http://schemas.openxmlformats.org/drawingml/2006/main">
+              <a:ext uri="{FF2B5EF4-FFF2-40B4-BE49-F238E27FC236}">
+                <a16:creationId xmlns:a16="http://schemas.microsoft.com/office/drawing/2014/main" id="{A9D591C9-DD11-4C0C-8723-6B239ABDF2F5}"/>
               </a:ext>
             </a:extLst>
           </p:cNvPr>
@@ -9266,8 +10405,8 @@
         </p:nvSpPr>
         <p:spPr>
           <a:xfrm xmlns:a="http://schemas.openxmlformats.org/drawingml/2006/main">
-            <a:off x="714375" y="2381250"/>
-            <a:ext cx="10477500" cy="781050"/>
+            <a:off x="657225" y="3019425"/>
+            <a:ext cx="3238500" cy="533400"/>
           </a:xfrm>
           <a:prstGeom xmlns:a="http://schemas.openxmlformats.org/drawingml/2006/main" prst="rect">
             <a:avLst/>
@@ -9282,9 +10421,9 @@
           <a:bodyPr xmlns:a="http://schemas.openxmlformats.org/drawingml/2006/main"/>
           <a:lstStyle xmlns:a="http://schemas.openxmlformats.org/drawingml/2006/main">
             <a:defPPr>
-              <a:defRPr sz="2175" b="0">
-                <a:solidFill>
-                  <a:srgbClr val="172B4D"/>
+              <a:defRPr sz="2100" b="0">
+                <a:solidFill>
+                  <a:srgbClr val="FFFFFF"/>
                 </a:solidFill>
                 <a:latin typeface="Arial"/>
                 <a:ea typeface="Arial"/>
@@ -9294,9 +10433,9 @@
           </a:lstStyle>
           <a:p xmlns:a="http://schemas.openxmlformats.org/drawingml/2006/main">
             <a:pPr>
-              <a:defRPr sz="2175" b="0">
-                <a:solidFill>
-                  <a:srgbClr val="172B4D"/>
+              <a:defRPr sz="2100" b="0">
+                <a:solidFill>
+                  <a:srgbClr val="FFFFFF"/>
                 </a:solidFill>
                 <a:latin typeface="Arial"/>
                 <a:ea typeface="Arial"/>
@@ -9304,25 +10443,25 @@
               </a:defRPr>
             </a:pPr>
             <a:r>
-              <a:rPr sz="2175" b="0">
-                <a:solidFill>
-                  <a:srgbClr val="172B4D"/>
+              <a:rPr sz="2100" b="0">
+                <a:solidFill>
+                  <a:srgbClr val="FFFFFF"/>
                 </a:solidFill>
                 <a:latin typeface="Arial"/>
                 <a:ea typeface="Arial"/>
                 <a:cs typeface="Arial"/>
               </a:rPr>
-              <a:t>2016: validate and select by daily MAE</a:t>
-            </a:r>
-          </a:p>
-        </p:txBody>
-      </p:sp>
-      <p:sp>
-        <p:nvSpPr>
-          <p:cNvPr id="6" name="">
-            <a:extLst xmlns:a="http://schemas.openxmlformats.org/drawingml/2006/main">
-              <a:ext uri="{FF2B5EF4-FFF2-40B4-BE49-F238E27FC236}">
-                <a16:creationId xmlns:a16="http://schemas.microsoft.com/office/drawing/2014/main" id="{0F388023-7905-4C85-B1B7-D02BC1757815}"/>
+              <a:t>Fit the models</a:t>
+            </a:r>
+          </a:p>
+        </p:txBody>
+      </p:sp>
+      <p:sp>
+        <p:nvSpPr>
+          <p:cNvPr id="7" name="">
+            <a:extLst xmlns:a="http://schemas.openxmlformats.org/drawingml/2006/main">
+              <a:ext uri="{FF2B5EF4-FFF2-40B4-BE49-F238E27FC236}">
+                <a16:creationId xmlns:a16="http://schemas.microsoft.com/office/drawing/2014/main" id="{07F81F88-F938-4C09-8612-1AB9EA1F485D}"/>
               </a:ext>
             </a:extLst>
           </p:cNvPr>
@@ -9333,8 +10472,8 @@
         </p:nvSpPr>
         <p:spPr>
           <a:xfrm xmlns:a="http://schemas.openxmlformats.org/drawingml/2006/main">
-            <a:off x="714375" y="3238500"/>
-            <a:ext cx="10477500" cy="781050"/>
+            <a:off x="4705350" y="2143125"/>
+            <a:ext cx="2667000" cy="723900"/>
           </a:xfrm>
           <a:prstGeom xmlns:a="http://schemas.openxmlformats.org/drawingml/2006/main" prst="rect">
             <a:avLst/>
@@ -9349,9 +10488,9 @@
           <a:bodyPr xmlns:a="http://schemas.openxmlformats.org/drawingml/2006/main"/>
           <a:lstStyle xmlns:a="http://schemas.openxmlformats.org/drawingml/2006/main">
             <a:defPPr>
-              <a:defRPr sz="2175" b="0">
-                <a:solidFill>
-                  <a:srgbClr val="172B4D"/>
+              <a:defRPr sz="3825" b="1">
+                <a:solidFill>
+                  <a:srgbClr val="A9E7D7"/>
                 </a:solidFill>
                 <a:latin typeface="Arial"/>
                 <a:ea typeface="Arial"/>
@@ -9361,9 +10500,9 @@
           </a:lstStyle>
           <a:p xmlns:a="http://schemas.openxmlformats.org/drawingml/2006/main">
             <a:pPr>
-              <a:defRPr sz="2175" b="0">
-                <a:solidFill>
-                  <a:srgbClr val="172B4D"/>
+              <a:defRPr sz="3825" b="1">
+                <a:solidFill>
+                  <a:srgbClr val="A9E7D7"/>
                 </a:solidFill>
                 <a:latin typeface="Arial"/>
                 <a:ea typeface="Arial"/>
@@ -9371,25 +10510,25 @@
               </a:defRPr>
             </a:pPr>
             <a:r>
-              <a:rPr sz="2175" b="0">
-                <a:solidFill>
-                  <a:srgbClr val="172B4D"/>
+              <a:rPr sz="3825" b="1">
+                <a:solidFill>
+                  <a:srgbClr val="A9E7D7"/>
                 </a:solidFill>
                 <a:latin typeface="Arial"/>
                 <a:ea typeface="Arial"/>
                 <a:cs typeface="Arial"/>
               </a:rPr>
-              <a:t>2017: final test using the frozen choice</a:t>
-            </a:r>
-          </a:p>
-        </p:txBody>
-      </p:sp>
-      <p:sp>
-        <p:nvSpPr>
-          <p:cNvPr id="7" name="">
-            <a:extLst xmlns:a="http://schemas.openxmlformats.org/drawingml/2006/main">
-              <a:ext uri="{FF2B5EF4-FFF2-40B4-BE49-F238E27FC236}">
-                <a16:creationId xmlns:a16="http://schemas.microsoft.com/office/drawing/2014/main" id="{744B1911-C9A3-4C8D-8532-16C1092A0B94}"/>
+              <a:t>2016</a:t>
+            </a:r>
+          </a:p>
+        </p:txBody>
+      </p:sp>
+      <p:sp>
+        <p:nvSpPr>
+          <p:cNvPr id="8" name="">
+            <a:extLst xmlns:a="http://schemas.openxmlformats.org/drawingml/2006/main">
+              <a:ext uri="{FF2B5EF4-FFF2-40B4-BE49-F238E27FC236}">
+                <a16:creationId xmlns:a16="http://schemas.microsoft.com/office/drawing/2014/main" id="{4A57B475-4EC4-48BC-9AB6-C56B88B28534}"/>
               </a:ext>
             </a:extLst>
           </p:cNvPr>
@@ -9400,8 +10539,8 @@
         </p:nvSpPr>
         <p:spPr>
           <a:xfrm xmlns:a="http://schemas.openxmlformats.org/drawingml/2006/main">
-            <a:off x="723900" y="4953000"/>
-            <a:ext cx="10477500" cy="666750"/>
+            <a:off x="4705350" y="3019425"/>
+            <a:ext cx="3333750" cy="704850"/>
           </a:xfrm>
           <a:prstGeom xmlns:a="http://schemas.openxmlformats.org/drawingml/2006/main" prst="rect">
             <a:avLst/>
@@ -9416,9 +10555,9 @@
           <a:bodyPr xmlns:a="http://schemas.openxmlformats.org/drawingml/2006/main"/>
           <a:lstStyle xmlns:a="http://schemas.openxmlformats.org/drawingml/2006/main">
             <a:defPPr>
-              <a:defRPr sz="2025" b="0">
-                <a:solidFill>
-                  <a:srgbClr val="0F766E"/>
+              <a:defRPr sz="2100" b="0">
+                <a:solidFill>
+                  <a:srgbClr val="FFFFFF"/>
                 </a:solidFill>
                 <a:latin typeface="Arial"/>
                 <a:ea typeface="Arial"/>
@@ -9428,9 +10567,9 @@
           </a:lstStyle>
           <a:p xmlns:a="http://schemas.openxmlformats.org/drawingml/2006/main">
             <a:pPr>
-              <a:defRPr sz="2025" b="0">
-                <a:solidFill>
-                  <a:srgbClr val="0F766E"/>
+              <a:defRPr sz="2100" b="0">
+                <a:solidFill>
+                  <a:srgbClr val="FFFFFF"/>
                 </a:solidFill>
                 <a:latin typeface="Arial"/>
                 <a:ea typeface="Arial"/>
@@ -9438,15 +10577,216 @@
               </a:defRPr>
             </a:pPr>
             <a:r>
-              <a:rPr sz="2025" b="0">
-                <a:solidFill>
-                  <a:srgbClr val="0F766E"/>
+              <a:rPr sz="2100" b="0">
+                <a:solidFill>
+                  <a:srgbClr val="FFFFFF"/>
                 </a:solidFill>
                 <a:latin typeface="Arial"/>
                 <a:ea typeface="Arial"/>
                 <a:cs typeface="Arial"/>
               </a:rPr>
-              <a:t>Compared: repeat last week, random forest and a small LSTM.</a:t>
+              <a:t>Select by daily MAE</a:t>
+            </a:r>
+          </a:p>
+        </p:txBody>
+      </p:sp>
+      <p:sp>
+        <p:nvSpPr>
+          <p:cNvPr id="9" name="">
+            <a:extLst xmlns:a="http://schemas.openxmlformats.org/drawingml/2006/main">
+              <a:ext uri="{FF2B5EF4-FFF2-40B4-BE49-F238E27FC236}">
+                <a16:creationId xmlns:a16="http://schemas.microsoft.com/office/drawing/2014/main" id="{3D6E0A91-FFF2-4FDD-9E89-E28377D4E7E9}"/>
+              </a:ext>
+            </a:extLst>
+          </p:cNvPr>
+          <p:cNvSpPr>
+            <a:spLocks xmlns:a="http://schemas.openxmlformats.org/drawingml/2006/main" noGrp="1"/>
+          </p:cNvSpPr>
+          <p:nvPr/>
+        </p:nvSpPr>
+        <p:spPr>
+          <a:xfrm xmlns:a="http://schemas.openxmlformats.org/drawingml/2006/main">
+            <a:off x="8648700" y="2143125"/>
+            <a:ext cx="2667000" cy="723900"/>
+          </a:xfrm>
+          <a:prstGeom xmlns:a="http://schemas.openxmlformats.org/drawingml/2006/main" prst="rect">
+            <a:avLst/>
+          </a:prstGeom>
+          <a:noFill xmlns:a="http://schemas.openxmlformats.org/drawingml/2006/main"/>
+          <a:ln xmlns:a="http://schemas.openxmlformats.org/drawingml/2006/main" w="0">
+            <a:noFill/>
+            <a:prstDash val="solid"/>
+          </a:ln>
+        </p:spPr>
+        <p:txBody>
+          <a:bodyPr xmlns:a="http://schemas.openxmlformats.org/drawingml/2006/main"/>
+          <a:lstStyle xmlns:a="http://schemas.openxmlformats.org/drawingml/2006/main">
+            <a:defPPr>
+              <a:defRPr sz="3825" b="1">
+                <a:solidFill>
+                  <a:srgbClr val="A9E7D7"/>
+                </a:solidFill>
+                <a:latin typeface="Arial"/>
+                <a:ea typeface="Arial"/>
+                <a:cs typeface="Arial"/>
+              </a:defRPr>
+            </a:defPPr>
+          </a:lstStyle>
+          <a:p xmlns:a="http://schemas.openxmlformats.org/drawingml/2006/main">
+            <a:pPr>
+              <a:defRPr sz="3825" b="1">
+                <a:solidFill>
+                  <a:srgbClr val="A9E7D7"/>
+                </a:solidFill>
+                <a:latin typeface="Arial"/>
+                <a:ea typeface="Arial"/>
+                <a:cs typeface="Arial"/>
+              </a:defRPr>
+            </a:pPr>
+            <a:r>
+              <a:rPr sz="3825" b="1">
+                <a:solidFill>
+                  <a:srgbClr val="A9E7D7"/>
+                </a:solidFill>
+                <a:latin typeface="Arial"/>
+                <a:ea typeface="Arial"/>
+                <a:cs typeface="Arial"/>
+              </a:rPr>
+              <a:t>2017</a:t>
+            </a:r>
+          </a:p>
+        </p:txBody>
+      </p:sp>
+      <p:sp>
+        <p:nvSpPr>
+          <p:cNvPr id="10" name="">
+            <a:extLst xmlns:a="http://schemas.openxmlformats.org/drawingml/2006/main">
+              <a:ext uri="{FF2B5EF4-FFF2-40B4-BE49-F238E27FC236}">
+                <a16:creationId xmlns:a16="http://schemas.microsoft.com/office/drawing/2014/main" id="{BFAA5A34-E107-4F6C-91E5-8F4D2EC3B5F6}"/>
+              </a:ext>
+            </a:extLst>
+          </p:cNvPr>
+          <p:cNvSpPr>
+            <a:spLocks xmlns:a="http://schemas.openxmlformats.org/drawingml/2006/main" noGrp="1"/>
+          </p:cNvSpPr>
+          <p:nvPr/>
+        </p:nvSpPr>
+        <p:spPr>
+          <a:xfrm xmlns:a="http://schemas.openxmlformats.org/drawingml/2006/main">
+            <a:off x="8648700" y="3019425"/>
+            <a:ext cx="2857500" cy="533400"/>
+          </a:xfrm>
+          <a:prstGeom xmlns:a="http://schemas.openxmlformats.org/drawingml/2006/main" prst="rect">
+            <a:avLst/>
+          </a:prstGeom>
+          <a:noFill xmlns:a="http://schemas.openxmlformats.org/drawingml/2006/main"/>
+          <a:ln xmlns:a="http://schemas.openxmlformats.org/drawingml/2006/main" w="0">
+            <a:noFill/>
+            <a:prstDash val="solid"/>
+          </a:ln>
+        </p:spPr>
+        <p:txBody>
+          <a:bodyPr xmlns:a="http://schemas.openxmlformats.org/drawingml/2006/main"/>
+          <a:lstStyle xmlns:a="http://schemas.openxmlformats.org/drawingml/2006/main">
+            <a:defPPr>
+              <a:defRPr sz="2100" b="0">
+                <a:solidFill>
+                  <a:srgbClr val="FFFFFF"/>
+                </a:solidFill>
+                <a:latin typeface="Arial"/>
+                <a:ea typeface="Arial"/>
+                <a:cs typeface="Arial"/>
+              </a:defRPr>
+            </a:defPPr>
+          </a:lstStyle>
+          <a:p xmlns:a="http://schemas.openxmlformats.org/drawingml/2006/main">
+            <a:pPr>
+              <a:defRPr sz="2100" b="0">
+                <a:solidFill>
+                  <a:srgbClr val="FFFFFF"/>
+                </a:solidFill>
+                <a:latin typeface="Arial"/>
+                <a:ea typeface="Arial"/>
+                <a:cs typeface="Arial"/>
+              </a:defRPr>
+            </a:pPr>
+            <a:r>
+              <a:rPr sz="2100" b="0">
+                <a:solidFill>
+                  <a:srgbClr val="FFFFFF"/>
+                </a:solidFill>
+                <a:latin typeface="Arial"/>
+                <a:ea typeface="Arial"/>
+                <a:cs typeface="Arial"/>
+              </a:rPr>
+              <a:t>Final test</a:t>
+            </a:r>
+          </a:p>
+        </p:txBody>
+      </p:sp>
+      <p:sp>
+        <p:nvSpPr>
+          <p:cNvPr id="11" name="">
+            <a:extLst xmlns:a="http://schemas.openxmlformats.org/drawingml/2006/main">
+              <a:ext uri="{FF2B5EF4-FFF2-40B4-BE49-F238E27FC236}">
+                <a16:creationId xmlns:a16="http://schemas.microsoft.com/office/drawing/2014/main" id="{66598BA7-906C-4EEF-A9AE-F9551690CA8D}"/>
+              </a:ext>
+            </a:extLst>
+          </p:cNvPr>
+          <p:cNvSpPr>
+            <a:spLocks xmlns:a="http://schemas.openxmlformats.org/drawingml/2006/main" noGrp="1"/>
+          </p:cNvSpPr>
+          <p:nvPr/>
+        </p:nvSpPr>
+        <p:spPr>
+          <a:xfrm xmlns:a="http://schemas.openxmlformats.org/drawingml/2006/main">
+            <a:off x="666750" y="4972050"/>
+            <a:ext cx="10477500" cy="876300"/>
+          </a:xfrm>
+          <a:prstGeom xmlns:a="http://schemas.openxmlformats.org/drawingml/2006/main" prst="rect">
+            <a:avLst/>
+          </a:prstGeom>
+          <a:noFill xmlns:a="http://schemas.openxmlformats.org/drawingml/2006/main"/>
+          <a:ln xmlns:a="http://schemas.openxmlformats.org/drawingml/2006/main" w="0">
+            <a:noFill/>
+            <a:prstDash val="solid"/>
+          </a:ln>
+        </p:spPr>
+        <p:txBody>
+          <a:bodyPr xmlns:a="http://schemas.openxmlformats.org/drawingml/2006/main"/>
+          <a:lstStyle xmlns:a="http://schemas.openxmlformats.org/drawingml/2006/main">
+            <a:defPPr>
+              <a:defRPr sz="2250" b="0">
+                <a:solidFill>
+                  <a:srgbClr val="FFFFFF"/>
+                </a:solidFill>
+                <a:latin typeface="Arial"/>
+                <a:ea typeface="Arial"/>
+                <a:cs typeface="Arial"/>
+              </a:defRPr>
+            </a:defPPr>
+          </a:lstStyle>
+          <a:p xmlns:a="http://schemas.openxmlformats.org/drawingml/2006/main">
+            <a:pPr>
+              <a:defRPr sz="2250" b="0">
+                <a:solidFill>
+                  <a:srgbClr val="FFFFFF"/>
+                </a:solidFill>
+                <a:latin typeface="Arial"/>
+                <a:ea typeface="Arial"/>
+                <a:cs typeface="Arial"/>
+              </a:defRPr>
+            </a:pPr>
+            <a:r>
+              <a:rPr sz="2250" b="0">
+                <a:solidFill>
+                  <a:srgbClr val="FFFFFF"/>
+                </a:solidFill>
+                <a:latin typeface="Arial"/>
+                <a:ea typeface="Arial"/>
+                <a:cs typeface="Arial"/>
+              </a:rPr>
+              <a:t>Compared: last-week repeat, random forest and a small LSTM</a:t>
             </a:r>
           </a:p>
         </p:txBody>
@@ -9454,7 +10794,7 @@
     </p:spTree>
     <p:extLst>
       <p:ext uri="{BB962C8B-B14F-4D97-AF65-F5344CB8AC3E}">
-        <p14:creationId xmlns:p14="http://schemas.microsoft.com/office/powerpoint/2010/main" val="2052671055"/>
+        <p14:creationId xmlns:p14="http://schemas.microsoft.com/office/powerpoint/2010/main" val="16224485"/>
       </p:ext>
     </p:extLst>
   </p:cSld>
@@ -9467,7 +10807,7 @@
     <p:bg>
       <p:bgPr>
         <a:solidFill xmlns:a="http://schemas.openxmlformats.org/drawingml/2006/main">
-          <a:srgbClr val="FFFFFF"/>
+          <a:srgbClr val="F7F5F0"/>
         </a:solidFill>
       </p:bgPr>
     </p:bg>
@@ -9482,10 +10822,10 @@
       </p:grpSpPr>
       <p:sp>
         <p:nvSpPr>
-          <p:cNvPr id="6" name="">
-            <a:extLst xmlns:a="http://schemas.openxmlformats.org/drawingml/2006/main">
-              <a:ext uri="{FF2B5EF4-FFF2-40B4-BE49-F238E27FC236}">
-                <a16:creationId xmlns:a16="http://schemas.microsoft.com/office/drawing/2014/main" id="{CDE6D771-B68D-48EC-B537-438B4B5F994F}"/>
+          <p:cNvPr id="7" name="">
+            <a:extLst xmlns:a="http://schemas.openxmlformats.org/drawingml/2006/main">
+              <a:ext uri="{FF2B5EF4-FFF2-40B4-BE49-F238E27FC236}">
+                <a16:creationId xmlns:a16="http://schemas.microsoft.com/office/drawing/2014/main" id="{55541CAD-F6C2-4927-A02D-0D97723401CD}"/>
               </a:ext>
             </a:extLst>
           </p:cNvPr>
@@ -9496,8 +10836,8 @@
         </p:nvSpPr>
         <p:spPr>
           <a:xfrm xmlns:a="http://schemas.openxmlformats.org/drawingml/2006/main">
-            <a:off x="685800" y="476250"/>
-            <a:ext cx="10820400" cy="857250"/>
+            <a:off x="609600" y="400050"/>
+            <a:ext cx="5715000" cy="285750"/>
           </a:xfrm>
           <a:prstGeom xmlns:a="http://schemas.openxmlformats.org/drawingml/2006/main" prst="rect">
             <a:avLst/>
@@ -9512,9 +10852,9 @@
           <a:bodyPr xmlns:a="http://schemas.openxmlformats.org/drawingml/2006/main"/>
           <a:lstStyle xmlns:a="http://schemas.openxmlformats.org/drawingml/2006/main">
             <a:defPPr>
-              <a:defRPr sz="3150" b="1">
-                <a:solidFill>
-                  <a:srgbClr val="172B4D"/>
+              <a:defRPr sz="1200" b="1">
+                <a:solidFill>
+                  <a:srgbClr val="087E79"/>
                 </a:solidFill>
                 <a:latin typeface="Arial"/>
                 <a:ea typeface="Arial"/>
@@ -9524,9 +10864,9 @@
           </a:lstStyle>
           <a:p xmlns:a="http://schemas.openxmlformats.org/drawingml/2006/main">
             <a:pPr>
-              <a:defRPr sz="3150" b="1">
-                <a:solidFill>
-                  <a:srgbClr val="172B4D"/>
+              <a:defRPr sz="1200" b="1">
+                <a:solidFill>
+                  <a:srgbClr val="087E79"/>
                 </a:solidFill>
                 <a:latin typeface="Arial"/>
                 <a:ea typeface="Arial"/>
@@ -9534,15 +10874,15 @@
               </a:defRPr>
             </a:pPr>
             <a:r>
-              <a:rPr sz="3150" b="1">
-                <a:solidFill>
-                  <a:srgbClr val="172B4D"/>
+              <a:rPr sz="1200" b="1">
+                <a:solidFill>
+                  <a:srgbClr val="087E79"/>
                 </a:solidFill>
                 <a:latin typeface="Arial"/>
                 <a:ea typeface="Arial"/>
                 <a:cs typeface="Arial"/>
               </a:rPr>
-              <a:t>2016 validation chose random forest</a:t>
+              <a:t>2016 VALIDATION</a:t>
             </a:r>
           </a:p>
         </p:txBody>
@@ -9552,7 +10892,7 @@
           <p:cNvPr id="2" name="">
             <a:extLst xmlns:a="http://schemas.openxmlformats.org/drawingml/2006/main">
               <a:ext uri="{FF2B5EF4-FFF2-40B4-BE49-F238E27FC236}">
-                <a16:creationId xmlns:a16="http://schemas.microsoft.com/office/drawing/2014/main" id="{09A6AB9F-62F3-4E4C-81D6-0744D60CADE8}"/>
+                <a16:creationId xmlns:a16="http://schemas.microsoft.com/office/drawing/2014/main" id="{9850C569-0580-4F7F-BC7C-7602C46E86DE}"/>
               </a:ext>
             </a:extLst>
           </p:cNvPr>
@@ -9563,8 +10903,8 @@
         </p:nvSpPr>
         <p:spPr>
           <a:xfrm xmlns:a="http://schemas.openxmlformats.org/drawingml/2006/main">
-            <a:off x="685800" y="6315075"/>
-            <a:ext cx="6096000" cy="266700"/>
+            <a:off x="609600" y="876300"/>
+            <a:ext cx="10934700" cy="914400"/>
           </a:xfrm>
           <a:prstGeom xmlns:a="http://schemas.openxmlformats.org/drawingml/2006/main" prst="rect">
             <a:avLst/>
@@ -9579,9 +10919,9 @@
           <a:bodyPr xmlns:a="http://schemas.openxmlformats.org/drawingml/2006/main"/>
           <a:lstStyle xmlns:a="http://schemas.openxmlformats.org/drawingml/2006/main">
             <a:defPPr>
-              <a:defRPr sz="1050" b="0">
-                <a:solidFill>
-                  <a:srgbClr val="526174"/>
+              <a:defRPr sz="3300" b="1">
+                <a:solidFill>
+                  <a:srgbClr val="18324A"/>
                 </a:solidFill>
                 <a:latin typeface="Arial"/>
                 <a:ea typeface="Arial"/>
@@ -9591,9 +10931,9 @@
           </a:lstStyle>
           <a:p xmlns:a="http://schemas.openxmlformats.org/drawingml/2006/main">
             <a:pPr>
-              <a:defRPr sz="1050" b="0">
-                <a:solidFill>
-                  <a:srgbClr val="526174"/>
+              <a:defRPr sz="3300" b="1">
+                <a:solidFill>
+                  <a:srgbClr val="18324A"/>
                 </a:solidFill>
                 <a:latin typeface="Arial"/>
                 <a:ea typeface="Arial"/>
@@ -9601,15 +10941,15 @@
               </a:defRPr>
             </a:pPr>
             <a:r>
-              <a:rPr sz="1050" b="0">
-                <a:solidFill>
-                  <a:srgbClr val="526174"/>
+              <a:rPr sz="3300" b="1">
+                <a:solidFill>
+                  <a:srgbClr val="18324A"/>
                 </a:solidFill>
                 <a:latin typeface="Arial"/>
                 <a:ea typeface="Arial"/>
                 <a:cs typeface="Arial"/>
               </a:rPr>
-              <a:t>VUT AI SOLUTIONS  /  AIBUY3A</a:t>
+              <a:t>Random forest won validation</a:t>
             </a:r>
           </a:p>
         </p:txBody>
@@ -9619,7 +10959,7 @@
           <p:cNvPr id="3" name="">
             <a:extLst xmlns:a="http://schemas.openxmlformats.org/drawingml/2006/main">
               <a:ext uri="{FF2B5EF4-FFF2-40B4-BE49-F238E27FC236}">
-                <a16:creationId xmlns:a16="http://schemas.microsoft.com/office/drawing/2014/main" id="{D98BD0AB-B17C-4C92-A44D-CF65BEEECC08}"/>
+                <a16:creationId xmlns:a16="http://schemas.microsoft.com/office/drawing/2014/main" id="{115AA314-B3C7-4510-9486-01F0BD2B71E0}"/>
               </a:ext>
             </a:extLst>
           </p:cNvPr>
@@ -9630,8 +10970,8 @@
         </p:nvSpPr>
         <p:spPr>
           <a:xfrm xmlns:a="http://schemas.openxmlformats.org/drawingml/2006/main">
-            <a:off x="11001375" y="6315075"/>
-            <a:ext cx="523875" cy="266700"/>
+            <a:off x="609600" y="6315075"/>
+            <a:ext cx="4000500" cy="209550"/>
           </a:xfrm>
           <a:prstGeom xmlns:a="http://schemas.openxmlformats.org/drawingml/2006/main" prst="rect">
             <a:avLst/>
@@ -9646,9 +10986,9 @@
           <a:bodyPr xmlns:a="http://schemas.openxmlformats.org/drawingml/2006/main"/>
           <a:lstStyle xmlns:a="http://schemas.openxmlformats.org/drawingml/2006/main">
             <a:defPPr>
-              <a:defRPr sz="1050" b="0">
-                <a:solidFill>
-                  <a:srgbClr val="526174"/>
+              <a:defRPr sz="975" b="1">
+                <a:solidFill>
+                  <a:srgbClr val="536A78"/>
                 </a:solidFill>
                 <a:latin typeface="Arial"/>
                 <a:ea typeface="Arial"/>
@@ -9658,9 +10998,9 @@
           </a:lstStyle>
           <a:p xmlns:a="http://schemas.openxmlformats.org/drawingml/2006/main">
             <a:pPr>
-              <a:defRPr sz="1050" b="0">
-                <a:solidFill>
-                  <a:srgbClr val="526174"/>
+              <a:defRPr sz="975" b="1">
+                <a:solidFill>
+                  <a:srgbClr val="536A78"/>
                 </a:solidFill>
                 <a:latin typeface="Arial"/>
                 <a:ea typeface="Arial"/>
@@ -9668,9 +11008,76 @@
               </a:defRPr>
             </a:pPr>
             <a:r>
-              <a:rPr sz="1050" b="0">
-                <a:solidFill>
-                  <a:srgbClr val="526174"/>
+              <a:rPr sz="975" b="1">
+                <a:solidFill>
+                  <a:srgbClr val="536A78"/>
+                </a:solidFill>
+                <a:latin typeface="Arial"/>
+                <a:ea typeface="Arial"/>
+                <a:cs typeface="Arial"/>
+              </a:rPr>
+              <a:t>STOCKSENSE AI</a:t>
+            </a:r>
+          </a:p>
+        </p:txBody>
+      </p:sp>
+      <p:sp>
+        <p:nvSpPr>
+          <p:cNvPr id="4" name="">
+            <a:extLst xmlns:a="http://schemas.openxmlformats.org/drawingml/2006/main">
+              <a:ext uri="{FF2B5EF4-FFF2-40B4-BE49-F238E27FC236}">
+                <a16:creationId xmlns:a16="http://schemas.microsoft.com/office/drawing/2014/main" id="{D8B85E98-42A0-4682-9EFE-5B3D96BE017E}"/>
+              </a:ext>
+            </a:extLst>
+          </p:cNvPr>
+          <p:cNvSpPr>
+            <a:spLocks xmlns:a="http://schemas.openxmlformats.org/drawingml/2006/main" noGrp="1"/>
+          </p:cNvSpPr>
+          <p:nvPr/>
+        </p:nvSpPr>
+        <p:spPr>
+          <a:xfrm xmlns:a="http://schemas.openxmlformats.org/drawingml/2006/main">
+            <a:off x="11049000" y="6315075"/>
+            <a:ext cx="666750" cy="209550"/>
+          </a:xfrm>
+          <a:prstGeom xmlns:a="http://schemas.openxmlformats.org/drawingml/2006/main" prst="rect">
+            <a:avLst/>
+          </a:prstGeom>
+          <a:noFill xmlns:a="http://schemas.openxmlformats.org/drawingml/2006/main"/>
+          <a:ln xmlns:a="http://schemas.openxmlformats.org/drawingml/2006/main" w="0">
+            <a:noFill/>
+            <a:prstDash val="solid"/>
+          </a:ln>
+        </p:spPr>
+        <p:txBody>
+          <a:bodyPr xmlns:a="http://schemas.openxmlformats.org/drawingml/2006/main"/>
+          <a:lstStyle xmlns:a="http://schemas.openxmlformats.org/drawingml/2006/main">
+            <a:defPPr>
+              <a:defRPr sz="975" b="0">
+                <a:solidFill>
+                  <a:srgbClr val="536A78"/>
+                </a:solidFill>
+                <a:latin typeface="Arial"/>
+                <a:ea typeface="Arial"/>
+                <a:cs typeface="Arial"/>
+              </a:defRPr>
+            </a:defPPr>
+          </a:lstStyle>
+          <a:p xmlns:a="http://schemas.openxmlformats.org/drawingml/2006/main">
+            <a:pPr>
+              <a:defRPr sz="975" b="0">
+                <a:solidFill>
+                  <a:srgbClr val="536A78"/>
+                </a:solidFill>
+                <a:latin typeface="Arial"/>
+                <a:ea typeface="Arial"/>
+                <a:cs typeface="Arial"/>
+              </a:defRPr>
+            </a:pPr>
+            <a:r>
+              <a:rPr sz="975" b="0">
+                <a:solidFill>
+                  <a:srgbClr val="536A78"/>
                 </a:solidFill>
                 <a:latin typeface="Arial"/>
                 <a:ea typeface="Arial"/>
@@ -9683,10 +11090,10 @@
       </p:sp>
       <p:graphicFrame>
         <p:nvGraphicFramePr>
-          <p:cNvPr id="4" name="Chart">
-            <a:extLst xmlns:a="http://schemas.openxmlformats.org/drawingml/2006/main">
-              <a:ext uri="{FF2B5EF4-FFF2-40B4-BE49-F238E27FC236}">
-                <a16:creationId xmlns:a16="http://schemas.microsoft.com/office/drawing/2014/main" id="{8B892F8D-5580-4515-BDCF-746E61529ED2}"/>
+          <p:cNvPr id="5" name="Chart">
+            <a:extLst xmlns:a="http://schemas.openxmlformats.org/drawingml/2006/main">
+              <a:ext uri="{FF2B5EF4-FFF2-40B4-BE49-F238E27FC236}">
+                <a16:creationId xmlns:a16="http://schemas.microsoft.com/office/drawing/2014/main" id="{71235FD8-1557-44DE-B1E0-34450EB91340}"/>
               </a:ext>
             </a:extLst>
           </p:cNvPr>
@@ -9694,21 +11101,21 @@
           <p:nvPr/>
         </p:nvGraphicFramePr>
         <p:xfrm>
-          <a:off xmlns:a="http://schemas.openxmlformats.org/drawingml/2006/main" x="904875" y="1571625"/>
-          <a:ext xmlns:a="http://schemas.openxmlformats.org/drawingml/2006/main" cx="9144000" cy="3381375"/>
+          <a:off xmlns:a="http://schemas.openxmlformats.org/drawingml/2006/main" x="714375" y="2009775"/>
+          <a:ext xmlns:a="http://schemas.openxmlformats.org/drawingml/2006/main" cx="10287000" cy="3190875"/>
         </p:xfrm>
         <a:graphic xmlns:a="http://schemas.openxmlformats.org/drawingml/2006/main">
           <a:graphicData uri="http://schemas.openxmlformats.org/drawingml/2006/chart">
-            <c:chart xmlns:r="http://schemas.openxmlformats.org/officeDocument/2006/relationships" xmlns:c="http://schemas.openxmlformats.org/drawingml/2006/chart" r:id="R56a564d2237640c3"/>
+            <c:chart xmlns:r="http://schemas.openxmlformats.org/officeDocument/2006/relationships" xmlns:c="http://schemas.openxmlformats.org/drawingml/2006/chart" r:id="R39ebe57926ee4afd"/>
           </a:graphicData>
         </a:graphic>
       </p:graphicFrame>
       <p:sp>
         <p:nvSpPr>
-          <p:cNvPr id="5" name="">
-            <a:extLst xmlns:a="http://schemas.openxmlformats.org/drawingml/2006/main">
-              <a:ext uri="{FF2B5EF4-FFF2-40B4-BE49-F238E27FC236}">
-                <a16:creationId xmlns:a16="http://schemas.microsoft.com/office/drawing/2014/main" id="{0BFF3E95-D70D-4E88-BB03-54BD945548B5}"/>
+          <p:cNvPr id="6" name="">
+            <a:extLst xmlns:a="http://schemas.openxmlformats.org/drawingml/2006/main">
+              <a:ext uri="{FF2B5EF4-FFF2-40B4-BE49-F238E27FC236}">
+                <a16:creationId xmlns:a16="http://schemas.microsoft.com/office/drawing/2014/main" id="{3D08BFB8-E2A2-4616-9A3B-A24441FD8C30}"/>
               </a:ext>
             </a:extLst>
           </p:cNvPr>
@@ -9719,8 +11126,8 @@
         </p:nvSpPr>
         <p:spPr>
           <a:xfrm xmlns:a="http://schemas.openxmlformats.org/drawingml/2006/main">
-            <a:off x="904875" y="5191125"/>
-            <a:ext cx="9525000" cy="438150"/>
+            <a:off x="790575" y="5429250"/>
+            <a:ext cx="9525000" cy="504825"/>
           </a:xfrm>
           <a:prstGeom xmlns:a="http://schemas.openxmlformats.org/drawingml/2006/main" prst="rect">
             <a:avLst/>
@@ -9737,7 +11144,7 @@
             <a:defPPr>
               <a:defRPr sz="1875" b="0">
                 <a:solidFill>
-                  <a:srgbClr val="526174"/>
+                  <a:srgbClr val="536A78"/>
                 </a:solidFill>
                 <a:latin typeface="Arial"/>
                 <a:ea typeface="Arial"/>
@@ -9749,7 +11156,7 @@
             <a:pPr>
               <a:defRPr sz="1875" b="0">
                 <a:solidFill>
-                  <a:srgbClr val="526174"/>
+                  <a:srgbClr val="536A78"/>
                 </a:solidFill>
                 <a:latin typeface="Arial"/>
                 <a:ea typeface="Arial"/>
@@ -9759,13 +11166,13 @@
             <a:r>
               <a:rPr sz="1875" b="0">
                 <a:solidFill>
-                  <a:srgbClr val="526174"/>
+                  <a:srgbClr val="536A78"/>
                 </a:solidFill>
                 <a:latin typeface="Arial"/>
                 <a:ea typeface="Arial"/>
                 <a:cs typeface="Arial"/>
               </a:rPr>
-              <a:t>Daily MAE in units. Lower is better.</a:t>
+              <a:t>Daily mean absolute error (units)</a:t>
             </a:r>
           </a:p>
         </p:txBody>
@@ -9773,7 +11180,7 @@
     </p:spTree>
     <p:extLst>
       <p:ext uri="{BB962C8B-B14F-4D97-AF65-F5344CB8AC3E}">
-        <p14:creationId xmlns:p14="http://schemas.microsoft.com/office/powerpoint/2010/main" val="2145694126"/>
+        <p14:creationId xmlns:p14="http://schemas.microsoft.com/office/powerpoint/2010/main" val="13333651"/>
       </p:ext>
     </p:extLst>
   </p:cSld>
@@ -9786,7 +11193,7 @@
     <p:bg>
       <p:bgPr>
         <a:solidFill xmlns:a="http://schemas.openxmlformats.org/drawingml/2006/main">
-          <a:srgbClr val="FFFFFF"/>
+          <a:srgbClr val="F7F5F0"/>
         </a:solidFill>
       </p:bgPr>
     </p:bg>
@@ -9801,10 +11208,10 @@
       </p:grpSpPr>
       <p:sp>
         <p:nvSpPr>
-          <p:cNvPr id="7" name="">
-            <a:extLst xmlns:a="http://schemas.openxmlformats.org/drawingml/2006/main">
-              <a:ext uri="{FF2B5EF4-FFF2-40B4-BE49-F238E27FC236}">
-                <a16:creationId xmlns:a16="http://schemas.microsoft.com/office/drawing/2014/main" id="{0BBD5384-F575-483D-B151-5C936591E755}"/>
+          <p:cNvPr id="8" name="">
+            <a:extLst xmlns:a="http://schemas.openxmlformats.org/drawingml/2006/main">
+              <a:ext uri="{FF2B5EF4-FFF2-40B4-BE49-F238E27FC236}">
+                <a16:creationId xmlns:a16="http://schemas.microsoft.com/office/drawing/2014/main" id="{9D54AF46-061C-4FDF-80C4-330FDC5A2A41}"/>
               </a:ext>
             </a:extLst>
           </p:cNvPr>
@@ -9815,8 +11222,8 @@
         </p:nvSpPr>
         <p:spPr>
           <a:xfrm xmlns:a="http://schemas.openxmlformats.org/drawingml/2006/main">
-            <a:off x="685800" y="476250"/>
-            <a:ext cx="10820400" cy="857250"/>
+            <a:off x="609600" y="400050"/>
+            <a:ext cx="5715000" cy="285750"/>
           </a:xfrm>
           <a:prstGeom xmlns:a="http://schemas.openxmlformats.org/drawingml/2006/main" prst="rect">
             <a:avLst/>
@@ -9831,9 +11238,9 @@
           <a:bodyPr xmlns:a="http://schemas.openxmlformats.org/drawingml/2006/main"/>
           <a:lstStyle xmlns:a="http://schemas.openxmlformats.org/drawingml/2006/main">
             <a:defPPr>
-              <a:defRPr sz="3150" b="1">
-                <a:solidFill>
-                  <a:srgbClr val="172B4D"/>
+              <a:defRPr sz="1200" b="1">
+                <a:solidFill>
+                  <a:srgbClr val="087E79"/>
                 </a:solidFill>
                 <a:latin typeface="Arial"/>
                 <a:ea typeface="Arial"/>
@@ -9843,9 +11250,9 @@
           </a:lstStyle>
           <a:p xmlns:a="http://schemas.openxmlformats.org/drawingml/2006/main">
             <a:pPr>
-              <a:defRPr sz="3150" b="1">
-                <a:solidFill>
-                  <a:srgbClr val="172B4D"/>
+              <a:defRPr sz="1200" b="1">
+                <a:solidFill>
+                  <a:srgbClr val="087E79"/>
                 </a:solidFill>
                 <a:latin typeface="Arial"/>
                 <a:ea typeface="Arial"/>
@@ -9853,15 +11260,15 @@
               </a:defRPr>
             </a:pPr>
             <a:r>
-              <a:rPr sz="3150" b="1">
-                <a:solidFill>
-                  <a:srgbClr val="172B4D"/>
+              <a:rPr sz="1200" b="1">
+                <a:solidFill>
+                  <a:srgbClr val="087E79"/>
                 </a:solidFill>
                 <a:latin typeface="Arial"/>
                 <a:ea typeface="Arial"/>
                 <a:cs typeface="Arial"/>
               </a:rPr>
-              <a:t>2017 final test: daily and weekly trade-off</a:t>
+              <a:t>2017 FINAL TEST</a:t>
             </a:r>
           </a:p>
         </p:txBody>
@@ -9871,7 +11278,7 @@
           <p:cNvPr id="2" name="">
             <a:extLst xmlns:a="http://schemas.openxmlformats.org/drawingml/2006/main">
               <a:ext uri="{FF2B5EF4-FFF2-40B4-BE49-F238E27FC236}">
-                <a16:creationId xmlns:a16="http://schemas.microsoft.com/office/drawing/2014/main" id="{A58EDEB8-B38D-4F79-A0A7-4ED92DE0C4F6}"/>
+                <a16:creationId xmlns:a16="http://schemas.microsoft.com/office/drawing/2014/main" id="{18B9BDCB-8F40-43E1-8F02-0C046F55502B}"/>
               </a:ext>
             </a:extLst>
           </p:cNvPr>
@@ -9882,8 +11289,8 @@
         </p:nvSpPr>
         <p:spPr>
           <a:xfrm xmlns:a="http://schemas.openxmlformats.org/drawingml/2006/main">
-            <a:off x="685800" y="6315075"/>
-            <a:ext cx="6096000" cy="266700"/>
+            <a:off x="609600" y="876300"/>
+            <a:ext cx="10934700" cy="914400"/>
           </a:xfrm>
           <a:prstGeom xmlns:a="http://schemas.openxmlformats.org/drawingml/2006/main" prst="rect">
             <a:avLst/>
@@ -9898,9 +11305,9 @@
           <a:bodyPr xmlns:a="http://schemas.openxmlformats.org/drawingml/2006/main"/>
           <a:lstStyle xmlns:a="http://schemas.openxmlformats.org/drawingml/2006/main">
             <a:defPPr>
-              <a:defRPr sz="1050" b="0">
-                <a:solidFill>
-                  <a:srgbClr val="526174"/>
+              <a:defRPr sz="3300" b="1">
+                <a:solidFill>
+                  <a:srgbClr val="18324A"/>
                 </a:solidFill>
                 <a:latin typeface="Arial"/>
                 <a:ea typeface="Arial"/>
@@ -9910,9 +11317,9 @@
           </a:lstStyle>
           <a:p xmlns:a="http://schemas.openxmlformats.org/drawingml/2006/main">
             <a:pPr>
-              <a:defRPr sz="1050" b="0">
-                <a:solidFill>
-                  <a:srgbClr val="526174"/>
+              <a:defRPr sz="3300" b="1">
+                <a:solidFill>
+                  <a:srgbClr val="18324A"/>
                 </a:solidFill>
                 <a:latin typeface="Arial"/>
                 <a:ea typeface="Arial"/>
@@ -9920,15 +11327,15 @@
               </a:defRPr>
             </a:pPr>
             <a:r>
-              <a:rPr sz="1050" b="0">
-                <a:solidFill>
-                  <a:srgbClr val="526174"/>
+              <a:rPr sz="3300" b="1">
+                <a:solidFill>
+                  <a:srgbClr val="18324A"/>
                 </a:solidFill>
                 <a:latin typeface="Arial"/>
                 <a:ea typeface="Arial"/>
                 <a:cs typeface="Arial"/>
               </a:rPr>
-              <a:t>VUT AI SOLUTIONS  /  AIBUY3A</a:t>
+              <a:t>The result held on the final test</a:t>
             </a:r>
           </a:p>
         </p:txBody>
@@ -9938,7 +11345,7 @@
           <p:cNvPr id="3" name="">
             <a:extLst xmlns:a="http://schemas.openxmlformats.org/drawingml/2006/main">
               <a:ext uri="{FF2B5EF4-FFF2-40B4-BE49-F238E27FC236}">
-                <a16:creationId xmlns:a16="http://schemas.microsoft.com/office/drawing/2014/main" id="{3849C09C-FECE-4E6F-B3EE-26F0A51F5F95}"/>
+                <a16:creationId xmlns:a16="http://schemas.microsoft.com/office/drawing/2014/main" id="{6FE39E9E-8DF9-48B0-97A9-9629D36DA0F4}"/>
               </a:ext>
             </a:extLst>
           </p:cNvPr>
@@ -9949,8 +11356,8 @@
         </p:nvSpPr>
         <p:spPr>
           <a:xfrm xmlns:a="http://schemas.openxmlformats.org/drawingml/2006/main">
-            <a:off x="11001375" y="6315075"/>
-            <a:ext cx="523875" cy="266700"/>
+            <a:off x="609600" y="6315075"/>
+            <a:ext cx="4000500" cy="209550"/>
           </a:xfrm>
           <a:prstGeom xmlns:a="http://schemas.openxmlformats.org/drawingml/2006/main" prst="rect">
             <a:avLst/>
@@ -9965,9 +11372,9 @@
           <a:bodyPr xmlns:a="http://schemas.openxmlformats.org/drawingml/2006/main"/>
           <a:lstStyle xmlns:a="http://schemas.openxmlformats.org/drawingml/2006/main">
             <a:defPPr>
-              <a:defRPr sz="1050" b="0">
-                <a:solidFill>
-                  <a:srgbClr val="526174"/>
+              <a:defRPr sz="975" b="1">
+                <a:solidFill>
+                  <a:srgbClr val="536A78"/>
                 </a:solidFill>
                 <a:latin typeface="Arial"/>
                 <a:ea typeface="Arial"/>
@@ -9977,9 +11384,9 @@
           </a:lstStyle>
           <a:p xmlns:a="http://schemas.openxmlformats.org/drawingml/2006/main">
             <a:pPr>
-              <a:defRPr sz="1050" b="0">
-                <a:solidFill>
-                  <a:srgbClr val="526174"/>
+              <a:defRPr sz="975" b="1">
+                <a:solidFill>
+                  <a:srgbClr val="536A78"/>
                 </a:solidFill>
                 <a:latin typeface="Arial"/>
                 <a:ea typeface="Arial"/>
@@ -9987,9 +11394,76 @@
               </a:defRPr>
             </a:pPr>
             <a:r>
-              <a:rPr sz="1050" b="0">
-                <a:solidFill>
-                  <a:srgbClr val="526174"/>
+              <a:rPr sz="975" b="1">
+                <a:solidFill>
+                  <a:srgbClr val="536A78"/>
+                </a:solidFill>
+                <a:latin typeface="Arial"/>
+                <a:ea typeface="Arial"/>
+                <a:cs typeface="Arial"/>
+              </a:rPr>
+              <a:t>STOCKSENSE AI</a:t>
+            </a:r>
+          </a:p>
+        </p:txBody>
+      </p:sp>
+      <p:sp>
+        <p:nvSpPr>
+          <p:cNvPr id="4" name="">
+            <a:extLst xmlns:a="http://schemas.openxmlformats.org/drawingml/2006/main">
+              <a:ext uri="{FF2B5EF4-FFF2-40B4-BE49-F238E27FC236}">
+                <a16:creationId xmlns:a16="http://schemas.microsoft.com/office/drawing/2014/main" id="{313E1951-6880-4BA7-96D8-E330893F5A69}"/>
+              </a:ext>
+            </a:extLst>
+          </p:cNvPr>
+          <p:cNvSpPr>
+            <a:spLocks xmlns:a="http://schemas.openxmlformats.org/drawingml/2006/main" noGrp="1"/>
+          </p:cNvSpPr>
+          <p:nvPr/>
+        </p:nvSpPr>
+        <p:spPr>
+          <a:xfrm xmlns:a="http://schemas.openxmlformats.org/drawingml/2006/main">
+            <a:off x="11049000" y="6315075"/>
+            <a:ext cx="666750" cy="209550"/>
+          </a:xfrm>
+          <a:prstGeom xmlns:a="http://schemas.openxmlformats.org/drawingml/2006/main" prst="rect">
+            <a:avLst/>
+          </a:prstGeom>
+          <a:noFill xmlns:a="http://schemas.openxmlformats.org/drawingml/2006/main"/>
+          <a:ln xmlns:a="http://schemas.openxmlformats.org/drawingml/2006/main" w="0">
+            <a:noFill/>
+            <a:prstDash val="solid"/>
+          </a:ln>
+        </p:spPr>
+        <p:txBody>
+          <a:bodyPr xmlns:a="http://schemas.openxmlformats.org/drawingml/2006/main"/>
+          <a:lstStyle xmlns:a="http://schemas.openxmlformats.org/drawingml/2006/main">
+            <a:defPPr>
+              <a:defRPr sz="975" b="0">
+                <a:solidFill>
+                  <a:srgbClr val="536A78"/>
+                </a:solidFill>
+                <a:latin typeface="Arial"/>
+                <a:ea typeface="Arial"/>
+                <a:cs typeface="Arial"/>
+              </a:defRPr>
+            </a:defPPr>
+          </a:lstStyle>
+          <a:p xmlns:a="http://schemas.openxmlformats.org/drawingml/2006/main">
+            <a:pPr>
+              <a:defRPr sz="975" b="0">
+                <a:solidFill>
+                  <a:srgbClr val="536A78"/>
+                </a:solidFill>
+                <a:latin typeface="Arial"/>
+                <a:ea typeface="Arial"/>
+                <a:cs typeface="Arial"/>
+              </a:defRPr>
+            </a:pPr>
+            <a:r>
+              <a:rPr sz="975" b="0">
+                <a:solidFill>
+                  <a:srgbClr val="536A78"/>
                 </a:solidFill>
                 <a:latin typeface="Arial"/>
                 <a:ea typeface="Arial"/>
@@ -10002,10 +11476,10 @@
       </p:sp>
       <p:graphicFrame>
         <p:nvGraphicFramePr>
-          <p:cNvPr id="4" name="Chart">
-            <a:extLst xmlns:a="http://schemas.openxmlformats.org/drawingml/2006/main">
-              <a:ext uri="{FF2B5EF4-FFF2-40B4-BE49-F238E27FC236}">
-                <a16:creationId xmlns:a16="http://schemas.microsoft.com/office/drawing/2014/main" id="{1FA287E7-21C8-4EB6-AA9B-8CE8D52F783B}"/>
+          <p:cNvPr id="5" name="Chart">
+            <a:extLst xmlns:a="http://schemas.openxmlformats.org/drawingml/2006/main">
+              <a:ext uri="{FF2B5EF4-FFF2-40B4-BE49-F238E27FC236}">
+                <a16:creationId xmlns:a16="http://schemas.microsoft.com/office/drawing/2014/main" id="{F55C63A8-5E59-4BF9-9768-2D0DFD9F8583}"/>
               </a:ext>
             </a:extLst>
           </p:cNvPr>
@@ -10013,21 +11487,21 @@
           <p:nvPr/>
         </p:nvGraphicFramePr>
         <p:xfrm>
-          <a:off xmlns:a="http://schemas.openxmlformats.org/drawingml/2006/main" x="904875" y="1381125"/>
-          <a:ext xmlns:a="http://schemas.openxmlformats.org/drawingml/2006/main" cx="8858250" cy="3143250"/>
+          <a:off xmlns:a="http://schemas.openxmlformats.org/drawingml/2006/main" x="714375" y="2009775"/>
+          <a:ext xmlns:a="http://schemas.openxmlformats.org/drawingml/2006/main" cx="10287000" cy="3190875"/>
         </p:xfrm>
         <a:graphic xmlns:a="http://schemas.openxmlformats.org/drawingml/2006/main">
           <a:graphicData uri="http://schemas.openxmlformats.org/drawingml/2006/chart">
-            <c:chart xmlns:r="http://schemas.openxmlformats.org/officeDocument/2006/relationships" xmlns:c="http://schemas.openxmlformats.org/drawingml/2006/chart" r:id="R3609aeb2fbec4af4"/>
+            <c:chart xmlns:r="http://schemas.openxmlformats.org/officeDocument/2006/relationships" xmlns:c="http://schemas.openxmlformats.org/drawingml/2006/chart" r:id="R182b30fe643b44c9"/>
           </a:graphicData>
         </a:graphic>
       </p:graphicFrame>
       <p:sp>
         <p:nvSpPr>
-          <p:cNvPr id="5" name="">
-            <a:extLst xmlns:a="http://schemas.openxmlformats.org/drawingml/2006/main">
-              <a:ext uri="{FF2B5EF4-FFF2-40B4-BE49-F238E27FC236}">
-                <a16:creationId xmlns:a16="http://schemas.microsoft.com/office/drawing/2014/main" id="{02B89BBD-426C-4BE6-A267-F425BFEADA06}"/>
+          <p:cNvPr id="6" name="">
+            <a:extLst xmlns:a="http://schemas.openxmlformats.org/drawingml/2006/main">
+              <a:ext uri="{FF2B5EF4-FFF2-40B4-BE49-F238E27FC236}">
+                <a16:creationId xmlns:a16="http://schemas.microsoft.com/office/drawing/2014/main" id="{823A7CE8-22BB-4C78-AD9D-0EA7C5634858}"/>
               </a:ext>
             </a:extLst>
           </p:cNvPr>
@@ -10038,8 +11512,8 @@
         </p:nvSpPr>
         <p:spPr>
           <a:xfrm xmlns:a="http://schemas.openxmlformats.org/drawingml/2006/main">
-            <a:off x="904875" y="4686300"/>
-            <a:ext cx="10477500" cy="523875"/>
+            <a:off x="790575" y="5324475"/>
+            <a:ext cx="10572750" cy="476250"/>
           </a:xfrm>
           <a:prstGeom xmlns:a="http://schemas.openxmlformats.org/drawingml/2006/main" prst="rect">
             <a:avLst/>
@@ -10056,7 +11530,7 @@
             <a:defPPr>
               <a:defRPr sz="2025" b="1">
                 <a:solidFill>
-                  <a:srgbClr val="172B4D"/>
+                  <a:srgbClr val="087E79"/>
                 </a:solidFill>
                 <a:latin typeface="Arial"/>
                 <a:ea typeface="Arial"/>
@@ -10068,7 +11542,7 @@
             <a:pPr>
               <a:defRPr sz="2025" b="1">
                 <a:solidFill>
-                  <a:srgbClr val="172B4D"/>
+                  <a:srgbClr val="087E79"/>
                 </a:solidFill>
                 <a:latin typeface="Arial"/>
                 <a:ea typeface="Arial"/>
@@ -10078,23 +11552,23 @@
             <a:r>
               <a:rPr sz="2025" b="1">
                 <a:solidFill>
-                  <a:srgbClr val="172B4D"/>
+                  <a:srgbClr val="087E79"/>
                 </a:solidFill>
                 <a:latin typeface="Arial"/>
                 <a:ea typeface="Arial"/>
                 <a:cs typeface="Arial"/>
               </a:rPr>
-              <a:t>Random forest: 23.3% lower daily MAE than the benchmark.</a:t>
-            </a:r>
-          </a:p>
-        </p:txBody>
-      </p:sp>
-      <p:sp>
-        <p:nvSpPr>
-          <p:cNvPr id="6" name="">
-            <a:extLst xmlns:a="http://schemas.openxmlformats.org/drawingml/2006/main">
-              <a:ext uri="{FF2B5EF4-FFF2-40B4-BE49-F238E27FC236}">
-                <a16:creationId xmlns:a16="http://schemas.microsoft.com/office/drawing/2014/main" id="{53C1A818-C055-4EFB-9603-685441FACB98}"/>
+              <a:t>23.3% lower daily error than the weekly benchmark</a:t>
+            </a:r>
+          </a:p>
+        </p:txBody>
+      </p:sp>
+      <p:sp>
+        <p:nvSpPr>
+          <p:cNvPr id="7" name="">
+            <a:extLst xmlns:a="http://schemas.openxmlformats.org/drawingml/2006/main">
+              <a:ext uri="{FF2B5EF4-FFF2-40B4-BE49-F238E27FC236}">
+                <a16:creationId xmlns:a16="http://schemas.microsoft.com/office/drawing/2014/main" id="{BEC68D27-0CB6-4F6F-AB57-B95371A44585}"/>
               </a:ext>
             </a:extLst>
           </p:cNvPr>
@@ -10105,8 +11579,8 @@
         </p:nvSpPr>
         <p:spPr>
           <a:xfrm xmlns:a="http://schemas.openxmlformats.org/drawingml/2006/main">
-            <a:off x="904875" y="5305425"/>
-            <a:ext cx="10477500" cy="457200"/>
+            <a:off x="790575" y="5829300"/>
+            <a:ext cx="10572750" cy="333375"/>
           </a:xfrm>
           <a:prstGeom xmlns:a="http://schemas.openxmlformats.org/drawingml/2006/main" prst="rect">
             <a:avLst/>
@@ -10121,9 +11595,9 @@
           <a:bodyPr xmlns:a="http://schemas.openxmlformats.org/drawingml/2006/main"/>
           <a:lstStyle xmlns:a="http://schemas.openxmlformats.org/drawingml/2006/main">
             <a:defPPr>
-              <a:defRPr sz="1725" b="0">
-                <a:solidFill>
-                  <a:srgbClr val="526174"/>
+              <a:defRPr sz="1500" b="0">
+                <a:solidFill>
+                  <a:srgbClr val="536A78"/>
                 </a:solidFill>
                 <a:latin typeface="Arial"/>
                 <a:ea typeface="Arial"/>
@@ -10133,9 +11607,9 @@
           </a:lstStyle>
           <a:p xmlns:a="http://schemas.openxmlformats.org/drawingml/2006/main">
             <a:pPr>
-              <a:defRPr sz="1725" b="0">
-                <a:solidFill>
-                  <a:srgbClr val="526174"/>
+              <a:defRPr sz="1500" b="0">
+                <a:solidFill>
+                  <a:srgbClr val="536A78"/>
                 </a:solidFill>
                 <a:latin typeface="Arial"/>
                 <a:ea typeface="Arial"/>
@@ -10143,15 +11617,15 @@
               </a:defRPr>
             </a:pPr>
             <a:r>
-              <a:rPr sz="1725" b="0">
-                <a:solidFill>
-                  <a:srgbClr val="526174"/>
+              <a:rPr sz="1500" b="0">
+                <a:solidFill>
+                  <a:srgbClr val="536A78"/>
                 </a:solidFill>
                 <a:latin typeface="Arial"/>
                 <a:ea typeface="Arial"/>
                 <a:cs typeface="Arial"/>
               </a:rPr>
-              <a:t>LSTM had the lowest overall weekly-total MAE: 17.343 units.</a:t>
+              <a:t>LSTM had the lowest weekly-total error (17.343 units).</a:t>
             </a:r>
           </a:p>
         </p:txBody>
@@ -10159,7 +11633,7 @@
     </p:spTree>
     <p:extLst>
       <p:ext uri="{BB962C8B-B14F-4D97-AF65-F5344CB8AC3E}">
-        <p14:creationId xmlns:p14="http://schemas.microsoft.com/office/powerpoint/2010/main" val="1788006365"/>
+        <p14:creationId xmlns:p14="http://schemas.microsoft.com/office/powerpoint/2010/main" val="811050592"/>
       </p:ext>
     </p:extLst>
   </p:cSld>
@@ -10172,7 +11646,7 @@
     <p:bg>
       <p:bgPr>
         <a:solidFill xmlns:a="http://schemas.openxmlformats.org/drawingml/2006/main">
-          <a:srgbClr val="FFFFFF"/>
+          <a:srgbClr val="11263E"/>
         </a:solidFill>
       </p:bgPr>
     </p:bg>
@@ -10187,10 +11661,10 @@
       </p:grpSpPr>
       <p:sp>
         <p:nvSpPr>
-          <p:cNvPr id="8" name="">
-            <a:extLst xmlns:a="http://schemas.openxmlformats.org/drawingml/2006/main">
-              <a:ext uri="{FF2B5EF4-FFF2-40B4-BE49-F238E27FC236}">
-                <a16:creationId xmlns:a16="http://schemas.microsoft.com/office/drawing/2014/main" id="{9368D3B4-0D86-4E21-836A-D570DCC25C3D}"/>
+          <p:cNvPr id="12" name="">
+            <a:extLst xmlns:a="http://schemas.openxmlformats.org/drawingml/2006/main">
+              <a:ext uri="{FF2B5EF4-FFF2-40B4-BE49-F238E27FC236}">
+                <a16:creationId xmlns:a16="http://schemas.microsoft.com/office/drawing/2014/main" id="{2FEC9E5C-9BA4-4FEB-9A3E-6560E9D5B434}"/>
               </a:ext>
             </a:extLst>
           </p:cNvPr>
@@ -10201,8 +11675,8 @@
         </p:nvSpPr>
         <p:spPr>
           <a:xfrm xmlns:a="http://schemas.openxmlformats.org/drawingml/2006/main">
-            <a:off x="685800" y="476250"/>
-            <a:ext cx="10820400" cy="857250"/>
+            <a:off x="609600" y="400050"/>
+            <a:ext cx="5715000" cy="285750"/>
           </a:xfrm>
           <a:prstGeom xmlns:a="http://schemas.openxmlformats.org/drawingml/2006/main" prst="rect">
             <a:avLst/>
@@ -10217,9 +11691,9 @@
           <a:bodyPr xmlns:a="http://schemas.openxmlformats.org/drawingml/2006/main"/>
           <a:lstStyle xmlns:a="http://schemas.openxmlformats.org/drawingml/2006/main">
             <a:defPPr>
-              <a:defRPr sz="3150" b="1">
-                <a:solidFill>
-                  <a:srgbClr val="172B4D"/>
+              <a:defRPr sz="1200" b="1">
+                <a:solidFill>
+                  <a:srgbClr val="A9E7D7"/>
                 </a:solidFill>
                 <a:latin typeface="Arial"/>
                 <a:ea typeface="Arial"/>
@@ -10229,9 +11703,9 @@
           </a:lstStyle>
           <a:p xmlns:a="http://schemas.openxmlformats.org/drawingml/2006/main">
             <a:pPr>
-              <a:defRPr sz="3150" b="1">
-                <a:solidFill>
-                  <a:srgbClr val="172B4D"/>
+              <a:defRPr sz="1200" b="1">
+                <a:solidFill>
+                  <a:srgbClr val="A9E7D7"/>
                 </a:solidFill>
                 <a:latin typeface="Arial"/>
                 <a:ea typeface="Arial"/>
@@ -10239,15 +11713,15 @@
               </a:defRPr>
             </a:pPr>
             <a:r>
-              <a:rPr sz="3150" b="1">
-                <a:solidFill>
-                  <a:srgbClr val="172B4D"/>
+              <a:rPr sz="1200" b="1">
+                <a:solidFill>
+                  <a:srgbClr val="A9E7D7"/>
                 </a:solidFill>
                 <a:latin typeface="Arial"/>
                 <a:ea typeface="Arial"/>
                 <a:cs typeface="Arial"/>
               </a:rPr>
-              <a:t>Small LSTM comparison</a:t>
+              <a:t>DEEP LEARNING</a:t>
             </a:r>
           </a:p>
         </p:txBody>
@@ -10257,7 +11731,7 @@
           <p:cNvPr id="2" name="">
             <a:extLst xmlns:a="http://schemas.openxmlformats.org/drawingml/2006/main">
               <a:ext uri="{FF2B5EF4-FFF2-40B4-BE49-F238E27FC236}">
-                <a16:creationId xmlns:a16="http://schemas.microsoft.com/office/drawing/2014/main" id="{2987E1B3-A465-4D02-9B80-A9C91353E003}"/>
+                <a16:creationId xmlns:a16="http://schemas.microsoft.com/office/drawing/2014/main" id="{17F84726-DB76-4993-904B-A6CEC934031A}"/>
               </a:ext>
             </a:extLst>
           </p:cNvPr>
@@ -10268,8 +11742,8 @@
         </p:nvSpPr>
         <p:spPr>
           <a:xfrm xmlns:a="http://schemas.openxmlformats.org/drawingml/2006/main">
-            <a:off x="685800" y="6315075"/>
-            <a:ext cx="6096000" cy="266700"/>
+            <a:off x="609600" y="876300"/>
+            <a:ext cx="10934700" cy="914400"/>
           </a:xfrm>
           <a:prstGeom xmlns:a="http://schemas.openxmlformats.org/drawingml/2006/main" prst="rect">
             <a:avLst/>
@@ -10284,9 +11758,9 @@
           <a:bodyPr xmlns:a="http://schemas.openxmlformats.org/drawingml/2006/main"/>
           <a:lstStyle xmlns:a="http://schemas.openxmlformats.org/drawingml/2006/main">
             <a:defPPr>
-              <a:defRPr sz="1050" b="0">
-                <a:solidFill>
-                  <a:srgbClr val="526174"/>
+              <a:defRPr sz="3300" b="1">
+                <a:solidFill>
+                  <a:srgbClr val="FFFFFF"/>
                 </a:solidFill>
                 <a:latin typeface="Arial"/>
                 <a:ea typeface="Arial"/>
@@ -10296,9 +11770,9 @@
           </a:lstStyle>
           <a:p xmlns:a="http://schemas.openxmlformats.org/drawingml/2006/main">
             <a:pPr>
-              <a:defRPr sz="1050" b="0">
-                <a:solidFill>
-                  <a:srgbClr val="526174"/>
+              <a:defRPr sz="3300" b="1">
+                <a:solidFill>
+                  <a:srgbClr val="FFFFFF"/>
                 </a:solidFill>
                 <a:latin typeface="Arial"/>
                 <a:ea typeface="Arial"/>
@@ -10306,15 +11780,15 @@
               </a:defRPr>
             </a:pPr>
             <a:r>
-              <a:rPr sz="1050" b="0">
-                <a:solidFill>
-                  <a:srgbClr val="526174"/>
+              <a:rPr sz="3300" b="1">
+                <a:solidFill>
+                  <a:srgbClr val="FFFFFF"/>
                 </a:solidFill>
                 <a:latin typeface="Arial"/>
                 <a:ea typeface="Arial"/>
                 <a:cs typeface="Arial"/>
               </a:rPr>
-              <a:t>VUT AI SOLUTIONS  /  AIBUY3A</a:t>
+              <a:t>A small LSTM comparison</a:t>
             </a:r>
           </a:p>
         </p:txBody>
@@ -10324,7 +11798,7 @@
           <p:cNvPr id="3" name="">
             <a:extLst xmlns:a="http://schemas.openxmlformats.org/drawingml/2006/main">
               <a:ext uri="{FF2B5EF4-FFF2-40B4-BE49-F238E27FC236}">
-                <a16:creationId xmlns:a16="http://schemas.microsoft.com/office/drawing/2014/main" id="{1B331E69-FE15-4FB5-B3D6-F66AE4D82F5A}"/>
+                <a16:creationId xmlns:a16="http://schemas.microsoft.com/office/drawing/2014/main" id="{D203BE21-6AD8-443A-95FF-C6FBE11BE3B2}"/>
               </a:ext>
             </a:extLst>
           </p:cNvPr>
@@ -10335,8 +11809,8 @@
         </p:nvSpPr>
         <p:spPr>
           <a:xfrm xmlns:a="http://schemas.openxmlformats.org/drawingml/2006/main">
-            <a:off x="11001375" y="6315075"/>
-            <a:ext cx="523875" cy="266700"/>
+            <a:off x="609600" y="6315075"/>
+            <a:ext cx="4000500" cy="209550"/>
           </a:xfrm>
           <a:prstGeom xmlns:a="http://schemas.openxmlformats.org/drawingml/2006/main" prst="rect">
             <a:avLst/>
@@ -10351,9 +11825,9 @@
           <a:bodyPr xmlns:a="http://schemas.openxmlformats.org/drawingml/2006/main"/>
           <a:lstStyle xmlns:a="http://schemas.openxmlformats.org/drawingml/2006/main">
             <a:defPPr>
-              <a:defRPr sz="1050" b="0">
-                <a:solidFill>
-                  <a:srgbClr val="526174"/>
+              <a:defRPr sz="975" b="1">
+                <a:solidFill>
+                  <a:srgbClr val="A9E7D7"/>
                 </a:solidFill>
                 <a:latin typeface="Arial"/>
                 <a:ea typeface="Arial"/>
@@ -10363,9 +11837,9 @@
           </a:lstStyle>
           <a:p xmlns:a="http://schemas.openxmlformats.org/drawingml/2006/main">
             <a:pPr>
-              <a:defRPr sz="1050" b="0">
-                <a:solidFill>
-                  <a:srgbClr val="526174"/>
+              <a:defRPr sz="975" b="1">
+                <a:solidFill>
+                  <a:srgbClr val="A9E7D7"/>
                 </a:solidFill>
                 <a:latin typeface="Arial"/>
                 <a:ea typeface="Arial"/>
@@ -10373,9 +11847,76 @@
               </a:defRPr>
             </a:pPr>
             <a:r>
-              <a:rPr sz="1050" b="0">
-                <a:solidFill>
-                  <a:srgbClr val="526174"/>
+              <a:rPr sz="975" b="1">
+                <a:solidFill>
+                  <a:srgbClr val="A9E7D7"/>
+                </a:solidFill>
+                <a:latin typeface="Arial"/>
+                <a:ea typeface="Arial"/>
+                <a:cs typeface="Arial"/>
+              </a:rPr>
+              <a:t>STOCKSENSE AI</a:t>
+            </a:r>
+          </a:p>
+        </p:txBody>
+      </p:sp>
+      <p:sp>
+        <p:nvSpPr>
+          <p:cNvPr id="4" name="">
+            <a:extLst xmlns:a="http://schemas.openxmlformats.org/drawingml/2006/main">
+              <a:ext uri="{FF2B5EF4-FFF2-40B4-BE49-F238E27FC236}">
+                <a16:creationId xmlns:a16="http://schemas.microsoft.com/office/drawing/2014/main" id="{6AABD55E-7E75-4CCC-B2A5-366A3000DCDF}"/>
+              </a:ext>
+            </a:extLst>
+          </p:cNvPr>
+          <p:cNvSpPr>
+            <a:spLocks xmlns:a="http://schemas.openxmlformats.org/drawingml/2006/main" noGrp="1"/>
+          </p:cNvSpPr>
+          <p:nvPr/>
+        </p:nvSpPr>
+        <p:spPr>
+          <a:xfrm xmlns:a="http://schemas.openxmlformats.org/drawingml/2006/main">
+            <a:off x="11049000" y="6315075"/>
+            <a:ext cx="666750" cy="209550"/>
+          </a:xfrm>
+          <a:prstGeom xmlns:a="http://schemas.openxmlformats.org/drawingml/2006/main" prst="rect">
+            <a:avLst/>
+          </a:prstGeom>
+          <a:noFill xmlns:a="http://schemas.openxmlformats.org/drawingml/2006/main"/>
+          <a:ln xmlns:a="http://schemas.openxmlformats.org/drawingml/2006/main" w="0">
+            <a:noFill/>
+            <a:prstDash val="solid"/>
+          </a:ln>
+        </p:spPr>
+        <p:txBody>
+          <a:bodyPr xmlns:a="http://schemas.openxmlformats.org/drawingml/2006/main"/>
+          <a:lstStyle xmlns:a="http://schemas.openxmlformats.org/drawingml/2006/main">
+            <a:defPPr>
+              <a:defRPr sz="975" b="0">
+                <a:solidFill>
+                  <a:srgbClr val="A9E7D7"/>
+                </a:solidFill>
+                <a:latin typeface="Arial"/>
+                <a:ea typeface="Arial"/>
+                <a:cs typeface="Arial"/>
+              </a:defRPr>
+            </a:defPPr>
+          </a:lstStyle>
+          <a:p xmlns:a="http://schemas.openxmlformats.org/drawingml/2006/main">
+            <a:pPr>
+              <a:defRPr sz="975" b="0">
+                <a:solidFill>
+                  <a:srgbClr val="A9E7D7"/>
+                </a:solidFill>
+                <a:latin typeface="Arial"/>
+                <a:ea typeface="Arial"/>
+                <a:cs typeface="Arial"/>
+              </a:defRPr>
+            </a:pPr>
+            <a:r>
+              <a:rPr sz="975" b="0">
+                <a:solidFill>
+                  <a:srgbClr val="A9E7D7"/>
                 </a:solidFill>
                 <a:latin typeface="Arial"/>
                 <a:ea typeface="Arial"/>
@@ -10388,10 +11929,10 @@
       </p:sp>
       <p:sp>
         <p:nvSpPr>
-          <p:cNvPr id="4" name="">
-            <a:extLst xmlns:a="http://schemas.openxmlformats.org/drawingml/2006/main">
-              <a:ext uri="{FF2B5EF4-FFF2-40B4-BE49-F238E27FC236}">
-                <a16:creationId xmlns:a16="http://schemas.microsoft.com/office/drawing/2014/main" id="{92D3FAC2-F581-4143-89AC-B96B40740CE5}"/>
+          <p:cNvPr id="5" name="">
+            <a:extLst xmlns:a="http://schemas.openxmlformats.org/drawingml/2006/main">
+              <a:ext uri="{FF2B5EF4-FFF2-40B4-BE49-F238E27FC236}">
+                <a16:creationId xmlns:a16="http://schemas.microsoft.com/office/drawing/2014/main" id="{32A4C66B-4B1A-4925-8173-E6F4F2FBF64E}"/>
               </a:ext>
             </a:extLst>
           </p:cNvPr>
@@ -10402,8 +11943,8 @@
         </p:nvSpPr>
         <p:spPr>
           <a:xfrm xmlns:a="http://schemas.openxmlformats.org/drawingml/2006/main">
-            <a:off x="723900" y="1666875"/>
-            <a:ext cx="10477500" cy="523875"/>
+            <a:off x="666750" y="2009775"/>
+            <a:ext cx="2762250" cy="1200150"/>
           </a:xfrm>
           <a:prstGeom xmlns:a="http://schemas.openxmlformats.org/drawingml/2006/main" prst="rect">
             <a:avLst/>
@@ -10418,9 +11959,9 @@
           <a:bodyPr xmlns:a="http://schemas.openxmlformats.org/drawingml/2006/main"/>
           <a:lstStyle xmlns:a="http://schemas.openxmlformats.org/drawingml/2006/main">
             <a:defPPr>
-              <a:defRPr sz="2400" b="1">
-                <a:solidFill>
-                  <a:srgbClr val="172B4D"/>
+              <a:defRPr sz="7200" b="1">
+                <a:solidFill>
+                  <a:srgbClr val="A9E7D7"/>
                 </a:solidFill>
                 <a:latin typeface="Arial"/>
                 <a:ea typeface="Arial"/>
@@ -10430,9 +11971,9 @@
           </a:lstStyle>
           <a:p xmlns:a="http://schemas.openxmlformats.org/drawingml/2006/main">
             <a:pPr>
-              <a:defRPr sz="2400" b="1">
-                <a:solidFill>
-                  <a:srgbClr val="172B4D"/>
+              <a:defRPr sz="7200" b="1">
+                <a:solidFill>
+                  <a:srgbClr val="A9E7D7"/>
                 </a:solidFill>
                 <a:latin typeface="Arial"/>
                 <a:ea typeface="Arial"/>
@@ -10440,25 +11981,25 @@
               </a:defRPr>
             </a:pPr>
             <a:r>
-              <a:rPr sz="2400" b="1">
-                <a:solidFill>
-                  <a:srgbClr val="172B4D"/>
+              <a:rPr sz="7200" b="1">
+                <a:solidFill>
+                  <a:srgbClr val="A9E7D7"/>
                 </a:solidFill>
                 <a:latin typeface="Arial"/>
                 <a:ea typeface="Arial"/>
                 <a:cs typeface="Arial"/>
               </a:rPr>
-              <a:t>28 past daily sales values</a:t>
-            </a:r>
-          </a:p>
-        </p:txBody>
-      </p:sp>
-      <p:sp>
-        <p:nvSpPr>
-          <p:cNvPr id="5" name="">
-            <a:extLst xmlns:a="http://schemas.openxmlformats.org/drawingml/2006/main">
-              <a:ext uri="{FF2B5EF4-FFF2-40B4-BE49-F238E27FC236}">
-                <a16:creationId xmlns:a16="http://schemas.microsoft.com/office/drawing/2014/main" id="{FAC58251-8E89-4E84-B86B-6876F94BC097}"/>
+              <a:t>28</a:t>
+            </a:r>
+          </a:p>
+        </p:txBody>
+      </p:sp>
+      <p:sp>
+        <p:nvSpPr>
+          <p:cNvPr id="6" name="">
+            <a:extLst xmlns:a="http://schemas.openxmlformats.org/drawingml/2006/main">
+              <a:ext uri="{FF2B5EF4-FFF2-40B4-BE49-F238E27FC236}">
+                <a16:creationId xmlns:a16="http://schemas.microsoft.com/office/drawing/2014/main" id="{2965DA79-544D-458C-BB93-8BE7077A8409}"/>
               </a:ext>
             </a:extLst>
           </p:cNvPr>
@@ -10469,8 +12010,8 @@
         </p:nvSpPr>
         <p:spPr>
           <a:xfrm xmlns:a="http://schemas.openxmlformats.org/drawingml/2006/main">
-            <a:off x="723900" y="2647950"/>
-            <a:ext cx="10477500" cy="523875"/>
+            <a:off x="685800" y="3314700"/>
+            <a:ext cx="3143250" cy="514350"/>
           </a:xfrm>
           <a:prstGeom xmlns:a="http://schemas.openxmlformats.org/drawingml/2006/main" prst="rect">
             <a:avLst/>
@@ -10485,9 +12026,9 @@
           <a:bodyPr xmlns:a="http://schemas.openxmlformats.org/drawingml/2006/main"/>
           <a:lstStyle xmlns:a="http://schemas.openxmlformats.org/drawingml/2006/main">
             <a:defPPr>
-              <a:defRPr sz="2400" b="1">
-                <a:solidFill>
-                  <a:srgbClr val="172B4D"/>
+              <a:defRPr sz="2100" b="0">
+                <a:solidFill>
+                  <a:srgbClr val="FFFFFF"/>
                 </a:solidFill>
                 <a:latin typeface="Arial"/>
                 <a:ea typeface="Arial"/>
@@ -10497,9 +12038,9 @@
           </a:lstStyle>
           <a:p xmlns:a="http://schemas.openxmlformats.org/drawingml/2006/main">
             <a:pPr>
-              <a:defRPr sz="2400" b="1">
-                <a:solidFill>
-                  <a:srgbClr val="172B4D"/>
+              <a:defRPr sz="2100" b="0">
+                <a:solidFill>
+                  <a:srgbClr val="FFFFFF"/>
                 </a:solidFill>
                 <a:latin typeface="Arial"/>
                 <a:ea typeface="Arial"/>
@@ -10507,25 +12048,25 @@
               </a:defRPr>
             </a:pPr>
             <a:r>
-              <a:rPr sz="2400" b="1">
-                <a:solidFill>
-                  <a:srgbClr val="172B4D"/>
+              <a:rPr sz="2100" b="0">
+                <a:solidFill>
+                  <a:srgbClr val="FFFFFF"/>
                 </a:solidFill>
                 <a:latin typeface="Arial"/>
                 <a:ea typeface="Arial"/>
                 <a:cs typeface="Arial"/>
               </a:rPr>
-              <a:t>One 16-unit LSTM layer</a:t>
-            </a:r>
-          </a:p>
-        </p:txBody>
-      </p:sp>
-      <p:sp>
-        <p:nvSpPr>
-          <p:cNvPr id="6" name="">
-            <a:extLst xmlns:a="http://schemas.openxmlformats.org/drawingml/2006/main">
-              <a:ext uri="{FF2B5EF4-FFF2-40B4-BE49-F238E27FC236}">
-                <a16:creationId xmlns:a16="http://schemas.microsoft.com/office/drawing/2014/main" id="{784403A5-791A-4408-BFA1-37FD55274A1F}"/>
+              <a:t>past sales days</a:t>
+            </a:r>
+          </a:p>
+        </p:txBody>
+      </p:sp>
+      <p:sp>
+        <p:nvSpPr>
+          <p:cNvPr id="7" name="">
+            <a:extLst xmlns:a="http://schemas.openxmlformats.org/drawingml/2006/main">
+              <a:ext uri="{FF2B5EF4-FFF2-40B4-BE49-F238E27FC236}">
+                <a16:creationId xmlns:a16="http://schemas.microsoft.com/office/drawing/2014/main" id="{78D54FF6-F1CC-41DA-893E-968E6DBF5449}"/>
               </a:ext>
             </a:extLst>
           </p:cNvPr>
@@ -10536,8 +12077,8 @@
         </p:nvSpPr>
         <p:spPr>
           <a:xfrm xmlns:a="http://schemas.openxmlformats.org/drawingml/2006/main">
-            <a:off x="723900" y="3629025"/>
-            <a:ext cx="10477500" cy="523875"/>
+            <a:off x="4686300" y="2009775"/>
+            <a:ext cx="2667000" cy="1200150"/>
           </a:xfrm>
           <a:prstGeom xmlns:a="http://schemas.openxmlformats.org/drawingml/2006/main" prst="rect">
             <a:avLst/>
@@ -10552,9 +12093,9 @@
           <a:bodyPr xmlns:a="http://schemas.openxmlformats.org/drawingml/2006/main"/>
           <a:lstStyle xmlns:a="http://schemas.openxmlformats.org/drawingml/2006/main">
             <a:defPPr>
-              <a:defRPr sz="2400" b="1">
-                <a:solidFill>
-                  <a:srgbClr val="172B4D"/>
+              <a:defRPr sz="7200" b="1">
+                <a:solidFill>
+                  <a:srgbClr val="A9E7D7"/>
                 </a:solidFill>
                 <a:latin typeface="Arial"/>
                 <a:ea typeface="Arial"/>
@@ -10564,9 +12105,9 @@
           </a:lstStyle>
           <a:p xmlns:a="http://schemas.openxmlformats.org/drawingml/2006/main">
             <a:pPr>
-              <a:defRPr sz="2400" b="1">
-                <a:solidFill>
-                  <a:srgbClr val="172B4D"/>
+              <a:defRPr sz="7200" b="1">
+                <a:solidFill>
+                  <a:srgbClr val="A9E7D7"/>
                 </a:solidFill>
                 <a:latin typeface="Arial"/>
                 <a:ea typeface="Arial"/>
@@ -10574,25 +12115,25 @@
               </a:defRPr>
             </a:pPr>
             <a:r>
-              <a:rPr sz="2400" b="1">
-                <a:solidFill>
-                  <a:srgbClr val="172B4D"/>
+              <a:rPr sz="7200" b="1">
+                <a:solidFill>
+                  <a:srgbClr val="A9E7D7"/>
                 </a:solidFill>
                 <a:latin typeface="Arial"/>
                 <a:ea typeface="Arial"/>
                 <a:cs typeface="Arial"/>
               </a:rPr>
-              <a:t>Seven daily predictions</a:t>
-            </a:r>
-          </a:p>
-        </p:txBody>
-      </p:sp>
-      <p:sp>
-        <p:nvSpPr>
-          <p:cNvPr id="7" name="">
-            <a:extLst xmlns:a="http://schemas.openxmlformats.org/drawingml/2006/main">
-              <a:ext uri="{FF2B5EF4-FFF2-40B4-BE49-F238E27FC236}">
-                <a16:creationId xmlns:a16="http://schemas.microsoft.com/office/drawing/2014/main" id="{2F2E71FE-6D69-4E0C-891D-D9AC60F16C0E}"/>
+              <a:t>16</a:t>
+            </a:r>
+          </a:p>
+        </p:txBody>
+      </p:sp>
+      <p:sp>
+        <p:nvSpPr>
+          <p:cNvPr id="8" name="">
+            <a:extLst xmlns:a="http://schemas.openxmlformats.org/drawingml/2006/main">
+              <a:ext uri="{FF2B5EF4-FFF2-40B4-BE49-F238E27FC236}">
+                <a16:creationId xmlns:a16="http://schemas.microsoft.com/office/drawing/2014/main" id="{5BCB927C-F6E9-4F00-823D-916776CFB2E2}"/>
               </a:ext>
             </a:extLst>
           </p:cNvPr>
@@ -10603,8 +12144,8 @@
         </p:nvSpPr>
         <p:spPr>
           <a:xfrm xmlns:a="http://schemas.openxmlformats.org/drawingml/2006/main">
-            <a:off x="723900" y="4972050"/>
-            <a:ext cx="10477500" cy="762000"/>
+            <a:off x="4705350" y="3314700"/>
+            <a:ext cx="3048000" cy="514350"/>
           </a:xfrm>
           <a:prstGeom xmlns:a="http://schemas.openxmlformats.org/drawingml/2006/main" prst="rect">
             <a:avLst/>
@@ -10619,9 +12160,9 @@
           <a:bodyPr xmlns:a="http://schemas.openxmlformats.org/drawingml/2006/main"/>
           <a:lstStyle xmlns:a="http://schemas.openxmlformats.org/drawingml/2006/main">
             <a:defPPr>
-              <a:defRPr sz="1950" b="0">
-                <a:solidFill>
-                  <a:srgbClr val="0F766E"/>
+              <a:defRPr sz="2100" b="0">
+                <a:solidFill>
+                  <a:srgbClr val="FFFFFF"/>
                 </a:solidFill>
                 <a:latin typeface="Arial"/>
                 <a:ea typeface="Arial"/>
@@ -10631,9 +12172,9 @@
           </a:lstStyle>
           <a:p xmlns:a="http://schemas.openxmlformats.org/drawingml/2006/main">
             <a:pPr>
-              <a:defRPr sz="1950" b="0">
-                <a:solidFill>
-                  <a:srgbClr val="0F766E"/>
+              <a:defRPr sz="2100" b="0">
+                <a:solidFill>
+                  <a:srgbClr val="FFFFFF"/>
                 </a:solidFill>
                 <a:latin typeface="Arial"/>
                 <a:ea typeface="Arial"/>
@@ -10641,15 +12182,216 @@
               </a:defRPr>
             </a:pPr>
             <a:r>
-              <a:rPr sz="1950" b="0">
-                <a:solidFill>
-                  <a:srgbClr val="0F766E"/>
+              <a:rPr sz="2100" b="0">
+                <a:solidFill>
+                  <a:srgbClr val="FFFFFF"/>
                 </a:solidFill>
                 <a:latin typeface="Arial"/>
                 <a:ea typeface="Arial"/>
                 <a:cs typeface="Arial"/>
               </a:rPr>
-              <a:t>The LSTM improved weekly totals overall, but random forest had the lowest daily error.</a:t>
+              <a:t>LSTM units</a:t>
+            </a:r>
+          </a:p>
+        </p:txBody>
+      </p:sp>
+      <p:sp>
+        <p:nvSpPr>
+          <p:cNvPr id="9" name="">
+            <a:extLst xmlns:a="http://schemas.openxmlformats.org/drawingml/2006/main">
+              <a:ext uri="{FF2B5EF4-FFF2-40B4-BE49-F238E27FC236}">
+                <a16:creationId xmlns:a16="http://schemas.microsoft.com/office/drawing/2014/main" id="{ACEAD8E5-AF08-4884-8F2A-181EEDAEF2B1}"/>
+              </a:ext>
+            </a:extLst>
+          </p:cNvPr>
+          <p:cNvSpPr>
+            <a:spLocks xmlns:a="http://schemas.openxmlformats.org/drawingml/2006/main" noGrp="1"/>
+          </p:cNvSpPr>
+          <p:nvPr/>
+        </p:nvSpPr>
+        <p:spPr>
+          <a:xfrm xmlns:a="http://schemas.openxmlformats.org/drawingml/2006/main">
+            <a:off x="8820150" y="2009775"/>
+            <a:ext cx="2286000" cy="1200150"/>
+          </a:xfrm>
+          <a:prstGeom xmlns:a="http://schemas.openxmlformats.org/drawingml/2006/main" prst="rect">
+            <a:avLst/>
+          </a:prstGeom>
+          <a:noFill xmlns:a="http://schemas.openxmlformats.org/drawingml/2006/main"/>
+          <a:ln xmlns:a="http://schemas.openxmlformats.org/drawingml/2006/main" w="0">
+            <a:noFill/>
+            <a:prstDash val="solid"/>
+          </a:ln>
+        </p:spPr>
+        <p:txBody>
+          <a:bodyPr xmlns:a="http://schemas.openxmlformats.org/drawingml/2006/main"/>
+          <a:lstStyle xmlns:a="http://schemas.openxmlformats.org/drawingml/2006/main">
+            <a:defPPr>
+              <a:defRPr sz="7200" b="1">
+                <a:solidFill>
+                  <a:srgbClr val="A9E7D7"/>
+                </a:solidFill>
+                <a:latin typeface="Arial"/>
+                <a:ea typeface="Arial"/>
+                <a:cs typeface="Arial"/>
+              </a:defRPr>
+            </a:defPPr>
+          </a:lstStyle>
+          <a:p xmlns:a="http://schemas.openxmlformats.org/drawingml/2006/main">
+            <a:pPr>
+              <a:defRPr sz="7200" b="1">
+                <a:solidFill>
+                  <a:srgbClr val="A9E7D7"/>
+                </a:solidFill>
+                <a:latin typeface="Arial"/>
+                <a:ea typeface="Arial"/>
+                <a:cs typeface="Arial"/>
+              </a:defRPr>
+            </a:pPr>
+            <a:r>
+              <a:rPr sz="7200" b="1">
+                <a:solidFill>
+                  <a:srgbClr val="A9E7D7"/>
+                </a:solidFill>
+                <a:latin typeface="Arial"/>
+                <a:ea typeface="Arial"/>
+                <a:cs typeface="Arial"/>
+              </a:rPr>
+              <a:t>7</a:t>
+            </a:r>
+          </a:p>
+        </p:txBody>
+      </p:sp>
+      <p:sp>
+        <p:nvSpPr>
+          <p:cNvPr id="10" name="">
+            <a:extLst xmlns:a="http://schemas.openxmlformats.org/drawingml/2006/main">
+              <a:ext uri="{FF2B5EF4-FFF2-40B4-BE49-F238E27FC236}">
+                <a16:creationId xmlns:a16="http://schemas.microsoft.com/office/drawing/2014/main" id="{DF10DD5A-7253-4071-9A3F-8CF83E20FC4F}"/>
+              </a:ext>
+            </a:extLst>
+          </p:cNvPr>
+          <p:cNvSpPr>
+            <a:spLocks xmlns:a="http://schemas.openxmlformats.org/drawingml/2006/main" noGrp="1"/>
+          </p:cNvSpPr>
+          <p:nvPr/>
+        </p:nvSpPr>
+        <p:spPr>
+          <a:xfrm xmlns:a="http://schemas.openxmlformats.org/drawingml/2006/main">
+            <a:off x="8839200" y="3314700"/>
+            <a:ext cx="2762250" cy="514350"/>
+          </a:xfrm>
+          <a:prstGeom xmlns:a="http://schemas.openxmlformats.org/drawingml/2006/main" prst="rect">
+            <a:avLst/>
+          </a:prstGeom>
+          <a:noFill xmlns:a="http://schemas.openxmlformats.org/drawingml/2006/main"/>
+          <a:ln xmlns:a="http://schemas.openxmlformats.org/drawingml/2006/main" w="0">
+            <a:noFill/>
+            <a:prstDash val="solid"/>
+          </a:ln>
+        </p:spPr>
+        <p:txBody>
+          <a:bodyPr xmlns:a="http://schemas.openxmlformats.org/drawingml/2006/main"/>
+          <a:lstStyle xmlns:a="http://schemas.openxmlformats.org/drawingml/2006/main">
+            <a:defPPr>
+              <a:defRPr sz="2100" b="0">
+                <a:solidFill>
+                  <a:srgbClr val="FFFFFF"/>
+                </a:solidFill>
+                <a:latin typeface="Arial"/>
+                <a:ea typeface="Arial"/>
+                <a:cs typeface="Arial"/>
+              </a:defRPr>
+            </a:defPPr>
+          </a:lstStyle>
+          <a:p xmlns:a="http://schemas.openxmlformats.org/drawingml/2006/main">
+            <a:pPr>
+              <a:defRPr sz="2100" b="0">
+                <a:solidFill>
+                  <a:srgbClr val="FFFFFF"/>
+                </a:solidFill>
+                <a:latin typeface="Arial"/>
+                <a:ea typeface="Arial"/>
+                <a:cs typeface="Arial"/>
+              </a:defRPr>
+            </a:pPr>
+            <a:r>
+              <a:rPr sz="2100" b="0">
+                <a:solidFill>
+                  <a:srgbClr val="FFFFFF"/>
+                </a:solidFill>
+                <a:latin typeface="Arial"/>
+                <a:ea typeface="Arial"/>
+                <a:cs typeface="Arial"/>
+              </a:rPr>
+              <a:t>predicted days</a:t>
+            </a:r>
+          </a:p>
+        </p:txBody>
+      </p:sp>
+      <p:sp>
+        <p:nvSpPr>
+          <p:cNvPr id="11" name="">
+            <a:extLst xmlns:a="http://schemas.openxmlformats.org/drawingml/2006/main">
+              <a:ext uri="{FF2B5EF4-FFF2-40B4-BE49-F238E27FC236}">
+                <a16:creationId xmlns:a16="http://schemas.microsoft.com/office/drawing/2014/main" id="{F2E08869-3AF7-4AE6-9880-56D932CEA473}"/>
+              </a:ext>
+            </a:extLst>
+          </p:cNvPr>
+          <p:cNvSpPr>
+            <a:spLocks xmlns:a="http://schemas.openxmlformats.org/drawingml/2006/main" noGrp="1"/>
+          </p:cNvSpPr>
+          <p:nvPr/>
+        </p:nvSpPr>
+        <p:spPr>
+          <a:xfrm xmlns:a="http://schemas.openxmlformats.org/drawingml/2006/main">
+            <a:off x="685800" y="4914900"/>
+            <a:ext cx="10477500" cy="971550"/>
+          </a:xfrm>
+          <a:prstGeom xmlns:a="http://schemas.openxmlformats.org/drawingml/2006/main" prst="rect">
+            <a:avLst/>
+          </a:prstGeom>
+          <a:noFill xmlns:a="http://schemas.openxmlformats.org/drawingml/2006/main"/>
+          <a:ln xmlns:a="http://schemas.openxmlformats.org/drawingml/2006/main" w="0">
+            <a:noFill/>
+            <a:prstDash val="solid"/>
+          </a:ln>
+        </p:spPr>
+        <p:txBody>
+          <a:bodyPr xmlns:a="http://schemas.openxmlformats.org/drawingml/2006/main"/>
+          <a:lstStyle xmlns:a="http://schemas.openxmlformats.org/drawingml/2006/main">
+            <a:defPPr>
+              <a:defRPr sz="2175" b="0">
+                <a:solidFill>
+                  <a:srgbClr val="FFFFFF"/>
+                </a:solidFill>
+                <a:latin typeface="Arial"/>
+                <a:ea typeface="Arial"/>
+                <a:cs typeface="Arial"/>
+              </a:defRPr>
+            </a:defPPr>
+          </a:lstStyle>
+          <a:p xmlns:a="http://schemas.openxmlformats.org/drawingml/2006/main">
+            <a:pPr>
+              <a:defRPr sz="2175" b="0">
+                <a:solidFill>
+                  <a:srgbClr val="FFFFFF"/>
+                </a:solidFill>
+                <a:latin typeface="Arial"/>
+                <a:ea typeface="Arial"/>
+                <a:cs typeface="Arial"/>
+              </a:defRPr>
+            </a:pPr>
+            <a:r>
+              <a:rPr sz="2175" b="0">
+                <a:solidFill>
+                  <a:srgbClr val="FFFFFF"/>
+                </a:solidFill>
+                <a:latin typeface="Arial"/>
+                <a:ea typeface="Arial"/>
+                <a:cs typeface="Arial"/>
+              </a:rPr>
+              <a:t>It had better weekly totals overall, while random forest had lower daily error.</a:t>
             </a:r>
           </a:p>
         </p:txBody>
@@ -10657,7 +12399,7 @@
     </p:spTree>
     <p:extLst>
       <p:ext uri="{BB962C8B-B14F-4D97-AF65-F5344CB8AC3E}">
-        <p14:creationId xmlns:p14="http://schemas.microsoft.com/office/powerpoint/2010/main" val="65776941"/>
+        <p14:creationId xmlns:p14="http://schemas.microsoft.com/office/powerpoint/2010/main" val="1778286769"/>
       </p:ext>
     </p:extLst>
   </p:cSld>

--- a/docs/StockSense_AI_Presentation_Review.pptx
+++ b/docs/StockSense_AI_Presentation_Review.pptx
@@ -665,7 +665,7 @@
           <a:lstStyle xmlns:a="http://schemas.openxmlformats.org/drawingml/2006/main"/>
           <a:p xmlns:a="http://schemas.openxmlformats.org/drawingml/2006/main">
             <a:r>
-              <a:t>Proposed speakers: Buhle and Wandile. About 90 seconds. Office copy passed 52 tests on 12 October 2026. Earlier personal-PC rehearsal passed 45 tests. Assistant fresh check: 24/25 supported, 8/8 unrelated rejected. Human usability review is pending.</a:t>
+              <a:t>Proposed speakers: Buhle and Wandile. About 90 seconds. Office copy passed all 79 tests on 16 October 2026, with no skips. Earlier personal-PC rehearsal passed 45 tests. Assistant fresh check: 24/25 supported, 8/8 unrelated rejected. Human usability review is pending.</a:t>
             </a:r>
           </a:p>
         </p:txBody>
@@ -5943,7 +5943,7 @@
                 <a:ea typeface="Arial"/>
                 <a:cs typeface="Arial"/>
               </a:rPr>
-              <a:t>52</a:t>
+              <a:t>79</a:t>
             </a:r>
           </a:p>
         </p:txBody>
